--- a/docs/final_presentation.pptx
+++ b/docs/final_presentation.pptx
@@ -601,7 +601,7 @@
               </a:defRPr>
             </a:pPr>
             <a:r>
-              <a:t>If I could show you only one mapping case, it would be this one. Dhyana — sustained meditation — traveled from Sanskrit to Pali to Chinese to Japanese, and at each stage the pronunciation shifted. Dhyana became jhana in Pali, then channa in Chinese, then the abbreviated chan, then Japanese zen. An entire school of Buddhism takes its name from this single Sanskrit word. What's fascinating is that Chinese translators developed four different renderings. The full transliteration channa. The abbreviation chan. A hybrid, chanding, pairing the foreign sound with a native Chinese word meaning "stability." And Xuanzang's semantic translation jinglü, meaning "quiet contemplation" — a 7th-century attempt to recover the precise meaning. And here's the doctrinal shift: in the Yoga Sutras, dhyana is one specific stage — limb 7 of 8. In Chinese Buddhism, chan expanded until it named an entire orientation toward awakening. The word traveled, but its scope changed dramatically.</a:t>
+              <a:t>If I could show you only one mapping case, it would be this one. Dhyana — sustained meditation — traveled from Sanskrit to Pali to Chinese to Japanese, and at each stage the pronunciation shifted. Dhyana became jhana in Pali, then channa in Chinese, then the abbreviated chan, then Japanese zen. An entire school of Buddhism takes its name from this single Sanskrit word. What's fascinating is that Chinese translators developed four different renderings. The full transliteration channa. The abbreviation chan. A hybrid, chanding, pairing the foreign sound with a native Chinese word meaning "stability." And Xuanzang's semantic translation jinglu, meaning "quiet contemplation" — a 7th-century attempt to recover the precise meaning. And here's the doctrinal shift: in the Yoga Sutras, dhyana is one specific stage — limb 7 of 8. In Chinese Buddhism, chan expanded until it named an entire orientation toward awakening. The word traveled, but its scope changed dramatically.</a:t>
             </a:r>
           </a:p>
           <a:p>
@@ -765,7 +765,7 @@
               </a:defRPr>
             </a:pPr>
             <a:r>
-              <a:t>My last mapping case is a cautionary one. Svarupa in the Yoga Sutras means "own form" — it's what purusha, pure awareness, actually is. Yoga Sutra 1.3 says: when meditation succeeds, the seer abides in its own form. The closest Chinese candidate is zixing, "own nature." Sounds like a reasonable match. But in Chinese Madhyamaka Buddhism, zixing is the thing that nothing has. The central Madhyamaka insight is svabhava-shunyata — emptiness of own-nature. The Yoga Sutras say you find your essential nature. Madhyamaka says you see through the illusion that anything has one. Same philosophical question — does anything have an essential nature? — opposite answers. I include this case because the gap is more instructive than any smooth connection. It shows the limits of mapping, and it shows that these are genuinely different traditions, not one tradition in two languages.</a:t>
+              <a:t>My last mapping case is a cautionary one. Svarupa in the Yoga Sutras means "own form" — it's what purusa, pure awareness, actually is. Yoga Sutra 1.3 says: when meditation succeeds, the seer abides in its own form. The closest Chinese candidate is zixing, "own nature." Sounds like a reasonable match. But in Chinese Madhyamaka Buddhism, zixing is the thing that nothing has. The central Madhyamaka insight is svabhava-shunyata — emptiness of own-nature. The Yoga Sutras say you find your essential nature. Madhyamaka says you see through the illusion that anything has one. Same philosophical question — does anything have an essential nature? — opposite answers. I include this case because the gap is more instructive than any smooth connection. It shows the limits of mapping, and it shows that these are genuinely different traditions, not one tradition in two languages.</a:t>
             </a:r>
           </a:p>
           <a:p>
@@ -1011,7 +1011,7 @@
               </a:defRPr>
             </a:pPr>
             <a:r>
-              <a:t>Let me ground this in a sentence most of you already know: Yoga Sutra 1.2, the definition of yoga itself. This single sentence contains three technical terms — citta, vrtti, nirodha — each built from specific roots and prefixes. By the end of this talk, I want you to hear each of those words differently. Let's start by looking at how the breakdown works.</a:t>
+              <a:t>Let me ground this in a sentence most of you already know: Yoga Sutra 1.2, the definition of yoga itself. Here it is in Devanagari and transliteration. This single sentence contains three technical terms — citta, vrtti, nirodha — each built from specific roots and prefixes. By the end of this talk, I want you to hear each of those words differently. Let's start by looking at how the breakdown works.</a:t>
             </a:r>
           </a:p>
           <a:p>
@@ -1175,7 +1175,7 @@
               </a:defRPr>
             </a:pPr>
             <a:r>
-              <a:t>Samadhi — the culmination of yogic practice. Built from the root dha, "to place," with two prefixes: sam meaning "together" or "completely," and a meaning "toward." Plus the suffix -i making it an action noun. So literally: a complete placing-together. A total composing or settling of awareness. Notice what the word is doing — it's not just naming a state, it's describing a process: the gathering and settling of dispersed awareness into unified focus. Quick sidebar: you'll sometimes hear samadhi glossed as "equal placing" from sama plus adhi. That's a folk etymology — the standard dictionaries derive it from the prefixes sam plus a plus the root dha. This is exactly the kind of correction that morphological analysis is good for.</a:t>
+              <a:t>Samadhi — the culmination of yogic practice. Built from the root dha, "to place," with two prefixes: sam meaning "together" or "completely," and a meaning "toward." Plus the suffix -i making it an action noun. So literally: a complete placing-together. Philosophically: the state of total meditative absorption where the meditator's awareness merges with its object. Notice what the word is doing — it's not just naming a state, it's describing a process: the gathering and settling of dispersed awareness into unified focus. Quick sidebar: you'll sometimes hear samadhi glossed as "equal placing" from sama plus adhi. That's a folk etymology — the standard dictionaries derive it from the prefixes sam plus a plus the root dha. This is exactly the kind of correction that morphological analysis is good for.</a:t>
             </a:r>
           </a:p>
           <a:p>
@@ -1257,7 +1257,7 @@
               </a:defRPr>
             </a:pPr>
             <a:r>
-              <a:t>Nirodha — the operative word in Yoga Sutra 1.2. Built from the prefix ni, which intensifies, plus the root rudh, meaning "to hold back" or "to restrain," plus the suffix -a. So literally: a complete holding-back. Why does this matter? Because different English translations carry very different philosophical implications. "Cessation" implies something ends. "Suppression" implies force. "Stilling" implies a gentle quieting. The root rudh — "to hold back" — is closer to stilling than to either ending or forcing. Patanjali isn't saying the mind is destroyed. He's saying its habitual activity is held in check so that pure awareness can emerge. This becomes even more interesting when we get to the Chinese rendering later.</a:t>
+              <a:t>Nirodha — the operative word in Yoga Sutra 1.2. Built from the prefix ni, which intensifies, plus the root rudh, meaning "to hold back" or "to restrain," plus the suffix -a. So literally: a complete holding-back. Philosophically: the stilling of citta's habitual activity so that pure awareness can emerge. Why does the morphology matter? Because different English translations carry very different philosophical implications. "Cessation" implies something ends. "Suppression" implies force. "Stilling" implies a gentle quieting. The root rudh — "to hold back" — is closer to stilling than to either ending or forcing. Patanjali isn't saying the mind is destroyed. He's saying its habitual activity is held in check. This becomes even more interesting when we get to the Chinese rendering later.</a:t>
             </a:r>
           </a:p>
           <a:p>
@@ -1421,7 +1421,7 @@
               </a:defRPr>
             </a:pPr>
             <a:r>
-              <a:t>One more Sanskrit case. Samskara — sam plus the root kr, "to make," plus the suffix -a. Literally: a thorough making, a complete preparation. This word has three completely different lives depending on context. In ritual, it means consecration — the sacraments of birth, marriage, death. In grammar, it means refinement — the word Sanskrit itself, samskrta, means "well-made." And in the Yoga Sutras, it means latent impression — the subliminal trace that every experience leaves in the mind, shaping future perception and behavior without your awareness. This is strikingly close to what modern psychology calls unconscious conditioning. And crucially, Patanjali says that samskaras from samadhi can overwrite samskaras from ordinary experience — which is the mechanism by which practice actually transforms the mind. Not by destroying old patterns, but by laying down new, deeper ones.</a:t>
+              <a:t>One more Sanskrit case. Samskara — sam plus the root kr, "to make," plus the suffix -a. Literally: a thorough making. Philosophically: the latent impressions — subliminal traces — left in the mind by every experience. This word has three completely different lives depending on context. In ritual, it means consecration — the sacraments of birth, marriage, death. In grammar, it means refinement — the word Sanskrit itself, samskrta, means "well-made." And in the Yoga Sutras, it means the unconscious residue of experience that shapes future perception and behavior without your awareness. This is strikingly close to what modern psychology calls unconscious conditioning. And crucially, Patanjali says that samskaras from samadhi can overwrite samskaras from ordinary experience — which is the mechanism by which practice actually transforms the mind. Not by destroying old patterns, but by laying down new, deeper ones.</a:t>
             </a:r>
           </a:p>
           <a:p>
@@ -4913,7 +4913,7 @@
               </a:defRPr>
             </a:pPr>
             <a:r>
-              <a:t>禪那 — full transliteration</a:t>
+              <a:t>禪那 channa — full transliteration</a:t>
             </a:r>
           </a:p>
           <a:p>
@@ -4929,7 +4929,7 @@
               </a:defRPr>
             </a:pPr>
             <a:r>
-              <a:t>禪 — abbreviation (became school name)</a:t>
+              <a:t>禪 chan — abbreviation (became school name)</a:t>
             </a:r>
           </a:p>
           <a:p>
@@ -4945,7 +4945,7 @@
               </a:defRPr>
             </a:pPr>
             <a:r>
-              <a:t>禪定 — hybrid (sound + meaning)</a:t>
+              <a:t>禪定 chanding — hybrid (sound + meaning)</a:t>
             </a:r>
           </a:p>
           <a:p>
@@ -4961,7 +4961,7 @@
               </a:defRPr>
             </a:pPr>
             <a:r>
-              <a:t>靜慮 — Xuanzang's semantic: "quiet contemplation"</a:t>
+              <a:t>靜慮 jinglu — Xuanzang's semantic: "quiet contemplation"</a:t>
             </a:r>
           </a:p>
         </p:txBody>
@@ -5023,7 +5023,7 @@
               </a:defRPr>
             </a:pPr>
             <a:r>
-              <a:t>avidya to wuming — Translation as Interpretation</a:t>
+              <a:t>अविद्या avidya to 無明 wuming</a:t>
             </a:r>
           </a:p>
         </p:txBody>
@@ -5208,7 +5208,7 @@
               </a:defRPr>
             </a:pPr>
             <a:r>
-              <a:t>But the translators chose "brightness" over "knowledge"</a:t>
+              <a:t>The translators chose "brightness" over "knowledge"</a:t>
             </a:r>
           </a:p>
           <a:p>
@@ -5256,7 +5256,7 @@
               </a:defRPr>
             </a:pPr>
             <a:r>
-              <a:t>Small shift, real consequences</a:t>
+              <a:t>Small shift, real consequences for practice</a:t>
             </a:r>
           </a:p>
           <a:p>
@@ -5334,7 +5334,7 @@
               </a:defRPr>
             </a:pPr>
             <a:r>
-              <a:t>svarupa vs. zixing — When the Gap Is the Finding</a:t>
+              <a:t>svarupa vs. 自性 zixing — When the Gap Is the Finding</a:t>
             </a:r>
           </a:p>
         </p:txBody>
@@ -5448,7 +5448,7 @@
               </a:defRPr>
             </a:pPr>
             <a:r>
-              <a:t>Purusha has a real essential nature</a:t>
+              <a:t>Purusa has a real essential nature</a:t>
             </a:r>
           </a:p>
           <a:p>
@@ -6081,7 +6081,7 @@
               </a:defRPr>
             </a:pPr>
             <a:r>
-              <a:t>yogas citta-vrtti-nirodhah</a:t>
+              <a:t>योगश्चित्तवृत्तिनिरोधः    yogas citta-vrtti-nirodhah</a:t>
             </a:r>
           </a:p>
         </p:txBody>
@@ -6117,7 +6117,7 @@
               </a:defRPr>
             </a:pPr>
             <a:r>
-              <a:t>Yoga Sutra 1.2 — "Yoga is the cessation of the turnings of the mind"</a:t>
+              <a:t>Yoga Sutra 1.2 — "Yoga is the stilling of the turnings of the mind"</a:t>
             </a:r>
           </a:p>
         </p:txBody>
@@ -6387,7 +6387,7 @@
               </a:defRPr>
             </a:pPr>
             <a:r>
-              <a:t>samadhi — "A Complete Placing-Together"</a:t>
+              <a:t>समाधि samadhi — Meditative Absorption</a:t>
             </a:r>
           </a:p>
         </p:txBody>
@@ -6469,7 +6469,7 @@
               </a:defRPr>
             </a:pPr>
             <a:r>
-              <a:t>Root: dha — "to place, put"</a:t>
+              <a:t>Root: √dha — "to place, put"</a:t>
             </a:r>
           </a:p>
           <a:p>
@@ -6518,6 +6518,22 @@
             </a:pPr>
             <a:r>
               <a:t>Literal: "a complete placing-together"</a:t>
+            </a:r>
+          </a:p>
+          <a:p>
+            <a:pPr>
+              <a:spcAft>
+                <a:spcPts val="800"/>
+              </a:spcAft>
+              <a:defRPr sz="1600">
+                <a:solidFill>
+                  <a:srgbClr val="2C3E50"/>
+                </a:solidFill>
+                <a:latin typeface="Helvetica"/>
+              </a:defRPr>
+            </a:pPr>
+            <a:r>
+              <a:t>Philosophical: total absorption of awareness into its object</a:t>
             </a:r>
           </a:p>
         </p:txBody>
@@ -6572,7 +6588,7 @@
               </a:defRPr>
             </a:pPr>
             <a:r>
-              <a:t>Not a metaphor added later — built into the word itself</a:t>
+              <a:t>"Placing-together" is not a metaphor added later — it is built into the word</a:t>
             </a:r>
           </a:p>
           <a:p>
@@ -6588,7 +6604,7 @@
               </a:defRPr>
             </a:pPr>
             <a:r>
-              <a:t>Common folk etymology sama + adhi ("equal placing") is incorrect</a:t>
+              <a:t>Common folk etymology sama + adhi ("equal placing") is not supported by standard grammar</a:t>
             </a:r>
           </a:p>
           <a:p>
@@ -6604,7 +6620,7 @@
               </a:defRPr>
             </a:pPr>
             <a:r>
-              <a:t>Standard derivation: sam + a + dha (Monier-Williams)</a:t>
+              <a:t>Standard derivation: sam + a + √dha (Monier-Williams)</a:t>
             </a:r>
           </a:p>
         </p:txBody>
@@ -6666,7 +6682,7 @@
               </a:defRPr>
             </a:pPr>
             <a:r>
-              <a:t>nirodha — "A Complete Holding-Back"</a:t>
+              <a:t>निरोध nirodha — Cessation or Stilling</a:t>
             </a:r>
           </a:p>
         </p:txBody>
@@ -6748,7 +6764,7 @@
               </a:defRPr>
             </a:pPr>
             <a:r>
-              <a:t>Root: rudh — "to hold back, restrain"</a:t>
+              <a:t>Root: √rudh — "to hold back, restrain"</a:t>
             </a:r>
           </a:p>
           <a:p>
@@ -6796,7 +6812,23 @@
               </a:defRPr>
             </a:pPr>
             <a:r>
-              <a:t>Literal: "a complete restraining"</a:t>
+              <a:t>Literal: "a complete holding-back"</a:t>
+            </a:r>
+          </a:p>
+          <a:p>
+            <a:pPr>
+              <a:spcAft>
+                <a:spcPts val="800"/>
+              </a:spcAft>
+              <a:defRPr sz="1600">
+                <a:solidFill>
+                  <a:srgbClr val="2C3E50"/>
+                </a:solidFill>
+                <a:latin typeface="Helvetica"/>
+              </a:defRPr>
+            </a:pPr>
+            <a:r>
+              <a:t>Philosophical: the stilling of mental activity</a:t>
             </a:r>
           </a:p>
         </p:txBody>
@@ -6899,7 +6931,7 @@
               </a:defRPr>
             </a:pPr>
             <a:r>
-              <a:t>The root rudh favors "stilling" over "destroying"</a:t>
+              <a:t>The root √rudh favors "stilling" over "destroying"</a:t>
             </a:r>
           </a:p>
         </p:txBody>
@@ -6961,7 +6993,7 @@
               </a:defRPr>
             </a:pPr>
             <a:r>
-              <a:t>abhinivesa — "A Deep Settling-Into"</a:t>
+              <a:t>abhinivesa — Clinging to Existence</a:t>
             </a:r>
           </a:p>
         </p:txBody>
@@ -7043,7 +7075,7 @@
               </a:defRPr>
             </a:pPr>
             <a:r>
-              <a:t>Root: vis — "to enter, settle into"</a:t>
+              <a:t>Root: √vis — "to enter, settle into"</a:t>
             </a:r>
           </a:p>
           <a:p>
@@ -7076,6 +7108,22 @@
             </a:pPr>
             <a:r>
               <a:t>Prefix: ni- ("down, into")</a:t>
+            </a:r>
+          </a:p>
+          <a:p>
+            <a:pPr>
+              <a:spcAft>
+                <a:spcPts val="800"/>
+              </a:spcAft>
+              <a:defRPr sz="1600">
+                <a:solidFill>
+                  <a:srgbClr val="2C3E50"/>
+                </a:solidFill>
+                <a:latin typeface="Helvetica"/>
+              </a:defRPr>
+            </a:pPr>
+            <a:r>
+              <a:t>Literal: "a deep settling-into"</a:t>
             </a:r>
           </a:p>
           <a:p>
@@ -7178,7 +7226,7 @@
               </a:defRPr>
             </a:pPr>
             <a:r>
-              <a:t>Morphology physically enacts the concept</a:t>
+              <a:t>The morphology physically enacts the concept</a:t>
             </a:r>
           </a:p>
         </p:txBody>
@@ -7240,7 +7288,7 @@
               </a:defRPr>
             </a:pPr>
             <a:r>
-              <a:t>samskara — "A Thorough Making"</a:t>
+              <a:t>samskara — Latent Impressions</a:t>
             </a:r>
           </a:p>
         </p:txBody>
@@ -7322,7 +7370,7 @@
               </a:defRPr>
             </a:pPr>
             <a:r>
-              <a:t>Root: kr — "to do, make"    Prefix: sam- ("completely")</a:t>
+              <a:t>Root: √kr — "to do, make"    Prefix: sam- ("completely")</a:t>
             </a:r>
           </a:p>
           <a:p>
@@ -7338,7 +7386,7 @@
               </a:defRPr>
             </a:pPr>
             <a:r>
-              <a:t>Three lives of one word:</a:t>
+              <a:t>Literal: "a thorough making"     Philosophical: accumulated subliminal traces</a:t>
             </a:r>
           </a:p>
           <a:p>
@@ -7354,7 +7402,7 @@
               </a:defRPr>
             </a:pPr>
             <a:r>
-              <a:t>Ritual: consecration, sacrament (the samskaras of life)</a:t>
+              <a:t>Three lives of one word:</a:t>
             </a:r>
           </a:p>
           <a:p>
@@ -7370,7 +7418,7 @@
               </a:defRPr>
             </a:pPr>
             <a:r>
-              <a:t>Grammar: refinement (samskrta = "Sanskrit" = the "well-made" language)</a:t>
+              <a:t>Ritual: consecration, sacrament (the samskaras of life)</a:t>
             </a:r>
           </a:p>
           <a:p>
@@ -7386,7 +7434,7 @@
               </a:defRPr>
             </a:pPr>
             <a:r>
-              <a:t>Yoga Sutras: latent impressions — the unconscious residue of experience</a:t>
+              <a:t>Grammar: refinement (samskrta = "Sanskrit" = the "well-made" language)</a:t>
             </a:r>
           </a:p>
           <a:p>
@@ -7402,7 +7450,7 @@
               </a:defRPr>
             </a:pPr>
             <a:r>
-              <a:t>In Patanjali: the traces that shape perception without our awareness</a:t>
+              <a:t>Yoga Sutras: latent impressions — the unconscious residue of experience</a:t>
             </a:r>
           </a:p>
           <a:p>

--- a/docs/final_presentation.pptx
+++ b/docs/final_presentation.pptx
@@ -515,7 +515,7 @@
           <a:p>
             <a:pPr>
               <a:defRPr sz="1100">
-                <a:latin typeface="Helvetica"/>
+                <a:latin typeface="Calibri"/>
               </a:defRPr>
             </a:pPr>
             <a:r>
@@ -525,7 +525,7 @@
           <a:p>
             <a:pPr>
               <a:defRPr sz="1100">
-                <a:latin typeface="Helvetica"/>
+                <a:latin typeface="Calibri"/>
               </a:defRPr>
             </a:pPr>
           </a:p>
@@ -597,7 +597,7 @@
           <a:p>
             <a:pPr>
               <a:defRPr sz="1100">
-                <a:latin typeface="Helvetica"/>
+                <a:latin typeface="Calibri"/>
               </a:defRPr>
             </a:pPr>
             <a:r>
@@ -607,7 +607,7 @@
           <a:p>
             <a:pPr>
               <a:defRPr sz="1100">
-                <a:latin typeface="Helvetica"/>
+                <a:latin typeface="Calibri"/>
               </a:defRPr>
             </a:pPr>
           </a:p>
@@ -679,7 +679,7 @@
           <a:p>
             <a:pPr>
               <a:defRPr sz="1100">
-                <a:latin typeface="Helvetica"/>
+                <a:latin typeface="Calibri"/>
               </a:defRPr>
             </a:pPr>
             <a:r>
@@ -689,7 +689,7 @@
           <a:p>
             <a:pPr>
               <a:defRPr sz="1100">
-                <a:latin typeface="Helvetica"/>
+                <a:latin typeface="Calibri"/>
               </a:defRPr>
             </a:pPr>
           </a:p>
@@ -761,7 +761,7 @@
           <a:p>
             <a:pPr>
               <a:defRPr sz="1100">
-                <a:latin typeface="Helvetica"/>
+                <a:latin typeface="Calibri"/>
               </a:defRPr>
             </a:pPr>
             <a:r>
@@ -771,7 +771,7 @@
           <a:p>
             <a:pPr>
               <a:defRPr sz="1100">
-                <a:latin typeface="Helvetica"/>
+                <a:latin typeface="Calibri"/>
               </a:defRPr>
             </a:pPr>
           </a:p>
@@ -843,7 +843,7 @@
           <a:p>
             <a:pPr>
               <a:defRPr sz="1100">
-                <a:latin typeface="Helvetica"/>
+                <a:latin typeface="Calibri"/>
               </a:defRPr>
             </a:pPr>
             <a:r>
@@ -853,7 +853,7 @@
           <a:p>
             <a:pPr>
               <a:defRPr sz="1100">
-                <a:latin typeface="Helvetica"/>
+                <a:latin typeface="Calibri"/>
               </a:defRPr>
             </a:pPr>
           </a:p>
@@ -925,7 +925,7 @@
           <a:p>
             <a:pPr>
               <a:defRPr sz="1100">
-                <a:latin typeface="Helvetica"/>
+                <a:latin typeface="Calibri"/>
               </a:defRPr>
             </a:pPr>
             <a:r>
@@ -935,7 +935,7 @@
           <a:p>
             <a:pPr>
               <a:defRPr sz="1100">
-                <a:latin typeface="Helvetica"/>
+                <a:latin typeface="Calibri"/>
               </a:defRPr>
             </a:pPr>
           </a:p>
@@ -1007,7 +1007,7 @@
           <a:p>
             <a:pPr>
               <a:defRPr sz="1100">
-                <a:latin typeface="Helvetica"/>
+                <a:latin typeface="Calibri"/>
               </a:defRPr>
             </a:pPr>
             <a:r>
@@ -1017,7 +1017,7 @@
           <a:p>
             <a:pPr>
               <a:defRPr sz="1100">
-                <a:latin typeface="Helvetica"/>
+                <a:latin typeface="Calibri"/>
               </a:defRPr>
             </a:pPr>
           </a:p>
@@ -1089,7 +1089,7 @@
           <a:p>
             <a:pPr>
               <a:defRPr sz="1100">
-                <a:latin typeface="Helvetica"/>
+                <a:latin typeface="Calibri"/>
               </a:defRPr>
             </a:pPr>
             <a:r>
@@ -1099,7 +1099,7 @@
           <a:p>
             <a:pPr>
               <a:defRPr sz="1100">
-                <a:latin typeface="Helvetica"/>
+                <a:latin typeface="Calibri"/>
               </a:defRPr>
             </a:pPr>
           </a:p>
@@ -1171,7 +1171,7 @@
           <a:p>
             <a:pPr>
               <a:defRPr sz="1100">
-                <a:latin typeface="Helvetica"/>
+                <a:latin typeface="Calibri"/>
               </a:defRPr>
             </a:pPr>
             <a:r>
@@ -1181,7 +1181,7 @@
           <a:p>
             <a:pPr>
               <a:defRPr sz="1100">
-                <a:latin typeface="Helvetica"/>
+                <a:latin typeface="Calibri"/>
               </a:defRPr>
             </a:pPr>
           </a:p>
@@ -1253,7 +1253,7 @@
           <a:p>
             <a:pPr>
               <a:defRPr sz="1100">
-                <a:latin typeface="Helvetica"/>
+                <a:latin typeface="Calibri"/>
               </a:defRPr>
             </a:pPr>
             <a:r>
@@ -1263,7 +1263,7 @@
           <a:p>
             <a:pPr>
               <a:defRPr sz="1100">
-                <a:latin typeface="Helvetica"/>
+                <a:latin typeface="Calibri"/>
               </a:defRPr>
             </a:pPr>
           </a:p>
@@ -1335,7 +1335,7 @@
           <a:p>
             <a:pPr>
               <a:defRPr sz="1100">
-                <a:latin typeface="Helvetica"/>
+                <a:latin typeface="Calibri"/>
               </a:defRPr>
             </a:pPr>
             <a:r>
@@ -1345,7 +1345,7 @@
           <a:p>
             <a:pPr>
               <a:defRPr sz="1100">
-                <a:latin typeface="Helvetica"/>
+                <a:latin typeface="Calibri"/>
               </a:defRPr>
             </a:pPr>
           </a:p>
@@ -1417,7 +1417,7 @@
           <a:p>
             <a:pPr>
               <a:defRPr sz="1100">
-                <a:latin typeface="Helvetica"/>
+                <a:latin typeface="Calibri"/>
               </a:defRPr>
             </a:pPr>
             <a:r>
@@ -1427,7 +1427,7 @@
           <a:p>
             <a:pPr>
               <a:defRPr sz="1100">
-                <a:latin typeface="Helvetica"/>
+                <a:latin typeface="Calibri"/>
               </a:defRPr>
             </a:pPr>
           </a:p>
@@ -1499,7 +1499,7 @@
           <a:p>
             <a:pPr>
               <a:defRPr sz="1100">
-                <a:latin typeface="Helvetica"/>
+                <a:latin typeface="Calibri"/>
               </a:defRPr>
             </a:pPr>
             <a:r>
@@ -1509,7 +1509,7 @@
           <a:p>
             <a:pPr>
               <a:defRPr sz="1100">
-                <a:latin typeface="Helvetica"/>
+                <a:latin typeface="Calibri"/>
               </a:defRPr>
             </a:pPr>
           </a:p>
@@ -4512,7 +4512,7 @@
     <p:bg>
       <p:bgPr>
         <a:solidFill>
-          <a:srgbClr val="FAF9F6"/>
+          <a:srgbClr val="F7F6F2"/>
         </a:solidFill>
         <a:effectLst/>
       </p:bgPr>
@@ -4549,9 +4549,9 @@
             <a:pPr algn="l">
               <a:defRPr sz="3600" b="1">
                 <a:solidFill>
-                  <a:srgbClr val="1A1A2E"/>
-                </a:solidFill>
-                <a:latin typeface="Helvetica"/>
+                  <a:srgbClr val="1E2761"/>
+                </a:solidFill>
+                <a:latin typeface="Georgia"/>
               </a:defRPr>
             </a:pPr>
             <a:r>
@@ -4587,7 +4587,7 @@
                 <a:solidFill>
                   <a:srgbClr val="2C3E50"/>
                 </a:solidFill>
-                <a:latin typeface="Helvetica"/>
+                <a:latin typeface="Calibri"/>
               </a:defRPr>
             </a:pPr>
             <a:r>
@@ -4611,7 +4611,7 @@
             <a:avLst/>
           </a:prstGeom>
           <a:solidFill>
-            <a:srgbClr val="8B1A1A"/>
+            <a:srgbClr val="7B2D26"/>
           </a:solidFill>
           <a:ln>
             <a:noFill/>
@@ -4653,7 +4653,7 @@
     <p:bg>
       <p:bgPr>
         <a:solidFill>
-          <a:srgbClr val="FAF9F6"/>
+          <a:srgbClr val="F7F6F2"/>
         </a:solidFill>
         <a:effectLst/>
       </p:bgPr>
@@ -4690,9 +4690,9 @@
             <a:pPr algn="l">
               <a:defRPr sz="2800" b="1">
                 <a:solidFill>
-                  <a:srgbClr val="1A1A2E"/>
-                </a:solidFill>
-                <a:latin typeface="Helvetica"/>
+                  <a:srgbClr val="1E2761"/>
+                </a:solidFill>
+                <a:latin typeface="Georgia"/>
               </a:defRPr>
             </a:pPr>
             <a:r>
@@ -4716,7 +4716,7 @@
             <a:avLst/>
           </a:prstGeom>
           <a:solidFill>
-            <a:srgbClr val="8B1A1A"/>
+            <a:srgbClr val="7B2D26"/>
           </a:solidFill>
           <a:ln>
             <a:noFill/>
@@ -4774,7 +4774,7 @@
                 <a:solidFill>
                   <a:srgbClr val="2C3E50"/>
                 </a:solidFill>
-                <a:latin typeface="Helvetica"/>
+                <a:latin typeface="Calibri"/>
               </a:defRPr>
             </a:pPr>
             <a:r>
@@ -4790,7 +4790,7 @@
                 <a:solidFill>
                   <a:srgbClr val="2C3E50"/>
                 </a:solidFill>
-                <a:latin typeface="Helvetica"/>
+                <a:latin typeface="Calibri"/>
               </a:defRPr>
             </a:pPr>
             <a:r>
@@ -4806,7 +4806,7 @@
                 <a:solidFill>
                   <a:srgbClr val="2C3E50"/>
                 </a:solidFill>
-                <a:latin typeface="Helvetica"/>
+                <a:latin typeface="Calibri"/>
               </a:defRPr>
             </a:pPr>
             <a:r>
@@ -4822,7 +4822,7 @@
                 <a:solidFill>
                   <a:srgbClr val="2C3E50"/>
                 </a:solidFill>
-                <a:latin typeface="Helvetica"/>
+                <a:latin typeface="Calibri"/>
               </a:defRPr>
             </a:pPr>
             <a:r>
@@ -4838,7 +4838,7 @@
                 <a:solidFill>
                   <a:srgbClr val="2C3E50"/>
                 </a:solidFill>
-                <a:latin typeface="Helvetica"/>
+                <a:latin typeface="Calibri"/>
               </a:defRPr>
             </a:pPr>
             <a:r>
@@ -4854,7 +4854,7 @@
                 <a:solidFill>
                   <a:srgbClr val="2C3E50"/>
                 </a:solidFill>
-                <a:latin typeface="Helvetica"/>
+                <a:latin typeface="Calibri"/>
               </a:defRPr>
             </a:pPr>
             <a:r>
@@ -4893,7 +4893,7 @@
                 <a:solidFill>
                   <a:srgbClr val="2C3E50"/>
                 </a:solidFill>
-                <a:latin typeface="Helvetica"/>
+                <a:latin typeface="Calibri"/>
               </a:defRPr>
             </a:pPr>
             <a:r>
@@ -4909,7 +4909,7 @@
                 <a:solidFill>
                   <a:srgbClr val="2C3E50"/>
                 </a:solidFill>
-                <a:latin typeface="Helvetica"/>
+                <a:latin typeface="Calibri"/>
               </a:defRPr>
             </a:pPr>
             <a:r>
@@ -4925,7 +4925,7 @@
                 <a:solidFill>
                   <a:srgbClr val="2C3E50"/>
                 </a:solidFill>
-                <a:latin typeface="Helvetica"/>
+                <a:latin typeface="Calibri"/>
               </a:defRPr>
             </a:pPr>
             <a:r>
@@ -4941,7 +4941,7 @@
                 <a:solidFill>
                   <a:srgbClr val="2C3E50"/>
                 </a:solidFill>
-                <a:latin typeface="Helvetica"/>
+                <a:latin typeface="Calibri"/>
               </a:defRPr>
             </a:pPr>
             <a:r>
@@ -4957,7 +4957,7 @@
                 <a:solidFill>
                   <a:srgbClr val="2C3E50"/>
                 </a:solidFill>
-                <a:latin typeface="Helvetica"/>
+                <a:latin typeface="Calibri"/>
               </a:defRPr>
             </a:pPr>
             <a:r>
@@ -4980,7 +4980,7 @@
     <p:bg>
       <p:bgPr>
         <a:solidFill>
-          <a:srgbClr val="FAF9F6"/>
+          <a:srgbClr val="F7F6F2"/>
         </a:solidFill>
         <a:effectLst/>
       </p:bgPr>
@@ -5017,9 +5017,9 @@
             <a:pPr algn="l">
               <a:defRPr sz="2800" b="1">
                 <a:solidFill>
-                  <a:srgbClr val="1A1A2E"/>
-                </a:solidFill>
-                <a:latin typeface="Helvetica"/>
+                  <a:srgbClr val="1E2761"/>
+                </a:solidFill>
+                <a:latin typeface="Georgia"/>
               </a:defRPr>
             </a:pPr>
             <a:r>
@@ -5043,7 +5043,7 @@
             <a:avLst/>
           </a:prstGeom>
           <a:solidFill>
-            <a:srgbClr val="8B1A1A"/>
+            <a:srgbClr val="7B2D26"/>
           </a:solidFill>
           <a:ln>
             <a:noFill/>
@@ -5101,7 +5101,7 @@
                 <a:solidFill>
                   <a:srgbClr val="2C3E50"/>
                 </a:solidFill>
-                <a:latin typeface="Helvetica"/>
+                <a:latin typeface="Calibri"/>
               </a:defRPr>
             </a:pPr>
             <a:r>
@@ -5117,7 +5117,7 @@
                 <a:solidFill>
                   <a:srgbClr val="2C3E50"/>
                 </a:solidFill>
-                <a:latin typeface="Helvetica"/>
+                <a:latin typeface="Calibri"/>
               </a:defRPr>
             </a:pPr>
             <a:r>
@@ -5133,7 +5133,7 @@
                 <a:solidFill>
                   <a:srgbClr val="2C3E50"/>
                 </a:solidFill>
-                <a:latin typeface="Helvetica"/>
+                <a:latin typeface="Calibri"/>
               </a:defRPr>
             </a:pPr>
             <a:r>
@@ -5149,7 +5149,7 @@
                 <a:solidFill>
                   <a:srgbClr val="2C3E50"/>
                 </a:solidFill>
-                <a:latin typeface="Helvetica"/>
+                <a:latin typeface="Calibri"/>
               </a:defRPr>
             </a:pPr>
             <a:r>
@@ -5165,7 +5165,7 @@
                 <a:solidFill>
                   <a:srgbClr val="2C3E50"/>
                 </a:solidFill>
-                <a:latin typeface="Helvetica"/>
+                <a:latin typeface="Calibri"/>
               </a:defRPr>
             </a:pPr>
             <a:r>
@@ -5204,7 +5204,7 @@
                 <a:solidFill>
                   <a:srgbClr val="2C3E50"/>
                 </a:solidFill>
-                <a:latin typeface="Helvetica"/>
+                <a:latin typeface="Calibri"/>
               </a:defRPr>
             </a:pPr>
             <a:r>
@@ -5220,7 +5220,7 @@
                 <a:solidFill>
                   <a:srgbClr val="2C3E50"/>
                 </a:solidFill>
-                <a:latin typeface="Helvetica"/>
+                <a:latin typeface="Calibri"/>
               </a:defRPr>
             </a:pPr>
             <a:r>
@@ -5236,7 +5236,7 @@
                 <a:solidFill>
                   <a:srgbClr val="2C3E50"/>
                 </a:solidFill>
-                <a:latin typeface="Helvetica"/>
+                <a:latin typeface="Calibri"/>
               </a:defRPr>
             </a:pPr>
             <a:r>
@@ -5252,7 +5252,7 @@
                 <a:solidFill>
                   <a:srgbClr val="2C3E50"/>
                 </a:solidFill>
-                <a:latin typeface="Helvetica"/>
+                <a:latin typeface="Calibri"/>
               </a:defRPr>
             </a:pPr>
             <a:r>
@@ -5268,7 +5268,7 @@
                 <a:solidFill>
                   <a:srgbClr val="2C3E50"/>
                 </a:solidFill>
-                <a:latin typeface="Helvetica"/>
+                <a:latin typeface="Calibri"/>
               </a:defRPr>
             </a:pPr>
             <a:r>
@@ -5291,7 +5291,7 @@
     <p:bg>
       <p:bgPr>
         <a:solidFill>
-          <a:srgbClr val="FAF9F6"/>
+          <a:srgbClr val="F7F6F2"/>
         </a:solidFill>
         <a:effectLst/>
       </p:bgPr>
@@ -5328,9 +5328,9 @@
             <a:pPr algn="l">
               <a:defRPr sz="2800" b="1">
                 <a:solidFill>
-                  <a:srgbClr val="1A1A2E"/>
-                </a:solidFill>
-                <a:latin typeface="Helvetica"/>
+                  <a:srgbClr val="1E2761"/>
+                </a:solidFill>
+                <a:latin typeface="Georgia"/>
               </a:defRPr>
             </a:pPr>
             <a:r>
@@ -5354,7 +5354,7 @@
             <a:avLst/>
           </a:prstGeom>
           <a:solidFill>
-            <a:srgbClr val="8B1A1A"/>
+            <a:srgbClr val="7B2D26"/>
           </a:solidFill>
           <a:ln>
             <a:noFill/>
@@ -5412,7 +5412,7 @@
                 <a:solidFill>
                   <a:srgbClr val="2C3E50"/>
                 </a:solidFill>
-                <a:latin typeface="Helvetica"/>
+                <a:latin typeface="Calibri"/>
               </a:defRPr>
             </a:pPr>
             <a:r>
@@ -5428,7 +5428,7 @@
                 <a:solidFill>
                   <a:srgbClr val="2C3E50"/>
                 </a:solidFill>
-                <a:latin typeface="Helvetica"/>
+                <a:latin typeface="Calibri"/>
               </a:defRPr>
             </a:pPr>
             <a:r>
@@ -5444,7 +5444,7 @@
                 <a:solidFill>
                   <a:srgbClr val="2C3E50"/>
                 </a:solidFill>
-                <a:latin typeface="Helvetica"/>
+                <a:latin typeface="Calibri"/>
               </a:defRPr>
             </a:pPr>
             <a:r>
@@ -5460,7 +5460,7 @@
                 <a:solidFill>
                   <a:srgbClr val="2C3E50"/>
                 </a:solidFill>
-                <a:latin typeface="Helvetica"/>
+                <a:latin typeface="Calibri"/>
               </a:defRPr>
             </a:pPr>
             <a:r>
@@ -5499,7 +5499,7 @@
                 <a:solidFill>
                   <a:srgbClr val="2C3E50"/>
                 </a:solidFill>
-                <a:latin typeface="Helvetica"/>
+                <a:latin typeface="Calibri"/>
               </a:defRPr>
             </a:pPr>
             <a:r>
@@ -5515,7 +5515,7 @@
                 <a:solidFill>
                   <a:srgbClr val="2C3E50"/>
                 </a:solidFill>
-                <a:latin typeface="Helvetica"/>
+                <a:latin typeface="Calibri"/>
               </a:defRPr>
             </a:pPr>
             <a:r>
@@ -5531,7 +5531,7 @@
                 <a:solidFill>
                   <a:srgbClr val="2C3E50"/>
                 </a:solidFill>
-                <a:latin typeface="Helvetica"/>
+                <a:latin typeface="Calibri"/>
               </a:defRPr>
             </a:pPr>
             <a:r>
@@ -5547,7 +5547,7 @@
                 <a:solidFill>
                   <a:srgbClr val="2C3E50"/>
                 </a:solidFill>
-                <a:latin typeface="Helvetica"/>
+                <a:latin typeface="Calibri"/>
               </a:defRPr>
             </a:pPr>
             <a:r>
@@ -5570,7 +5570,7 @@
     <p:bg>
       <p:bgPr>
         <a:solidFill>
-          <a:srgbClr val="FAF9F6"/>
+          <a:srgbClr val="F7F6F2"/>
         </a:solidFill>
         <a:effectLst/>
       </p:bgPr>
@@ -5607,9 +5607,9 @@
             <a:pPr algn="l">
               <a:defRPr sz="2800" b="1">
                 <a:solidFill>
-                  <a:srgbClr val="1A1A2E"/>
-                </a:solidFill>
-                <a:latin typeface="Helvetica"/>
+                  <a:srgbClr val="1E2761"/>
+                </a:solidFill>
+                <a:latin typeface="Georgia"/>
               </a:defRPr>
             </a:pPr>
             <a:r>
@@ -5633,7 +5633,7 @@
             <a:avLst/>
           </a:prstGeom>
           <a:solidFill>
-            <a:srgbClr val="8B1A1A"/>
+            <a:srgbClr val="7B2D26"/>
           </a:solidFill>
           <a:ln>
             <a:noFill/>
@@ -5691,7 +5691,7 @@
                 <a:solidFill>
                   <a:srgbClr val="2C3E50"/>
                 </a:solidFill>
-                <a:latin typeface="Helvetica"/>
+                <a:latin typeface="Calibri"/>
               </a:defRPr>
             </a:pPr>
             <a:r>
@@ -5707,7 +5707,7 @@
                 <a:solidFill>
                   <a:srgbClr val="2C3E50"/>
                 </a:solidFill>
-                <a:latin typeface="Helvetica"/>
+                <a:latin typeface="Calibri"/>
               </a:defRPr>
             </a:pPr>
             <a:r>
@@ -5723,7 +5723,7 @@
                 <a:solidFill>
                   <a:srgbClr val="2C3E50"/>
                 </a:solidFill>
-                <a:latin typeface="Helvetica"/>
+                <a:latin typeface="Calibri"/>
               </a:defRPr>
             </a:pPr>
             <a:r>
@@ -5739,7 +5739,7 @@
                 <a:solidFill>
                   <a:srgbClr val="2C3E50"/>
                 </a:solidFill>
-                <a:latin typeface="Helvetica"/>
+                <a:latin typeface="Calibri"/>
               </a:defRPr>
             </a:pPr>
             <a:r>
@@ -5755,7 +5755,7 @@
                 <a:solidFill>
                   <a:srgbClr val="2C3E50"/>
                 </a:solidFill>
-                <a:latin typeface="Helvetica"/>
+                <a:latin typeface="Calibri"/>
               </a:defRPr>
             </a:pPr>
             <a:r>
@@ -5771,7 +5771,7 @@
                 <a:solidFill>
                   <a:srgbClr val="2C3E50"/>
                 </a:solidFill>
-                <a:latin typeface="Helvetica"/>
+                <a:latin typeface="Calibri"/>
               </a:defRPr>
             </a:pPr>
             <a:r>
@@ -5787,7 +5787,7 @@
                 <a:solidFill>
                   <a:srgbClr val="2C3E50"/>
                 </a:solidFill>
-                <a:latin typeface="Helvetica"/>
+                <a:latin typeface="Calibri"/>
               </a:defRPr>
             </a:pPr>
             <a:r>
@@ -5810,7 +5810,7 @@
     <p:bg>
       <p:bgPr>
         <a:solidFill>
-          <a:srgbClr val="FAF9F6"/>
+          <a:srgbClr val="F7F6F2"/>
         </a:solidFill>
         <a:effectLst/>
       </p:bgPr>
@@ -5847,9 +5847,9 @@
             <a:pPr algn="l">
               <a:defRPr sz="2800" b="1">
                 <a:solidFill>
-                  <a:srgbClr val="1A1A2E"/>
-                </a:solidFill>
-                <a:latin typeface="Helvetica"/>
+                  <a:srgbClr val="1E2761"/>
+                </a:solidFill>
+                <a:latin typeface="Georgia"/>
               </a:defRPr>
             </a:pPr>
             <a:r>
@@ -5873,7 +5873,7 @@
             <a:avLst/>
           </a:prstGeom>
           <a:solidFill>
-            <a:srgbClr val="8B1A1A"/>
+            <a:srgbClr val="7B2D26"/>
           </a:solidFill>
           <a:ln>
             <a:noFill/>
@@ -5931,7 +5931,7 @@
                 <a:solidFill>
                   <a:srgbClr val="2C3E50"/>
                 </a:solidFill>
-                <a:latin typeface="Helvetica"/>
+                <a:latin typeface="Calibri"/>
               </a:defRPr>
             </a:pPr>
             <a:r>
@@ -5947,7 +5947,7 @@
                 <a:solidFill>
                   <a:srgbClr val="2C3E50"/>
                 </a:solidFill>
-                <a:latin typeface="Helvetica"/>
+                <a:latin typeface="Calibri"/>
               </a:defRPr>
             </a:pPr>
             <a:r>
@@ -5963,7 +5963,7 @@
                 <a:solidFill>
                   <a:srgbClr val="2C3E50"/>
                 </a:solidFill>
-                <a:latin typeface="Helvetica"/>
+                <a:latin typeface="Calibri"/>
               </a:defRPr>
             </a:pPr>
             <a:r>
@@ -5979,7 +5979,7 @@
                 <a:solidFill>
                   <a:srgbClr val="2C3E50"/>
                 </a:solidFill>
-                <a:latin typeface="Helvetica"/>
+                <a:latin typeface="Calibri"/>
               </a:defRPr>
             </a:pPr>
             <a:r>
@@ -6002,7 +6002,7 @@
     <p:bg>
       <p:bgPr>
         <a:solidFill>
-          <a:srgbClr val="FAF9F6"/>
+          <a:srgbClr val="F7F6F2"/>
         </a:solidFill>
         <a:effectLst/>
       </p:bgPr>
@@ -6039,9 +6039,9 @@
             <a:pPr algn="l">
               <a:defRPr sz="2800" b="1">
                 <a:solidFill>
-                  <a:srgbClr val="1A1A2E"/>
-                </a:solidFill>
-                <a:latin typeface="Helvetica"/>
+                  <a:srgbClr val="1E2761"/>
+                </a:solidFill>
+                <a:latin typeface="Georgia"/>
               </a:defRPr>
             </a:pPr>
             <a:r>
@@ -6075,9 +6075,9 @@
             <a:pPr algn="ctr">
               <a:defRPr sz="2200" i="1">
                 <a:solidFill>
-                  <a:srgbClr val="1A1A2E"/>
-                </a:solidFill>
-                <a:latin typeface="Helvetica"/>
+                  <a:srgbClr val="1E2761"/>
+                </a:solidFill>
+                <a:latin typeface="Calibri"/>
               </a:defRPr>
             </a:pPr>
             <a:r>
@@ -6111,9 +6111,9 @@
             <a:pPr algn="ctr">
               <a:defRPr sz="1400" b="0">
                 <a:solidFill>
-                  <a:srgbClr val="8B1A1A"/>
-                </a:solidFill>
-                <a:latin typeface="Helvetica"/>
+                  <a:srgbClr val="7B2D26"/>
+                </a:solidFill>
+                <a:latin typeface="Calibri"/>
               </a:defRPr>
             </a:pPr>
             <a:r>
@@ -6136,7 +6136,7 @@
     <p:bg>
       <p:bgPr>
         <a:solidFill>
-          <a:srgbClr val="FAF9F6"/>
+          <a:srgbClr val="F7F6F2"/>
         </a:solidFill>
         <a:effectLst/>
       </p:bgPr>
@@ -6173,9 +6173,9 @@
             <a:pPr algn="l">
               <a:defRPr sz="2800" b="1">
                 <a:solidFill>
-                  <a:srgbClr val="1A1A2E"/>
-                </a:solidFill>
-                <a:latin typeface="Helvetica"/>
+                  <a:srgbClr val="1E2761"/>
+                </a:solidFill>
+                <a:latin typeface="Georgia"/>
               </a:defRPr>
             </a:pPr>
             <a:r>
@@ -6199,7 +6199,7 @@
             <a:avLst/>
           </a:prstGeom>
           <a:solidFill>
-            <a:srgbClr val="8B1A1A"/>
+            <a:srgbClr val="7B2D26"/>
           </a:solidFill>
           <a:ln>
             <a:noFill/>
@@ -6257,7 +6257,7 @@
                 <a:solidFill>
                   <a:srgbClr val="2C3E50"/>
                 </a:solidFill>
-                <a:latin typeface="Helvetica"/>
+                <a:latin typeface="Calibri"/>
               </a:defRPr>
             </a:pPr>
             <a:r>
@@ -6273,7 +6273,7 @@
                 <a:solidFill>
                   <a:srgbClr val="2C3E50"/>
                 </a:solidFill>
-                <a:latin typeface="Helvetica"/>
+                <a:latin typeface="Calibri"/>
               </a:defRPr>
             </a:pPr>
             <a:r>
@@ -6289,7 +6289,7 @@
                 <a:solidFill>
                   <a:srgbClr val="2C3E50"/>
                 </a:solidFill>
-                <a:latin typeface="Helvetica"/>
+                <a:latin typeface="Calibri"/>
               </a:defRPr>
             </a:pPr>
             <a:r>
@@ -6305,7 +6305,7 @@
                 <a:solidFill>
                   <a:srgbClr val="2C3E50"/>
                 </a:solidFill>
-                <a:latin typeface="Helvetica"/>
+                <a:latin typeface="Calibri"/>
               </a:defRPr>
             </a:pPr>
             <a:r>
@@ -6321,7 +6321,7 @@
                 <a:solidFill>
                   <a:srgbClr val="2C3E50"/>
                 </a:solidFill>
-                <a:latin typeface="Helvetica"/>
+                <a:latin typeface="Calibri"/>
               </a:defRPr>
             </a:pPr>
             <a:r>
@@ -6344,7 +6344,7 @@
     <p:bg>
       <p:bgPr>
         <a:solidFill>
-          <a:srgbClr val="FAF9F6"/>
+          <a:srgbClr val="F7F6F2"/>
         </a:solidFill>
         <a:effectLst/>
       </p:bgPr>
@@ -6381,9 +6381,9 @@
             <a:pPr algn="l">
               <a:defRPr sz="2800" b="1">
                 <a:solidFill>
-                  <a:srgbClr val="1A1A2E"/>
-                </a:solidFill>
-                <a:latin typeface="Helvetica"/>
+                  <a:srgbClr val="1E2761"/>
+                </a:solidFill>
+                <a:latin typeface="Georgia"/>
               </a:defRPr>
             </a:pPr>
             <a:r>
@@ -6407,7 +6407,7 @@
             <a:avLst/>
           </a:prstGeom>
           <a:solidFill>
-            <a:srgbClr val="8B1A1A"/>
+            <a:srgbClr val="7B2D26"/>
           </a:solidFill>
           <a:ln>
             <a:noFill/>
@@ -6465,7 +6465,7 @@
                 <a:solidFill>
                   <a:srgbClr val="2C3E50"/>
                 </a:solidFill>
-                <a:latin typeface="Helvetica"/>
+                <a:latin typeface="Calibri"/>
               </a:defRPr>
             </a:pPr>
             <a:r>
@@ -6481,7 +6481,7 @@
                 <a:solidFill>
                   <a:srgbClr val="2C3E50"/>
                 </a:solidFill>
-                <a:latin typeface="Helvetica"/>
+                <a:latin typeface="Calibri"/>
               </a:defRPr>
             </a:pPr>
             <a:r>
@@ -6497,7 +6497,7 @@
                 <a:solidFill>
                   <a:srgbClr val="2C3E50"/>
                 </a:solidFill>
-                <a:latin typeface="Helvetica"/>
+                <a:latin typeface="Calibri"/>
               </a:defRPr>
             </a:pPr>
             <a:r>
@@ -6513,7 +6513,7 @@
                 <a:solidFill>
                   <a:srgbClr val="2C3E50"/>
                 </a:solidFill>
-                <a:latin typeface="Helvetica"/>
+                <a:latin typeface="Calibri"/>
               </a:defRPr>
             </a:pPr>
             <a:r>
@@ -6529,7 +6529,7 @@
                 <a:solidFill>
                   <a:srgbClr val="2C3E50"/>
                 </a:solidFill>
-                <a:latin typeface="Helvetica"/>
+                <a:latin typeface="Calibri"/>
               </a:defRPr>
             </a:pPr>
             <a:r>
@@ -6568,7 +6568,7 @@
                 <a:solidFill>
                   <a:srgbClr val="2C3E50"/>
                 </a:solidFill>
-                <a:latin typeface="Helvetica"/>
+                <a:latin typeface="Calibri"/>
               </a:defRPr>
             </a:pPr>
             <a:r>
@@ -6584,7 +6584,7 @@
                 <a:solidFill>
                   <a:srgbClr val="2C3E50"/>
                 </a:solidFill>
-                <a:latin typeface="Helvetica"/>
+                <a:latin typeface="Calibri"/>
               </a:defRPr>
             </a:pPr>
             <a:r>
@@ -6600,7 +6600,7 @@
                 <a:solidFill>
                   <a:srgbClr val="2C3E50"/>
                 </a:solidFill>
-                <a:latin typeface="Helvetica"/>
+                <a:latin typeface="Calibri"/>
               </a:defRPr>
             </a:pPr>
             <a:r>
@@ -6616,7 +6616,7 @@
                 <a:solidFill>
                   <a:srgbClr val="2C3E50"/>
                 </a:solidFill>
-                <a:latin typeface="Helvetica"/>
+                <a:latin typeface="Calibri"/>
               </a:defRPr>
             </a:pPr>
             <a:r>
@@ -6639,7 +6639,7 @@
     <p:bg>
       <p:bgPr>
         <a:solidFill>
-          <a:srgbClr val="FAF9F6"/>
+          <a:srgbClr val="F7F6F2"/>
         </a:solidFill>
         <a:effectLst/>
       </p:bgPr>
@@ -6676,9 +6676,9 @@
             <a:pPr algn="l">
               <a:defRPr sz="2800" b="1">
                 <a:solidFill>
-                  <a:srgbClr val="1A1A2E"/>
-                </a:solidFill>
-                <a:latin typeface="Helvetica"/>
+                  <a:srgbClr val="1E2761"/>
+                </a:solidFill>
+                <a:latin typeface="Georgia"/>
               </a:defRPr>
             </a:pPr>
             <a:r>
@@ -6702,7 +6702,7 @@
             <a:avLst/>
           </a:prstGeom>
           <a:solidFill>
-            <a:srgbClr val="8B1A1A"/>
+            <a:srgbClr val="7B2D26"/>
           </a:solidFill>
           <a:ln>
             <a:noFill/>
@@ -6760,7 +6760,7 @@
                 <a:solidFill>
                   <a:srgbClr val="2C3E50"/>
                 </a:solidFill>
-                <a:latin typeface="Helvetica"/>
+                <a:latin typeface="Calibri"/>
               </a:defRPr>
             </a:pPr>
             <a:r>
@@ -6776,7 +6776,7 @@
                 <a:solidFill>
                   <a:srgbClr val="2C3E50"/>
                 </a:solidFill>
-                <a:latin typeface="Helvetica"/>
+                <a:latin typeface="Calibri"/>
               </a:defRPr>
             </a:pPr>
             <a:r>
@@ -6792,7 +6792,7 @@
                 <a:solidFill>
                   <a:srgbClr val="2C3E50"/>
                 </a:solidFill>
-                <a:latin typeface="Helvetica"/>
+                <a:latin typeface="Calibri"/>
               </a:defRPr>
             </a:pPr>
             <a:r>
@@ -6808,7 +6808,7 @@
                 <a:solidFill>
                   <a:srgbClr val="2C3E50"/>
                 </a:solidFill>
-                <a:latin typeface="Helvetica"/>
+                <a:latin typeface="Calibri"/>
               </a:defRPr>
             </a:pPr>
             <a:r>
@@ -6824,7 +6824,7 @@
                 <a:solidFill>
                   <a:srgbClr val="2C3E50"/>
                 </a:solidFill>
-                <a:latin typeface="Helvetica"/>
+                <a:latin typeface="Calibri"/>
               </a:defRPr>
             </a:pPr>
             <a:r>
@@ -6863,7 +6863,7 @@
                 <a:solidFill>
                   <a:srgbClr val="2C3E50"/>
                 </a:solidFill>
-                <a:latin typeface="Helvetica"/>
+                <a:latin typeface="Calibri"/>
               </a:defRPr>
             </a:pPr>
             <a:r>
@@ -6879,7 +6879,7 @@
                 <a:solidFill>
                   <a:srgbClr val="2C3E50"/>
                 </a:solidFill>
-                <a:latin typeface="Helvetica"/>
+                <a:latin typeface="Calibri"/>
               </a:defRPr>
             </a:pPr>
             <a:r>
@@ -6895,7 +6895,7 @@
                 <a:solidFill>
                   <a:srgbClr val="2C3E50"/>
                 </a:solidFill>
-                <a:latin typeface="Helvetica"/>
+                <a:latin typeface="Calibri"/>
               </a:defRPr>
             </a:pPr>
             <a:r>
@@ -6911,7 +6911,7 @@
                 <a:solidFill>
                   <a:srgbClr val="2C3E50"/>
                 </a:solidFill>
-                <a:latin typeface="Helvetica"/>
+                <a:latin typeface="Calibri"/>
               </a:defRPr>
             </a:pPr>
             <a:r>
@@ -6927,7 +6927,7 @@
                 <a:solidFill>
                   <a:srgbClr val="2C3E50"/>
                 </a:solidFill>
-                <a:latin typeface="Helvetica"/>
+                <a:latin typeface="Calibri"/>
               </a:defRPr>
             </a:pPr>
             <a:r>
@@ -6950,7 +6950,7 @@
     <p:bg>
       <p:bgPr>
         <a:solidFill>
-          <a:srgbClr val="FAF9F6"/>
+          <a:srgbClr val="F7F6F2"/>
         </a:solidFill>
         <a:effectLst/>
       </p:bgPr>
@@ -6987,9 +6987,9 @@
             <a:pPr algn="l">
               <a:defRPr sz="2800" b="1">
                 <a:solidFill>
-                  <a:srgbClr val="1A1A2E"/>
-                </a:solidFill>
-                <a:latin typeface="Helvetica"/>
+                  <a:srgbClr val="1E2761"/>
+                </a:solidFill>
+                <a:latin typeface="Georgia"/>
               </a:defRPr>
             </a:pPr>
             <a:r>
@@ -7013,7 +7013,7 @@
             <a:avLst/>
           </a:prstGeom>
           <a:solidFill>
-            <a:srgbClr val="8B1A1A"/>
+            <a:srgbClr val="7B2D26"/>
           </a:solidFill>
           <a:ln>
             <a:noFill/>
@@ -7071,7 +7071,7 @@
                 <a:solidFill>
                   <a:srgbClr val="2C3E50"/>
                 </a:solidFill>
-                <a:latin typeface="Helvetica"/>
+                <a:latin typeface="Calibri"/>
               </a:defRPr>
             </a:pPr>
             <a:r>
@@ -7087,7 +7087,7 @@
                 <a:solidFill>
                   <a:srgbClr val="2C3E50"/>
                 </a:solidFill>
-                <a:latin typeface="Helvetica"/>
+                <a:latin typeface="Calibri"/>
               </a:defRPr>
             </a:pPr>
             <a:r>
@@ -7103,7 +7103,7 @@
                 <a:solidFill>
                   <a:srgbClr val="2C3E50"/>
                 </a:solidFill>
-                <a:latin typeface="Helvetica"/>
+                <a:latin typeface="Calibri"/>
               </a:defRPr>
             </a:pPr>
             <a:r>
@@ -7119,7 +7119,7 @@
                 <a:solidFill>
                   <a:srgbClr val="2C3E50"/>
                 </a:solidFill>
-                <a:latin typeface="Helvetica"/>
+                <a:latin typeface="Calibri"/>
               </a:defRPr>
             </a:pPr>
             <a:r>
@@ -7135,7 +7135,7 @@
                 <a:solidFill>
                   <a:srgbClr val="2C3E50"/>
                 </a:solidFill>
-                <a:latin typeface="Helvetica"/>
+                <a:latin typeface="Calibri"/>
               </a:defRPr>
             </a:pPr>
             <a:r>
@@ -7174,7 +7174,7 @@
                 <a:solidFill>
                   <a:srgbClr val="2C3E50"/>
                 </a:solidFill>
-                <a:latin typeface="Helvetica"/>
+                <a:latin typeface="Calibri"/>
               </a:defRPr>
             </a:pPr>
             <a:r>
@@ -7190,7 +7190,7 @@
                 <a:solidFill>
                   <a:srgbClr val="2C3E50"/>
                 </a:solidFill>
-                <a:latin typeface="Helvetica"/>
+                <a:latin typeface="Calibri"/>
               </a:defRPr>
             </a:pPr>
             <a:r>
@@ -7206,7 +7206,7 @@
                 <a:solidFill>
                   <a:srgbClr val="2C3E50"/>
                 </a:solidFill>
-                <a:latin typeface="Helvetica"/>
+                <a:latin typeface="Calibri"/>
               </a:defRPr>
             </a:pPr>
             <a:r>
@@ -7222,7 +7222,7 @@
                 <a:solidFill>
                   <a:srgbClr val="2C3E50"/>
                 </a:solidFill>
-                <a:latin typeface="Helvetica"/>
+                <a:latin typeface="Calibri"/>
               </a:defRPr>
             </a:pPr>
             <a:r>
@@ -7245,7 +7245,7 @@
     <p:bg>
       <p:bgPr>
         <a:solidFill>
-          <a:srgbClr val="FAF9F6"/>
+          <a:srgbClr val="F7F6F2"/>
         </a:solidFill>
         <a:effectLst/>
       </p:bgPr>
@@ -7282,13 +7282,13 @@
             <a:pPr algn="l">
               <a:defRPr sz="2800" b="1">
                 <a:solidFill>
-                  <a:srgbClr val="1A1A2E"/>
-                </a:solidFill>
-                <a:latin typeface="Helvetica"/>
-              </a:defRPr>
-            </a:pPr>
-            <a:r>
-              <a:t>samskara — Latent Impressions</a:t>
+                  <a:srgbClr val="1E2761"/>
+                </a:solidFill>
+                <a:latin typeface="Georgia"/>
+              </a:defRPr>
+            </a:pPr>
+            <a:r>
+              <a:t>saṃskāra — Latent Impressions</a:t>
             </a:r>
           </a:p>
         </p:txBody>
@@ -7308,7 +7308,7 @@
             <a:avLst/>
           </a:prstGeom>
           <a:solidFill>
-            <a:srgbClr val="8B1A1A"/>
+            <a:srgbClr val="7B2D26"/>
           </a:solidFill>
           <a:ln>
             <a:noFill/>
@@ -7366,11 +7366,11 @@
                 <a:solidFill>
                   <a:srgbClr val="2C3E50"/>
                 </a:solidFill>
-                <a:latin typeface="Helvetica"/>
-              </a:defRPr>
-            </a:pPr>
-            <a:r>
-              <a:t>Root: √kr — "to do, make"    Prefix: sam- ("completely")</a:t>
+                <a:latin typeface="Calibri"/>
+              </a:defRPr>
+            </a:pPr>
+            <a:r>
+              <a:t>Root: √kṛ — "to do, make"</a:t>
             </a:r>
           </a:p>
           <a:p>
@@ -7382,11 +7382,11 @@
                 <a:solidFill>
                   <a:srgbClr val="2C3E50"/>
                 </a:solidFill>
-                <a:latin typeface="Helvetica"/>
-              </a:defRPr>
-            </a:pPr>
-            <a:r>
-              <a:t>Literal: "a thorough making"     Philosophical: accumulated subliminal traces</a:t>
+                <a:latin typeface="Calibri"/>
+              </a:defRPr>
+            </a:pPr>
+            <a:r>
+              <a:t>Prefix: sam- ("completely, thoroughly")</a:t>
             </a:r>
           </a:p>
           <a:p>
@@ -7398,11 +7398,11 @@
                 <a:solidFill>
                   <a:srgbClr val="2C3E50"/>
                 </a:solidFill>
-                <a:latin typeface="Helvetica"/>
-              </a:defRPr>
-            </a:pPr>
-            <a:r>
-              <a:t>Three lives of one word:</a:t>
+                <a:latin typeface="Calibri"/>
+              </a:defRPr>
+            </a:pPr>
+            <a:r>
+              <a:t>Literal: "a thorough making"</a:t>
             </a:r>
           </a:p>
           <a:p>
@@ -7414,11 +7414,11 @@
                 <a:solidFill>
                   <a:srgbClr val="2C3E50"/>
                 </a:solidFill>
-                <a:latin typeface="Helvetica"/>
-              </a:defRPr>
-            </a:pPr>
-            <a:r>
-              <a:t>Ritual: consecration, sacrament (the samskaras of life)</a:t>
+                <a:latin typeface="Calibri"/>
+              </a:defRPr>
+            </a:pPr>
+            <a:r>
+              <a:t>Philosophical: accumulated subliminal traces that shape perception</a:t>
             </a:r>
           </a:p>
           <a:p>
@@ -7430,11 +7430,11 @@
                 <a:solidFill>
                   <a:srgbClr val="2C3E50"/>
                 </a:solidFill>
-                <a:latin typeface="Helvetica"/>
-              </a:defRPr>
-            </a:pPr>
-            <a:r>
-              <a:t>Grammar: refinement (samskrta = "Sanskrit" = the "well-made" language)</a:t>
+                <a:latin typeface="Calibri"/>
+              </a:defRPr>
+            </a:pPr>
+            <a:r>
+              <a:t>Three lives of one word:</a:t>
             </a:r>
           </a:p>
           <a:p>
@@ -7446,11 +7446,11 @@
                 <a:solidFill>
                   <a:srgbClr val="2C3E50"/>
                 </a:solidFill>
-                <a:latin typeface="Helvetica"/>
-              </a:defRPr>
-            </a:pPr>
-            <a:r>
-              <a:t>Yoga Sutras: latent impressions — the unconscious residue of experience</a:t>
+                <a:latin typeface="Calibri"/>
+              </a:defRPr>
+            </a:pPr>
+            <a:r>
+              <a:t>Ritual: consecration, sacrament</a:t>
             </a:r>
           </a:p>
           <a:p>
@@ -7462,11 +7462,43 @@
                 <a:solidFill>
                   <a:srgbClr val="2C3E50"/>
                 </a:solidFill>
-                <a:latin typeface="Helvetica"/>
-              </a:defRPr>
-            </a:pPr>
-            <a:r>
-              <a:t>Samskaras from samadhi can overwrite samskaras from ordinary experience (YS 1.50)</a:t>
+                <a:latin typeface="Calibri"/>
+              </a:defRPr>
+            </a:pPr>
+            <a:r>
+              <a:t>Grammar: refinement — saṃskṛta = "Sanskrit" = the "well-made" language</a:t>
+            </a:r>
+          </a:p>
+          <a:p>
+            <a:pPr>
+              <a:spcAft>
+                <a:spcPts val="800"/>
+              </a:spcAft>
+              <a:defRPr sz="1800">
+                <a:solidFill>
+                  <a:srgbClr val="2C3E50"/>
+                </a:solidFill>
+                <a:latin typeface="Calibri"/>
+              </a:defRPr>
+            </a:pPr>
+            <a:r>
+              <a:t>Yoga Sutras: the unconscious residue of experience</a:t>
+            </a:r>
+          </a:p>
+          <a:p>
+            <a:pPr>
+              <a:spcAft>
+                <a:spcPts val="800"/>
+              </a:spcAft>
+              <a:defRPr sz="1800">
+                <a:solidFill>
+                  <a:srgbClr val="2C3E50"/>
+                </a:solidFill>
+                <a:latin typeface="Calibri"/>
+              </a:defRPr>
+            </a:pPr>
+            <a:r>
+              <a:t>Saṃskāras from samādhi overwrite saṃskāras from ordinary experience (YS 1.50)</a:t>
             </a:r>
           </a:p>
         </p:txBody>
@@ -7485,7 +7517,7 @@
     <p:bg>
       <p:bgPr>
         <a:solidFill>
-          <a:srgbClr val="1A1A2E"/>
+          <a:srgbClr val="1E2761"/>
         </a:solidFill>
         <a:effectLst/>
       </p:bgPr>
@@ -7524,7 +7556,7 @@
                 <a:solidFill>
                   <a:srgbClr val="FFFFFF"/>
                 </a:solidFill>
-                <a:latin typeface="Helvetica"/>
+                <a:latin typeface="Georgia"/>
               </a:defRPr>
             </a:pPr>
             <a:r>

--- a/docs/final_presentation.pptx
+++ b/docs/final_presentation.pptx
@@ -19,7 +19,7 @@
     <p:sldId id="267" r:id="rId19"/>
     <p:sldId id="268" r:id="rId20"/>
   </p:sldIdLst>
-  <p:sldSz cx="9144000" cy="6858000" type="screen4x3"/>
+  <p:sldSz cx="12191695" cy="6858000" type="screen4x3"/>
   <p:notesSz cx="6858000" cy="9144000"/>
   <p:defaultTextStyle>
     <a:defPPr>
@@ -515,7 +515,7 @@
           <a:p>
             <a:pPr>
               <a:defRPr sz="1100">
-                <a:latin typeface="Calibri"/>
+                <a:latin typeface="Avenir Next"/>
               </a:defRPr>
             </a:pPr>
             <a:r>
@@ -525,7 +525,7 @@
           <a:p>
             <a:pPr>
               <a:defRPr sz="1100">
-                <a:latin typeface="Calibri"/>
+                <a:latin typeface="Avenir Next"/>
               </a:defRPr>
             </a:pPr>
           </a:p>
@@ -597,7 +597,7 @@
           <a:p>
             <a:pPr>
               <a:defRPr sz="1100">
-                <a:latin typeface="Calibri"/>
+                <a:latin typeface="Avenir Next"/>
               </a:defRPr>
             </a:pPr>
             <a:r>
@@ -607,7 +607,7 @@
           <a:p>
             <a:pPr>
               <a:defRPr sz="1100">
-                <a:latin typeface="Calibri"/>
+                <a:latin typeface="Avenir Next"/>
               </a:defRPr>
             </a:pPr>
           </a:p>
@@ -679,7 +679,7 @@
           <a:p>
             <a:pPr>
               <a:defRPr sz="1100">
-                <a:latin typeface="Calibri"/>
+                <a:latin typeface="Avenir Next"/>
               </a:defRPr>
             </a:pPr>
             <a:r>
@@ -689,7 +689,7 @@
           <a:p>
             <a:pPr>
               <a:defRPr sz="1100">
-                <a:latin typeface="Calibri"/>
+                <a:latin typeface="Avenir Next"/>
               </a:defRPr>
             </a:pPr>
           </a:p>
@@ -761,7 +761,7 @@
           <a:p>
             <a:pPr>
               <a:defRPr sz="1100">
-                <a:latin typeface="Calibri"/>
+                <a:latin typeface="Avenir Next"/>
               </a:defRPr>
             </a:pPr>
             <a:r>
@@ -771,7 +771,7 @@
           <a:p>
             <a:pPr>
               <a:defRPr sz="1100">
-                <a:latin typeface="Calibri"/>
+                <a:latin typeface="Avenir Next"/>
               </a:defRPr>
             </a:pPr>
           </a:p>
@@ -843,7 +843,7 @@
           <a:p>
             <a:pPr>
               <a:defRPr sz="1100">
-                <a:latin typeface="Calibri"/>
+                <a:latin typeface="Avenir Next"/>
               </a:defRPr>
             </a:pPr>
             <a:r>
@@ -853,7 +853,7 @@
           <a:p>
             <a:pPr>
               <a:defRPr sz="1100">
-                <a:latin typeface="Calibri"/>
+                <a:latin typeface="Avenir Next"/>
               </a:defRPr>
             </a:pPr>
           </a:p>
@@ -925,7 +925,7 @@
           <a:p>
             <a:pPr>
               <a:defRPr sz="1100">
-                <a:latin typeface="Calibri"/>
+                <a:latin typeface="Avenir Next"/>
               </a:defRPr>
             </a:pPr>
             <a:r>
@@ -935,7 +935,7 @@
           <a:p>
             <a:pPr>
               <a:defRPr sz="1100">
-                <a:latin typeface="Calibri"/>
+                <a:latin typeface="Avenir Next"/>
               </a:defRPr>
             </a:pPr>
           </a:p>
@@ -1007,7 +1007,7 @@
           <a:p>
             <a:pPr>
               <a:defRPr sz="1100">
-                <a:latin typeface="Calibri"/>
+                <a:latin typeface="Avenir Next"/>
               </a:defRPr>
             </a:pPr>
             <a:r>
@@ -1017,7 +1017,7 @@
           <a:p>
             <a:pPr>
               <a:defRPr sz="1100">
-                <a:latin typeface="Calibri"/>
+                <a:latin typeface="Avenir Next"/>
               </a:defRPr>
             </a:pPr>
           </a:p>
@@ -1089,7 +1089,7 @@
           <a:p>
             <a:pPr>
               <a:defRPr sz="1100">
-                <a:latin typeface="Calibri"/>
+                <a:latin typeface="Avenir Next"/>
               </a:defRPr>
             </a:pPr>
             <a:r>
@@ -1099,7 +1099,7 @@
           <a:p>
             <a:pPr>
               <a:defRPr sz="1100">
-                <a:latin typeface="Calibri"/>
+                <a:latin typeface="Avenir Next"/>
               </a:defRPr>
             </a:pPr>
           </a:p>
@@ -1171,7 +1171,7 @@
           <a:p>
             <a:pPr>
               <a:defRPr sz="1100">
-                <a:latin typeface="Calibri"/>
+                <a:latin typeface="Avenir Next"/>
               </a:defRPr>
             </a:pPr>
             <a:r>
@@ -1181,7 +1181,7 @@
           <a:p>
             <a:pPr>
               <a:defRPr sz="1100">
-                <a:latin typeface="Calibri"/>
+                <a:latin typeface="Avenir Next"/>
               </a:defRPr>
             </a:pPr>
           </a:p>
@@ -1253,7 +1253,7 @@
           <a:p>
             <a:pPr>
               <a:defRPr sz="1100">
-                <a:latin typeface="Calibri"/>
+                <a:latin typeface="Avenir Next"/>
               </a:defRPr>
             </a:pPr>
             <a:r>
@@ -1263,7 +1263,7 @@
           <a:p>
             <a:pPr>
               <a:defRPr sz="1100">
-                <a:latin typeface="Calibri"/>
+                <a:latin typeface="Avenir Next"/>
               </a:defRPr>
             </a:pPr>
           </a:p>
@@ -1335,7 +1335,7 @@
           <a:p>
             <a:pPr>
               <a:defRPr sz="1100">
-                <a:latin typeface="Calibri"/>
+                <a:latin typeface="Avenir Next"/>
               </a:defRPr>
             </a:pPr>
             <a:r>
@@ -1345,7 +1345,7 @@
           <a:p>
             <a:pPr>
               <a:defRPr sz="1100">
-                <a:latin typeface="Calibri"/>
+                <a:latin typeface="Avenir Next"/>
               </a:defRPr>
             </a:pPr>
           </a:p>
@@ -1417,7 +1417,7 @@
           <a:p>
             <a:pPr>
               <a:defRPr sz="1100">
-                <a:latin typeface="Calibri"/>
+                <a:latin typeface="Avenir Next"/>
               </a:defRPr>
             </a:pPr>
             <a:r>
@@ -1427,7 +1427,7 @@
           <a:p>
             <a:pPr>
               <a:defRPr sz="1100">
-                <a:latin typeface="Calibri"/>
+                <a:latin typeface="Avenir Next"/>
               </a:defRPr>
             </a:pPr>
           </a:p>
@@ -1499,7 +1499,7 @@
           <a:p>
             <a:pPr>
               <a:defRPr sz="1100">
-                <a:latin typeface="Calibri"/>
+                <a:latin typeface="Avenir Next"/>
               </a:defRPr>
             </a:pPr>
             <a:r>
@@ -1509,7 +1509,7 @@
           <a:p>
             <a:pPr>
               <a:defRPr sz="1100">
-                <a:latin typeface="Calibri"/>
+                <a:latin typeface="Avenir Next"/>
               </a:defRPr>
             </a:pPr>
           </a:p>
@@ -4512,7 +4512,7 @@
     <p:bg>
       <p:bgPr>
         <a:solidFill>
-          <a:srgbClr val="F7F6F2"/>
+          <a:srgbClr val="1E2761"/>
         </a:solidFill>
         <a:effectLst/>
       </p:bgPr>
@@ -4526,14 +4526,59 @@
       <p:grpSpPr/>
       <p:sp>
         <p:nvSpPr>
-          <p:cNvPr id="2" name="TextBox 1"/>
+          <p:cNvPr id="2" name="Rounded Rectangle 1"/>
+          <p:cNvSpPr/>
+          <p:nvPr/>
+        </p:nvSpPr>
+        <p:spPr>
+          <a:xfrm>
+            <a:off x="731520" y="1645920"/>
+            <a:ext cx="2743200" cy="76200"/>
+          </a:xfrm>
+          <a:prstGeom prst="roundRect">
+            <a:avLst>
+              <a:gd name="adj" fmla="val 10000"/>
+            </a:avLst>
+          </a:prstGeom>
+          <a:solidFill>
+            <a:srgbClr val="7B2D26"/>
+          </a:solidFill>
+          <a:ln>
+            <a:noFill/>
+          </a:ln>
+        </p:spPr>
+        <p:style>
+          <a:lnRef idx="1">
+            <a:schemeClr val="accent1"/>
+          </a:lnRef>
+          <a:fillRef idx="3">
+            <a:schemeClr val="accent1"/>
+          </a:fillRef>
+          <a:effectRef idx="2">
+            <a:schemeClr val="accent1"/>
+          </a:effectRef>
+          <a:fontRef idx="minor">
+            <a:schemeClr val="lt1"/>
+          </a:fontRef>
+        </p:style>
+        <p:txBody>
+          <a:bodyPr rtlCol="0" anchor="ctr"/>
+          <a:lstStyle/>
+          <a:p>
+            <a:pPr algn="ctr"/>
+          </a:p>
+        </p:txBody>
+      </p:sp>
+      <p:sp>
+        <p:nvSpPr>
+          <p:cNvPr id="3" name="TextBox 2"/>
           <p:cNvSpPr txBox="1"/>
           <p:nvPr/>
         </p:nvSpPr>
         <p:spPr>
           <a:xfrm>
-            <a:off x="731520" y="1828800"/>
-            <a:ext cx="7680960" cy="1371600"/>
+            <a:off x="731520" y="1920240"/>
+            <a:ext cx="7680960" cy="1828800"/>
           </a:xfrm>
           <a:prstGeom prst="rect">
             <a:avLst/>
@@ -4547,11 +4592,17 @@
           <a:lstStyle/>
           <a:p>
             <a:pPr algn="l">
-              <a:defRPr sz="3600" b="1">
-                <a:solidFill>
-                  <a:srgbClr val="1E2761"/>
-                </a:solidFill>
-                <a:latin typeface="Georgia"/>
+              <a:spcBef>
+                <a:spcPts val="0"/>
+              </a:spcBef>
+              <a:spcAft>
+                <a:spcPts val="800"/>
+              </a:spcAft>
+              <a:defRPr sz="4400" b="1" i="0">
+                <a:solidFill>
+                  <a:srgbClr val="FFFFFF"/>
+                </a:solidFill>
+                <a:latin typeface="Palatino"/>
               </a:defRPr>
             </a:pPr>
             <a:r>
@@ -4562,14 +4613,14 @@
       </p:sp>
       <p:sp>
         <p:nvSpPr>
-          <p:cNvPr id="3" name="TextBox 2"/>
+          <p:cNvPr id="4" name="TextBox 3"/>
           <p:cNvSpPr txBox="1"/>
           <p:nvPr/>
         </p:nvSpPr>
         <p:spPr>
           <a:xfrm>
-            <a:off x="731520" y="3291840"/>
-            <a:ext cx="7680960" cy="914400"/>
+            <a:off x="731520" y="3840480"/>
+            <a:ext cx="7680960" cy="1097280"/>
           </a:xfrm>
           <a:prstGeom prst="rect">
             <a:avLst/>
@@ -4583,11 +4634,17 @@
           <a:lstStyle/>
           <a:p>
             <a:pPr algn="l">
-              <a:defRPr sz="1800" b="0">
-                <a:solidFill>
-                  <a:srgbClr val="2C3E50"/>
-                </a:solidFill>
-                <a:latin typeface="Calibri"/>
+              <a:spcBef>
+                <a:spcPts val="0"/>
+              </a:spcBef>
+              <a:spcAft>
+                <a:spcPts val="400"/>
+              </a:spcAft>
+              <a:defRPr sz="2000" b="0" i="0">
+                <a:solidFill>
+                  <a:srgbClr val="CADCFC"/>
+                </a:solidFill>
+                <a:latin typeface="Avenir Next"/>
               </a:defRPr>
             </a:pPr>
             <a:r>
@@ -4598,17 +4655,19 @@
       </p:sp>
       <p:sp>
         <p:nvSpPr>
-          <p:cNvPr id="4" name="Rectangle 3"/>
+          <p:cNvPr id="5" name="Rounded Rectangle 4"/>
           <p:cNvSpPr/>
           <p:nvPr/>
         </p:nvSpPr>
         <p:spPr>
           <a:xfrm>
-            <a:off x="731520" y="3108960"/>
-            <a:ext cx="1828800" cy="38100"/>
+            <a:off x="731520" y="6035040"/>
+            <a:ext cx="7680960" cy="25400"/>
           </a:xfrm>
-          <a:prstGeom prst="rect">
-            <a:avLst/>
+          <a:prstGeom prst="roundRect">
+            <a:avLst>
+              <a:gd name="adj" fmla="val 10000"/>
+            </a:avLst>
           </a:prstGeom>
           <a:solidFill>
             <a:srgbClr val="7B2D26"/>
@@ -4667,14 +4726,57 @@
       <p:grpSpPr/>
       <p:sp>
         <p:nvSpPr>
-          <p:cNvPr id="2" name="TextBox 1"/>
+          <p:cNvPr id="2" name="Rectangle 1"/>
+          <p:cNvSpPr/>
+          <p:nvPr/>
+        </p:nvSpPr>
+        <p:spPr>
+          <a:xfrm>
+            <a:off x="0" y="0"/>
+            <a:ext cx="320040" cy="6858000"/>
+          </a:xfrm>
+          <a:prstGeom prst="rect">
+            <a:avLst/>
+          </a:prstGeom>
+          <a:solidFill>
+            <a:srgbClr val="1E2761"/>
+          </a:solidFill>
+          <a:ln>
+            <a:noFill/>
+          </a:ln>
+        </p:spPr>
+        <p:style>
+          <a:lnRef idx="1">
+            <a:schemeClr val="accent1"/>
+          </a:lnRef>
+          <a:fillRef idx="3">
+            <a:schemeClr val="accent1"/>
+          </a:fillRef>
+          <a:effectRef idx="2">
+            <a:schemeClr val="accent1"/>
+          </a:effectRef>
+          <a:fontRef idx="minor">
+            <a:schemeClr val="lt1"/>
+          </a:fontRef>
+        </p:style>
+        <p:txBody>
+          <a:bodyPr rtlCol="0" anchor="ctr"/>
+          <a:lstStyle/>
+          <a:p>
+            <a:pPr algn="ctr"/>
+          </a:p>
+        </p:txBody>
+      </p:sp>
+      <p:sp>
+        <p:nvSpPr>
+          <p:cNvPr id="3" name="TextBox 2"/>
           <p:cNvSpPr txBox="1"/>
           <p:nvPr/>
         </p:nvSpPr>
         <p:spPr>
           <a:xfrm>
-            <a:off x="731520" y="457200"/>
-            <a:ext cx="7680960" cy="731520"/>
+            <a:off x="731520" y="320040"/>
+            <a:ext cx="8046720" cy="822960"/>
           </a:xfrm>
           <a:prstGeom prst="rect">
             <a:avLst/>
@@ -4688,11 +4790,17 @@
           <a:lstStyle/>
           <a:p>
             <a:pPr algn="l">
-              <a:defRPr sz="2800" b="1">
+              <a:spcBef>
+                <a:spcPts val="0"/>
+              </a:spcBef>
+              <a:spcAft>
+                <a:spcPts val="0"/>
+              </a:spcAft>
+              <a:defRPr sz="3000" b="1" i="0">
                 <a:solidFill>
                   <a:srgbClr val="1E2761"/>
                 </a:solidFill>
-                <a:latin typeface="Georgia"/>
+                <a:latin typeface="Palatino"/>
               </a:defRPr>
             </a:pPr>
             <a:r>
@@ -4703,17 +4811,19 @@
       </p:sp>
       <p:sp>
         <p:nvSpPr>
-          <p:cNvPr id="3" name="Rectangle 2"/>
+          <p:cNvPr id="4" name="Rounded Rectangle 3"/>
           <p:cNvSpPr/>
           <p:nvPr/>
         </p:nvSpPr>
         <p:spPr>
           <a:xfrm>
-            <a:off x="731520" y="1143000"/>
-            <a:ext cx="1371600" cy="25400"/>
+            <a:off x="731520" y="1188720"/>
+            <a:ext cx="1828800" cy="50800"/>
           </a:xfrm>
-          <a:prstGeom prst="rect">
-            <a:avLst/>
+          <a:prstGeom prst="roundRect">
+            <a:avLst>
+              <a:gd name="adj" fmla="val 10000"/>
+            </a:avLst>
           </a:prstGeom>
           <a:solidFill>
             <a:srgbClr val="7B2D26"/>
@@ -4746,14 +4856,57 @@
       </p:sp>
       <p:sp>
         <p:nvSpPr>
-          <p:cNvPr id="4" name="TextBox 3"/>
+          <p:cNvPr id="5" name="Rectangle 4"/>
+          <p:cNvSpPr/>
+          <p:nvPr/>
+        </p:nvSpPr>
+        <p:spPr>
+          <a:xfrm>
+            <a:off x="4434840" y="1463040"/>
+            <a:ext cx="19050" cy="4754880"/>
+          </a:xfrm>
+          <a:prstGeom prst="rect">
+            <a:avLst/>
+          </a:prstGeom>
+          <a:solidFill>
+            <a:srgbClr val="D0D0D0"/>
+          </a:solidFill>
+          <a:ln>
+            <a:noFill/>
+          </a:ln>
+        </p:spPr>
+        <p:style>
+          <a:lnRef idx="1">
+            <a:schemeClr val="accent1"/>
+          </a:lnRef>
+          <a:fillRef idx="3">
+            <a:schemeClr val="accent1"/>
+          </a:fillRef>
+          <a:effectRef idx="2">
+            <a:schemeClr val="accent1"/>
+          </a:effectRef>
+          <a:fontRef idx="minor">
+            <a:schemeClr val="lt1"/>
+          </a:fontRef>
+        </p:style>
+        <p:txBody>
+          <a:bodyPr rtlCol="0" anchor="ctr"/>
+          <a:lstStyle/>
+          <a:p>
+            <a:pPr algn="ctr"/>
+          </a:p>
+        </p:txBody>
+      </p:sp>
+      <p:sp>
+        <p:nvSpPr>
+          <p:cNvPr id="6" name="TextBox 5"/>
           <p:cNvSpPr txBox="1"/>
           <p:nvPr/>
         </p:nvSpPr>
         <p:spPr>
           <a:xfrm>
-            <a:off x="731520" y="1463040"/>
-            <a:ext cx="3657600" cy="4572000"/>
+            <a:off x="731520" y="1508760"/>
+            <a:ext cx="3566160" cy="4846320"/>
           </a:xfrm>
           <a:prstGeom prst="rect">
             <a:avLst/>
@@ -4766,15 +4919,18 @@
           </a:bodyPr>
           <a:lstStyle/>
           <a:p>
-            <a:pPr>
-              <a:spcAft>
+            <a:pPr algn="l">
+              <a:spcBef>
                 <a:spcPts val="800"/>
-              </a:spcAft>
-              <a:defRPr sz="1600">
+              </a:spcBef>
+              <a:spcAft>
+                <a:spcPts val="400"/>
+              </a:spcAft>
+              <a:defRPr sz="1800" b="0" i="0">
                 <a:solidFill>
                   <a:srgbClr val="2C3E50"/>
                 </a:solidFill>
-                <a:latin typeface="Calibri"/>
+                <a:latin typeface="Avenir Next"/>
               </a:defRPr>
             </a:pPr>
             <a:r>
@@ -4782,15 +4938,18 @@
             </a:r>
           </a:p>
           <a:p>
-            <a:pPr>
-              <a:spcAft>
+            <a:pPr algn="l">
+              <a:spcBef>
                 <a:spcPts val="800"/>
-              </a:spcAft>
-              <a:defRPr sz="1600">
+              </a:spcBef>
+              <a:spcAft>
+                <a:spcPts val="400"/>
+              </a:spcAft>
+              <a:defRPr sz="1800" b="0" i="0">
                 <a:solidFill>
                   <a:srgbClr val="2C3E50"/>
                 </a:solidFill>
-                <a:latin typeface="Calibri"/>
+                <a:latin typeface="Avenir Next"/>
               </a:defRPr>
             </a:pPr>
             <a:r>
@@ -4798,15 +4957,18 @@
             </a:r>
           </a:p>
           <a:p>
-            <a:pPr>
-              <a:spcAft>
+            <a:pPr algn="l">
+              <a:spcBef>
                 <a:spcPts val="800"/>
-              </a:spcAft>
-              <a:defRPr sz="1600">
+              </a:spcBef>
+              <a:spcAft>
+                <a:spcPts val="400"/>
+              </a:spcAft>
+              <a:defRPr sz="1800" b="0" i="0">
                 <a:solidFill>
                   <a:srgbClr val="2C3E50"/>
                 </a:solidFill>
-                <a:latin typeface="Calibri"/>
+                <a:latin typeface="Avenir Next"/>
               </a:defRPr>
             </a:pPr>
             <a:r>
@@ -4814,15 +4976,18 @@
             </a:r>
           </a:p>
           <a:p>
-            <a:pPr>
-              <a:spcAft>
+            <a:pPr algn="l">
+              <a:spcBef>
                 <a:spcPts val="800"/>
-              </a:spcAft>
-              <a:defRPr sz="1600">
+              </a:spcBef>
+              <a:spcAft>
+                <a:spcPts val="400"/>
+              </a:spcAft>
+              <a:defRPr sz="1800" b="0" i="0">
                 <a:solidFill>
                   <a:srgbClr val="2C3E50"/>
                 </a:solidFill>
-                <a:latin typeface="Calibri"/>
+                <a:latin typeface="Avenir Next"/>
               </a:defRPr>
             </a:pPr>
             <a:r>
@@ -4830,15 +4995,18 @@
             </a:r>
           </a:p>
           <a:p>
-            <a:pPr>
-              <a:spcAft>
+            <a:pPr algn="l">
+              <a:spcBef>
                 <a:spcPts val="800"/>
-              </a:spcAft>
-              <a:defRPr sz="1600">
+              </a:spcBef>
+              <a:spcAft>
+                <a:spcPts val="400"/>
+              </a:spcAft>
+              <a:defRPr sz="1800" b="0" i="0">
                 <a:solidFill>
                   <a:srgbClr val="2C3E50"/>
                 </a:solidFill>
-                <a:latin typeface="Calibri"/>
+                <a:latin typeface="Avenir Next"/>
               </a:defRPr>
             </a:pPr>
             <a:r>
@@ -4846,15 +5014,18 @@
             </a:r>
           </a:p>
           <a:p>
-            <a:pPr>
-              <a:spcAft>
+            <a:pPr algn="l">
+              <a:spcBef>
                 <a:spcPts val="800"/>
-              </a:spcAft>
-              <a:defRPr sz="1600">
+              </a:spcBef>
+              <a:spcAft>
+                <a:spcPts val="400"/>
+              </a:spcAft>
+              <a:defRPr sz="1800" b="0" i="0">
                 <a:solidFill>
                   <a:srgbClr val="2C3E50"/>
                 </a:solidFill>
-                <a:latin typeface="Calibri"/>
+                <a:latin typeface="Avenir Next"/>
               </a:defRPr>
             </a:pPr>
             <a:r>
@@ -4865,14 +5036,14 @@
       </p:sp>
       <p:sp>
         <p:nvSpPr>
-          <p:cNvPr id="5" name="TextBox 4"/>
+          <p:cNvPr id="7" name="TextBox 6"/>
           <p:cNvSpPr txBox="1"/>
           <p:nvPr/>
         </p:nvSpPr>
         <p:spPr>
           <a:xfrm>
-            <a:off x="4754880" y="1463040"/>
-            <a:ext cx="3657600" cy="4572000"/>
+            <a:off x="4663440" y="1508760"/>
+            <a:ext cx="4114800" cy="4846320"/>
           </a:xfrm>
           <a:prstGeom prst="rect">
             <a:avLst/>
@@ -4885,15 +5056,18 @@
           </a:bodyPr>
           <a:lstStyle/>
           <a:p>
-            <a:pPr>
-              <a:spcAft>
+            <a:pPr algn="l">
+              <a:spcBef>
                 <a:spcPts val="800"/>
-              </a:spcAft>
-              <a:defRPr sz="1600">
+              </a:spcBef>
+              <a:spcAft>
+                <a:spcPts val="400"/>
+              </a:spcAft>
+              <a:defRPr sz="1800" b="0" i="0">
                 <a:solidFill>
                   <a:srgbClr val="2C3E50"/>
                 </a:solidFill>
-                <a:latin typeface="Calibri"/>
+                <a:latin typeface="Avenir Next"/>
               </a:defRPr>
             </a:pPr>
             <a:r>
@@ -4901,15 +5075,18 @@
             </a:r>
           </a:p>
           <a:p>
-            <a:pPr>
-              <a:spcAft>
+            <a:pPr algn="l">
+              <a:spcBef>
                 <a:spcPts val="800"/>
-              </a:spcAft>
-              <a:defRPr sz="1600">
+              </a:spcBef>
+              <a:spcAft>
+                <a:spcPts val="400"/>
+              </a:spcAft>
+              <a:defRPr sz="1800" b="0" i="0">
                 <a:solidFill>
                   <a:srgbClr val="2C3E50"/>
                 </a:solidFill>
-                <a:latin typeface="Calibri"/>
+                <a:latin typeface="Avenir Next"/>
               </a:defRPr>
             </a:pPr>
             <a:r>
@@ -4917,15 +5094,18 @@
             </a:r>
           </a:p>
           <a:p>
-            <a:pPr>
-              <a:spcAft>
+            <a:pPr algn="l">
+              <a:spcBef>
                 <a:spcPts val="800"/>
-              </a:spcAft>
-              <a:defRPr sz="1600">
+              </a:spcBef>
+              <a:spcAft>
+                <a:spcPts val="400"/>
+              </a:spcAft>
+              <a:defRPr sz="1800" b="0" i="0">
                 <a:solidFill>
                   <a:srgbClr val="2C3E50"/>
                 </a:solidFill>
-                <a:latin typeface="Calibri"/>
+                <a:latin typeface="Avenir Next"/>
               </a:defRPr>
             </a:pPr>
             <a:r>
@@ -4933,15 +5113,18 @@
             </a:r>
           </a:p>
           <a:p>
-            <a:pPr>
-              <a:spcAft>
+            <a:pPr algn="l">
+              <a:spcBef>
                 <a:spcPts val="800"/>
-              </a:spcAft>
-              <a:defRPr sz="1600">
+              </a:spcBef>
+              <a:spcAft>
+                <a:spcPts val="400"/>
+              </a:spcAft>
+              <a:defRPr sz="1800" b="0" i="0">
                 <a:solidFill>
                   <a:srgbClr val="2C3E50"/>
                 </a:solidFill>
-                <a:latin typeface="Calibri"/>
+                <a:latin typeface="Avenir Next"/>
               </a:defRPr>
             </a:pPr>
             <a:r>
@@ -4949,15 +5132,18 @@
             </a:r>
           </a:p>
           <a:p>
-            <a:pPr>
-              <a:spcAft>
+            <a:pPr algn="l">
+              <a:spcBef>
                 <a:spcPts val="800"/>
-              </a:spcAft>
-              <a:defRPr sz="1600">
+              </a:spcBef>
+              <a:spcAft>
+                <a:spcPts val="400"/>
+              </a:spcAft>
+              <a:defRPr sz="1800" b="0" i="0">
                 <a:solidFill>
                   <a:srgbClr val="2C3E50"/>
                 </a:solidFill>
-                <a:latin typeface="Calibri"/>
+                <a:latin typeface="Avenir Next"/>
               </a:defRPr>
             </a:pPr>
             <a:r>
@@ -4994,14 +5180,57 @@
       <p:grpSpPr/>
       <p:sp>
         <p:nvSpPr>
-          <p:cNvPr id="2" name="TextBox 1"/>
+          <p:cNvPr id="2" name="Rectangle 1"/>
+          <p:cNvSpPr/>
+          <p:nvPr/>
+        </p:nvSpPr>
+        <p:spPr>
+          <a:xfrm>
+            <a:off x="0" y="0"/>
+            <a:ext cx="320040" cy="6858000"/>
+          </a:xfrm>
+          <a:prstGeom prst="rect">
+            <a:avLst/>
+          </a:prstGeom>
+          <a:solidFill>
+            <a:srgbClr val="1E2761"/>
+          </a:solidFill>
+          <a:ln>
+            <a:noFill/>
+          </a:ln>
+        </p:spPr>
+        <p:style>
+          <a:lnRef idx="1">
+            <a:schemeClr val="accent1"/>
+          </a:lnRef>
+          <a:fillRef idx="3">
+            <a:schemeClr val="accent1"/>
+          </a:fillRef>
+          <a:effectRef idx="2">
+            <a:schemeClr val="accent1"/>
+          </a:effectRef>
+          <a:fontRef idx="minor">
+            <a:schemeClr val="lt1"/>
+          </a:fontRef>
+        </p:style>
+        <p:txBody>
+          <a:bodyPr rtlCol="0" anchor="ctr"/>
+          <a:lstStyle/>
+          <a:p>
+            <a:pPr algn="ctr"/>
+          </a:p>
+        </p:txBody>
+      </p:sp>
+      <p:sp>
+        <p:nvSpPr>
+          <p:cNvPr id="3" name="TextBox 2"/>
           <p:cNvSpPr txBox="1"/>
           <p:nvPr/>
         </p:nvSpPr>
         <p:spPr>
           <a:xfrm>
-            <a:off x="731520" y="457200"/>
-            <a:ext cx="7680960" cy="731520"/>
+            <a:off x="731520" y="320040"/>
+            <a:ext cx="8046720" cy="822960"/>
           </a:xfrm>
           <a:prstGeom prst="rect">
             <a:avLst/>
@@ -5015,11 +5244,17 @@
           <a:lstStyle/>
           <a:p>
             <a:pPr algn="l">
-              <a:defRPr sz="2800" b="1">
+              <a:spcBef>
+                <a:spcPts val="0"/>
+              </a:spcBef>
+              <a:spcAft>
+                <a:spcPts val="0"/>
+              </a:spcAft>
+              <a:defRPr sz="3000" b="1" i="0">
                 <a:solidFill>
                   <a:srgbClr val="1E2761"/>
                 </a:solidFill>
-                <a:latin typeface="Georgia"/>
+                <a:latin typeface="Palatino"/>
               </a:defRPr>
             </a:pPr>
             <a:r>
@@ -5030,17 +5265,19 @@
       </p:sp>
       <p:sp>
         <p:nvSpPr>
-          <p:cNvPr id="3" name="Rectangle 2"/>
+          <p:cNvPr id="4" name="Rounded Rectangle 3"/>
           <p:cNvSpPr/>
           <p:nvPr/>
         </p:nvSpPr>
         <p:spPr>
           <a:xfrm>
-            <a:off x="731520" y="1143000"/>
-            <a:ext cx="1371600" cy="25400"/>
+            <a:off x="731520" y="1188720"/>
+            <a:ext cx="1828800" cy="50800"/>
           </a:xfrm>
-          <a:prstGeom prst="rect">
-            <a:avLst/>
+          <a:prstGeom prst="roundRect">
+            <a:avLst>
+              <a:gd name="adj" fmla="val 10000"/>
+            </a:avLst>
           </a:prstGeom>
           <a:solidFill>
             <a:srgbClr val="7B2D26"/>
@@ -5073,14 +5310,57 @@
       </p:sp>
       <p:sp>
         <p:nvSpPr>
-          <p:cNvPr id="4" name="TextBox 3"/>
+          <p:cNvPr id="5" name="Rectangle 4"/>
+          <p:cNvSpPr/>
+          <p:nvPr/>
+        </p:nvSpPr>
+        <p:spPr>
+          <a:xfrm>
+            <a:off x="4434840" y="1463040"/>
+            <a:ext cx="19050" cy="4754880"/>
+          </a:xfrm>
+          <a:prstGeom prst="rect">
+            <a:avLst/>
+          </a:prstGeom>
+          <a:solidFill>
+            <a:srgbClr val="D0D0D0"/>
+          </a:solidFill>
+          <a:ln>
+            <a:noFill/>
+          </a:ln>
+        </p:spPr>
+        <p:style>
+          <a:lnRef idx="1">
+            <a:schemeClr val="accent1"/>
+          </a:lnRef>
+          <a:fillRef idx="3">
+            <a:schemeClr val="accent1"/>
+          </a:fillRef>
+          <a:effectRef idx="2">
+            <a:schemeClr val="accent1"/>
+          </a:effectRef>
+          <a:fontRef idx="minor">
+            <a:schemeClr val="lt1"/>
+          </a:fontRef>
+        </p:style>
+        <p:txBody>
+          <a:bodyPr rtlCol="0" anchor="ctr"/>
+          <a:lstStyle/>
+          <a:p>
+            <a:pPr algn="ctr"/>
+          </a:p>
+        </p:txBody>
+      </p:sp>
+      <p:sp>
+        <p:nvSpPr>
+          <p:cNvPr id="6" name="TextBox 5"/>
           <p:cNvSpPr txBox="1"/>
           <p:nvPr/>
         </p:nvSpPr>
         <p:spPr>
           <a:xfrm>
-            <a:off x="731520" y="1463040"/>
-            <a:ext cx="3657600" cy="4572000"/>
+            <a:off x="731520" y="1508760"/>
+            <a:ext cx="3566160" cy="4846320"/>
           </a:xfrm>
           <a:prstGeom prst="rect">
             <a:avLst/>
@@ -5093,15 +5373,18 @@
           </a:bodyPr>
           <a:lstStyle/>
           <a:p>
-            <a:pPr>
-              <a:spcAft>
+            <a:pPr algn="l">
+              <a:spcBef>
                 <a:spcPts val="800"/>
-              </a:spcAft>
-              <a:defRPr sz="1600">
+              </a:spcBef>
+              <a:spcAft>
+                <a:spcPts val="400"/>
+              </a:spcAft>
+              <a:defRPr sz="1800" b="0" i="0">
                 <a:solidFill>
                   <a:srgbClr val="2C3E50"/>
                 </a:solidFill>
-                <a:latin typeface="Calibri"/>
+                <a:latin typeface="Avenir Next"/>
               </a:defRPr>
             </a:pPr>
             <a:r>
@@ -5109,15 +5392,18 @@
             </a:r>
           </a:p>
           <a:p>
-            <a:pPr>
-              <a:spcAft>
+            <a:pPr algn="l">
+              <a:spcBef>
                 <a:spcPts val="800"/>
-              </a:spcAft>
-              <a:defRPr sz="1600">
+              </a:spcBef>
+              <a:spcAft>
+                <a:spcPts val="400"/>
+              </a:spcAft>
+              <a:defRPr sz="1800" b="0" i="0">
                 <a:solidFill>
                   <a:srgbClr val="2C3E50"/>
                 </a:solidFill>
-                <a:latin typeface="Calibri"/>
+                <a:latin typeface="Avenir Next"/>
               </a:defRPr>
             </a:pPr>
             <a:r>
@@ -5125,15 +5411,18 @@
             </a:r>
           </a:p>
           <a:p>
-            <a:pPr>
-              <a:spcAft>
+            <a:pPr algn="l">
+              <a:spcBef>
                 <a:spcPts val="800"/>
-              </a:spcAft>
-              <a:defRPr sz="1600">
+              </a:spcBef>
+              <a:spcAft>
+                <a:spcPts val="400"/>
+              </a:spcAft>
+              <a:defRPr sz="1800" b="0" i="0">
                 <a:solidFill>
                   <a:srgbClr val="2C3E50"/>
                 </a:solidFill>
-                <a:latin typeface="Calibri"/>
+                <a:latin typeface="Avenir Next"/>
               </a:defRPr>
             </a:pPr>
             <a:r>
@@ -5141,15 +5430,18 @@
             </a:r>
           </a:p>
           <a:p>
-            <a:pPr>
-              <a:spcAft>
+            <a:pPr algn="l">
+              <a:spcBef>
                 <a:spcPts val="800"/>
-              </a:spcAft>
-              <a:defRPr sz="1600">
+              </a:spcBef>
+              <a:spcAft>
+                <a:spcPts val="400"/>
+              </a:spcAft>
+              <a:defRPr sz="1800" b="0" i="0">
                 <a:solidFill>
                   <a:srgbClr val="2C3E50"/>
                 </a:solidFill>
-                <a:latin typeface="Calibri"/>
+                <a:latin typeface="Avenir Next"/>
               </a:defRPr>
             </a:pPr>
             <a:r>
@@ -5157,15 +5449,18 @@
             </a:r>
           </a:p>
           <a:p>
-            <a:pPr>
-              <a:spcAft>
+            <a:pPr algn="l">
+              <a:spcBef>
                 <a:spcPts val="800"/>
-              </a:spcAft>
-              <a:defRPr sz="1600">
+              </a:spcBef>
+              <a:spcAft>
+                <a:spcPts val="400"/>
+              </a:spcAft>
+              <a:defRPr sz="1800" b="0" i="0">
                 <a:solidFill>
                   <a:srgbClr val="2C3E50"/>
                 </a:solidFill>
-                <a:latin typeface="Calibri"/>
+                <a:latin typeface="Avenir Next"/>
               </a:defRPr>
             </a:pPr>
             <a:r>
@@ -5176,14 +5471,14 @@
       </p:sp>
       <p:sp>
         <p:nvSpPr>
-          <p:cNvPr id="5" name="TextBox 4"/>
+          <p:cNvPr id="7" name="TextBox 6"/>
           <p:cNvSpPr txBox="1"/>
           <p:nvPr/>
         </p:nvSpPr>
         <p:spPr>
           <a:xfrm>
-            <a:off x="4754880" y="1463040"/>
-            <a:ext cx="3657600" cy="4572000"/>
+            <a:off x="4663440" y="1508760"/>
+            <a:ext cx="4114800" cy="4846320"/>
           </a:xfrm>
           <a:prstGeom prst="rect">
             <a:avLst/>
@@ -5196,15 +5491,18 @@
           </a:bodyPr>
           <a:lstStyle/>
           <a:p>
-            <a:pPr>
-              <a:spcAft>
+            <a:pPr algn="l">
+              <a:spcBef>
                 <a:spcPts val="800"/>
-              </a:spcAft>
-              <a:defRPr sz="1600">
+              </a:spcBef>
+              <a:spcAft>
+                <a:spcPts val="400"/>
+              </a:spcAft>
+              <a:defRPr sz="1800" b="0" i="0">
                 <a:solidFill>
                   <a:srgbClr val="2C3E50"/>
                 </a:solidFill>
-                <a:latin typeface="Calibri"/>
+                <a:latin typeface="Avenir Next"/>
               </a:defRPr>
             </a:pPr>
             <a:r>
@@ -5212,15 +5510,18 @@
             </a:r>
           </a:p>
           <a:p>
-            <a:pPr>
-              <a:spcAft>
+            <a:pPr algn="l">
+              <a:spcBef>
                 <a:spcPts val="800"/>
-              </a:spcAft>
-              <a:defRPr sz="1600">
+              </a:spcBef>
+              <a:spcAft>
+                <a:spcPts val="400"/>
+              </a:spcAft>
+              <a:defRPr sz="1800" b="0" i="0">
                 <a:solidFill>
                   <a:srgbClr val="2C3E50"/>
                 </a:solidFill>
-                <a:latin typeface="Calibri"/>
+                <a:latin typeface="Avenir Next"/>
               </a:defRPr>
             </a:pPr>
             <a:r>
@@ -5228,15 +5529,18 @@
             </a:r>
           </a:p>
           <a:p>
-            <a:pPr>
-              <a:spcAft>
+            <a:pPr algn="l">
+              <a:spcBef>
                 <a:spcPts val="800"/>
-              </a:spcAft>
-              <a:defRPr sz="1600">
+              </a:spcBef>
+              <a:spcAft>
+                <a:spcPts val="400"/>
+              </a:spcAft>
+              <a:defRPr sz="1800" b="0" i="0">
                 <a:solidFill>
                   <a:srgbClr val="2C3E50"/>
                 </a:solidFill>
-                <a:latin typeface="Calibri"/>
+                <a:latin typeface="Avenir Next"/>
               </a:defRPr>
             </a:pPr>
             <a:r>
@@ -5244,15 +5548,18 @@
             </a:r>
           </a:p>
           <a:p>
-            <a:pPr>
-              <a:spcAft>
+            <a:pPr algn="l">
+              <a:spcBef>
                 <a:spcPts val="800"/>
-              </a:spcAft>
-              <a:defRPr sz="1600">
+              </a:spcBef>
+              <a:spcAft>
+                <a:spcPts val="400"/>
+              </a:spcAft>
+              <a:defRPr sz="1800" b="0" i="0">
                 <a:solidFill>
                   <a:srgbClr val="2C3E50"/>
                 </a:solidFill>
-                <a:latin typeface="Calibri"/>
+                <a:latin typeface="Avenir Next"/>
               </a:defRPr>
             </a:pPr>
             <a:r>
@@ -5260,15 +5567,18 @@
             </a:r>
           </a:p>
           <a:p>
-            <a:pPr>
-              <a:spcAft>
+            <a:pPr algn="l">
+              <a:spcBef>
                 <a:spcPts val="800"/>
-              </a:spcAft>
-              <a:defRPr sz="1600">
+              </a:spcBef>
+              <a:spcAft>
+                <a:spcPts val="400"/>
+              </a:spcAft>
+              <a:defRPr sz="1800" b="0" i="0">
                 <a:solidFill>
                   <a:srgbClr val="2C3E50"/>
                 </a:solidFill>
-                <a:latin typeface="Calibri"/>
+                <a:latin typeface="Avenir Next"/>
               </a:defRPr>
             </a:pPr>
             <a:r>
@@ -5305,14 +5615,57 @@
       <p:grpSpPr/>
       <p:sp>
         <p:nvSpPr>
-          <p:cNvPr id="2" name="TextBox 1"/>
+          <p:cNvPr id="2" name="Rectangle 1"/>
+          <p:cNvSpPr/>
+          <p:nvPr/>
+        </p:nvSpPr>
+        <p:spPr>
+          <a:xfrm>
+            <a:off x="0" y="0"/>
+            <a:ext cx="320040" cy="6858000"/>
+          </a:xfrm>
+          <a:prstGeom prst="rect">
+            <a:avLst/>
+          </a:prstGeom>
+          <a:solidFill>
+            <a:srgbClr val="1E2761"/>
+          </a:solidFill>
+          <a:ln>
+            <a:noFill/>
+          </a:ln>
+        </p:spPr>
+        <p:style>
+          <a:lnRef idx="1">
+            <a:schemeClr val="accent1"/>
+          </a:lnRef>
+          <a:fillRef idx="3">
+            <a:schemeClr val="accent1"/>
+          </a:fillRef>
+          <a:effectRef idx="2">
+            <a:schemeClr val="accent1"/>
+          </a:effectRef>
+          <a:fontRef idx="minor">
+            <a:schemeClr val="lt1"/>
+          </a:fontRef>
+        </p:style>
+        <p:txBody>
+          <a:bodyPr rtlCol="0" anchor="ctr"/>
+          <a:lstStyle/>
+          <a:p>
+            <a:pPr algn="ctr"/>
+          </a:p>
+        </p:txBody>
+      </p:sp>
+      <p:sp>
+        <p:nvSpPr>
+          <p:cNvPr id="3" name="TextBox 2"/>
           <p:cNvSpPr txBox="1"/>
           <p:nvPr/>
         </p:nvSpPr>
         <p:spPr>
           <a:xfrm>
-            <a:off x="731520" y="457200"/>
-            <a:ext cx="7680960" cy="731520"/>
+            <a:off x="731520" y="320040"/>
+            <a:ext cx="8046720" cy="822960"/>
           </a:xfrm>
           <a:prstGeom prst="rect">
             <a:avLst/>
@@ -5326,11 +5679,17 @@
           <a:lstStyle/>
           <a:p>
             <a:pPr algn="l">
-              <a:defRPr sz="2800" b="1">
+              <a:spcBef>
+                <a:spcPts val="0"/>
+              </a:spcBef>
+              <a:spcAft>
+                <a:spcPts val="0"/>
+              </a:spcAft>
+              <a:defRPr sz="3000" b="1" i="0">
                 <a:solidFill>
                   <a:srgbClr val="1E2761"/>
                 </a:solidFill>
-                <a:latin typeface="Georgia"/>
+                <a:latin typeface="Palatino"/>
               </a:defRPr>
             </a:pPr>
             <a:r>
@@ -5341,17 +5700,19 @@
       </p:sp>
       <p:sp>
         <p:nvSpPr>
-          <p:cNvPr id="3" name="Rectangle 2"/>
+          <p:cNvPr id="4" name="Rounded Rectangle 3"/>
           <p:cNvSpPr/>
           <p:nvPr/>
         </p:nvSpPr>
         <p:spPr>
           <a:xfrm>
-            <a:off x="731520" y="1143000"/>
-            <a:ext cx="1371600" cy="25400"/>
+            <a:off x="731520" y="1188720"/>
+            <a:ext cx="1828800" cy="50800"/>
           </a:xfrm>
-          <a:prstGeom prst="rect">
-            <a:avLst/>
+          <a:prstGeom prst="roundRect">
+            <a:avLst>
+              <a:gd name="adj" fmla="val 10000"/>
+            </a:avLst>
           </a:prstGeom>
           <a:solidFill>
             <a:srgbClr val="7B2D26"/>
@@ -5384,14 +5745,57 @@
       </p:sp>
       <p:sp>
         <p:nvSpPr>
-          <p:cNvPr id="4" name="TextBox 3"/>
+          <p:cNvPr id="5" name="Rectangle 4"/>
+          <p:cNvSpPr/>
+          <p:nvPr/>
+        </p:nvSpPr>
+        <p:spPr>
+          <a:xfrm>
+            <a:off x="4434840" y="1463040"/>
+            <a:ext cx="19050" cy="4754880"/>
+          </a:xfrm>
+          <a:prstGeom prst="rect">
+            <a:avLst/>
+          </a:prstGeom>
+          <a:solidFill>
+            <a:srgbClr val="D0D0D0"/>
+          </a:solidFill>
+          <a:ln>
+            <a:noFill/>
+          </a:ln>
+        </p:spPr>
+        <p:style>
+          <a:lnRef idx="1">
+            <a:schemeClr val="accent1"/>
+          </a:lnRef>
+          <a:fillRef idx="3">
+            <a:schemeClr val="accent1"/>
+          </a:fillRef>
+          <a:effectRef idx="2">
+            <a:schemeClr val="accent1"/>
+          </a:effectRef>
+          <a:fontRef idx="minor">
+            <a:schemeClr val="lt1"/>
+          </a:fontRef>
+        </p:style>
+        <p:txBody>
+          <a:bodyPr rtlCol="0" anchor="ctr"/>
+          <a:lstStyle/>
+          <a:p>
+            <a:pPr algn="ctr"/>
+          </a:p>
+        </p:txBody>
+      </p:sp>
+      <p:sp>
+        <p:nvSpPr>
+          <p:cNvPr id="6" name="TextBox 5"/>
           <p:cNvSpPr txBox="1"/>
           <p:nvPr/>
         </p:nvSpPr>
         <p:spPr>
           <a:xfrm>
-            <a:off x="731520" y="1463040"/>
-            <a:ext cx="3657600" cy="4572000"/>
+            <a:off x="731520" y="1508760"/>
+            <a:ext cx="3566160" cy="4846320"/>
           </a:xfrm>
           <a:prstGeom prst="rect">
             <a:avLst/>
@@ -5404,15 +5808,18 @@
           </a:bodyPr>
           <a:lstStyle/>
           <a:p>
-            <a:pPr>
-              <a:spcAft>
+            <a:pPr algn="l">
+              <a:spcBef>
                 <a:spcPts val="800"/>
-              </a:spcAft>
-              <a:defRPr sz="1600">
+              </a:spcBef>
+              <a:spcAft>
+                <a:spcPts val="400"/>
+              </a:spcAft>
+              <a:defRPr sz="1800" b="0" i="0">
                 <a:solidFill>
                   <a:srgbClr val="2C3E50"/>
                 </a:solidFill>
-                <a:latin typeface="Calibri"/>
+                <a:latin typeface="Avenir Next"/>
               </a:defRPr>
             </a:pPr>
             <a:r>
@@ -5420,15 +5827,18 @@
             </a:r>
           </a:p>
           <a:p>
-            <a:pPr>
-              <a:spcAft>
+            <a:pPr algn="l">
+              <a:spcBef>
                 <a:spcPts val="800"/>
-              </a:spcAft>
-              <a:defRPr sz="1600">
+              </a:spcBef>
+              <a:spcAft>
+                <a:spcPts val="400"/>
+              </a:spcAft>
+              <a:defRPr sz="1800" b="0" i="0">
                 <a:solidFill>
                   <a:srgbClr val="2C3E50"/>
                 </a:solidFill>
-                <a:latin typeface="Calibri"/>
+                <a:latin typeface="Avenir Next"/>
               </a:defRPr>
             </a:pPr>
             <a:r>
@@ -5436,15 +5846,18 @@
             </a:r>
           </a:p>
           <a:p>
-            <a:pPr>
-              <a:spcAft>
+            <a:pPr algn="l">
+              <a:spcBef>
                 <a:spcPts val="800"/>
-              </a:spcAft>
-              <a:defRPr sz="1600">
+              </a:spcBef>
+              <a:spcAft>
+                <a:spcPts val="400"/>
+              </a:spcAft>
+              <a:defRPr sz="1800" b="0" i="0">
                 <a:solidFill>
                   <a:srgbClr val="2C3E50"/>
                 </a:solidFill>
-                <a:latin typeface="Calibri"/>
+                <a:latin typeface="Avenir Next"/>
               </a:defRPr>
             </a:pPr>
             <a:r>
@@ -5452,15 +5865,18 @@
             </a:r>
           </a:p>
           <a:p>
-            <a:pPr>
-              <a:spcAft>
+            <a:pPr algn="l">
+              <a:spcBef>
                 <a:spcPts val="800"/>
-              </a:spcAft>
-              <a:defRPr sz="1600">
+              </a:spcBef>
+              <a:spcAft>
+                <a:spcPts val="400"/>
+              </a:spcAft>
+              <a:defRPr sz="1800" b="0" i="0">
                 <a:solidFill>
                   <a:srgbClr val="2C3E50"/>
                 </a:solidFill>
-                <a:latin typeface="Calibri"/>
+                <a:latin typeface="Avenir Next"/>
               </a:defRPr>
             </a:pPr>
             <a:r>
@@ -5471,14 +5887,14 @@
       </p:sp>
       <p:sp>
         <p:nvSpPr>
-          <p:cNvPr id="5" name="TextBox 4"/>
+          <p:cNvPr id="7" name="TextBox 6"/>
           <p:cNvSpPr txBox="1"/>
           <p:nvPr/>
         </p:nvSpPr>
         <p:spPr>
           <a:xfrm>
-            <a:off x="4754880" y="1463040"/>
-            <a:ext cx="3657600" cy="4572000"/>
+            <a:off x="4663440" y="1508760"/>
+            <a:ext cx="4114800" cy="4846320"/>
           </a:xfrm>
           <a:prstGeom prst="rect">
             <a:avLst/>
@@ -5491,15 +5907,18 @@
           </a:bodyPr>
           <a:lstStyle/>
           <a:p>
-            <a:pPr>
-              <a:spcAft>
+            <a:pPr algn="l">
+              <a:spcBef>
                 <a:spcPts val="800"/>
-              </a:spcAft>
-              <a:defRPr sz="1600">
+              </a:spcBef>
+              <a:spcAft>
+                <a:spcPts val="400"/>
+              </a:spcAft>
+              <a:defRPr sz="1800" b="0" i="0">
                 <a:solidFill>
                   <a:srgbClr val="2C3E50"/>
                 </a:solidFill>
-                <a:latin typeface="Calibri"/>
+                <a:latin typeface="Avenir Next"/>
               </a:defRPr>
             </a:pPr>
             <a:r>
@@ -5507,15 +5926,18 @@
             </a:r>
           </a:p>
           <a:p>
-            <a:pPr>
-              <a:spcAft>
+            <a:pPr algn="l">
+              <a:spcBef>
                 <a:spcPts val="800"/>
-              </a:spcAft>
-              <a:defRPr sz="1600">
+              </a:spcBef>
+              <a:spcAft>
+                <a:spcPts val="400"/>
+              </a:spcAft>
+              <a:defRPr sz="1800" b="0" i="0">
                 <a:solidFill>
                   <a:srgbClr val="2C3E50"/>
                 </a:solidFill>
-                <a:latin typeface="Calibri"/>
+                <a:latin typeface="Avenir Next"/>
               </a:defRPr>
             </a:pPr>
             <a:r>
@@ -5523,15 +5945,18 @@
             </a:r>
           </a:p>
           <a:p>
-            <a:pPr>
-              <a:spcAft>
+            <a:pPr algn="l">
+              <a:spcBef>
                 <a:spcPts val="800"/>
-              </a:spcAft>
-              <a:defRPr sz="1600">
+              </a:spcBef>
+              <a:spcAft>
+                <a:spcPts val="400"/>
+              </a:spcAft>
+              <a:defRPr sz="1800" b="0" i="0">
                 <a:solidFill>
                   <a:srgbClr val="2C3E50"/>
                 </a:solidFill>
-                <a:latin typeface="Calibri"/>
+                <a:latin typeface="Avenir Next"/>
               </a:defRPr>
             </a:pPr>
             <a:r>
@@ -5539,15 +5964,18 @@
             </a:r>
           </a:p>
           <a:p>
-            <a:pPr>
-              <a:spcAft>
+            <a:pPr algn="l">
+              <a:spcBef>
                 <a:spcPts val="800"/>
-              </a:spcAft>
-              <a:defRPr sz="1600">
+              </a:spcBef>
+              <a:spcAft>
+                <a:spcPts val="400"/>
+              </a:spcAft>
+              <a:defRPr sz="1800" b="0" i="0">
                 <a:solidFill>
                   <a:srgbClr val="2C3E50"/>
                 </a:solidFill>
-                <a:latin typeface="Calibri"/>
+                <a:latin typeface="Avenir Next"/>
               </a:defRPr>
             </a:pPr>
             <a:r>
@@ -5584,14 +6012,57 @@
       <p:grpSpPr/>
       <p:sp>
         <p:nvSpPr>
-          <p:cNvPr id="2" name="TextBox 1"/>
+          <p:cNvPr id="2" name="Rectangle 1"/>
+          <p:cNvSpPr/>
+          <p:nvPr/>
+        </p:nvSpPr>
+        <p:spPr>
+          <a:xfrm>
+            <a:off x="0" y="0"/>
+            <a:ext cx="320040" cy="6858000"/>
+          </a:xfrm>
+          <a:prstGeom prst="rect">
+            <a:avLst/>
+          </a:prstGeom>
+          <a:solidFill>
+            <a:srgbClr val="1E2761"/>
+          </a:solidFill>
+          <a:ln>
+            <a:noFill/>
+          </a:ln>
+        </p:spPr>
+        <p:style>
+          <a:lnRef idx="1">
+            <a:schemeClr val="accent1"/>
+          </a:lnRef>
+          <a:fillRef idx="3">
+            <a:schemeClr val="accent1"/>
+          </a:fillRef>
+          <a:effectRef idx="2">
+            <a:schemeClr val="accent1"/>
+          </a:effectRef>
+          <a:fontRef idx="minor">
+            <a:schemeClr val="lt1"/>
+          </a:fontRef>
+        </p:style>
+        <p:txBody>
+          <a:bodyPr rtlCol="0" anchor="ctr"/>
+          <a:lstStyle/>
+          <a:p>
+            <a:pPr algn="ctr"/>
+          </a:p>
+        </p:txBody>
+      </p:sp>
+      <p:sp>
+        <p:nvSpPr>
+          <p:cNvPr id="3" name="TextBox 2"/>
           <p:cNvSpPr txBox="1"/>
           <p:nvPr/>
         </p:nvSpPr>
         <p:spPr>
           <a:xfrm>
-            <a:off x="731520" y="457200"/>
-            <a:ext cx="7680960" cy="731520"/>
+            <a:off x="731520" y="320040"/>
+            <a:ext cx="8046720" cy="822960"/>
           </a:xfrm>
           <a:prstGeom prst="rect">
             <a:avLst/>
@@ -5605,11 +6076,17 @@
           <a:lstStyle/>
           <a:p>
             <a:pPr algn="l">
-              <a:defRPr sz="2800" b="1">
+              <a:spcBef>
+                <a:spcPts val="0"/>
+              </a:spcBef>
+              <a:spcAft>
+                <a:spcPts val="0"/>
+              </a:spcAft>
+              <a:defRPr sz="3200" b="1" i="0">
                 <a:solidFill>
                   <a:srgbClr val="1E2761"/>
                 </a:solidFill>
-                <a:latin typeface="Georgia"/>
+                <a:latin typeface="Palatino"/>
               </a:defRPr>
             </a:pPr>
             <a:r>
@@ -5620,17 +6097,19 @@
       </p:sp>
       <p:sp>
         <p:nvSpPr>
-          <p:cNvPr id="3" name="Rectangle 2"/>
+          <p:cNvPr id="4" name="Rounded Rectangle 3"/>
           <p:cNvSpPr/>
           <p:nvPr/>
         </p:nvSpPr>
         <p:spPr>
           <a:xfrm>
-            <a:off x="731520" y="1143000"/>
-            <a:ext cx="1371600" cy="25400"/>
+            <a:off x="731520" y="1188720"/>
+            <a:ext cx="1828800" cy="50800"/>
           </a:xfrm>
-          <a:prstGeom prst="rect">
-            <a:avLst/>
+          <a:prstGeom prst="roundRect">
+            <a:avLst>
+              <a:gd name="adj" fmla="val 10000"/>
+            </a:avLst>
           </a:prstGeom>
           <a:solidFill>
             <a:srgbClr val="7B2D26"/>
@@ -5663,14 +6142,14 @@
       </p:sp>
       <p:sp>
         <p:nvSpPr>
-          <p:cNvPr id="4" name="TextBox 3"/>
+          <p:cNvPr id="5" name="TextBox 4"/>
           <p:cNvSpPr txBox="1"/>
           <p:nvPr/>
         </p:nvSpPr>
         <p:spPr>
           <a:xfrm>
-            <a:off x="731520" y="1463040"/>
-            <a:ext cx="7680960" cy="4572000"/>
+            <a:off x="731520" y="1554480"/>
+            <a:ext cx="7863840" cy="4754880"/>
           </a:xfrm>
           <a:prstGeom prst="rect">
             <a:avLst/>
@@ -5683,15 +6162,18 @@
           </a:bodyPr>
           <a:lstStyle/>
           <a:p>
-            <a:pPr>
-              <a:spcAft>
-                <a:spcPts val="800"/>
-              </a:spcAft>
-              <a:defRPr sz="1800">
+            <a:pPr algn="l">
+              <a:spcBef>
+                <a:spcPts val="1600"/>
+              </a:spcBef>
+              <a:spcAft>
+                <a:spcPts val="400"/>
+              </a:spcAft>
+              <a:defRPr sz="2000" b="1" i="0">
                 <a:solidFill>
                   <a:srgbClr val="2C3E50"/>
                 </a:solidFill>
-                <a:latin typeface="Calibri"/>
+                <a:latin typeface="Avenir Next"/>
               </a:defRPr>
             </a:pPr>
             <a:r>
@@ -5699,31 +6181,37 @@
             </a:r>
           </a:p>
           <a:p>
-            <a:pPr>
-              <a:spcAft>
-                <a:spcPts val="800"/>
-              </a:spcAft>
-              <a:defRPr sz="1800">
+            <a:pPr algn="l">
+              <a:spcBef>
+                <a:spcPts val="200"/>
+              </a:spcBef>
+              <a:spcAft>
+                <a:spcPts val="600"/>
+              </a:spcAft>
+              <a:defRPr sz="1800" b="0" i="1">
                 <a:solidFill>
                   <a:srgbClr val="2C3E50"/>
                 </a:solidFill>
-                <a:latin typeface="Calibri"/>
-              </a:defRPr>
-            </a:pPr>
-            <a:r>
-              <a:t>Roots and prefixes compress arguments about what concepts mean</a:t>
-            </a:r>
-          </a:p>
-          <a:p>
-            <a:pPr>
-              <a:spcAft>
-                <a:spcPts val="800"/>
-              </a:spcAft>
-              <a:defRPr sz="1800">
+                <a:latin typeface="Avenir Next"/>
+              </a:defRPr>
+            </a:pPr>
+            <a:r>
+              <a:t>     Roots and prefixes compress arguments about what concepts mean</a:t>
+            </a:r>
+          </a:p>
+          <a:p>
+            <a:pPr algn="l">
+              <a:spcBef>
+                <a:spcPts val="1600"/>
+              </a:spcBef>
+              <a:spcAft>
+                <a:spcPts val="400"/>
+              </a:spcAft>
+              <a:defRPr sz="2000" b="1" i="0">
                 <a:solidFill>
                   <a:srgbClr val="2C3E50"/>
                 </a:solidFill>
-                <a:latin typeface="Calibri"/>
+                <a:latin typeface="Avenir Next"/>
               </a:defRPr>
             </a:pPr>
             <a:r>
@@ -5731,31 +6219,37 @@
             </a:r>
           </a:p>
           <a:p>
-            <a:pPr>
-              <a:spcAft>
-                <a:spcPts val="800"/>
-              </a:spcAft>
-              <a:defRPr sz="1800">
+            <a:pPr algn="l">
+              <a:spcBef>
+                <a:spcPts val="200"/>
+              </a:spcBef>
+              <a:spcAft>
+                <a:spcPts val="600"/>
+              </a:spcAft>
+              <a:defRPr sz="1800" b="0" i="1">
                 <a:solidFill>
                   <a:srgbClr val="2C3E50"/>
                 </a:solidFill>
-                <a:latin typeface="Calibri"/>
-              </a:defRPr>
-            </a:pPr>
-            <a:r>
-              <a:t>Sound vs. meaning, darkness vs. ignorance, extinction vs. restraint</a:t>
-            </a:r>
-          </a:p>
-          <a:p>
-            <a:pPr>
-              <a:spcAft>
-                <a:spcPts val="800"/>
-              </a:spcAft>
-              <a:defRPr sz="1800">
+                <a:latin typeface="Avenir Next"/>
+              </a:defRPr>
+            </a:pPr>
+            <a:r>
+              <a:t>     Sound vs. meaning, darkness vs. ignorance, extinction vs. restraint</a:t>
+            </a:r>
+          </a:p>
+          <a:p>
+            <a:pPr algn="l">
+              <a:spcBef>
+                <a:spcPts val="1600"/>
+              </a:spcBef>
+              <a:spcAft>
+                <a:spcPts val="400"/>
+              </a:spcAft>
+              <a:defRPr sz="2000" b="1" i="0">
                 <a:solidFill>
                   <a:srgbClr val="2C3E50"/>
                 </a:solidFill>
-                <a:latin typeface="Calibri"/>
+                <a:latin typeface="Avenir Next"/>
               </a:defRPr>
             </a:pPr>
             <a:r>
@@ -5763,31 +6257,37 @@
             </a:r>
           </a:p>
           <a:p>
-            <a:pPr>
-              <a:spcAft>
-                <a:spcPts val="800"/>
-              </a:spcAft>
-              <a:defRPr sz="1800">
+            <a:pPr algn="l">
+              <a:spcBef>
+                <a:spcPts val="200"/>
+              </a:spcBef>
+              <a:spcAft>
+                <a:spcPts val="600"/>
+              </a:spcAft>
+              <a:defRPr sz="1800" b="0" i="1">
                 <a:solidFill>
                   <a:srgbClr val="2C3E50"/>
                 </a:solidFill>
-                <a:latin typeface="Calibri"/>
-              </a:defRPr>
-            </a:pPr>
-            <a:r>
-              <a:t>dhyana to zen is rock-solid; the Yoga Sutras' vocabulary has no Chinese equivalent</a:t>
-            </a:r>
-          </a:p>
-          <a:p>
-            <a:pPr>
-              <a:spcAft>
-                <a:spcPts val="800"/>
-              </a:spcAft>
-              <a:defRPr sz="1800">
+                <a:latin typeface="Avenir Next"/>
+              </a:defRPr>
+            </a:pPr>
+            <a:r>
+              <a:t>     dhyāna → zen is rock-solid; the Yoga Sutras' vocabulary has no Chinese equivalent</a:t>
+            </a:r>
+          </a:p>
+          <a:p>
+            <a:pPr algn="l">
+              <a:spcBef>
+                <a:spcPts val="1600"/>
+              </a:spcBef>
+              <a:spcAft>
+                <a:spcPts val="400"/>
+              </a:spcAft>
+              <a:defRPr sz="2000" b="1" i="0">
                 <a:solidFill>
                   <a:srgbClr val="2C3E50"/>
                 </a:solidFill>
-                <a:latin typeface="Calibri"/>
+                <a:latin typeface="Avenir Next"/>
               </a:defRPr>
             </a:pPr>
             <a:r>
@@ -5824,14 +6324,57 @@
       <p:grpSpPr/>
       <p:sp>
         <p:nvSpPr>
-          <p:cNvPr id="2" name="TextBox 1"/>
+          <p:cNvPr id="2" name="Rectangle 1"/>
+          <p:cNvSpPr/>
+          <p:nvPr/>
+        </p:nvSpPr>
+        <p:spPr>
+          <a:xfrm>
+            <a:off x="0" y="0"/>
+            <a:ext cx="320040" cy="6858000"/>
+          </a:xfrm>
+          <a:prstGeom prst="rect">
+            <a:avLst/>
+          </a:prstGeom>
+          <a:solidFill>
+            <a:srgbClr val="1E2761"/>
+          </a:solidFill>
+          <a:ln>
+            <a:noFill/>
+          </a:ln>
+        </p:spPr>
+        <p:style>
+          <a:lnRef idx="1">
+            <a:schemeClr val="accent1"/>
+          </a:lnRef>
+          <a:fillRef idx="3">
+            <a:schemeClr val="accent1"/>
+          </a:fillRef>
+          <a:effectRef idx="2">
+            <a:schemeClr val="accent1"/>
+          </a:effectRef>
+          <a:fontRef idx="minor">
+            <a:schemeClr val="lt1"/>
+          </a:fontRef>
+        </p:style>
+        <p:txBody>
+          <a:bodyPr rtlCol="0" anchor="ctr"/>
+          <a:lstStyle/>
+          <a:p>
+            <a:pPr algn="ctr"/>
+          </a:p>
+        </p:txBody>
+      </p:sp>
+      <p:sp>
+        <p:nvSpPr>
+          <p:cNvPr id="3" name="TextBox 2"/>
           <p:cNvSpPr txBox="1"/>
           <p:nvPr/>
         </p:nvSpPr>
         <p:spPr>
           <a:xfrm>
-            <a:off x="731520" y="457200"/>
-            <a:ext cx="7680960" cy="731520"/>
+            <a:off x="731520" y="320040"/>
+            <a:ext cx="8046720" cy="822960"/>
           </a:xfrm>
           <a:prstGeom prst="rect">
             <a:avLst/>
@@ -5845,11 +6388,17 @@
           <a:lstStyle/>
           <a:p>
             <a:pPr algn="l">
-              <a:defRPr sz="2800" b="1">
+              <a:spcBef>
+                <a:spcPts val="0"/>
+              </a:spcBef>
+              <a:spcAft>
+                <a:spcPts val="0"/>
+              </a:spcAft>
+              <a:defRPr sz="3200" b="1" i="0">
                 <a:solidFill>
                   <a:srgbClr val="1E2761"/>
                 </a:solidFill>
-                <a:latin typeface="Georgia"/>
+                <a:latin typeface="Palatino"/>
               </a:defRPr>
             </a:pPr>
             <a:r>
@@ -5860,17 +6409,19 @@
       </p:sp>
       <p:sp>
         <p:nvSpPr>
-          <p:cNvPr id="3" name="Rectangle 2"/>
+          <p:cNvPr id="4" name="Rounded Rectangle 3"/>
           <p:cNvSpPr/>
           <p:nvPr/>
         </p:nvSpPr>
         <p:spPr>
           <a:xfrm>
-            <a:off x="731520" y="1143000"/>
-            <a:ext cx="1371600" cy="25400"/>
+            <a:off x="731520" y="1188720"/>
+            <a:ext cx="1828800" cy="50800"/>
           </a:xfrm>
-          <a:prstGeom prst="rect">
-            <a:avLst/>
+          <a:prstGeom prst="roundRect">
+            <a:avLst>
+              <a:gd name="adj" fmla="val 10000"/>
+            </a:avLst>
           </a:prstGeom>
           <a:solidFill>
             <a:srgbClr val="7B2D26"/>
@@ -5903,14 +6454,14 @@
       </p:sp>
       <p:sp>
         <p:nvSpPr>
-          <p:cNvPr id="4" name="TextBox 3"/>
+          <p:cNvPr id="5" name="TextBox 4"/>
           <p:cNvSpPr txBox="1"/>
           <p:nvPr/>
         </p:nvSpPr>
         <p:spPr>
           <a:xfrm>
-            <a:off x="731520" y="1463040"/>
-            <a:ext cx="7680960" cy="4572000"/>
+            <a:off x="731520" y="1554480"/>
+            <a:ext cx="7863840" cy="4754880"/>
           </a:xfrm>
           <a:prstGeom prst="rect">
             <a:avLst/>
@@ -5923,15 +6474,18 @@
           </a:bodyPr>
           <a:lstStyle/>
           <a:p>
-            <a:pPr>
-              <a:spcAft>
+            <a:pPr algn="l">
+              <a:spcBef>
                 <a:spcPts val="800"/>
-              </a:spcAft>
-              <a:defRPr sz="1800">
+              </a:spcBef>
+              <a:spcAft>
+                <a:spcPts val="400"/>
+              </a:spcAft>
+              <a:defRPr sz="2000" b="0" i="0">
                 <a:solidFill>
                   <a:srgbClr val="2C3E50"/>
                 </a:solidFill>
-                <a:latin typeface="Calibri"/>
+                <a:latin typeface="Avenir Next"/>
               </a:defRPr>
             </a:pPr>
             <a:r>
@@ -5939,15 +6493,18 @@
             </a:r>
           </a:p>
           <a:p>
-            <a:pPr>
-              <a:spcAft>
+            <a:pPr algn="l">
+              <a:spcBef>
                 <a:spcPts val="800"/>
-              </a:spcAft>
-              <a:defRPr sz="1800">
+              </a:spcBef>
+              <a:spcAft>
+                <a:spcPts val="400"/>
+              </a:spcAft>
+              <a:defRPr sz="2000" b="0" i="0">
                 <a:solidFill>
                   <a:srgbClr val="2C3E50"/>
                 </a:solidFill>
-                <a:latin typeface="Calibri"/>
+                <a:latin typeface="Avenir Next"/>
               </a:defRPr>
             </a:pPr>
             <a:r>
@@ -5955,15 +6512,18 @@
             </a:r>
           </a:p>
           <a:p>
-            <a:pPr>
-              <a:spcAft>
+            <a:pPr algn="l">
+              <a:spcBef>
                 <a:spcPts val="800"/>
-              </a:spcAft>
-              <a:defRPr sz="1800">
+              </a:spcBef>
+              <a:spcAft>
+                <a:spcPts val="400"/>
+              </a:spcAft>
+              <a:defRPr sz="2000" b="0" i="0">
                 <a:solidFill>
                   <a:srgbClr val="2C3E50"/>
                 </a:solidFill>
-                <a:latin typeface="Calibri"/>
+                <a:latin typeface="Avenir Next"/>
               </a:defRPr>
             </a:pPr>
             <a:r>
@@ -5971,15 +6531,18 @@
             </a:r>
           </a:p>
           <a:p>
-            <a:pPr>
-              <a:spcAft>
+            <a:pPr algn="l">
+              <a:spcBef>
                 <a:spcPts val="800"/>
-              </a:spcAft>
-              <a:defRPr sz="1800">
+              </a:spcBef>
+              <a:spcAft>
+                <a:spcPts val="400"/>
+              </a:spcAft>
+              <a:defRPr sz="2000" b="0" i="0">
                 <a:solidFill>
                   <a:srgbClr val="2C3E50"/>
                 </a:solidFill>
-                <a:latin typeface="Calibri"/>
+                <a:latin typeface="Avenir Next"/>
               </a:defRPr>
             </a:pPr>
             <a:r>
@@ -6016,14 +6579,57 @@
       <p:grpSpPr/>
       <p:sp>
         <p:nvSpPr>
-          <p:cNvPr id="2" name="TextBox 1"/>
+          <p:cNvPr id="2" name="Rectangle 1"/>
+          <p:cNvSpPr/>
+          <p:nvPr/>
+        </p:nvSpPr>
+        <p:spPr>
+          <a:xfrm>
+            <a:off x="0" y="0"/>
+            <a:ext cx="320040" cy="6858000"/>
+          </a:xfrm>
+          <a:prstGeom prst="rect">
+            <a:avLst/>
+          </a:prstGeom>
+          <a:solidFill>
+            <a:srgbClr val="1E2761"/>
+          </a:solidFill>
+          <a:ln>
+            <a:noFill/>
+          </a:ln>
+        </p:spPr>
+        <p:style>
+          <a:lnRef idx="1">
+            <a:schemeClr val="accent1"/>
+          </a:lnRef>
+          <a:fillRef idx="3">
+            <a:schemeClr val="accent1"/>
+          </a:fillRef>
+          <a:effectRef idx="2">
+            <a:schemeClr val="accent1"/>
+          </a:effectRef>
+          <a:fontRef idx="minor">
+            <a:schemeClr val="lt1"/>
+          </a:fontRef>
+        </p:style>
+        <p:txBody>
+          <a:bodyPr rtlCol="0" anchor="ctr"/>
+          <a:lstStyle/>
+          <a:p>
+            <a:pPr algn="ctr"/>
+          </a:p>
+        </p:txBody>
+      </p:sp>
+      <p:sp>
+        <p:nvSpPr>
+          <p:cNvPr id="3" name="TextBox 2"/>
           <p:cNvSpPr txBox="1"/>
           <p:nvPr/>
         </p:nvSpPr>
         <p:spPr>
           <a:xfrm>
-            <a:off x="731520" y="457200"/>
-            <a:ext cx="7680960" cy="731520"/>
+            <a:off x="731520" y="320040"/>
+            <a:ext cx="8046720" cy="822960"/>
           </a:xfrm>
           <a:prstGeom prst="rect">
             <a:avLst/>
@@ -6037,11 +6643,17 @@
           <a:lstStyle/>
           <a:p>
             <a:pPr algn="l">
-              <a:defRPr sz="2800" b="1">
+              <a:spcBef>
+                <a:spcPts val="0"/>
+              </a:spcBef>
+              <a:spcAft>
+                <a:spcPts val="0"/>
+              </a:spcAft>
+              <a:defRPr sz="3200" b="1" i="0">
                 <a:solidFill>
                   <a:srgbClr val="1E2761"/>
                 </a:solidFill>
-                <a:latin typeface="Georgia"/>
+                <a:latin typeface="Palatino"/>
               </a:defRPr>
             </a:pPr>
             <a:r>
@@ -6052,14 +6664,14 @@
       </p:sp>
       <p:sp>
         <p:nvSpPr>
-          <p:cNvPr id="3" name="TextBox 2"/>
+          <p:cNvPr id="4" name="TextBox 3"/>
           <p:cNvSpPr txBox="1"/>
           <p:nvPr/>
         </p:nvSpPr>
         <p:spPr>
           <a:xfrm>
-            <a:off x="1371600" y="2011680"/>
-            <a:ext cx="6400800" cy="2286000"/>
+            <a:off x="914400" y="1463040"/>
+            <a:ext cx="914400" cy="914400"/>
           </a:xfrm>
           <a:prstGeom prst="rect">
             <a:avLst/>
@@ -6067,35 +6679,41 @@
           <a:noFill/>
         </p:spPr>
         <p:txBody>
-          <a:bodyPr wrap="square">
+          <a:bodyPr wrap="none">
             <a:spAutoFit/>
           </a:bodyPr>
           <a:lstStyle/>
           <a:p>
-            <a:pPr algn="ctr">
-              <a:defRPr sz="2200" i="1">
-                <a:solidFill>
-                  <a:srgbClr val="1E2761"/>
-                </a:solidFill>
-                <a:latin typeface="Calibri"/>
-              </a:defRPr>
-            </a:pPr>
-            <a:r>
-              <a:t>योगश्चित्तवृत्तिनिरोधः    yogas citta-vrtti-nirodhah</a:t>
-            </a:r>
-          </a:p>
-        </p:txBody>
-      </p:sp>
-      <p:sp>
-        <p:nvSpPr>
-          <p:cNvPr id="4" name="TextBox 3"/>
+            <a:pPr algn="l">
+              <a:spcBef>
+                <a:spcPts val="0"/>
+              </a:spcBef>
+              <a:spcAft>
+                <a:spcPts val="0"/>
+              </a:spcAft>
+              <a:defRPr sz="7200" b="1" i="0">
+                <a:solidFill>
+                  <a:srgbClr val="7B2D26"/>
+                </a:solidFill>
+                <a:latin typeface="Palatino"/>
+              </a:defRPr>
+            </a:pPr>
+            <a:r>
+              <a:t>“</a:t>
+            </a:r>
+          </a:p>
+        </p:txBody>
+      </p:sp>
+      <p:sp>
+        <p:nvSpPr>
+          <p:cNvPr id="5" name="TextBox 4"/>
           <p:cNvSpPr txBox="1"/>
           <p:nvPr/>
         </p:nvSpPr>
         <p:spPr>
           <a:xfrm>
-            <a:off x="1371600" y="4389120"/>
-            <a:ext cx="6400800" cy="457200"/>
+            <a:off x="1371600" y="2194560"/>
+            <a:ext cx="6858000" cy="2286000"/>
           </a:xfrm>
           <a:prstGeom prst="rect">
             <a:avLst/>
@@ -6108,12 +6726,60 @@
           </a:bodyPr>
           <a:lstStyle/>
           <a:p>
-            <a:pPr algn="ctr">
-              <a:defRPr sz="1400" b="0">
+            <a:pPr algn="l">
+              <a:spcBef>
+                <a:spcPts val="0"/>
+              </a:spcBef>
+              <a:spcAft>
+                <a:spcPts val="1200"/>
+              </a:spcAft>
+              <a:defRPr sz="2600" b="0" i="1">
+                <a:solidFill>
+                  <a:srgbClr val="1E2761"/>
+                </a:solidFill>
+                <a:latin typeface="Palatino"/>
+              </a:defRPr>
+            </a:pPr>
+            <a:r>
+              <a:t>योगश्चित्तवृत्तिनिरोधः    yogas citta-vrtti-nirodhah</a:t>
+            </a:r>
+          </a:p>
+        </p:txBody>
+      </p:sp>
+      <p:sp>
+        <p:nvSpPr>
+          <p:cNvPr id="6" name="TextBox 5"/>
+          <p:cNvSpPr txBox="1"/>
+          <p:nvPr/>
+        </p:nvSpPr>
+        <p:spPr>
+          <a:xfrm>
+            <a:off x="1371600" y="4572000"/>
+            <a:ext cx="6858000" cy="731520"/>
+          </a:xfrm>
+          <a:prstGeom prst="rect">
+            <a:avLst/>
+          </a:prstGeom>
+          <a:noFill/>
+        </p:spPr>
+        <p:txBody>
+          <a:bodyPr wrap="square">
+            <a:spAutoFit/>
+          </a:bodyPr>
+          <a:lstStyle/>
+          <a:p>
+            <a:pPr algn="l">
+              <a:spcBef>
+                <a:spcPts val="0"/>
+              </a:spcBef>
+              <a:spcAft>
+                <a:spcPts val="0"/>
+              </a:spcAft>
+              <a:defRPr sz="1600" b="0" i="1">
                 <a:solidFill>
                   <a:srgbClr val="7B2D26"/>
                 </a:solidFill>
-                <a:latin typeface="Calibri"/>
+                <a:latin typeface="Avenir Next"/>
               </a:defRPr>
             </a:pPr>
             <a:r>
@@ -6150,14 +6816,57 @@
       <p:grpSpPr/>
       <p:sp>
         <p:nvSpPr>
-          <p:cNvPr id="2" name="TextBox 1"/>
+          <p:cNvPr id="2" name="Rectangle 1"/>
+          <p:cNvSpPr/>
+          <p:nvPr/>
+        </p:nvSpPr>
+        <p:spPr>
+          <a:xfrm>
+            <a:off x="0" y="0"/>
+            <a:ext cx="320040" cy="6858000"/>
+          </a:xfrm>
+          <a:prstGeom prst="rect">
+            <a:avLst/>
+          </a:prstGeom>
+          <a:solidFill>
+            <a:srgbClr val="1E2761"/>
+          </a:solidFill>
+          <a:ln>
+            <a:noFill/>
+          </a:ln>
+        </p:spPr>
+        <p:style>
+          <a:lnRef idx="1">
+            <a:schemeClr val="accent1"/>
+          </a:lnRef>
+          <a:fillRef idx="3">
+            <a:schemeClr val="accent1"/>
+          </a:fillRef>
+          <a:effectRef idx="2">
+            <a:schemeClr val="accent1"/>
+          </a:effectRef>
+          <a:fontRef idx="minor">
+            <a:schemeClr val="lt1"/>
+          </a:fontRef>
+        </p:style>
+        <p:txBody>
+          <a:bodyPr rtlCol="0" anchor="ctr"/>
+          <a:lstStyle/>
+          <a:p>
+            <a:pPr algn="ctr"/>
+          </a:p>
+        </p:txBody>
+      </p:sp>
+      <p:sp>
+        <p:nvSpPr>
+          <p:cNvPr id="3" name="TextBox 2"/>
           <p:cNvSpPr txBox="1"/>
           <p:nvPr/>
         </p:nvSpPr>
         <p:spPr>
           <a:xfrm>
-            <a:off x="731520" y="457200"/>
-            <a:ext cx="7680960" cy="731520"/>
+            <a:off x="731520" y="320040"/>
+            <a:ext cx="8046720" cy="822960"/>
           </a:xfrm>
           <a:prstGeom prst="rect">
             <a:avLst/>
@@ -6171,11 +6880,17 @@
           <a:lstStyle/>
           <a:p>
             <a:pPr algn="l">
-              <a:defRPr sz="2800" b="1">
+              <a:spcBef>
+                <a:spcPts val="0"/>
+              </a:spcBef>
+              <a:spcAft>
+                <a:spcPts val="0"/>
+              </a:spcAft>
+              <a:defRPr sz="3200" b="1" i="0">
                 <a:solidFill>
                   <a:srgbClr val="1E2761"/>
                 </a:solidFill>
-                <a:latin typeface="Georgia"/>
+                <a:latin typeface="Palatino"/>
               </a:defRPr>
             </a:pPr>
             <a:r>
@@ -6186,17 +6901,19 @@
       </p:sp>
       <p:sp>
         <p:nvSpPr>
-          <p:cNvPr id="3" name="Rectangle 2"/>
+          <p:cNvPr id="4" name="Rounded Rectangle 3"/>
           <p:cNvSpPr/>
           <p:nvPr/>
         </p:nvSpPr>
         <p:spPr>
           <a:xfrm>
-            <a:off x="731520" y="1143000"/>
-            <a:ext cx="1371600" cy="25400"/>
+            <a:off x="731520" y="1188720"/>
+            <a:ext cx="1828800" cy="50800"/>
           </a:xfrm>
-          <a:prstGeom prst="rect">
-            <a:avLst/>
+          <a:prstGeom prst="roundRect">
+            <a:avLst>
+              <a:gd name="adj" fmla="val 10000"/>
+            </a:avLst>
           </a:prstGeom>
           <a:solidFill>
             <a:srgbClr val="7B2D26"/>
@@ -6229,14 +6946,14 @@
       </p:sp>
       <p:sp>
         <p:nvSpPr>
-          <p:cNvPr id="4" name="TextBox 3"/>
+          <p:cNvPr id="5" name="TextBox 4"/>
           <p:cNvSpPr txBox="1"/>
           <p:nvPr/>
         </p:nvSpPr>
         <p:spPr>
           <a:xfrm>
-            <a:off x="731520" y="1463040"/>
-            <a:ext cx="7680960" cy="4572000"/>
+            <a:off x="731520" y="1554480"/>
+            <a:ext cx="7863840" cy="4754880"/>
           </a:xfrm>
           <a:prstGeom prst="rect">
             <a:avLst/>
@@ -6249,15 +6966,18 @@
           </a:bodyPr>
           <a:lstStyle/>
           <a:p>
-            <a:pPr>
-              <a:spcAft>
+            <a:pPr algn="l">
+              <a:spcBef>
                 <a:spcPts val="800"/>
-              </a:spcAft>
-              <a:defRPr sz="1800">
+              </a:spcBef>
+              <a:spcAft>
+                <a:spcPts val="400"/>
+              </a:spcAft>
+              <a:defRPr sz="2000" b="0" i="0">
                 <a:solidFill>
                   <a:srgbClr val="2C3E50"/>
                 </a:solidFill>
-                <a:latin typeface="Calibri"/>
+                <a:latin typeface="Avenir Next"/>
               </a:defRPr>
             </a:pPr>
             <a:r>
@@ -6265,15 +6985,18 @@
             </a:r>
           </a:p>
           <a:p>
-            <a:pPr>
-              <a:spcAft>
+            <a:pPr algn="l">
+              <a:spcBef>
                 <a:spcPts val="800"/>
-              </a:spcAft>
-              <a:defRPr sz="1800">
+              </a:spcBef>
+              <a:spcAft>
+                <a:spcPts val="400"/>
+              </a:spcAft>
+              <a:defRPr sz="2000" b="0" i="0">
                 <a:solidFill>
                   <a:srgbClr val="2C3E50"/>
                 </a:solidFill>
-                <a:latin typeface="Calibri"/>
+                <a:latin typeface="Avenir Next"/>
               </a:defRPr>
             </a:pPr>
             <a:r>
@@ -6281,15 +7004,18 @@
             </a:r>
           </a:p>
           <a:p>
-            <a:pPr>
-              <a:spcAft>
+            <a:pPr algn="l">
+              <a:spcBef>
                 <a:spcPts val="800"/>
-              </a:spcAft>
-              <a:defRPr sz="1800">
+              </a:spcBef>
+              <a:spcAft>
+                <a:spcPts val="400"/>
+              </a:spcAft>
+              <a:defRPr sz="2000" b="0" i="0">
                 <a:solidFill>
                   <a:srgbClr val="2C3E50"/>
                 </a:solidFill>
-                <a:latin typeface="Calibri"/>
+                <a:latin typeface="Avenir Next"/>
               </a:defRPr>
             </a:pPr>
             <a:r>
@@ -6297,15 +7023,18 @@
             </a:r>
           </a:p>
           <a:p>
-            <a:pPr>
-              <a:spcAft>
+            <a:pPr algn="l">
+              <a:spcBef>
                 <a:spcPts val="800"/>
-              </a:spcAft>
-              <a:defRPr sz="1800">
+              </a:spcBef>
+              <a:spcAft>
+                <a:spcPts val="400"/>
+              </a:spcAft>
+              <a:defRPr sz="2000" b="0" i="0">
                 <a:solidFill>
                   <a:srgbClr val="2C3E50"/>
                 </a:solidFill>
-                <a:latin typeface="Calibri"/>
+                <a:latin typeface="Avenir Next"/>
               </a:defRPr>
             </a:pPr>
             <a:r>
@@ -6313,15 +7042,18 @@
             </a:r>
           </a:p>
           <a:p>
-            <a:pPr>
-              <a:spcAft>
+            <a:pPr algn="l">
+              <a:spcBef>
                 <a:spcPts val="800"/>
-              </a:spcAft>
-              <a:defRPr sz="1800">
+              </a:spcBef>
+              <a:spcAft>
+                <a:spcPts val="400"/>
+              </a:spcAft>
+              <a:defRPr sz="2000" b="0" i="0">
                 <a:solidFill>
                   <a:srgbClr val="2C3E50"/>
                 </a:solidFill>
-                <a:latin typeface="Calibri"/>
+                <a:latin typeface="Avenir Next"/>
               </a:defRPr>
             </a:pPr>
             <a:r>
@@ -6358,14 +7090,57 @@
       <p:grpSpPr/>
       <p:sp>
         <p:nvSpPr>
-          <p:cNvPr id="2" name="TextBox 1"/>
+          <p:cNvPr id="2" name="Rectangle 1"/>
+          <p:cNvSpPr/>
+          <p:nvPr/>
+        </p:nvSpPr>
+        <p:spPr>
+          <a:xfrm>
+            <a:off x="0" y="0"/>
+            <a:ext cx="320040" cy="6858000"/>
+          </a:xfrm>
+          <a:prstGeom prst="rect">
+            <a:avLst/>
+          </a:prstGeom>
+          <a:solidFill>
+            <a:srgbClr val="1E2761"/>
+          </a:solidFill>
+          <a:ln>
+            <a:noFill/>
+          </a:ln>
+        </p:spPr>
+        <p:style>
+          <a:lnRef idx="1">
+            <a:schemeClr val="accent1"/>
+          </a:lnRef>
+          <a:fillRef idx="3">
+            <a:schemeClr val="accent1"/>
+          </a:fillRef>
+          <a:effectRef idx="2">
+            <a:schemeClr val="accent1"/>
+          </a:effectRef>
+          <a:fontRef idx="minor">
+            <a:schemeClr val="lt1"/>
+          </a:fontRef>
+        </p:style>
+        <p:txBody>
+          <a:bodyPr rtlCol="0" anchor="ctr"/>
+          <a:lstStyle/>
+          <a:p>
+            <a:pPr algn="ctr"/>
+          </a:p>
+        </p:txBody>
+      </p:sp>
+      <p:sp>
+        <p:nvSpPr>
+          <p:cNvPr id="3" name="TextBox 2"/>
           <p:cNvSpPr txBox="1"/>
           <p:nvPr/>
         </p:nvSpPr>
         <p:spPr>
           <a:xfrm>
-            <a:off x="731520" y="457200"/>
-            <a:ext cx="7680960" cy="731520"/>
+            <a:off x="731520" y="320040"/>
+            <a:ext cx="8046720" cy="822960"/>
           </a:xfrm>
           <a:prstGeom prst="rect">
             <a:avLst/>
@@ -6379,11 +7154,17 @@
           <a:lstStyle/>
           <a:p>
             <a:pPr algn="l">
-              <a:defRPr sz="2800" b="1">
+              <a:spcBef>
+                <a:spcPts val="0"/>
+              </a:spcBef>
+              <a:spcAft>
+                <a:spcPts val="0"/>
+              </a:spcAft>
+              <a:defRPr sz="3000" b="1" i="0">
                 <a:solidFill>
                   <a:srgbClr val="1E2761"/>
                 </a:solidFill>
-                <a:latin typeface="Georgia"/>
+                <a:latin typeface="Palatino"/>
               </a:defRPr>
             </a:pPr>
             <a:r>
@@ -6394,17 +7175,19 @@
       </p:sp>
       <p:sp>
         <p:nvSpPr>
-          <p:cNvPr id="3" name="Rectangle 2"/>
+          <p:cNvPr id="4" name="Rounded Rectangle 3"/>
           <p:cNvSpPr/>
           <p:nvPr/>
         </p:nvSpPr>
         <p:spPr>
           <a:xfrm>
-            <a:off x="731520" y="1143000"/>
-            <a:ext cx="1371600" cy="25400"/>
+            <a:off x="731520" y="1188720"/>
+            <a:ext cx="1828800" cy="50800"/>
           </a:xfrm>
-          <a:prstGeom prst="rect">
-            <a:avLst/>
+          <a:prstGeom prst="roundRect">
+            <a:avLst>
+              <a:gd name="adj" fmla="val 10000"/>
+            </a:avLst>
           </a:prstGeom>
           <a:solidFill>
             <a:srgbClr val="7B2D26"/>
@@ -6437,14 +7220,57 @@
       </p:sp>
       <p:sp>
         <p:nvSpPr>
-          <p:cNvPr id="4" name="TextBox 3"/>
+          <p:cNvPr id="5" name="Rectangle 4"/>
+          <p:cNvSpPr/>
+          <p:nvPr/>
+        </p:nvSpPr>
+        <p:spPr>
+          <a:xfrm>
+            <a:off x="4434840" y="1463040"/>
+            <a:ext cx="19050" cy="4754880"/>
+          </a:xfrm>
+          <a:prstGeom prst="rect">
+            <a:avLst/>
+          </a:prstGeom>
+          <a:solidFill>
+            <a:srgbClr val="D0D0D0"/>
+          </a:solidFill>
+          <a:ln>
+            <a:noFill/>
+          </a:ln>
+        </p:spPr>
+        <p:style>
+          <a:lnRef idx="1">
+            <a:schemeClr val="accent1"/>
+          </a:lnRef>
+          <a:fillRef idx="3">
+            <a:schemeClr val="accent1"/>
+          </a:fillRef>
+          <a:effectRef idx="2">
+            <a:schemeClr val="accent1"/>
+          </a:effectRef>
+          <a:fontRef idx="minor">
+            <a:schemeClr val="lt1"/>
+          </a:fontRef>
+        </p:style>
+        <p:txBody>
+          <a:bodyPr rtlCol="0" anchor="ctr"/>
+          <a:lstStyle/>
+          <a:p>
+            <a:pPr algn="ctr"/>
+          </a:p>
+        </p:txBody>
+      </p:sp>
+      <p:sp>
+        <p:nvSpPr>
+          <p:cNvPr id="6" name="TextBox 5"/>
           <p:cNvSpPr txBox="1"/>
           <p:nvPr/>
         </p:nvSpPr>
         <p:spPr>
           <a:xfrm>
-            <a:off x="731520" y="1463040"/>
-            <a:ext cx="3657600" cy="4572000"/>
+            <a:off x="731520" y="1508760"/>
+            <a:ext cx="3566160" cy="4846320"/>
           </a:xfrm>
           <a:prstGeom prst="rect">
             <a:avLst/>
@@ -6457,15 +7283,18 @@
           </a:bodyPr>
           <a:lstStyle/>
           <a:p>
-            <a:pPr>
-              <a:spcAft>
+            <a:pPr algn="l">
+              <a:spcBef>
                 <a:spcPts val="800"/>
-              </a:spcAft>
-              <a:defRPr sz="1600">
+              </a:spcBef>
+              <a:spcAft>
+                <a:spcPts val="400"/>
+              </a:spcAft>
+              <a:defRPr sz="1800" b="0" i="0">
                 <a:solidFill>
                   <a:srgbClr val="2C3E50"/>
                 </a:solidFill>
-                <a:latin typeface="Calibri"/>
+                <a:latin typeface="Avenir Next"/>
               </a:defRPr>
             </a:pPr>
             <a:r>
@@ -6473,15 +7302,18 @@
             </a:r>
           </a:p>
           <a:p>
-            <a:pPr>
-              <a:spcAft>
+            <a:pPr algn="l">
+              <a:spcBef>
                 <a:spcPts val="800"/>
-              </a:spcAft>
-              <a:defRPr sz="1600">
+              </a:spcBef>
+              <a:spcAft>
+                <a:spcPts val="400"/>
+              </a:spcAft>
+              <a:defRPr sz="1800" b="0" i="0">
                 <a:solidFill>
                   <a:srgbClr val="2C3E50"/>
                 </a:solidFill>
-                <a:latin typeface="Calibri"/>
+                <a:latin typeface="Avenir Next"/>
               </a:defRPr>
             </a:pPr>
             <a:r>
@@ -6489,15 +7321,18 @@
             </a:r>
           </a:p>
           <a:p>
-            <a:pPr>
-              <a:spcAft>
+            <a:pPr algn="l">
+              <a:spcBef>
                 <a:spcPts val="800"/>
-              </a:spcAft>
-              <a:defRPr sz="1600">
+              </a:spcBef>
+              <a:spcAft>
+                <a:spcPts val="400"/>
+              </a:spcAft>
+              <a:defRPr sz="1800" b="0" i="0">
                 <a:solidFill>
                   <a:srgbClr val="2C3E50"/>
                 </a:solidFill>
-                <a:latin typeface="Calibri"/>
+                <a:latin typeface="Avenir Next"/>
               </a:defRPr>
             </a:pPr>
             <a:r>
@@ -6505,15 +7340,18 @@
             </a:r>
           </a:p>
           <a:p>
-            <a:pPr>
-              <a:spcAft>
+            <a:pPr algn="l">
+              <a:spcBef>
                 <a:spcPts val="800"/>
-              </a:spcAft>
-              <a:defRPr sz="1600">
+              </a:spcBef>
+              <a:spcAft>
+                <a:spcPts val="400"/>
+              </a:spcAft>
+              <a:defRPr sz="1800" b="0" i="0">
                 <a:solidFill>
                   <a:srgbClr val="2C3E50"/>
                 </a:solidFill>
-                <a:latin typeface="Calibri"/>
+                <a:latin typeface="Avenir Next"/>
               </a:defRPr>
             </a:pPr>
             <a:r>
@@ -6521,15 +7359,18 @@
             </a:r>
           </a:p>
           <a:p>
-            <a:pPr>
-              <a:spcAft>
+            <a:pPr algn="l">
+              <a:spcBef>
                 <a:spcPts val="800"/>
-              </a:spcAft>
-              <a:defRPr sz="1600">
+              </a:spcBef>
+              <a:spcAft>
+                <a:spcPts val="400"/>
+              </a:spcAft>
+              <a:defRPr sz="1800" b="0" i="0">
                 <a:solidFill>
                   <a:srgbClr val="2C3E50"/>
                 </a:solidFill>
-                <a:latin typeface="Calibri"/>
+                <a:latin typeface="Avenir Next"/>
               </a:defRPr>
             </a:pPr>
             <a:r>
@@ -6540,14 +7381,14 @@
       </p:sp>
       <p:sp>
         <p:nvSpPr>
-          <p:cNvPr id="5" name="TextBox 4"/>
+          <p:cNvPr id="7" name="TextBox 6"/>
           <p:cNvSpPr txBox="1"/>
           <p:nvPr/>
         </p:nvSpPr>
         <p:spPr>
           <a:xfrm>
-            <a:off x="4754880" y="1463040"/>
-            <a:ext cx="3657600" cy="4572000"/>
+            <a:off x="4663440" y="1508760"/>
+            <a:ext cx="4114800" cy="4846320"/>
           </a:xfrm>
           <a:prstGeom prst="rect">
             <a:avLst/>
@@ -6560,15 +7401,18 @@
           </a:bodyPr>
           <a:lstStyle/>
           <a:p>
-            <a:pPr>
-              <a:spcAft>
+            <a:pPr algn="l">
+              <a:spcBef>
                 <a:spcPts val="800"/>
-              </a:spcAft>
-              <a:defRPr sz="1600">
+              </a:spcBef>
+              <a:spcAft>
+                <a:spcPts val="400"/>
+              </a:spcAft>
+              <a:defRPr sz="1800" b="0" i="0">
                 <a:solidFill>
                   <a:srgbClr val="2C3E50"/>
                 </a:solidFill>
-                <a:latin typeface="Calibri"/>
+                <a:latin typeface="Avenir Next"/>
               </a:defRPr>
             </a:pPr>
             <a:r>
@@ -6576,15 +7420,18 @@
             </a:r>
           </a:p>
           <a:p>
-            <a:pPr>
-              <a:spcAft>
+            <a:pPr algn="l">
+              <a:spcBef>
                 <a:spcPts val="800"/>
-              </a:spcAft>
-              <a:defRPr sz="1600">
+              </a:spcBef>
+              <a:spcAft>
+                <a:spcPts val="400"/>
+              </a:spcAft>
+              <a:defRPr sz="1800" b="0" i="0">
                 <a:solidFill>
                   <a:srgbClr val="2C3E50"/>
                 </a:solidFill>
-                <a:latin typeface="Calibri"/>
+                <a:latin typeface="Avenir Next"/>
               </a:defRPr>
             </a:pPr>
             <a:r>
@@ -6592,15 +7439,18 @@
             </a:r>
           </a:p>
           <a:p>
-            <a:pPr>
-              <a:spcAft>
+            <a:pPr algn="l">
+              <a:spcBef>
                 <a:spcPts val="800"/>
-              </a:spcAft>
-              <a:defRPr sz="1600">
+              </a:spcBef>
+              <a:spcAft>
+                <a:spcPts val="400"/>
+              </a:spcAft>
+              <a:defRPr sz="1800" b="0" i="0">
                 <a:solidFill>
                   <a:srgbClr val="2C3E50"/>
                 </a:solidFill>
-                <a:latin typeface="Calibri"/>
+                <a:latin typeface="Avenir Next"/>
               </a:defRPr>
             </a:pPr>
             <a:r>
@@ -6608,15 +7458,18 @@
             </a:r>
           </a:p>
           <a:p>
-            <a:pPr>
-              <a:spcAft>
+            <a:pPr algn="l">
+              <a:spcBef>
                 <a:spcPts val="800"/>
-              </a:spcAft>
-              <a:defRPr sz="1600">
+              </a:spcBef>
+              <a:spcAft>
+                <a:spcPts val="400"/>
+              </a:spcAft>
+              <a:defRPr sz="1800" b="0" i="0">
                 <a:solidFill>
                   <a:srgbClr val="2C3E50"/>
                 </a:solidFill>
-                <a:latin typeface="Calibri"/>
+                <a:latin typeface="Avenir Next"/>
               </a:defRPr>
             </a:pPr>
             <a:r>
@@ -6653,14 +7506,57 @@
       <p:grpSpPr/>
       <p:sp>
         <p:nvSpPr>
-          <p:cNvPr id="2" name="TextBox 1"/>
+          <p:cNvPr id="2" name="Rectangle 1"/>
+          <p:cNvSpPr/>
+          <p:nvPr/>
+        </p:nvSpPr>
+        <p:spPr>
+          <a:xfrm>
+            <a:off x="0" y="0"/>
+            <a:ext cx="320040" cy="6858000"/>
+          </a:xfrm>
+          <a:prstGeom prst="rect">
+            <a:avLst/>
+          </a:prstGeom>
+          <a:solidFill>
+            <a:srgbClr val="1E2761"/>
+          </a:solidFill>
+          <a:ln>
+            <a:noFill/>
+          </a:ln>
+        </p:spPr>
+        <p:style>
+          <a:lnRef idx="1">
+            <a:schemeClr val="accent1"/>
+          </a:lnRef>
+          <a:fillRef idx="3">
+            <a:schemeClr val="accent1"/>
+          </a:fillRef>
+          <a:effectRef idx="2">
+            <a:schemeClr val="accent1"/>
+          </a:effectRef>
+          <a:fontRef idx="minor">
+            <a:schemeClr val="lt1"/>
+          </a:fontRef>
+        </p:style>
+        <p:txBody>
+          <a:bodyPr rtlCol="0" anchor="ctr"/>
+          <a:lstStyle/>
+          <a:p>
+            <a:pPr algn="ctr"/>
+          </a:p>
+        </p:txBody>
+      </p:sp>
+      <p:sp>
+        <p:nvSpPr>
+          <p:cNvPr id="3" name="TextBox 2"/>
           <p:cNvSpPr txBox="1"/>
           <p:nvPr/>
         </p:nvSpPr>
         <p:spPr>
           <a:xfrm>
-            <a:off x="731520" y="457200"/>
-            <a:ext cx="7680960" cy="731520"/>
+            <a:off x="731520" y="320040"/>
+            <a:ext cx="8046720" cy="822960"/>
           </a:xfrm>
           <a:prstGeom prst="rect">
             <a:avLst/>
@@ -6674,11 +7570,17 @@
           <a:lstStyle/>
           <a:p>
             <a:pPr algn="l">
-              <a:defRPr sz="2800" b="1">
+              <a:spcBef>
+                <a:spcPts val="0"/>
+              </a:spcBef>
+              <a:spcAft>
+                <a:spcPts val="0"/>
+              </a:spcAft>
+              <a:defRPr sz="3000" b="1" i="0">
                 <a:solidFill>
                   <a:srgbClr val="1E2761"/>
                 </a:solidFill>
-                <a:latin typeface="Georgia"/>
+                <a:latin typeface="Palatino"/>
               </a:defRPr>
             </a:pPr>
             <a:r>
@@ -6689,17 +7591,19 @@
       </p:sp>
       <p:sp>
         <p:nvSpPr>
-          <p:cNvPr id="3" name="Rectangle 2"/>
+          <p:cNvPr id="4" name="Rounded Rectangle 3"/>
           <p:cNvSpPr/>
           <p:nvPr/>
         </p:nvSpPr>
         <p:spPr>
           <a:xfrm>
-            <a:off x="731520" y="1143000"/>
-            <a:ext cx="1371600" cy="25400"/>
+            <a:off x="731520" y="1188720"/>
+            <a:ext cx="1828800" cy="50800"/>
           </a:xfrm>
-          <a:prstGeom prst="rect">
-            <a:avLst/>
+          <a:prstGeom prst="roundRect">
+            <a:avLst>
+              <a:gd name="adj" fmla="val 10000"/>
+            </a:avLst>
           </a:prstGeom>
           <a:solidFill>
             <a:srgbClr val="7B2D26"/>
@@ -6732,14 +7636,57 @@
       </p:sp>
       <p:sp>
         <p:nvSpPr>
-          <p:cNvPr id="4" name="TextBox 3"/>
+          <p:cNvPr id="5" name="Rectangle 4"/>
+          <p:cNvSpPr/>
+          <p:nvPr/>
+        </p:nvSpPr>
+        <p:spPr>
+          <a:xfrm>
+            <a:off x="4434840" y="1463040"/>
+            <a:ext cx="19050" cy="4754880"/>
+          </a:xfrm>
+          <a:prstGeom prst="rect">
+            <a:avLst/>
+          </a:prstGeom>
+          <a:solidFill>
+            <a:srgbClr val="D0D0D0"/>
+          </a:solidFill>
+          <a:ln>
+            <a:noFill/>
+          </a:ln>
+        </p:spPr>
+        <p:style>
+          <a:lnRef idx="1">
+            <a:schemeClr val="accent1"/>
+          </a:lnRef>
+          <a:fillRef idx="3">
+            <a:schemeClr val="accent1"/>
+          </a:fillRef>
+          <a:effectRef idx="2">
+            <a:schemeClr val="accent1"/>
+          </a:effectRef>
+          <a:fontRef idx="minor">
+            <a:schemeClr val="lt1"/>
+          </a:fontRef>
+        </p:style>
+        <p:txBody>
+          <a:bodyPr rtlCol="0" anchor="ctr"/>
+          <a:lstStyle/>
+          <a:p>
+            <a:pPr algn="ctr"/>
+          </a:p>
+        </p:txBody>
+      </p:sp>
+      <p:sp>
+        <p:nvSpPr>
+          <p:cNvPr id="6" name="TextBox 5"/>
           <p:cNvSpPr txBox="1"/>
           <p:nvPr/>
         </p:nvSpPr>
         <p:spPr>
           <a:xfrm>
-            <a:off x="731520" y="1463040"/>
-            <a:ext cx="3657600" cy="4572000"/>
+            <a:off x="731520" y="1508760"/>
+            <a:ext cx="3566160" cy="4846320"/>
           </a:xfrm>
           <a:prstGeom prst="rect">
             <a:avLst/>
@@ -6752,15 +7699,18 @@
           </a:bodyPr>
           <a:lstStyle/>
           <a:p>
-            <a:pPr>
-              <a:spcAft>
+            <a:pPr algn="l">
+              <a:spcBef>
                 <a:spcPts val="800"/>
-              </a:spcAft>
-              <a:defRPr sz="1600">
+              </a:spcBef>
+              <a:spcAft>
+                <a:spcPts val="400"/>
+              </a:spcAft>
+              <a:defRPr sz="1800" b="0" i="0">
                 <a:solidFill>
                   <a:srgbClr val="2C3E50"/>
                 </a:solidFill>
-                <a:latin typeface="Calibri"/>
+                <a:latin typeface="Avenir Next"/>
               </a:defRPr>
             </a:pPr>
             <a:r>
@@ -6768,15 +7718,18 @@
             </a:r>
           </a:p>
           <a:p>
-            <a:pPr>
-              <a:spcAft>
+            <a:pPr algn="l">
+              <a:spcBef>
                 <a:spcPts val="800"/>
-              </a:spcAft>
-              <a:defRPr sz="1600">
+              </a:spcBef>
+              <a:spcAft>
+                <a:spcPts val="400"/>
+              </a:spcAft>
+              <a:defRPr sz="1800" b="0" i="0">
                 <a:solidFill>
                   <a:srgbClr val="2C3E50"/>
                 </a:solidFill>
-                <a:latin typeface="Calibri"/>
+                <a:latin typeface="Avenir Next"/>
               </a:defRPr>
             </a:pPr>
             <a:r>
@@ -6784,15 +7737,18 @@
             </a:r>
           </a:p>
           <a:p>
-            <a:pPr>
-              <a:spcAft>
+            <a:pPr algn="l">
+              <a:spcBef>
                 <a:spcPts val="800"/>
-              </a:spcAft>
-              <a:defRPr sz="1600">
+              </a:spcBef>
+              <a:spcAft>
+                <a:spcPts val="400"/>
+              </a:spcAft>
+              <a:defRPr sz="1800" b="0" i="0">
                 <a:solidFill>
                   <a:srgbClr val="2C3E50"/>
                 </a:solidFill>
-                <a:latin typeface="Calibri"/>
+                <a:latin typeface="Avenir Next"/>
               </a:defRPr>
             </a:pPr>
             <a:r>
@@ -6800,15 +7756,18 @@
             </a:r>
           </a:p>
           <a:p>
-            <a:pPr>
-              <a:spcAft>
+            <a:pPr algn="l">
+              <a:spcBef>
                 <a:spcPts val="800"/>
-              </a:spcAft>
-              <a:defRPr sz="1600">
+              </a:spcBef>
+              <a:spcAft>
+                <a:spcPts val="400"/>
+              </a:spcAft>
+              <a:defRPr sz="1800" b="0" i="0">
                 <a:solidFill>
                   <a:srgbClr val="2C3E50"/>
                 </a:solidFill>
-                <a:latin typeface="Calibri"/>
+                <a:latin typeface="Avenir Next"/>
               </a:defRPr>
             </a:pPr>
             <a:r>
@@ -6816,15 +7775,18 @@
             </a:r>
           </a:p>
           <a:p>
-            <a:pPr>
-              <a:spcAft>
+            <a:pPr algn="l">
+              <a:spcBef>
                 <a:spcPts val="800"/>
-              </a:spcAft>
-              <a:defRPr sz="1600">
+              </a:spcBef>
+              <a:spcAft>
+                <a:spcPts val="400"/>
+              </a:spcAft>
+              <a:defRPr sz="1800" b="0" i="0">
                 <a:solidFill>
                   <a:srgbClr val="2C3E50"/>
                 </a:solidFill>
-                <a:latin typeface="Calibri"/>
+                <a:latin typeface="Avenir Next"/>
               </a:defRPr>
             </a:pPr>
             <a:r>
@@ -6835,14 +7797,14 @@
       </p:sp>
       <p:sp>
         <p:nvSpPr>
-          <p:cNvPr id="5" name="TextBox 4"/>
+          <p:cNvPr id="7" name="TextBox 6"/>
           <p:cNvSpPr txBox="1"/>
           <p:nvPr/>
         </p:nvSpPr>
         <p:spPr>
           <a:xfrm>
-            <a:off x="4754880" y="1463040"/>
-            <a:ext cx="3657600" cy="4572000"/>
+            <a:off x="4663440" y="1508760"/>
+            <a:ext cx="4114800" cy="4846320"/>
           </a:xfrm>
           <a:prstGeom prst="rect">
             <a:avLst/>
@@ -6855,15 +7817,18 @@
           </a:bodyPr>
           <a:lstStyle/>
           <a:p>
-            <a:pPr>
-              <a:spcAft>
+            <a:pPr algn="l">
+              <a:spcBef>
                 <a:spcPts val="800"/>
-              </a:spcAft>
-              <a:defRPr sz="1600">
+              </a:spcBef>
+              <a:spcAft>
+                <a:spcPts val="400"/>
+              </a:spcAft>
+              <a:defRPr sz="1800" b="0" i="0">
                 <a:solidFill>
                   <a:srgbClr val="2C3E50"/>
                 </a:solidFill>
-                <a:latin typeface="Calibri"/>
+                <a:latin typeface="Avenir Next"/>
               </a:defRPr>
             </a:pPr>
             <a:r>
@@ -6871,15 +7836,18 @@
             </a:r>
           </a:p>
           <a:p>
-            <a:pPr>
-              <a:spcAft>
+            <a:pPr algn="l">
+              <a:spcBef>
                 <a:spcPts val="800"/>
-              </a:spcAft>
-              <a:defRPr sz="1600">
+              </a:spcBef>
+              <a:spcAft>
+                <a:spcPts val="400"/>
+              </a:spcAft>
+              <a:defRPr sz="1800" b="0" i="0">
                 <a:solidFill>
                   <a:srgbClr val="2C3E50"/>
                 </a:solidFill>
-                <a:latin typeface="Calibri"/>
+                <a:latin typeface="Avenir Next"/>
               </a:defRPr>
             </a:pPr>
             <a:r>
@@ -6887,15 +7855,18 @@
             </a:r>
           </a:p>
           <a:p>
-            <a:pPr>
-              <a:spcAft>
+            <a:pPr algn="l">
+              <a:spcBef>
                 <a:spcPts val="800"/>
-              </a:spcAft>
-              <a:defRPr sz="1600">
+              </a:spcBef>
+              <a:spcAft>
+                <a:spcPts val="400"/>
+              </a:spcAft>
+              <a:defRPr sz="1800" b="0" i="0">
                 <a:solidFill>
                   <a:srgbClr val="2C3E50"/>
                 </a:solidFill>
-                <a:latin typeface="Calibri"/>
+                <a:latin typeface="Avenir Next"/>
               </a:defRPr>
             </a:pPr>
             <a:r>
@@ -6903,15 +7874,18 @@
             </a:r>
           </a:p>
           <a:p>
-            <a:pPr>
-              <a:spcAft>
+            <a:pPr algn="l">
+              <a:spcBef>
                 <a:spcPts val="800"/>
-              </a:spcAft>
-              <a:defRPr sz="1600">
+              </a:spcBef>
+              <a:spcAft>
+                <a:spcPts val="400"/>
+              </a:spcAft>
+              <a:defRPr sz="1800" b="0" i="0">
                 <a:solidFill>
                   <a:srgbClr val="2C3E50"/>
                 </a:solidFill>
-                <a:latin typeface="Calibri"/>
+                <a:latin typeface="Avenir Next"/>
               </a:defRPr>
             </a:pPr>
             <a:r>
@@ -6919,15 +7893,18 @@
             </a:r>
           </a:p>
           <a:p>
-            <a:pPr>
-              <a:spcAft>
+            <a:pPr algn="l">
+              <a:spcBef>
                 <a:spcPts val="800"/>
-              </a:spcAft>
-              <a:defRPr sz="1600">
+              </a:spcBef>
+              <a:spcAft>
+                <a:spcPts val="400"/>
+              </a:spcAft>
+              <a:defRPr sz="1800" b="0" i="0">
                 <a:solidFill>
                   <a:srgbClr val="2C3E50"/>
                 </a:solidFill>
-                <a:latin typeface="Calibri"/>
+                <a:latin typeface="Avenir Next"/>
               </a:defRPr>
             </a:pPr>
             <a:r>
@@ -6964,14 +7941,57 @@
       <p:grpSpPr/>
       <p:sp>
         <p:nvSpPr>
-          <p:cNvPr id="2" name="TextBox 1"/>
+          <p:cNvPr id="2" name="Rectangle 1"/>
+          <p:cNvSpPr/>
+          <p:nvPr/>
+        </p:nvSpPr>
+        <p:spPr>
+          <a:xfrm>
+            <a:off x="0" y="0"/>
+            <a:ext cx="320040" cy="6858000"/>
+          </a:xfrm>
+          <a:prstGeom prst="rect">
+            <a:avLst/>
+          </a:prstGeom>
+          <a:solidFill>
+            <a:srgbClr val="1E2761"/>
+          </a:solidFill>
+          <a:ln>
+            <a:noFill/>
+          </a:ln>
+        </p:spPr>
+        <p:style>
+          <a:lnRef idx="1">
+            <a:schemeClr val="accent1"/>
+          </a:lnRef>
+          <a:fillRef idx="3">
+            <a:schemeClr val="accent1"/>
+          </a:fillRef>
+          <a:effectRef idx="2">
+            <a:schemeClr val="accent1"/>
+          </a:effectRef>
+          <a:fontRef idx="minor">
+            <a:schemeClr val="lt1"/>
+          </a:fontRef>
+        </p:style>
+        <p:txBody>
+          <a:bodyPr rtlCol="0" anchor="ctr"/>
+          <a:lstStyle/>
+          <a:p>
+            <a:pPr algn="ctr"/>
+          </a:p>
+        </p:txBody>
+      </p:sp>
+      <p:sp>
+        <p:nvSpPr>
+          <p:cNvPr id="3" name="TextBox 2"/>
           <p:cNvSpPr txBox="1"/>
           <p:nvPr/>
         </p:nvSpPr>
         <p:spPr>
           <a:xfrm>
-            <a:off x="731520" y="457200"/>
-            <a:ext cx="7680960" cy="731520"/>
+            <a:off x="731520" y="320040"/>
+            <a:ext cx="8046720" cy="822960"/>
           </a:xfrm>
           <a:prstGeom prst="rect">
             <a:avLst/>
@@ -6985,11 +8005,17 @@
           <a:lstStyle/>
           <a:p>
             <a:pPr algn="l">
-              <a:defRPr sz="2800" b="1">
+              <a:spcBef>
+                <a:spcPts val="0"/>
+              </a:spcBef>
+              <a:spcAft>
+                <a:spcPts val="0"/>
+              </a:spcAft>
+              <a:defRPr sz="3000" b="1" i="0">
                 <a:solidFill>
                   <a:srgbClr val="1E2761"/>
                 </a:solidFill>
-                <a:latin typeface="Georgia"/>
+                <a:latin typeface="Palatino"/>
               </a:defRPr>
             </a:pPr>
             <a:r>
@@ -7000,17 +8026,19 @@
       </p:sp>
       <p:sp>
         <p:nvSpPr>
-          <p:cNvPr id="3" name="Rectangle 2"/>
+          <p:cNvPr id="4" name="Rounded Rectangle 3"/>
           <p:cNvSpPr/>
           <p:nvPr/>
         </p:nvSpPr>
         <p:spPr>
           <a:xfrm>
-            <a:off x="731520" y="1143000"/>
-            <a:ext cx="1371600" cy="25400"/>
+            <a:off x="731520" y="1188720"/>
+            <a:ext cx="1828800" cy="50800"/>
           </a:xfrm>
-          <a:prstGeom prst="rect">
-            <a:avLst/>
+          <a:prstGeom prst="roundRect">
+            <a:avLst>
+              <a:gd name="adj" fmla="val 10000"/>
+            </a:avLst>
           </a:prstGeom>
           <a:solidFill>
             <a:srgbClr val="7B2D26"/>
@@ -7043,14 +8071,57 @@
       </p:sp>
       <p:sp>
         <p:nvSpPr>
-          <p:cNvPr id="4" name="TextBox 3"/>
+          <p:cNvPr id="5" name="Rectangle 4"/>
+          <p:cNvSpPr/>
+          <p:nvPr/>
+        </p:nvSpPr>
+        <p:spPr>
+          <a:xfrm>
+            <a:off x="4434840" y="1463040"/>
+            <a:ext cx="19050" cy="4754880"/>
+          </a:xfrm>
+          <a:prstGeom prst="rect">
+            <a:avLst/>
+          </a:prstGeom>
+          <a:solidFill>
+            <a:srgbClr val="D0D0D0"/>
+          </a:solidFill>
+          <a:ln>
+            <a:noFill/>
+          </a:ln>
+        </p:spPr>
+        <p:style>
+          <a:lnRef idx="1">
+            <a:schemeClr val="accent1"/>
+          </a:lnRef>
+          <a:fillRef idx="3">
+            <a:schemeClr val="accent1"/>
+          </a:fillRef>
+          <a:effectRef idx="2">
+            <a:schemeClr val="accent1"/>
+          </a:effectRef>
+          <a:fontRef idx="minor">
+            <a:schemeClr val="lt1"/>
+          </a:fontRef>
+        </p:style>
+        <p:txBody>
+          <a:bodyPr rtlCol="0" anchor="ctr"/>
+          <a:lstStyle/>
+          <a:p>
+            <a:pPr algn="ctr"/>
+          </a:p>
+        </p:txBody>
+      </p:sp>
+      <p:sp>
+        <p:nvSpPr>
+          <p:cNvPr id="6" name="TextBox 5"/>
           <p:cNvSpPr txBox="1"/>
           <p:nvPr/>
         </p:nvSpPr>
         <p:spPr>
           <a:xfrm>
-            <a:off x="731520" y="1463040"/>
-            <a:ext cx="3657600" cy="4572000"/>
+            <a:off x="731520" y="1508760"/>
+            <a:ext cx="3566160" cy="4846320"/>
           </a:xfrm>
           <a:prstGeom prst="rect">
             <a:avLst/>
@@ -7063,15 +8134,18 @@
           </a:bodyPr>
           <a:lstStyle/>
           <a:p>
-            <a:pPr>
-              <a:spcAft>
+            <a:pPr algn="l">
+              <a:spcBef>
                 <a:spcPts val="800"/>
-              </a:spcAft>
-              <a:defRPr sz="1600">
+              </a:spcBef>
+              <a:spcAft>
+                <a:spcPts val="400"/>
+              </a:spcAft>
+              <a:defRPr sz="1800" b="0" i="0">
                 <a:solidFill>
                   <a:srgbClr val="2C3E50"/>
                 </a:solidFill>
-                <a:latin typeface="Calibri"/>
+                <a:latin typeface="Avenir Next"/>
               </a:defRPr>
             </a:pPr>
             <a:r>
@@ -7079,15 +8153,18 @@
             </a:r>
           </a:p>
           <a:p>
-            <a:pPr>
-              <a:spcAft>
+            <a:pPr algn="l">
+              <a:spcBef>
                 <a:spcPts val="800"/>
-              </a:spcAft>
-              <a:defRPr sz="1600">
+              </a:spcBef>
+              <a:spcAft>
+                <a:spcPts val="400"/>
+              </a:spcAft>
+              <a:defRPr sz="1800" b="0" i="0">
                 <a:solidFill>
                   <a:srgbClr val="2C3E50"/>
                 </a:solidFill>
-                <a:latin typeface="Calibri"/>
+                <a:latin typeface="Avenir Next"/>
               </a:defRPr>
             </a:pPr>
             <a:r>
@@ -7095,15 +8172,18 @@
             </a:r>
           </a:p>
           <a:p>
-            <a:pPr>
-              <a:spcAft>
+            <a:pPr algn="l">
+              <a:spcBef>
                 <a:spcPts val="800"/>
-              </a:spcAft>
-              <a:defRPr sz="1600">
+              </a:spcBef>
+              <a:spcAft>
+                <a:spcPts val="400"/>
+              </a:spcAft>
+              <a:defRPr sz="1800" b="0" i="0">
                 <a:solidFill>
                   <a:srgbClr val="2C3E50"/>
                 </a:solidFill>
-                <a:latin typeface="Calibri"/>
+                <a:latin typeface="Avenir Next"/>
               </a:defRPr>
             </a:pPr>
             <a:r>
@@ -7111,15 +8191,18 @@
             </a:r>
           </a:p>
           <a:p>
-            <a:pPr>
-              <a:spcAft>
+            <a:pPr algn="l">
+              <a:spcBef>
                 <a:spcPts val="800"/>
-              </a:spcAft>
-              <a:defRPr sz="1600">
+              </a:spcBef>
+              <a:spcAft>
+                <a:spcPts val="400"/>
+              </a:spcAft>
+              <a:defRPr sz="1800" b="0" i="0">
                 <a:solidFill>
                   <a:srgbClr val="2C3E50"/>
                 </a:solidFill>
-                <a:latin typeface="Calibri"/>
+                <a:latin typeface="Avenir Next"/>
               </a:defRPr>
             </a:pPr>
             <a:r>
@@ -7127,15 +8210,18 @@
             </a:r>
           </a:p>
           <a:p>
-            <a:pPr>
-              <a:spcAft>
+            <a:pPr algn="l">
+              <a:spcBef>
                 <a:spcPts val="800"/>
-              </a:spcAft>
-              <a:defRPr sz="1600">
+              </a:spcBef>
+              <a:spcAft>
+                <a:spcPts val="400"/>
+              </a:spcAft>
+              <a:defRPr sz="1800" b="0" i="0">
                 <a:solidFill>
                   <a:srgbClr val="2C3E50"/>
                 </a:solidFill>
-                <a:latin typeface="Calibri"/>
+                <a:latin typeface="Avenir Next"/>
               </a:defRPr>
             </a:pPr>
             <a:r>
@@ -7146,14 +8232,14 @@
       </p:sp>
       <p:sp>
         <p:nvSpPr>
-          <p:cNvPr id="5" name="TextBox 4"/>
+          <p:cNvPr id="7" name="TextBox 6"/>
           <p:cNvSpPr txBox="1"/>
           <p:nvPr/>
         </p:nvSpPr>
         <p:spPr>
           <a:xfrm>
-            <a:off x="4754880" y="1463040"/>
-            <a:ext cx="3657600" cy="4572000"/>
+            <a:off x="4663440" y="1508760"/>
+            <a:ext cx="4114800" cy="4846320"/>
           </a:xfrm>
           <a:prstGeom prst="rect">
             <a:avLst/>
@@ -7166,15 +8252,18 @@
           </a:bodyPr>
           <a:lstStyle/>
           <a:p>
-            <a:pPr>
-              <a:spcAft>
+            <a:pPr algn="l">
+              <a:spcBef>
                 <a:spcPts val="800"/>
-              </a:spcAft>
-              <a:defRPr sz="1600">
+              </a:spcBef>
+              <a:spcAft>
+                <a:spcPts val="400"/>
+              </a:spcAft>
+              <a:defRPr sz="1800" b="0" i="0">
                 <a:solidFill>
                   <a:srgbClr val="2C3E50"/>
                 </a:solidFill>
-                <a:latin typeface="Calibri"/>
+                <a:latin typeface="Avenir Next"/>
               </a:defRPr>
             </a:pPr>
             <a:r>
@@ -7182,15 +8271,18 @@
             </a:r>
           </a:p>
           <a:p>
-            <a:pPr>
-              <a:spcAft>
+            <a:pPr algn="l">
+              <a:spcBef>
                 <a:spcPts val="800"/>
-              </a:spcAft>
-              <a:defRPr sz="1600">
+              </a:spcBef>
+              <a:spcAft>
+                <a:spcPts val="400"/>
+              </a:spcAft>
+              <a:defRPr sz="1800" b="0" i="0">
                 <a:solidFill>
                   <a:srgbClr val="2C3E50"/>
                 </a:solidFill>
-                <a:latin typeface="Calibri"/>
+                <a:latin typeface="Avenir Next"/>
               </a:defRPr>
             </a:pPr>
             <a:r>
@@ -7198,15 +8290,18 @@
             </a:r>
           </a:p>
           <a:p>
-            <a:pPr>
-              <a:spcAft>
+            <a:pPr algn="l">
+              <a:spcBef>
                 <a:spcPts val="800"/>
-              </a:spcAft>
-              <a:defRPr sz="1600">
+              </a:spcBef>
+              <a:spcAft>
+                <a:spcPts val="400"/>
+              </a:spcAft>
+              <a:defRPr sz="1800" b="0" i="0">
                 <a:solidFill>
                   <a:srgbClr val="2C3E50"/>
                 </a:solidFill>
-                <a:latin typeface="Calibri"/>
+                <a:latin typeface="Avenir Next"/>
               </a:defRPr>
             </a:pPr>
             <a:r>
@@ -7214,15 +8309,18 @@
             </a:r>
           </a:p>
           <a:p>
-            <a:pPr>
-              <a:spcAft>
+            <a:pPr algn="l">
+              <a:spcBef>
                 <a:spcPts val="800"/>
-              </a:spcAft>
-              <a:defRPr sz="1600">
+              </a:spcBef>
+              <a:spcAft>
+                <a:spcPts val="400"/>
+              </a:spcAft>
+              <a:defRPr sz="1800" b="0" i="0">
                 <a:solidFill>
                   <a:srgbClr val="2C3E50"/>
                 </a:solidFill>
-                <a:latin typeface="Calibri"/>
+                <a:latin typeface="Avenir Next"/>
               </a:defRPr>
             </a:pPr>
             <a:r>
@@ -7259,14 +8357,57 @@
       <p:grpSpPr/>
       <p:sp>
         <p:nvSpPr>
-          <p:cNvPr id="2" name="TextBox 1"/>
+          <p:cNvPr id="2" name="Rectangle 1"/>
+          <p:cNvSpPr/>
+          <p:nvPr/>
+        </p:nvSpPr>
+        <p:spPr>
+          <a:xfrm>
+            <a:off x="0" y="0"/>
+            <a:ext cx="320040" cy="6858000"/>
+          </a:xfrm>
+          <a:prstGeom prst="rect">
+            <a:avLst/>
+          </a:prstGeom>
+          <a:solidFill>
+            <a:srgbClr val="1E2761"/>
+          </a:solidFill>
+          <a:ln>
+            <a:noFill/>
+          </a:ln>
+        </p:spPr>
+        <p:style>
+          <a:lnRef idx="1">
+            <a:schemeClr val="accent1"/>
+          </a:lnRef>
+          <a:fillRef idx="3">
+            <a:schemeClr val="accent1"/>
+          </a:fillRef>
+          <a:effectRef idx="2">
+            <a:schemeClr val="accent1"/>
+          </a:effectRef>
+          <a:fontRef idx="minor">
+            <a:schemeClr val="lt1"/>
+          </a:fontRef>
+        </p:style>
+        <p:txBody>
+          <a:bodyPr rtlCol="0" anchor="ctr"/>
+          <a:lstStyle/>
+          <a:p>
+            <a:pPr algn="ctr"/>
+          </a:p>
+        </p:txBody>
+      </p:sp>
+      <p:sp>
+        <p:nvSpPr>
+          <p:cNvPr id="3" name="TextBox 2"/>
           <p:cNvSpPr txBox="1"/>
           <p:nvPr/>
         </p:nvSpPr>
         <p:spPr>
           <a:xfrm>
-            <a:off x="731520" y="457200"/>
-            <a:ext cx="7680960" cy="731520"/>
+            <a:off x="731520" y="320040"/>
+            <a:ext cx="8046720" cy="822960"/>
           </a:xfrm>
           <a:prstGeom prst="rect">
             <a:avLst/>
@@ -7280,11 +8421,17 @@
           <a:lstStyle/>
           <a:p>
             <a:pPr algn="l">
-              <a:defRPr sz="2800" b="1">
+              <a:spcBef>
+                <a:spcPts val="0"/>
+              </a:spcBef>
+              <a:spcAft>
+                <a:spcPts val="0"/>
+              </a:spcAft>
+              <a:defRPr sz="3200" b="1" i="0">
                 <a:solidFill>
                   <a:srgbClr val="1E2761"/>
                 </a:solidFill>
-                <a:latin typeface="Georgia"/>
+                <a:latin typeface="Palatino"/>
               </a:defRPr>
             </a:pPr>
             <a:r>
@@ -7295,17 +8442,19 @@
       </p:sp>
       <p:sp>
         <p:nvSpPr>
-          <p:cNvPr id="3" name="Rectangle 2"/>
+          <p:cNvPr id="4" name="Rounded Rectangle 3"/>
           <p:cNvSpPr/>
           <p:nvPr/>
         </p:nvSpPr>
         <p:spPr>
           <a:xfrm>
-            <a:off x="731520" y="1143000"/>
-            <a:ext cx="1371600" cy="25400"/>
+            <a:off x="731520" y="1188720"/>
+            <a:ext cx="1828800" cy="50800"/>
           </a:xfrm>
-          <a:prstGeom prst="rect">
-            <a:avLst/>
+          <a:prstGeom prst="roundRect">
+            <a:avLst>
+              <a:gd name="adj" fmla="val 10000"/>
+            </a:avLst>
           </a:prstGeom>
           <a:solidFill>
             <a:srgbClr val="7B2D26"/>
@@ -7338,14 +8487,14 @@
       </p:sp>
       <p:sp>
         <p:nvSpPr>
-          <p:cNvPr id="4" name="TextBox 3"/>
+          <p:cNvPr id="5" name="TextBox 4"/>
           <p:cNvSpPr txBox="1"/>
           <p:nvPr/>
         </p:nvSpPr>
         <p:spPr>
           <a:xfrm>
-            <a:off x="731520" y="1463040"/>
-            <a:ext cx="7680960" cy="4572000"/>
+            <a:off x="731520" y="1554480"/>
+            <a:ext cx="7863840" cy="4754880"/>
           </a:xfrm>
           <a:prstGeom prst="rect">
             <a:avLst/>
@@ -7358,15 +8507,18 @@
           </a:bodyPr>
           <a:lstStyle/>
           <a:p>
-            <a:pPr>
-              <a:spcAft>
+            <a:pPr algn="l">
+              <a:spcBef>
                 <a:spcPts val="800"/>
-              </a:spcAft>
-              <a:defRPr sz="1800">
+              </a:spcBef>
+              <a:spcAft>
+                <a:spcPts val="400"/>
+              </a:spcAft>
+              <a:defRPr sz="2000" b="0" i="0">
                 <a:solidFill>
                   <a:srgbClr val="2C3E50"/>
                 </a:solidFill>
-                <a:latin typeface="Calibri"/>
+                <a:latin typeface="Avenir Next"/>
               </a:defRPr>
             </a:pPr>
             <a:r>
@@ -7374,15 +8526,18 @@
             </a:r>
           </a:p>
           <a:p>
-            <a:pPr>
-              <a:spcAft>
+            <a:pPr algn="l">
+              <a:spcBef>
                 <a:spcPts val="800"/>
-              </a:spcAft>
-              <a:defRPr sz="1800">
+              </a:spcBef>
+              <a:spcAft>
+                <a:spcPts val="400"/>
+              </a:spcAft>
+              <a:defRPr sz="2000" b="0" i="0">
                 <a:solidFill>
                   <a:srgbClr val="2C3E50"/>
                 </a:solidFill>
-                <a:latin typeface="Calibri"/>
+                <a:latin typeface="Avenir Next"/>
               </a:defRPr>
             </a:pPr>
             <a:r>
@@ -7390,15 +8545,18 @@
             </a:r>
           </a:p>
           <a:p>
-            <a:pPr>
-              <a:spcAft>
+            <a:pPr algn="l">
+              <a:spcBef>
                 <a:spcPts val="800"/>
-              </a:spcAft>
-              <a:defRPr sz="1800">
+              </a:spcBef>
+              <a:spcAft>
+                <a:spcPts val="400"/>
+              </a:spcAft>
+              <a:defRPr sz="2000" b="0" i="0">
                 <a:solidFill>
                   <a:srgbClr val="2C3E50"/>
                 </a:solidFill>
-                <a:latin typeface="Calibri"/>
+                <a:latin typeface="Avenir Next"/>
               </a:defRPr>
             </a:pPr>
             <a:r>
@@ -7406,15 +8564,18 @@
             </a:r>
           </a:p>
           <a:p>
-            <a:pPr>
-              <a:spcAft>
+            <a:pPr algn="l">
+              <a:spcBef>
                 <a:spcPts val="800"/>
-              </a:spcAft>
-              <a:defRPr sz="1800">
+              </a:spcBef>
+              <a:spcAft>
+                <a:spcPts val="400"/>
+              </a:spcAft>
+              <a:defRPr sz="2000" b="0" i="0">
                 <a:solidFill>
                   <a:srgbClr val="2C3E50"/>
                 </a:solidFill>
-                <a:latin typeface="Calibri"/>
+                <a:latin typeface="Avenir Next"/>
               </a:defRPr>
             </a:pPr>
             <a:r>
@@ -7422,79 +8583,94 @@
             </a:r>
           </a:p>
           <a:p>
-            <a:pPr>
-              <a:spcAft>
+            <a:pPr algn="l">
+              <a:spcBef>
+                <a:spcPts val="1600"/>
+              </a:spcBef>
+              <a:spcAft>
+                <a:spcPts val="400"/>
+              </a:spcAft>
+              <a:defRPr sz="2000" b="1" i="0">
+                <a:solidFill>
+                  <a:srgbClr val="2C3E50"/>
+                </a:solidFill>
+                <a:latin typeface="Avenir Next"/>
+              </a:defRPr>
+            </a:pPr>
+            <a:r>
+              <a:t>Three lives of one word:</a:t>
+            </a:r>
+          </a:p>
+          <a:p>
+            <a:pPr algn="l">
+              <a:spcBef>
+                <a:spcPts val="200"/>
+              </a:spcBef>
+              <a:spcAft>
+                <a:spcPts val="600"/>
+              </a:spcAft>
+              <a:defRPr sz="1800" b="0" i="1">
+                <a:solidFill>
+                  <a:srgbClr val="2C3E50"/>
+                </a:solidFill>
+                <a:latin typeface="Avenir Next"/>
+              </a:defRPr>
+            </a:pPr>
+            <a:r>
+              <a:t>     Ritual: consecration, sacrament</a:t>
+            </a:r>
+          </a:p>
+          <a:p>
+            <a:pPr algn="l">
+              <a:spcBef>
+                <a:spcPts val="200"/>
+              </a:spcBef>
+              <a:spcAft>
+                <a:spcPts val="600"/>
+              </a:spcAft>
+              <a:defRPr sz="1800" b="0" i="1">
+                <a:solidFill>
+                  <a:srgbClr val="2C3E50"/>
+                </a:solidFill>
+                <a:latin typeface="Avenir Next"/>
+              </a:defRPr>
+            </a:pPr>
+            <a:r>
+              <a:t>     Grammar: refinement — saṃskṛta = "Sanskrit" = the "well-made" language</a:t>
+            </a:r>
+          </a:p>
+          <a:p>
+            <a:pPr algn="l">
+              <a:spcBef>
+                <a:spcPts val="200"/>
+              </a:spcBef>
+              <a:spcAft>
+                <a:spcPts val="600"/>
+              </a:spcAft>
+              <a:defRPr sz="1800" b="0" i="1">
+                <a:solidFill>
+                  <a:srgbClr val="2C3E50"/>
+                </a:solidFill>
+                <a:latin typeface="Avenir Next"/>
+              </a:defRPr>
+            </a:pPr>
+            <a:r>
+              <a:t>     Yoga Sutras: the unconscious residue of experience</a:t>
+            </a:r>
+          </a:p>
+          <a:p>
+            <a:pPr algn="l">
+              <a:spcBef>
                 <a:spcPts val="800"/>
-              </a:spcAft>
-              <a:defRPr sz="1800">
+              </a:spcBef>
+              <a:spcAft>
+                <a:spcPts val="400"/>
+              </a:spcAft>
+              <a:defRPr sz="2000" b="0" i="0">
                 <a:solidFill>
                   <a:srgbClr val="2C3E50"/>
                 </a:solidFill>
-                <a:latin typeface="Calibri"/>
-              </a:defRPr>
-            </a:pPr>
-            <a:r>
-              <a:t>Three lives of one word:</a:t>
-            </a:r>
-          </a:p>
-          <a:p>
-            <a:pPr>
-              <a:spcAft>
-                <a:spcPts val="800"/>
-              </a:spcAft>
-              <a:defRPr sz="1800">
-                <a:solidFill>
-                  <a:srgbClr val="2C3E50"/>
-                </a:solidFill>
-                <a:latin typeface="Calibri"/>
-              </a:defRPr>
-            </a:pPr>
-            <a:r>
-              <a:t>Ritual: consecration, sacrament</a:t>
-            </a:r>
-          </a:p>
-          <a:p>
-            <a:pPr>
-              <a:spcAft>
-                <a:spcPts val="800"/>
-              </a:spcAft>
-              <a:defRPr sz="1800">
-                <a:solidFill>
-                  <a:srgbClr val="2C3E50"/>
-                </a:solidFill>
-                <a:latin typeface="Calibri"/>
-              </a:defRPr>
-            </a:pPr>
-            <a:r>
-              <a:t>Grammar: refinement — saṃskṛta = "Sanskrit" = the "well-made" language</a:t>
-            </a:r>
-          </a:p>
-          <a:p>
-            <a:pPr>
-              <a:spcAft>
-                <a:spcPts val="800"/>
-              </a:spcAft>
-              <a:defRPr sz="1800">
-                <a:solidFill>
-                  <a:srgbClr val="2C3E50"/>
-                </a:solidFill>
-                <a:latin typeface="Calibri"/>
-              </a:defRPr>
-            </a:pPr>
-            <a:r>
-              <a:t>Yoga Sutras: the unconscious residue of experience</a:t>
-            </a:r>
-          </a:p>
-          <a:p>
-            <a:pPr>
-              <a:spcAft>
-                <a:spcPts val="800"/>
-              </a:spcAft>
-              <a:defRPr sz="1800">
-                <a:solidFill>
-                  <a:srgbClr val="2C3E50"/>
-                </a:solidFill>
-                <a:latin typeface="Calibri"/>
+                <a:latin typeface="Avenir Next"/>
               </a:defRPr>
             </a:pPr>
             <a:r>
@@ -7531,14 +8707,59 @@
       <p:grpSpPr/>
       <p:sp>
         <p:nvSpPr>
-          <p:cNvPr id="2" name="TextBox 1"/>
+          <p:cNvPr id="2" name="Rounded Rectangle 1"/>
+          <p:cNvSpPr/>
+          <p:nvPr/>
+        </p:nvSpPr>
+        <p:spPr>
+          <a:xfrm>
+            <a:off x="731520" y="2560320"/>
+            <a:ext cx="2286000" cy="63500"/>
+          </a:xfrm>
+          <a:prstGeom prst="roundRect">
+            <a:avLst>
+              <a:gd name="adj" fmla="val 10000"/>
+            </a:avLst>
+          </a:prstGeom>
+          <a:solidFill>
+            <a:srgbClr val="7B2D26"/>
+          </a:solidFill>
+          <a:ln>
+            <a:noFill/>
+          </a:ln>
+        </p:spPr>
+        <p:style>
+          <a:lnRef idx="1">
+            <a:schemeClr val="accent1"/>
+          </a:lnRef>
+          <a:fillRef idx="3">
+            <a:schemeClr val="accent1"/>
+          </a:fillRef>
+          <a:effectRef idx="2">
+            <a:schemeClr val="accent1"/>
+          </a:effectRef>
+          <a:fontRef idx="minor">
+            <a:schemeClr val="lt1"/>
+          </a:fontRef>
+        </p:style>
+        <p:txBody>
+          <a:bodyPr rtlCol="0" anchor="ctr"/>
+          <a:lstStyle/>
+          <a:p>
+            <a:pPr algn="ctr"/>
+          </a:p>
+        </p:txBody>
+      </p:sp>
+      <p:sp>
+        <p:nvSpPr>
+          <p:cNvPr id="3" name="TextBox 2"/>
           <p:cNvSpPr txBox="1"/>
           <p:nvPr/>
         </p:nvSpPr>
         <p:spPr>
           <a:xfrm>
-            <a:off x="731520" y="2286000"/>
-            <a:ext cx="7680960" cy="1828800"/>
+            <a:off x="731520" y="2834640"/>
+            <a:ext cx="7680960" cy="1645920"/>
           </a:xfrm>
           <a:prstGeom prst="rect">
             <a:avLst/>
@@ -7552,11 +8773,17 @@
           <a:lstStyle/>
           <a:p>
             <a:pPr algn="l">
-              <a:defRPr sz="3200" b="1">
+              <a:spcBef>
+                <a:spcPts val="0"/>
+              </a:spcBef>
+              <a:spcAft>
+                <a:spcPts val="0"/>
+              </a:spcAft>
+              <a:defRPr sz="3800" b="1" i="0">
                 <a:solidFill>
                   <a:srgbClr val="FFFFFF"/>
                 </a:solidFill>
-                <a:latin typeface="Georgia"/>
+                <a:latin typeface="Palatino"/>
               </a:defRPr>
             </a:pPr>
             <a:r>

--- a/docs/final_presentation.pptx
+++ b/docs/final_presentation.pptx
@@ -18,6 +18,7 @@
     <p:sldId id="266" r:id="rId18"/>
     <p:sldId id="267" r:id="rId19"/>
     <p:sldId id="268" r:id="rId20"/>
+    <p:sldId id="269" r:id="rId21"/>
   </p:sldIdLst>
   <p:sldSz cx="12191695" cy="6858000" type="screen4x3"/>
   <p:notesSz cx="6858000" cy="9144000"/>
@@ -798,6 +799,88 @@
 </file>
 
 <file path=ppt/notesSlides/notesSlide13.xml><?xml version="1.0" encoding="utf-8"?>
+<p:notes xmlns:a="http://schemas.openxmlformats.org/drawingml/2006/main" xmlns:p="http://schemas.openxmlformats.org/presentationml/2006/main" xmlns:r="http://schemas.openxmlformats.org/officeDocument/2006/relationships">
+  <p:cSld>
+    <p:spTree>
+      <p:nvGrpSpPr>
+        <p:cNvPr id="1" name=""/>
+        <p:cNvGrpSpPr/>
+        <p:nvPr/>
+      </p:nvGrpSpPr>
+      <p:grpSpPr>
+        <a:xfrm>
+          <a:off x="0" y="0"/>
+          <a:ext cx="0" cy="0"/>
+          <a:chOff x="0" y="0"/>
+          <a:chExt cx="0" cy="0"/>
+        </a:xfrm>
+      </p:grpSpPr>
+      <p:sp>
+        <p:nvSpPr>
+          <p:cNvPr id="2" name="Slide Image Placeholder 1"/>
+          <p:cNvSpPr>
+            <a:spLocks noGrp="1"/>
+          </p:cNvSpPr>
+          <p:nvPr>
+            <p:ph type="sldImg" idx="2"/>
+          </p:nvPr>
+        </p:nvSpPr>
+        <p:spPr/>
+      </p:sp>
+      <p:sp>
+        <p:nvSpPr>
+          <p:cNvPr id="3" name="Notes Placeholder 2"/>
+          <p:cNvSpPr>
+            <a:spLocks noGrp="1"/>
+          </p:cNvSpPr>
+          <p:nvPr>
+            <p:ph type="body" idx="3" sz="quarter"/>
+          </p:nvPr>
+        </p:nvSpPr>
+        <p:spPr/>
+        <p:txBody>
+          <a:bodyPr/>
+          <a:lstStyle/>
+          <a:p>
+            <a:pPr>
+              <a:defRPr sz="1100">
+                <a:latin typeface="Avenir Next"/>
+              </a:defRPr>
+            </a:pPr>
+            <a:r>
+              <a:t>Let me show you something quickly. I built an interactive tool that lets you explore all of these terms yourself. It has 84 terms — every term from your Yoga Sutras vocabulary lists, all four chapters. Let me switch to the browser and show you. [Switch to browser, open demo/index.html] Type "samadhi" — show the full breakdown card. Point out the segmentation strip (color-coded prefixes, root, suffixes), the morphology grid, the philosophical meaning, the Chinese equivalents. Click "karma" from the browse grid to show it works for any term. Point out that karma and samskara share the root kr ("to do/make"). "This is available for you to explore after class — it's just an HTML file, works offline, no installation needed." [Switch back to slides]</a:t>
+            </a:r>
+          </a:p>
+          <a:p>
+            <a:pPr>
+              <a:defRPr sz="1100">
+                <a:latin typeface="Avenir Next"/>
+              </a:defRPr>
+            </a:pPr>
+          </a:p>
+        </p:txBody>
+      </p:sp>
+      <p:sp>
+        <p:nvSpPr>
+          <p:cNvPr id="4" name="Slide Number Placeholder 3"/>
+          <p:cNvSpPr>
+            <a:spLocks noGrp="1"/>
+          </p:cNvSpPr>
+          <p:nvPr>
+            <p:ph type="sldNum" idx="5" sz="quarter"/>
+          </p:nvPr>
+        </p:nvSpPr>
+        <p:spPr/>
+      </p:sp>
+    </p:spTree>
+  </p:cSld>
+  <p:clrMapOvr>
+    <a:masterClrMapping/>
+  </p:clrMapOvr>
+</p:notes>
+</file>
+
+<file path=ppt/notesSlides/notesSlide14.xml><?xml version="1.0" encoding="utf-8"?>
 <p:notes xmlns:a="http://schemas.openxmlformats.org/drawingml/2006/main" xmlns:p="http://schemas.openxmlformats.org/presentationml/2006/main" xmlns:r="http://schemas.openxmlformats.org/officeDocument/2006/relationships">
   <p:cSld>
     <p:spTree>
@@ -5993,6 +6076,337 @@
 </file>
 
 <file path=ppt/slides/slide13.xml><?xml version="1.0" encoding="utf-8"?>
+<p:sld xmlns:a="http://schemas.openxmlformats.org/drawingml/2006/main" xmlns:p="http://schemas.openxmlformats.org/presentationml/2006/main" xmlns:r="http://schemas.openxmlformats.org/officeDocument/2006/relationships">
+  <p:cSld>
+    <p:bg>
+      <p:bgPr>
+        <a:solidFill>
+          <a:srgbClr val="F7F6F2"/>
+        </a:solidFill>
+        <a:effectLst/>
+      </p:bgPr>
+    </p:bg>
+    <p:spTree>
+      <p:nvGrpSpPr>
+        <p:cNvPr id="1" name=""/>
+        <p:cNvGrpSpPr/>
+        <p:nvPr/>
+      </p:nvGrpSpPr>
+      <p:grpSpPr/>
+      <p:sp>
+        <p:nvSpPr>
+          <p:cNvPr id="2" name="Rectangle 1"/>
+          <p:cNvSpPr/>
+          <p:nvPr/>
+        </p:nvSpPr>
+        <p:spPr>
+          <a:xfrm>
+            <a:off x="0" y="0"/>
+            <a:ext cx="320040" cy="6858000"/>
+          </a:xfrm>
+          <a:prstGeom prst="rect">
+            <a:avLst/>
+          </a:prstGeom>
+          <a:solidFill>
+            <a:srgbClr val="1E2761"/>
+          </a:solidFill>
+          <a:ln>
+            <a:noFill/>
+          </a:ln>
+        </p:spPr>
+        <p:style>
+          <a:lnRef idx="1">
+            <a:schemeClr val="accent1"/>
+          </a:lnRef>
+          <a:fillRef idx="3">
+            <a:schemeClr val="accent1"/>
+          </a:fillRef>
+          <a:effectRef idx="2">
+            <a:schemeClr val="accent1"/>
+          </a:effectRef>
+          <a:fontRef idx="minor">
+            <a:schemeClr val="lt1"/>
+          </a:fontRef>
+        </p:style>
+        <p:txBody>
+          <a:bodyPr rtlCol="0" anchor="ctr"/>
+          <a:lstStyle/>
+          <a:p>
+            <a:pPr algn="ctr"/>
+          </a:p>
+        </p:txBody>
+      </p:sp>
+      <p:sp>
+        <p:nvSpPr>
+          <p:cNvPr id="3" name="TextBox 2"/>
+          <p:cNvSpPr txBox="1"/>
+          <p:nvPr/>
+        </p:nvSpPr>
+        <p:spPr>
+          <a:xfrm>
+            <a:off x="731520" y="320040"/>
+            <a:ext cx="8046720" cy="822960"/>
+          </a:xfrm>
+          <a:prstGeom prst="rect">
+            <a:avLst/>
+          </a:prstGeom>
+          <a:noFill/>
+        </p:spPr>
+        <p:txBody>
+          <a:bodyPr wrap="square">
+            <a:spAutoFit/>
+          </a:bodyPr>
+          <a:lstStyle/>
+          <a:p>
+            <a:pPr algn="l">
+              <a:spcBef>
+                <a:spcPts val="0"/>
+              </a:spcBef>
+              <a:spcAft>
+                <a:spcPts val="0"/>
+              </a:spcAft>
+              <a:defRPr sz="3200" b="1" i="0">
+                <a:solidFill>
+                  <a:srgbClr val="1E2761"/>
+                </a:solidFill>
+                <a:latin typeface="Palatino"/>
+              </a:defRPr>
+            </a:pPr>
+            <a:r>
+              <a:t>Live Demo — Sanskrit Word Explorer</a:t>
+            </a:r>
+          </a:p>
+        </p:txBody>
+      </p:sp>
+      <p:sp>
+        <p:nvSpPr>
+          <p:cNvPr id="4" name="Rounded Rectangle 3"/>
+          <p:cNvSpPr/>
+          <p:nvPr/>
+        </p:nvSpPr>
+        <p:spPr>
+          <a:xfrm>
+            <a:off x="731520" y="1188720"/>
+            <a:ext cx="1828800" cy="50800"/>
+          </a:xfrm>
+          <a:prstGeom prst="roundRect">
+            <a:avLst>
+              <a:gd name="adj" fmla="val 10000"/>
+            </a:avLst>
+          </a:prstGeom>
+          <a:solidFill>
+            <a:srgbClr val="7B2D26"/>
+          </a:solidFill>
+          <a:ln>
+            <a:noFill/>
+          </a:ln>
+        </p:spPr>
+        <p:style>
+          <a:lnRef idx="1">
+            <a:schemeClr val="accent1"/>
+          </a:lnRef>
+          <a:fillRef idx="3">
+            <a:schemeClr val="accent1"/>
+          </a:fillRef>
+          <a:effectRef idx="2">
+            <a:schemeClr val="accent1"/>
+          </a:effectRef>
+          <a:fontRef idx="minor">
+            <a:schemeClr val="lt1"/>
+          </a:fontRef>
+        </p:style>
+        <p:txBody>
+          <a:bodyPr rtlCol="0" anchor="ctr"/>
+          <a:lstStyle/>
+          <a:p>
+            <a:pPr algn="ctr"/>
+          </a:p>
+        </p:txBody>
+      </p:sp>
+      <p:sp>
+        <p:nvSpPr>
+          <p:cNvPr id="5" name="TextBox 4"/>
+          <p:cNvSpPr txBox="1"/>
+          <p:nvPr/>
+        </p:nvSpPr>
+        <p:spPr>
+          <a:xfrm>
+            <a:off x="731520" y="1554480"/>
+            <a:ext cx="7863840" cy="4754880"/>
+          </a:xfrm>
+          <a:prstGeom prst="rect">
+            <a:avLst/>
+          </a:prstGeom>
+          <a:noFill/>
+        </p:spPr>
+        <p:txBody>
+          <a:bodyPr wrap="square">
+            <a:spAutoFit/>
+          </a:bodyPr>
+          <a:lstStyle/>
+          <a:p>
+            <a:pPr algn="l">
+              <a:spcBef>
+                <a:spcPts val="1600"/>
+              </a:spcBef>
+              <a:spcAft>
+                <a:spcPts val="400"/>
+              </a:spcAft>
+              <a:defRPr sz="2000" b="1" i="0">
+                <a:solidFill>
+                  <a:srgbClr val="2C3E50"/>
+                </a:solidFill>
+                <a:latin typeface="Avenir Next"/>
+              </a:defRPr>
+            </a:pPr>
+            <a:r>
+              <a:t>84 terms from all 4 chapters of the Yoga Sutras</a:t>
+            </a:r>
+          </a:p>
+          <a:p>
+            <a:pPr algn="l">
+              <a:spcBef>
+                <a:spcPts val="200"/>
+              </a:spcBef>
+              <a:spcAft>
+                <a:spcPts val="600"/>
+              </a:spcAft>
+              <a:defRPr sz="1800" b="0" i="1">
+                <a:solidFill>
+                  <a:srgbClr val="2C3E50"/>
+                </a:solidFill>
+                <a:latin typeface="Avenir Next"/>
+              </a:defRPr>
+            </a:pPr>
+            <a:r>
+              <a:t>     Search by English, IAST, or Devanagari</a:t>
+            </a:r>
+          </a:p>
+          <a:p>
+            <a:pPr algn="l">
+              <a:spcBef>
+                <a:spcPts val="200"/>
+              </a:spcBef>
+              <a:spcAft>
+                <a:spcPts val="600"/>
+              </a:spcAft>
+              <a:defRPr sz="1800" b="0" i="1">
+                <a:solidFill>
+                  <a:srgbClr val="2C3E50"/>
+                </a:solidFill>
+                <a:latin typeface="Avenir Next"/>
+              </a:defRPr>
+            </a:pPr>
+            <a:r>
+              <a:t>     Color-coded morphological segmentation</a:t>
+            </a:r>
+          </a:p>
+          <a:p>
+            <a:pPr algn="l">
+              <a:spcBef>
+                <a:spcPts val="200"/>
+              </a:spcBef>
+              <a:spcAft>
+                <a:spcPts val="600"/>
+              </a:spcAft>
+              <a:defRPr sz="1800" b="0" i="1">
+                <a:solidFill>
+                  <a:srgbClr val="2C3E50"/>
+                </a:solidFill>
+                <a:latin typeface="Avenir Next"/>
+              </a:defRPr>
+            </a:pPr>
+            <a:r>
+              <a:t>     Root, prefix, and suffix breakdown cards</a:t>
+            </a:r>
+          </a:p>
+          <a:p>
+            <a:pPr algn="l">
+              <a:spcBef>
+                <a:spcPts val="200"/>
+              </a:spcBef>
+              <a:spcAft>
+                <a:spcPts val="600"/>
+              </a:spcAft>
+              <a:defRPr sz="1800" b="0" i="1">
+                <a:solidFill>
+                  <a:srgbClr val="2C3E50"/>
+                </a:solidFill>
+                <a:latin typeface="Avenir Next"/>
+              </a:defRPr>
+            </a:pPr>
+            <a:r>
+              <a:t>     Philosophical meaning and Yoga Sutras references</a:t>
+            </a:r>
+          </a:p>
+          <a:p>
+            <a:pPr algn="l">
+              <a:spcBef>
+                <a:spcPts val="200"/>
+              </a:spcBef>
+              <a:spcAft>
+                <a:spcPts val="600"/>
+              </a:spcAft>
+              <a:defRPr sz="1800" b="0" i="1">
+                <a:solidFill>
+                  <a:srgbClr val="2C3E50"/>
+                </a:solidFill>
+                <a:latin typeface="Avenir Next"/>
+              </a:defRPr>
+            </a:pPr>
+            <a:r>
+              <a:t>     Chinese Buddhist equivalents where attested</a:t>
+            </a:r>
+          </a:p>
+          <a:p>
+            <a:pPr algn="l">
+              <a:spcBef>
+                <a:spcPts val="1600"/>
+              </a:spcBef>
+              <a:spcAft>
+                <a:spcPts val="400"/>
+              </a:spcAft>
+              <a:defRPr sz="2000" b="1" i="0">
+                <a:solidFill>
+                  <a:srgbClr val="2C3E50"/>
+                </a:solidFill>
+                <a:latin typeface="Avenir Next"/>
+              </a:defRPr>
+            </a:pPr>
+            <a:r>
+              <a:t>Works offline — no installation needed</a:t>
+            </a:r>
+          </a:p>
+          <a:p>
+            <a:pPr algn="l">
+              <a:spcBef>
+                <a:spcPts val="200"/>
+              </a:spcBef>
+              <a:spcAft>
+                <a:spcPts val="600"/>
+              </a:spcAft>
+              <a:defRPr sz="1800" b="0" i="1">
+                <a:solidFill>
+                  <a:srgbClr val="2C3E50"/>
+                </a:solidFill>
+                <a:latin typeface="Avenir Next"/>
+              </a:defRPr>
+            </a:pPr>
+            <a:r>
+              <a:t>     Available for you to explore after class</a:t>
+            </a:r>
+          </a:p>
+        </p:txBody>
+      </p:sp>
+    </p:spTree>
+  </p:cSld>
+  <p:clrMapOvr>
+    <a:masterClrMapping/>
+  </p:clrMapOvr>
+</p:sld>
+</file>
+
+<file path=ppt/slides/slide14.xml><?xml version="1.0" encoding="utf-8"?>
 <p:sld xmlns:a="http://schemas.openxmlformats.org/drawingml/2006/main" xmlns:p="http://schemas.openxmlformats.org/presentationml/2006/main" xmlns:r="http://schemas.openxmlformats.org/officeDocument/2006/relationships">
   <p:cSld>
     <p:bg>

--- a/docs/final_presentation.pptx
+++ b/docs/final_presentation.pptx
@@ -5776,7 +5776,7 @@
               </a:defRPr>
             </a:pPr>
             <a:r>
-              <a:t>svarupa vs. 自性 zixing — When the Gap Is the Finding</a:t>
+              <a:t>svarupa vs. 自性 zixing — The Gap Is the Finding</a:t>
             </a:r>
           </a:p>
         </p:txBody>

--- a/docs/final_presentation.pptx
+++ b/docs/final_presentation.pptx
@@ -4859,6 +4859,1292 @@
         <p:spPr>
           <a:xfrm>
             <a:off x="731520" y="320040"/>
+            <a:ext cx="10515600" cy="1005840"/>
+          </a:xfrm>
+          <a:prstGeom prst="rect">
+            <a:avLst/>
+          </a:prstGeom>
+          <a:noFill/>
+        </p:spPr>
+        <p:txBody>
+          <a:bodyPr wrap="square">
+            <a:spAutoFit/>
+          </a:bodyPr>
+          <a:lstStyle/>
+          <a:p>
+            <a:pPr algn="l">
+              <a:spcBef>
+                <a:spcPts val="0"/>
+              </a:spcBef>
+              <a:spcAft>
+                <a:spcPts val="0"/>
+              </a:spcAft>
+              <a:defRPr sz="2800" b="1" i="0">
+                <a:solidFill>
+                  <a:srgbClr val="1E2761"/>
+                </a:solidFill>
+                <a:latin typeface="Palatino"/>
+              </a:defRPr>
+            </a:pPr>
+            <a:r>
+              <a:t>dhyana to chan to zen</a:t>
+            </a:r>
+          </a:p>
+        </p:txBody>
+      </p:sp>
+      <p:sp>
+        <p:nvSpPr>
+          <p:cNvPr id="4" name="Rounded Rectangle 3"/>
+          <p:cNvSpPr/>
+          <p:nvPr/>
+        </p:nvSpPr>
+        <p:spPr>
+          <a:xfrm>
+            <a:off x="731520" y="1371600"/>
+            <a:ext cx="1828800" cy="50800"/>
+          </a:xfrm>
+          <a:prstGeom prst="roundRect">
+            <a:avLst>
+              <a:gd name="adj" fmla="val 10000"/>
+            </a:avLst>
+          </a:prstGeom>
+          <a:solidFill>
+            <a:srgbClr val="7B2D26"/>
+          </a:solidFill>
+          <a:ln>
+            <a:noFill/>
+          </a:ln>
+        </p:spPr>
+        <p:style>
+          <a:lnRef idx="1">
+            <a:schemeClr val="accent1"/>
+          </a:lnRef>
+          <a:fillRef idx="3">
+            <a:schemeClr val="accent1"/>
+          </a:fillRef>
+          <a:effectRef idx="2">
+            <a:schemeClr val="accent1"/>
+          </a:effectRef>
+          <a:fontRef idx="minor">
+            <a:schemeClr val="lt1"/>
+          </a:fontRef>
+        </p:style>
+        <p:txBody>
+          <a:bodyPr rtlCol="0" anchor="ctr"/>
+          <a:lstStyle/>
+          <a:p>
+            <a:pPr algn="ctr"/>
+          </a:p>
+        </p:txBody>
+      </p:sp>
+      <p:sp>
+        <p:nvSpPr>
+          <p:cNvPr id="5" name="Rectangle 4"/>
+          <p:cNvSpPr/>
+          <p:nvPr/>
+        </p:nvSpPr>
+        <p:spPr>
+          <a:xfrm>
+            <a:off x="4434840" y="1645920"/>
+            <a:ext cx="19050" cy="4572000"/>
+          </a:xfrm>
+          <a:prstGeom prst="rect">
+            <a:avLst/>
+          </a:prstGeom>
+          <a:solidFill>
+            <a:srgbClr val="D0D0D0"/>
+          </a:solidFill>
+          <a:ln>
+            <a:noFill/>
+          </a:ln>
+        </p:spPr>
+        <p:style>
+          <a:lnRef idx="1">
+            <a:schemeClr val="accent1"/>
+          </a:lnRef>
+          <a:fillRef idx="3">
+            <a:schemeClr val="accent1"/>
+          </a:fillRef>
+          <a:effectRef idx="2">
+            <a:schemeClr val="accent1"/>
+          </a:effectRef>
+          <a:fontRef idx="minor">
+            <a:schemeClr val="lt1"/>
+          </a:fontRef>
+        </p:style>
+        <p:txBody>
+          <a:bodyPr rtlCol="0" anchor="ctr"/>
+          <a:lstStyle/>
+          <a:p>
+            <a:pPr algn="ctr"/>
+          </a:p>
+        </p:txBody>
+      </p:sp>
+      <p:sp>
+        <p:nvSpPr>
+          <p:cNvPr id="6" name="TextBox 5"/>
+          <p:cNvSpPr txBox="1"/>
+          <p:nvPr/>
+        </p:nvSpPr>
+        <p:spPr>
+          <a:xfrm>
+            <a:off x="731520" y="1691640"/>
+            <a:ext cx="3566160" cy="4663440"/>
+          </a:xfrm>
+          <a:prstGeom prst="rect">
+            <a:avLst/>
+          </a:prstGeom>
+          <a:noFill/>
+        </p:spPr>
+        <p:txBody>
+          <a:bodyPr wrap="square">
+            <a:spAutoFit/>
+          </a:bodyPr>
+          <a:lstStyle/>
+          <a:p>
+            <a:pPr algn="l">
+              <a:spcBef>
+                <a:spcPts val="800"/>
+              </a:spcBef>
+              <a:spcAft>
+                <a:spcPts val="400"/>
+              </a:spcAft>
+              <a:defRPr sz="1800" b="0" i="0">
+                <a:solidFill>
+                  <a:srgbClr val="2C3E50"/>
+                </a:solidFill>
+                <a:latin typeface="Avenir Next"/>
+              </a:defRPr>
+            </a:pPr>
+            <a:r>
+              <a:t>The phonetic chain:</a:t>
+            </a:r>
+          </a:p>
+          <a:p>
+            <a:pPr algn="l">
+              <a:spcBef>
+                <a:spcPts val="800"/>
+              </a:spcBef>
+              <a:spcAft>
+                <a:spcPts val="400"/>
+              </a:spcAft>
+              <a:defRPr sz="1800" b="0" i="0">
+                <a:solidFill>
+                  <a:srgbClr val="2C3E50"/>
+                </a:solidFill>
+                <a:latin typeface="Avenir Next"/>
+              </a:defRPr>
+            </a:pPr>
+            <a:r>
+              <a:t>dhyana (Sanskrit)</a:t>
+            </a:r>
+          </a:p>
+          <a:p>
+            <a:pPr algn="l">
+              <a:spcBef>
+                <a:spcPts val="800"/>
+              </a:spcBef>
+              <a:spcAft>
+                <a:spcPts val="400"/>
+              </a:spcAft>
+              <a:defRPr sz="1800" b="0" i="0">
+                <a:solidFill>
+                  <a:srgbClr val="2C3E50"/>
+                </a:solidFill>
+                <a:latin typeface="Avenir Next"/>
+              </a:defRPr>
+            </a:pPr>
+            <a:r>
+              <a:t>jhana (Pali/Prakrit)</a:t>
+            </a:r>
+          </a:p>
+          <a:p>
+            <a:pPr algn="l">
+              <a:spcBef>
+                <a:spcPts val="800"/>
+              </a:spcBef>
+              <a:spcAft>
+                <a:spcPts val="400"/>
+              </a:spcAft>
+              <a:defRPr sz="1800" b="0" i="0">
+                <a:solidFill>
+                  <a:srgbClr val="2C3E50"/>
+                </a:solidFill>
+                <a:latin typeface="Avenir Next"/>
+              </a:defRPr>
+            </a:pPr>
+            <a:r>
+              <a:t>channa / 禪那 (Chinese)</a:t>
+            </a:r>
+          </a:p>
+          <a:p>
+            <a:pPr algn="l">
+              <a:spcBef>
+                <a:spcPts val="800"/>
+              </a:spcBef>
+              <a:spcAft>
+                <a:spcPts val="400"/>
+              </a:spcAft>
+              <a:defRPr sz="1800" b="0" i="0">
+                <a:solidFill>
+                  <a:srgbClr val="2C3E50"/>
+                </a:solidFill>
+                <a:latin typeface="Avenir Next"/>
+              </a:defRPr>
+            </a:pPr>
+            <a:r>
+              <a:t>chan / 禪 (abbreviated)</a:t>
+            </a:r>
+          </a:p>
+          <a:p>
+            <a:pPr algn="l">
+              <a:spcBef>
+                <a:spcPts val="800"/>
+              </a:spcBef>
+              <a:spcAft>
+                <a:spcPts val="400"/>
+              </a:spcAft>
+              <a:defRPr sz="1800" b="0" i="0">
+                <a:solidFill>
+                  <a:srgbClr val="2C3E50"/>
+                </a:solidFill>
+                <a:latin typeface="Avenir Next"/>
+              </a:defRPr>
+            </a:pPr>
+            <a:r>
+              <a:t>zen / 禅 (Japanese)</a:t>
+            </a:r>
+          </a:p>
+        </p:txBody>
+      </p:sp>
+      <p:sp>
+        <p:nvSpPr>
+          <p:cNvPr id="7" name="TextBox 6"/>
+          <p:cNvSpPr txBox="1"/>
+          <p:nvPr/>
+        </p:nvSpPr>
+        <p:spPr>
+          <a:xfrm>
+            <a:off x="4663440" y="1691640"/>
+            <a:ext cx="4114800" cy="4663440"/>
+          </a:xfrm>
+          <a:prstGeom prst="rect">
+            <a:avLst/>
+          </a:prstGeom>
+          <a:noFill/>
+        </p:spPr>
+        <p:txBody>
+          <a:bodyPr wrap="square">
+            <a:spAutoFit/>
+          </a:bodyPr>
+          <a:lstStyle/>
+          <a:p>
+            <a:pPr algn="l">
+              <a:spcBef>
+                <a:spcPts val="800"/>
+              </a:spcBef>
+              <a:spcAft>
+                <a:spcPts val="400"/>
+              </a:spcAft>
+              <a:defRPr sz="1800" b="0" i="0">
+                <a:solidFill>
+                  <a:srgbClr val="2C3E50"/>
+                </a:solidFill>
+                <a:latin typeface="Avenir Next"/>
+              </a:defRPr>
+            </a:pPr>
+            <a:r>
+              <a:t>Four Chinese renderings:</a:t>
+            </a:r>
+          </a:p>
+          <a:p>
+            <a:pPr algn="l">
+              <a:spcBef>
+                <a:spcPts val="800"/>
+              </a:spcBef>
+              <a:spcAft>
+                <a:spcPts val="400"/>
+              </a:spcAft>
+              <a:defRPr sz="1800" b="0" i="0">
+                <a:solidFill>
+                  <a:srgbClr val="2C3E50"/>
+                </a:solidFill>
+                <a:latin typeface="Avenir Next"/>
+              </a:defRPr>
+            </a:pPr>
+            <a:r>
+              <a:t>禪那 channa — full transliteration</a:t>
+            </a:r>
+          </a:p>
+          <a:p>
+            <a:pPr algn="l">
+              <a:spcBef>
+                <a:spcPts val="800"/>
+              </a:spcBef>
+              <a:spcAft>
+                <a:spcPts val="400"/>
+              </a:spcAft>
+              <a:defRPr sz="1800" b="0" i="0">
+                <a:solidFill>
+                  <a:srgbClr val="2C3E50"/>
+                </a:solidFill>
+                <a:latin typeface="Avenir Next"/>
+              </a:defRPr>
+            </a:pPr>
+            <a:r>
+              <a:t>禪 chan — abbreviation (became school name)</a:t>
+            </a:r>
+          </a:p>
+          <a:p>
+            <a:pPr algn="l">
+              <a:spcBef>
+                <a:spcPts val="800"/>
+              </a:spcBef>
+              <a:spcAft>
+                <a:spcPts val="400"/>
+              </a:spcAft>
+              <a:defRPr sz="1800" b="0" i="0">
+                <a:solidFill>
+                  <a:srgbClr val="2C3E50"/>
+                </a:solidFill>
+                <a:latin typeface="Avenir Next"/>
+              </a:defRPr>
+            </a:pPr>
+            <a:r>
+              <a:t>禪定 chanding — hybrid (sound + meaning)</a:t>
+            </a:r>
+          </a:p>
+          <a:p>
+            <a:pPr algn="l">
+              <a:spcBef>
+                <a:spcPts val="800"/>
+              </a:spcBef>
+              <a:spcAft>
+                <a:spcPts val="400"/>
+              </a:spcAft>
+              <a:defRPr sz="1800" b="0" i="0">
+                <a:solidFill>
+                  <a:srgbClr val="2C3E50"/>
+                </a:solidFill>
+                <a:latin typeface="Avenir Next"/>
+              </a:defRPr>
+            </a:pPr>
+            <a:r>
+              <a:t>靜慮 jinglu — Xuanzang's semantic: "quiet contemplation"</a:t>
+            </a:r>
+          </a:p>
+        </p:txBody>
+      </p:sp>
+    </p:spTree>
+  </p:cSld>
+  <p:clrMapOvr>
+    <a:masterClrMapping/>
+  </p:clrMapOvr>
+</p:sld>
+</file>
+
+<file path=ppt/slides/slide11.xml><?xml version="1.0" encoding="utf-8"?>
+<p:sld xmlns:a="http://schemas.openxmlformats.org/drawingml/2006/main" xmlns:p="http://schemas.openxmlformats.org/presentationml/2006/main" xmlns:r="http://schemas.openxmlformats.org/officeDocument/2006/relationships">
+  <p:cSld>
+    <p:bg>
+      <p:bgPr>
+        <a:solidFill>
+          <a:srgbClr val="F7F6F2"/>
+        </a:solidFill>
+        <a:effectLst/>
+      </p:bgPr>
+    </p:bg>
+    <p:spTree>
+      <p:nvGrpSpPr>
+        <p:cNvPr id="1" name=""/>
+        <p:cNvGrpSpPr/>
+        <p:nvPr/>
+      </p:nvGrpSpPr>
+      <p:grpSpPr/>
+      <p:sp>
+        <p:nvSpPr>
+          <p:cNvPr id="2" name="Rectangle 1"/>
+          <p:cNvSpPr/>
+          <p:nvPr/>
+        </p:nvSpPr>
+        <p:spPr>
+          <a:xfrm>
+            <a:off x="0" y="0"/>
+            <a:ext cx="320040" cy="6858000"/>
+          </a:xfrm>
+          <a:prstGeom prst="rect">
+            <a:avLst/>
+          </a:prstGeom>
+          <a:solidFill>
+            <a:srgbClr val="1E2761"/>
+          </a:solidFill>
+          <a:ln>
+            <a:noFill/>
+          </a:ln>
+        </p:spPr>
+        <p:style>
+          <a:lnRef idx="1">
+            <a:schemeClr val="accent1"/>
+          </a:lnRef>
+          <a:fillRef idx="3">
+            <a:schemeClr val="accent1"/>
+          </a:fillRef>
+          <a:effectRef idx="2">
+            <a:schemeClr val="accent1"/>
+          </a:effectRef>
+          <a:fontRef idx="minor">
+            <a:schemeClr val="lt1"/>
+          </a:fontRef>
+        </p:style>
+        <p:txBody>
+          <a:bodyPr rtlCol="0" anchor="ctr"/>
+          <a:lstStyle/>
+          <a:p>
+            <a:pPr algn="ctr"/>
+          </a:p>
+        </p:txBody>
+      </p:sp>
+      <p:sp>
+        <p:nvSpPr>
+          <p:cNvPr id="3" name="TextBox 2"/>
+          <p:cNvSpPr txBox="1"/>
+          <p:nvPr/>
+        </p:nvSpPr>
+        <p:spPr>
+          <a:xfrm>
+            <a:off x="731520" y="320040"/>
+            <a:ext cx="10515600" cy="1005840"/>
+          </a:xfrm>
+          <a:prstGeom prst="rect">
+            <a:avLst/>
+          </a:prstGeom>
+          <a:noFill/>
+        </p:spPr>
+        <p:txBody>
+          <a:bodyPr wrap="square">
+            <a:spAutoFit/>
+          </a:bodyPr>
+          <a:lstStyle/>
+          <a:p>
+            <a:pPr algn="l">
+              <a:spcBef>
+                <a:spcPts val="0"/>
+              </a:spcBef>
+              <a:spcAft>
+                <a:spcPts val="0"/>
+              </a:spcAft>
+              <a:defRPr sz="2800" b="1" i="0">
+                <a:solidFill>
+                  <a:srgbClr val="1E2761"/>
+                </a:solidFill>
+                <a:latin typeface="Palatino"/>
+              </a:defRPr>
+            </a:pPr>
+            <a:r>
+              <a:t>अविद्या avidya to 無明 wuming</a:t>
+            </a:r>
+          </a:p>
+        </p:txBody>
+      </p:sp>
+      <p:sp>
+        <p:nvSpPr>
+          <p:cNvPr id="4" name="Rounded Rectangle 3"/>
+          <p:cNvSpPr/>
+          <p:nvPr/>
+        </p:nvSpPr>
+        <p:spPr>
+          <a:xfrm>
+            <a:off x="731520" y="1371600"/>
+            <a:ext cx="1828800" cy="50800"/>
+          </a:xfrm>
+          <a:prstGeom prst="roundRect">
+            <a:avLst>
+              <a:gd name="adj" fmla="val 10000"/>
+            </a:avLst>
+          </a:prstGeom>
+          <a:solidFill>
+            <a:srgbClr val="7B2D26"/>
+          </a:solidFill>
+          <a:ln>
+            <a:noFill/>
+          </a:ln>
+        </p:spPr>
+        <p:style>
+          <a:lnRef idx="1">
+            <a:schemeClr val="accent1"/>
+          </a:lnRef>
+          <a:fillRef idx="3">
+            <a:schemeClr val="accent1"/>
+          </a:fillRef>
+          <a:effectRef idx="2">
+            <a:schemeClr val="accent1"/>
+          </a:effectRef>
+          <a:fontRef idx="minor">
+            <a:schemeClr val="lt1"/>
+          </a:fontRef>
+        </p:style>
+        <p:txBody>
+          <a:bodyPr rtlCol="0" anchor="ctr"/>
+          <a:lstStyle/>
+          <a:p>
+            <a:pPr algn="ctr"/>
+          </a:p>
+        </p:txBody>
+      </p:sp>
+      <p:sp>
+        <p:nvSpPr>
+          <p:cNvPr id="5" name="Rectangle 4"/>
+          <p:cNvSpPr/>
+          <p:nvPr/>
+        </p:nvSpPr>
+        <p:spPr>
+          <a:xfrm>
+            <a:off x="4434840" y="1645920"/>
+            <a:ext cx="19050" cy="4572000"/>
+          </a:xfrm>
+          <a:prstGeom prst="rect">
+            <a:avLst/>
+          </a:prstGeom>
+          <a:solidFill>
+            <a:srgbClr val="D0D0D0"/>
+          </a:solidFill>
+          <a:ln>
+            <a:noFill/>
+          </a:ln>
+        </p:spPr>
+        <p:style>
+          <a:lnRef idx="1">
+            <a:schemeClr val="accent1"/>
+          </a:lnRef>
+          <a:fillRef idx="3">
+            <a:schemeClr val="accent1"/>
+          </a:fillRef>
+          <a:effectRef idx="2">
+            <a:schemeClr val="accent1"/>
+          </a:effectRef>
+          <a:fontRef idx="minor">
+            <a:schemeClr val="lt1"/>
+          </a:fontRef>
+        </p:style>
+        <p:txBody>
+          <a:bodyPr rtlCol="0" anchor="ctr"/>
+          <a:lstStyle/>
+          <a:p>
+            <a:pPr algn="ctr"/>
+          </a:p>
+        </p:txBody>
+      </p:sp>
+      <p:sp>
+        <p:nvSpPr>
+          <p:cNvPr id="6" name="TextBox 5"/>
+          <p:cNvSpPr txBox="1"/>
+          <p:nvPr/>
+        </p:nvSpPr>
+        <p:spPr>
+          <a:xfrm>
+            <a:off x="731520" y="1691640"/>
+            <a:ext cx="3566160" cy="4663440"/>
+          </a:xfrm>
+          <a:prstGeom prst="rect">
+            <a:avLst/>
+          </a:prstGeom>
+          <a:noFill/>
+        </p:spPr>
+        <p:txBody>
+          <a:bodyPr wrap="square">
+            <a:spAutoFit/>
+          </a:bodyPr>
+          <a:lstStyle/>
+          <a:p>
+            <a:pPr algn="l">
+              <a:spcBef>
+                <a:spcPts val="800"/>
+              </a:spcBef>
+              <a:spcAft>
+                <a:spcPts val="400"/>
+              </a:spcAft>
+              <a:defRPr sz="1800" b="0" i="0">
+                <a:solidFill>
+                  <a:srgbClr val="2C3E50"/>
+                </a:solidFill>
+                <a:latin typeface="Avenir Next"/>
+              </a:defRPr>
+            </a:pPr>
+            <a:r>
+              <a:t>Sanskrit: a- ("not") + vidya ("knowledge")</a:t>
+            </a:r>
+          </a:p>
+          <a:p>
+            <a:pPr algn="l">
+              <a:spcBef>
+                <a:spcPts val="800"/>
+              </a:spcBef>
+              <a:spcAft>
+                <a:spcPts val="400"/>
+              </a:spcAft>
+              <a:defRPr sz="1800" b="0" i="0">
+                <a:solidFill>
+                  <a:srgbClr val="2C3E50"/>
+                </a:solidFill>
+                <a:latin typeface="Avenir Next"/>
+              </a:defRPr>
+            </a:pPr>
+            <a:r>
+              <a:t>= "non-knowledge"</a:t>
+            </a:r>
+          </a:p>
+          <a:p>
+            <a:pPr algn="l">
+              <a:spcBef>
+                <a:spcPts val="800"/>
+              </a:spcBef>
+              <a:spcAft>
+                <a:spcPts val="400"/>
+              </a:spcAft>
+              <a:defRPr sz="1800" b="0" i="0">
+                <a:solidFill>
+                  <a:srgbClr val="2C3E50"/>
+                </a:solidFill>
+                <a:latin typeface="Avenir Next"/>
+              </a:defRPr>
+            </a:pPr>
+            <a:r>
+              <a:t>Chinese: 無 ("without") + 明 ("brightness")</a:t>
+            </a:r>
+          </a:p>
+          <a:p>
+            <a:pPr algn="l">
+              <a:spcBef>
+                <a:spcPts val="800"/>
+              </a:spcBef>
+              <a:spcAft>
+                <a:spcPts val="400"/>
+              </a:spcAft>
+              <a:defRPr sz="1800" b="0" i="0">
+                <a:solidFill>
+                  <a:srgbClr val="2C3E50"/>
+                </a:solidFill>
+                <a:latin typeface="Avenir Next"/>
+              </a:defRPr>
+            </a:pPr>
+            <a:r>
+              <a:t>= 無明 wuming = "without brightness"</a:t>
+            </a:r>
+          </a:p>
+          <a:p>
+            <a:pPr algn="l">
+              <a:spcBef>
+                <a:spcPts val="800"/>
+              </a:spcBef>
+              <a:spcAft>
+                <a:spcPts val="400"/>
+              </a:spcAft>
+              <a:defRPr sz="1800" b="0" i="0">
+                <a:solidFill>
+                  <a:srgbClr val="2C3E50"/>
+                </a:solidFill>
+                <a:latin typeface="Avenir Next"/>
+              </a:defRPr>
+            </a:pPr>
+            <a:r>
+              <a:t>A morphological mirror — almost piece by piece</a:t>
+            </a:r>
+          </a:p>
+        </p:txBody>
+      </p:sp>
+      <p:sp>
+        <p:nvSpPr>
+          <p:cNvPr id="7" name="TextBox 6"/>
+          <p:cNvSpPr txBox="1"/>
+          <p:nvPr/>
+        </p:nvSpPr>
+        <p:spPr>
+          <a:xfrm>
+            <a:off x="4663440" y="1691640"/>
+            <a:ext cx="4114800" cy="4663440"/>
+          </a:xfrm>
+          <a:prstGeom prst="rect">
+            <a:avLst/>
+          </a:prstGeom>
+          <a:noFill/>
+        </p:spPr>
+        <p:txBody>
+          <a:bodyPr wrap="square">
+            <a:spAutoFit/>
+          </a:bodyPr>
+          <a:lstStyle/>
+          <a:p>
+            <a:pPr algn="l">
+              <a:spcBef>
+                <a:spcPts val="800"/>
+              </a:spcBef>
+              <a:spcAft>
+                <a:spcPts val="400"/>
+              </a:spcAft>
+              <a:defRPr sz="1800" b="0" i="0">
+                <a:solidFill>
+                  <a:srgbClr val="2C3E50"/>
+                </a:solidFill>
+                <a:latin typeface="Avenir Next"/>
+              </a:defRPr>
+            </a:pPr>
+            <a:r>
+              <a:t>The translators chose "brightness" over "knowledge"</a:t>
+            </a:r>
+          </a:p>
+          <a:p>
+            <a:pPr algn="l">
+              <a:spcBef>
+                <a:spcPts val="800"/>
+              </a:spcBef>
+              <a:spcAft>
+                <a:spcPts val="400"/>
+              </a:spcAft>
+              <a:defRPr sz="1800" b="0" i="0">
+                <a:solidFill>
+                  <a:srgbClr val="2C3E50"/>
+                </a:solidFill>
+                <a:latin typeface="Avenir Next"/>
+              </a:defRPr>
+            </a:pPr>
+            <a:r>
+              <a:t>Sanskrit image: epistemological — a failure of knowing</a:t>
+            </a:r>
+          </a:p>
+          <a:p>
+            <a:pPr algn="l">
+              <a:spcBef>
+                <a:spcPts val="800"/>
+              </a:spcBef>
+              <a:spcAft>
+                <a:spcPts val="400"/>
+              </a:spcAft>
+              <a:defRPr sz="1800" b="0" i="0">
+                <a:solidFill>
+                  <a:srgbClr val="2C3E50"/>
+                </a:solidFill>
+                <a:latin typeface="Avenir Next"/>
+              </a:defRPr>
+            </a:pPr>
+            <a:r>
+              <a:t>Chinese image: phenomenological — an absence of light</a:t>
+            </a:r>
+          </a:p>
+          <a:p>
+            <a:pPr algn="l">
+              <a:spcBef>
+                <a:spcPts val="800"/>
+              </a:spcBef>
+              <a:spcAft>
+                <a:spcPts val="400"/>
+              </a:spcAft>
+              <a:defRPr sz="1800" b="0" i="0">
+                <a:solidFill>
+                  <a:srgbClr val="2C3E50"/>
+                </a:solidFill>
+                <a:latin typeface="Avenir Next"/>
+              </a:defRPr>
+            </a:pPr>
+            <a:r>
+              <a:t>Small shift, real consequences for practice</a:t>
+            </a:r>
+          </a:p>
+          <a:p>
+            <a:pPr algn="l">
+              <a:spcBef>
+                <a:spcPts val="800"/>
+              </a:spcBef>
+              <a:spcAft>
+                <a:spcPts val="400"/>
+              </a:spcAft>
+              <a:defRPr sz="1800" b="0" i="0">
+                <a:solidFill>
+                  <a:srgbClr val="2C3E50"/>
+                </a:solidFill>
+                <a:latin typeface="Avenir Next"/>
+              </a:defRPr>
+            </a:pPr>
+            <a:r>
+              <a:t>Even faithful translation is interpretation</a:t>
+            </a:r>
+          </a:p>
+        </p:txBody>
+      </p:sp>
+    </p:spTree>
+  </p:cSld>
+  <p:clrMapOvr>
+    <a:masterClrMapping/>
+  </p:clrMapOvr>
+</p:sld>
+</file>
+
+<file path=ppt/slides/slide12.xml><?xml version="1.0" encoding="utf-8"?>
+<p:sld xmlns:a="http://schemas.openxmlformats.org/drawingml/2006/main" xmlns:p="http://schemas.openxmlformats.org/presentationml/2006/main" xmlns:r="http://schemas.openxmlformats.org/officeDocument/2006/relationships">
+  <p:cSld>
+    <p:bg>
+      <p:bgPr>
+        <a:solidFill>
+          <a:srgbClr val="F7F6F2"/>
+        </a:solidFill>
+        <a:effectLst/>
+      </p:bgPr>
+    </p:bg>
+    <p:spTree>
+      <p:nvGrpSpPr>
+        <p:cNvPr id="1" name=""/>
+        <p:cNvGrpSpPr/>
+        <p:nvPr/>
+      </p:nvGrpSpPr>
+      <p:grpSpPr/>
+      <p:sp>
+        <p:nvSpPr>
+          <p:cNvPr id="2" name="Rectangle 1"/>
+          <p:cNvSpPr/>
+          <p:nvPr/>
+        </p:nvSpPr>
+        <p:spPr>
+          <a:xfrm>
+            <a:off x="0" y="0"/>
+            <a:ext cx="320040" cy="6858000"/>
+          </a:xfrm>
+          <a:prstGeom prst="rect">
+            <a:avLst/>
+          </a:prstGeom>
+          <a:solidFill>
+            <a:srgbClr val="1E2761"/>
+          </a:solidFill>
+          <a:ln>
+            <a:noFill/>
+          </a:ln>
+        </p:spPr>
+        <p:style>
+          <a:lnRef idx="1">
+            <a:schemeClr val="accent1"/>
+          </a:lnRef>
+          <a:fillRef idx="3">
+            <a:schemeClr val="accent1"/>
+          </a:fillRef>
+          <a:effectRef idx="2">
+            <a:schemeClr val="accent1"/>
+          </a:effectRef>
+          <a:fontRef idx="minor">
+            <a:schemeClr val="lt1"/>
+          </a:fontRef>
+        </p:style>
+        <p:txBody>
+          <a:bodyPr rtlCol="0" anchor="ctr"/>
+          <a:lstStyle/>
+          <a:p>
+            <a:pPr algn="ctr"/>
+          </a:p>
+        </p:txBody>
+      </p:sp>
+      <p:sp>
+        <p:nvSpPr>
+          <p:cNvPr id="3" name="TextBox 2"/>
+          <p:cNvSpPr txBox="1"/>
+          <p:nvPr/>
+        </p:nvSpPr>
+        <p:spPr>
+          <a:xfrm>
+            <a:off x="731520" y="320040"/>
+            <a:ext cx="10515600" cy="1005840"/>
+          </a:xfrm>
+          <a:prstGeom prst="rect">
+            <a:avLst/>
+          </a:prstGeom>
+          <a:noFill/>
+        </p:spPr>
+        <p:txBody>
+          <a:bodyPr wrap="square">
+            <a:spAutoFit/>
+          </a:bodyPr>
+          <a:lstStyle/>
+          <a:p>
+            <a:pPr algn="l">
+              <a:spcBef>
+                <a:spcPts val="0"/>
+              </a:spcBef>
+              <a:spcAft>
+                <a:spcPts val="0"/>
+              </a:spcAft>
+              <a:defRPr sz="2800" b="1" i="0">
+                <a:solidFill>
+                  <a:srgbClr val="1E2761"/>
+                </a:solidFill>
+                <a:latin typeface="Palatino"/>
+              </a:defRPr>
+            </a:pPr>
+            <a:r>
+              <a:t>svarūpa vs. 自性 — The Gap as Finding</a:t>
+            </a:r>
+          </a:p>
+        </p:txBody>
+      </p:sp>
+      <p:sp>
+        <p:nvSpPr>
+          <p:cNvPr id="4" name="Rounded Rectangle 3"/>
+          <p:cNvSpPr/>
+          <p:nvPr/>
+        </p:nvSpPr>
+        <p:spPr>
+          <a:xfrm>
+            <a:off x="731520" y="1371600"/>
+            <a:ext cx="1828800" cy="50800"/>
+          </a:xfrm>
+          <a:prstGeom prst="roundRect">
+            <a:avLst>
+              <a:gd name="adj" fmla="val 10000"/>
+            </a:avLst>
+          </a:prstGeom>
+          <a:solidFill>
+            <a:srgbClr val="7B2D26"/>
+          </a:solidFill>
+          <a:ln>
+            <a:noFill/>
+          </a:ln>
+        </p:spPr>
+        <p:style>
+          <a:lnRef idx="1">
+            <a:schemeClr val="accent1"/>
+          </a:lnRef>
+          <a:fillRef idx="3">
+            <a:schemeClr val="accent1"/>
+          </a:fillRef>
+          <a:effectRef idx="2">
+            <a:schemeClr val="accent1"/>
+          </a:effectRef>
+          <a:fontRef idx="minor">
+            <a:schemeClr val="lt1"/>
+          </a:fontRef>
+        </p:style>
+        <p:txBody>
+          <a:bodyPr rtlCol="0" anchor="ctr"/>
+          <a:lstStyle/>
+          <a:p>
+            <a:pPr algn="ctr"/>
+          </a:p>
+        </p:txBody>
+      </p:sp>
+      <p:sp>
+        <p:nvSpPr>
+          <p:cNvPr id="5" name="Rectangle 4"/>
+          <p:cNvSpPr/>
+          <p:nvPr/>
+        </p:nvSpPr>
+        <p:spPr>
+          <a:xfrm>
+            <a:off x="4434840" y="1645920"/>
+            <a:ext cx="19050" cy="4572000"/>
+          </a:xfrm>
+          <a:prstGeom prst="rect">
+            <a:avLst/>
+          </a:prstGeom>
+          <a:solidFill>
+            <a:srgbClr val="D0D0D0"/>
+          </a:solidFill>
+          <a:ln>
+            <a:noFill/>
+          </a:ln>
+        </p:spPr>
+        <p:style>
+          <a:lnRef idx="1">
+            <a:schemeClr val="accent1"/>
+          </a:lnRef>
+          <a:fillRef idx="3">
+            <a:schemeClr val="accent1"/>
+          </a:fillRef>
+          <a:effectRef idx="2">
+            <a:schemeClr val="accent1"/>
+          </a:effectRef>
+          <a:fontRef idx="minor">
+            <a:schemeClr val="lt1"/>
+          </a:fontRef>
+        </p:style>
+        <p:txBody>
+          <a:bodyPr rtlCol="0" anchor="ctr"/>
+          <a:lstStyle/>
+          <a:p>
+            <a:pPr algn="ctr"/>
+          </a:p>
+        </p:txBody>
+      </p:sp>
+      <p:sp>
+        <p:nvSpPr>
+          <p:cNvPr id="6" name="TextBox 5"/>
+          <p:cNvSpPr txBox="1"/>
+          <p:nvPr/>
+        </p:nvSpPr>
+        <p:spPr>
+          <a:xfrm>
+            <a:off x="731520" y="1691640"/>
+            <a:ext cx="3566160" cy="4663440"/>
+          </a:xfrm>
+          <a:prstGeom prst="rect">
+            <a:avLst/>
+          </a:prstGeom>
+          <a:noFill/>
+        </p:spPr>
+        <p:txBody>
+          <a:bodyPr wrap="square">
+            <a:spAutoFit/>
+          </a:bodyPr>
+          <a:lstStyle/>
+          <a:p>
+            <a:pPr algn="l">
+              <a:spcBef>
+                <a:spcPts val="800"/>
+              </a:spcBef>
+              <a:spcAft>
+                <a:spcPts val="400"/>
+              </a:spcAft>
+              <a:defRPr sz="1800" b="0" i="0">
+                <a:solidFill>
+                  <a:srgbClr val="2C3E50"/>
+                </a:solidFill>
+                <a:latin typeface="Avenir Next"/>
+              </a:defRPr>
+            </a:pPr>
+            <a:r>
+              <a:t>Yoga Sutras: svarupa = "own form"</a:t>
+            </a:r>
+          </a:p>
+          <a:p>
+            <a:pPr algn="l">
+              <a:spcBef>
+                <a:spcPts val="800"/>
+              </a:spcBef>
+              <a:spcAft>
+                <a:spcPts val="400"/>
+              </a:spcAft>
+              <a:defRPr sz="1800" b="0" i="0">
+                <a:solidFill>
+                  <a:srgbClr val="2C3E50"/>
+                </a:solidFill>
+                <a:latin typeface="Avenir Next"/>
+              </a:defRPr>
+            </a:pPr>
+            <a:r>
+              <a:t>YS 1.3: "The seer abides in its own form"</a:t>
+            </a:r>
+          </a:p>
+          <a:p>
+            <a:pPr algn="l">
+              <a:spcBef>
+                <a:spcPts val="800"/>
+              </a:spcBef>
+              <a:spcAft>
+                <a:spcPts val="400"/>
+              </a:spcAft>
+              <a:defRPr sz="1800" b="0" i="0">
+                <a:solidFill>
+                  <a:srgbClr val="2C3E50"/>
+                </a:solidFill>
+                <a:latin typeface="Avenir Next"/>
+              </a:defRPr>
+            </a:pPr>
+            <a:r>
+              <a:t>Purusa has a real essential nature</a:t>
+            </a:r>
+          </a:p>
+          <a:p>
+            <a:pPr algn="l">
+              <a:spcBef>
+                <a:spcPts val="800"/>
+              </a:spcBef>
+              <a:spcAft>
+                <a:spcPts val="400"/>
+              </a:spcAft>
+              <a:defRPr sz="1800" b="0" i="0">
+                <a:solidFill>
+                  <a:srgbClr val="2C3E50"/>
+                </a:solidFill>
+                <a:latin typeface="Avenir Next"/>
+              </a:defRPr>
+            </a:pPr>
+            <a:r>
+              <a:t>Meditation reveals it</a:t>
+            </a:r>
+          </a:p>
+        </p:txBody>
+      </p:sp>
+      <p:sp>
+        <p:nvSpPr>
+          <p:cNvPr id="7" name="TextBox 6"/>
+          <p:cNvSpPr txBox="1"/>
+          <p:nvPr/>
+        </p:nvSpPr>
+        <p:spPr>
+          <a:xfrm>
+            <a:off x="4663440" y="1691640"/>
+            <a:ext cx="4114800" cy="4663440"/>
+          </a:xfrm>
+          <a:prstGeom prst="rect">
+            <a:avLst/>
+          </a:prstGeom>
+          <a:noFill/>
+        </p:spPr>
+        <p:txBody>
+          <a:bodyPr wrap="square">
+            <a:spAutoFit/>
+          </a:bodyPr>
+          <a:lstStyle/>
+          <a:p>
+            <a:pPr algn="l">
+              <a:spcBef>
+                <a:spcPts val="800"/>
+              </a:spcBef>
+              <a:spcAft>
+                <a:spcPts val="400"/>
+              </a:spcAft>
+              <a:defRPr sz="1800" b="0" i="0">
+                <a:solidFill>
+                  <a:srgbClr val="2C3E50"/>
+                </a:solidFill>
+                <a:latin typeface="Avenir Next"/>
+              </a:defRPr>
+            </a:pPr>
+            <a:r>
+              <a:t>Chinese Madhyamaka: 自性 zixing = "own nature"</a:t>
+            </a:r>
+          </a:p>
+          <a:p>
+            <a:pPr algn="l">
+              <a:spcBef>
+                <a:spcPts val="800"/>
+              </a:spcBef>
+              <a:spcAft>
+                <a:spcPts val="400"/>
+              </a:spcAft>
+              <a:defRPr sz="1800" b="0" i="0">
+                <a:solidFill>
+                  <a:srgbClr val="2C3E50"/>
+                </a:solidFill>
+                <a:latin typeface="Avenir Next"/>
+              </a:defRPr>
+            </a:pPr>
+            <a:r>
+              <a:t>Central insight: 自性空 — "empty of own-nature"</a:t>
+            </a:r>
+          </a:p>
+          <a:p>
+            <a:pPr algn="l">
+              <a:spcBef>
+                <a:spcPts val="800"/>
+              </a:spcBef>
+              <a:spcAft>
+                <a:spcPts val="400"/>
+              </a:spcAft>
+              <a:defRPr sz="1800" b="0" i="0">
+                <a:solidFill>
+                  <a:srgbClr val="2C3E50"/>
+                </a:solidFill>
+                <a:latin typeface="Avenir Next"/>
+              </a:defRPr>
+            </a:pPr>
+            <a:r>
+              <a:t>Nothing has inherent nature</a:t>
+            </a:r>
+          </a:p>
+          <a:p>
+            <a:pPr algn="l">
+              <a:spcBef>
+                <a:spcPts val="800"/>
+              </a:spcBef>
+              <a:spcAft>
+                <a:spcPts val="400"/>
+              </a:spcAft>
+              <a:defRPr sz="1800" b="0" i="0">
+                <a:solidFill>
+                  <a:srgbClr val="2C3E50"/>
+                </a:solidFill>
+                <a:latin typeface="Avenir Next"/>
+              </a:defRPr>
+            </a:pPr>
+            <a:r>
+              <a:t>Meditation sees through the illusion of it</a:t>
+            </a:r>
+          </a:p>
+        </p:txBody>
+      </p:sp>
+    </p:spTree>
+  </p:cSld>
+  <p:clrMapOvr>
+    <a:masterClrMapping/>
+  </p:clrMapOvr>
+</p:sld>
+</file>
+
+<file path=ppt/slides/slide13.xml><?xml version="1.0" encoding="utf-8"?>
+<p:sld xmlns:a="http://schemas.openxmlformats.org/drawingml/2006/main" xmlns:p="http://schemas.openxmlformats.org/presentationml/2006/main" xmlns:r="http://schemas.openxmlformats.org/officeDocument/2006/relationships">
+  <p:cSld>
+    <p:bg>
+      <p:bgPr>
+        <a:solidFill>
+          <a:srgbClr val="F7F6F2"/>
+        </a:solidFill>
+        <a:effectLst/>
+      </p:bgPr>
+    </p:bg>
+    <p:spTree>
+      <p:nvGrpSpPr>
+        <p:cNvPr id="1" name=""/>
+        <p:cNvGrpSpPr/>
+        <p:nvPr/>
+      </p:nvGrpSpPr>
+      <p:grpSpPr/>
+      <p:sp>
+        <p:nvSpPr>
+          <p:cNvPr id="2" name="Rectangle 1"/>
+          <p:cNvSpPr/>
+          <p:nvPr/>
+        </p:nvSpPr>
+        <p:spPr>
+          <a:xfrm>
+            <a:off x="0" y="0"/>
+            <a:ext cx="320040" cy="6858000"/>
+          </a:xfrm>
+          <a:prstGeom prst="rect">
+            <a:avLst/>
+          </a:prstGeom>
+          <a:solidFill>
+            <a:srgbClr val="1E2761"/>
+          </a:solidFill>
+          <a:ln>
+            <a:noFill/>
+          </a:ln>
+        </p:spPr>
+        <p:style>
+          <a:lnRef idx="1">
+            <a:schemeClr val="accent1"/>
+          </a:lnRef>
+          <a:fillRef idx="3">
+            <a:schemeClr val="accent1"/>
+          </a:fillRef>
+          <a:effectRef idx="2">
+            <a:schemeClr val="accent1"/>
+          </a:effectRef>
+          <a:fontRef idx="minor">
+            <a:schemeClr val="lt1"/>
+          </a:fontRef>
+        </p:style>
+        <p:txBody>
+          <a:bodyPr rtlCol="0" anchor="ctr"/>
+          <a:lstStyle/>
+          <a:p>
+            <a:pPr algn="ctr"/>
+          </a:p>
+        </p:txBody>
+      </p:sp>
+      <p:sp>
+        <p:nvSpPr>
+          <p:cNvPr id="3" name="TextBox 2"/>
+          <p:cNvSpPr txBox="1"/>
+          <p:nvPr/>
+        </p:nvSpPr>
+        <p:spPr>
+          <a:xfrm>
+            <a:off x="731520" y="320040"/>
             <a:ext cx="8046720" cy="822960"/>
           </a:xfrm>
           <a:prstGeom prst="rect">
@@ -4879,7 +6165,7 @@
               <a:spcAft>
                 <a:spcPts val="0"/>
               </a:spcAft>
-              <a:defRPr sz="3000" b="1" i="0">
+              <a:defRPr sz="3200" b="1" i="0">
                 <a:solidFill>
                   <a:srgbClr val="1E2761"/>
                 </a:solidFill>
@@ -4887,7 +6173,7 @@
               </a:defRPr>
             </a:pPr>
             <a:r>
-              <a:t>dhyana to chan to zen</a:t>
+              <a:t>Live Demo — Sanskrit Word Explorer</a:t>
             </a:r>
           </a:p>
         </p:txBody>
@@ -4939,57 +6225,14 @@
       </p:sp>
       <p:sp>
         <p:nvSpPr>
-          <p:cNvPr id="5" name="Rectangle 4"/>
-          <p:cNvSpPr/>
+          <p:cNvPr id="5" name="TextBox 4"/>
+          <p:cNvSpPr txBox="1"/>
           <p:nvPr/>
         </p:nvSpPr>
         <p:spPr>
           <a:xfrm>
-            <a:off x="4434840" y="1463040"/>
-            <a:ext cx="19050" cy="4754880"/>
-          </a:xfrm>
-          <a:prstGeom prst="rect">
-            <a:avLst/>
-          </a:prstGeom>
-          <a:solidFill>
-            <a:srgbClr val="D0D0D0"/>
-          </a:solidFill>
-          <a:ln>
-            <a:noFill/>
-          </a:ln>
-        </p:spPr>
-        <p:style>
-          <a:lnRef idx="1">
-            <a:schemeClr val="accent1"/>
-          </a:lnRef>
-          <a:fillRef idx="3">
-            <a:schemeClr val="accent1"/>
-          </a:fillRef>
-          <a:effectRef idx="2">
-            <a:schemeClr val="accent1"/>
-          </a:effectRef>
-          <a:fontRef idx="minor">
-            <a:schemeClr val="lt1"/>
-          </a:fontRef>
-        </p:style>
-        <p:txBody>
-          <a:bodyPr rtlCol="0" anchor="ctr"/>
-          <a:lstStyle/>
-          <a:p>
-            <a:pPr algn="ctr"/>
-          </a:p>
-        </p:txBody>
-      </p:sp>
-      <p:sp>
-        <p:nvSpPr>
-          <p:cNvPr id="6" name="TextBox 5"/>
-          <p:cNvSpPr txBox="1"/>
-          <p:nvPr/>
-        </p:nvSpPr>
-        <p:spPr>
-          <a:xfrm>
-            <a:off x="731520" y="1508760"/>
-            <a:ext cx="3566160" cy="4846320"/>
+            <a:off x="731520" y="1554480"/>
+            <a:ext cx="7863840" cy="4754880"/>
           </a:xfrm>
           <a:prstGeom prst="rect">
             <a:avLst/>
@@ -5004,12 +6247,12 @@
           <a:p>
             <a:pPr algn="l">
               <a:spcBef>
-                <a:spcPts val="800"/>
+                <a:spcPts val="1600"/>
               </a:spcBef>
               <a:spcAft>
                 <a:spcPts val="400"/>
               </a:spcAft>
-              <a:defRPr sz="1800" b="0" i="0">
+              <a:defRPr sz="2000" b="1" i="0">
                 <a:solidFill>
                   <a:srgbClr val="2C3E50"/>
                 </a:solidFill>
@@ -5017,18 +6260,113 @@
               </a:defRPr>
             </a:pPr>
             <a:r>
-              <a:t>The phonetic chain:</a:t>
-            </a:r>
-          </a:p>
-          <a:p>
-            <a:pPr algn="l">
-              <a:spcBef>
-                <a:spcPts val="800"/>
+              <a:t>84 terms from all 4 chapters of the Yoga Sutras</a:t>
+            </a:r>
+          </a:p>
+          <a:p>
+            <a:pPr algn="l">
+              <a:spcBef>
+                <a:spcPts val="200"/>
+              </a:spcBef>
+              <a:spcAft>
+                <a:spcPts val="600"/>
+              </a:spcAft>
+              <a:defRPr sz="1800" b="0" i="1">
+                <a:solidFill>
+                  <a:srgbClr val="2C3E50"/>
+                </a:solidFill>
+                <a:latin typeface="Avenir Next"/>
+              </a:defRPr>
+            </a:pPr>
+            <a:r>
+              <a:t>     Search by English, IAST, or Devanagari</a:t>
+            </a:r>
+          </a:p>
+          <a:p>
+            <a:pPr algn="l">
+              <a:spcBef>
+                <a:spcPts val="200"/>
+              </a:spcBef>
+              <a:spcAft>
+                <a:spcPts val="600"/>
+              </a:spcAft>
+              <a:defRPr sz="1800" b="0" i="1">
+                <a:solidFill>
+                  <a:srgbClr val="2C3E50"/>
+                </a:solidFill>
+                <a:latin typeface="Avenir Next"/>
+              </a:defRPr>
+            </a:pPr>
+            <a:r>
+              <a:t>     Color-coded morphological segmentation</a:t>
+            </a:r>
+          </a:p>
+          <a:p>
+            <a:pPr algn="l">
+              <a:spcBef>
+                <a:spcPts val="200"/>
+              </a:spcBef>
+              <a:spcAft>
+                <a:spcPts val="600"/>
+              </a:spcAft>
+              <a:defRPr sz="1800" b="0" i="1">
+                <a:solidFill>
+                  <a:srgbClr val="2C3E50"/>
+                </a:solidFill>
+                <a:latin typeface="Avenir Next"/>
+              </a:defRPr>
+            </a:pPr>
+            <a:r>
+              <a:t>     Root, prefix, and suffix breakdown cards</a:t>
+            </a:r>
+          </a:p>
+          <a:p>
+            <a:pPr algn="l">
+              <a:spcBef>
+                <a:spcPts val="200"/>
+              </a:spcBef>
+              <a:spcAft>
+                <a:spcPts val="600"/>
+              </a:spcAft>
+              <a:defRPr sz="1800" b="0" i="1">
+                <a:solidFill>
+                  <a:srgbClr val="2C3E50"/>
+                </a:solidFill>
+                <a:latin typeface="Avenir Next"/>
+              </a:defRPr>
+            </a:pPr>
+            <a:r>
+              <a:t>     Philosophical meaning and Yoga Sutras references</a:t>
+            </a:r>
+          </a:p>
+          <a:p>
+            <a:pPr algn="l">
+              <a:spcBef>
+                <a:spcPts val="200"/>
+              </a:spcBef>
+              <a:spcAft>
+                <a:spcPts val="600"/>
+              </a:spcAft>
+              <a:defRPr sz="1800" b="0" i="1">
+                <a:solidFill>
+                  <a:srgbClr val="2C3E50"/>
+                </a:solidFill>
+                <a:latin typeface="Avenir Next"/>
+              </a:defRPr>
+            </a:pPr>
+            <a:r>
+              <a:t>     Chinese Buddhist equivalents where attested</a:t>
+            </a:r>
+          </a:p>
+          <a:p>
+            <a:pPr algn="l">
+              <a:spcBef>
+                <a:spcPts val="1600"/>
               </a:spcBef>
               <a:spcAft>
                 <a:spcPts val="400"/>
               </a:spcAft>
-              <a:defRPr sz="1800" b="0" i="0">
+              <a:defRPr sz="2000" b="1" i="0">
                 <a:solidFill>
                   <a:srgbClr val="2C3E50"/>
                 </a:solidFill>
@@ -5036,18 +6374,18 @@
               </a:defRPr>
             </a:pPr>
             <a:r>
-              <a:t>dhyana (Sanskrit)</a:t>
-            </a:r>
-          </a:p>
-          <a:p>
-            <a:pPr algn="l">
-              <a:spcBef>
-                <a:spcPts val="800"/>
-              </a:spcBef>
-              <a:spcAft>
-                <a:spcPts val="400"/>
-              </a:spcAft>
-              <a:defRPr sz="1800" b="0" i="0">
+              <a:t>Works offline — no installation needed</a:t>
+            </a:r>
+          </a:p>
+          <a:p>
+            <a:pPr algn="l">
+              <a:spcBef>
+                <a:spcPts val="200"/>
+              </a:spcBef>
+              <a:spcAft>
+                <a:spcPts val="600"/>
+              </a:spcAft>
+              <a:defRPr sz="1800" b="0" i="1">
                 <a:solidFill>
                   <a:srgbClr val="2C3E50"/>
                 </a:solidFill>
@@ -5055,182 +6393,7 @@
               </a:defRPr>
             </a:pPr>
             <a:r>
-              <a:t>jhana (Pali/Prakrit)</a:t>
-            </a:r>
-          </a:p>
-          <a:p>
-            <a:pPr algn="l">
-              <a:spcBef>
-                <a:spcPts val="800"/>
-              </a:spcBef>
-              <a:spcAft>
-                <a:spcPts val="400"/>
-              </a:spcAft>
-              <a:defRPr sz="1800" b="0" i="0">
-                <a:solidFill>
-                  <a:srgbClr val="2C3E50"/>
-                </a:solidFill>
-                <a:latin typeface="Avenir Next"/>
-              </a:defRPr>
-            </a:pPr>
-            <a:r>
-              <a:t>channa / 禪那 (Chinese)</a:t>
-            </a:r>
-          </a:p>
-          <a:p>
-            <a:pPr algn="l">
-              <a:spcBef>
-                <a:spcPts val="800"/>
-              </a:spcBef>
-              <a:spcAft>
-                <a:spcPts val="400"/>
-              </a:spcAft>
-              <a:defRPr sz="1800" b="0" i="0">
-                <a:solidFill>
-                  <a:srgbClr val="2C3E50"/>
-                </a:solidFill>
-                <a:latin typeface="Avenir Next"/>
-              </a:defRPr>
-            </a:pPr>
-            <a:r>
-              <a:t>chan / 禪 (abbreviated)</a:t>
-            </a:r>
-          </a:p>
-          <a:p>
-            <a:pPr algn="l">
-              <a:spcBef>
-                <a:spcPts val="800"/>
-              </a:spcBef>
-              <a:spcAft>
-                <a:spcPts val="400"/>
-              </a:spcAft>
-              <a:defRPr sz="1800" b="0" i="0">
-                <a:solidFill>
-                  <a:srgbClr val="2C3E50"/>
-                </a:solidFill>
-                <a:latin typeface="Avenir Next"/>
-              </a:defRPr>
-            </a:pPr>
-            <a:r>
-              <a:t>zen / 禅 (Japanese)</a:t>
-            </a:r>
-          </a:p>
-        </p:txBody>
-      </p:sp>
-      <p:sp>
-        <p:nvSpPr>
-          <p:cNvPr id="7" name="TextBox 6"/>
-          <p:cNvSpPr txBox="1"/>
-          <p:nvPr/>
-        </p:nvSpPr>
-        <p:spPr>
-          <a:xfrm>
-            <a:off x="4663440" y="1508760"/>
-            <a:ext cx="4114800" cy="4846320"/>
-          </a:xfrm>
-          <a:prstGeom prst="rect">
-            <a:avLst/>
-          </a:prstGeom>
-          <a:noFill/>
-        </p:spPr>
-        <p:txBody>
-          <a:bodyPr wrap="square">
-            <a:spAutoFit/>
-          </a:bodyPr>
-          <a:lstStyle/>
-          <a:p>
-            <a:pPr algn="l">
-              <a:spcBef>
-                <a:spcPts val="800"/>
-              </a:spcBef>
-              <a:spcAft>
-                <a:spcPts val="400"/>
-              </a:spcAft>
-              <a:defRPr sz="1800" b="0" i="0">
-                <a:solidFill>
-                  <a:srgbClr val="2C3E50"/>
-                </a:solidFill>
-                <a:latin typeface="Avenir Next"/>
-              </a:defRPr>
-            </a:pPr>
-            <a:r>
-              <a:t>Four Chinese renderings:</a:t>
-            </a:r>
-          </a:p>
-          <a:p>
-            <a:pPr algn="l">
-              <a:spcBef>
-                <a:spcPts val="800"/>
-              </a:spcBef>
-              <a:spcAft>
-                <a:spcPts val="400"/>
-              </a:spcAft>
-              <a:defRPr sz="1800" b="0" i="0">
-                <a:solidFill>
-                  <a:srgbClr val="2C3E50"/>
-                </a:solidFill>
-                <a:latin typeface="Avenir Next"/>
-              </a:defRPr>
-            </a:pPr>
-            <a:r>
-              <a:t>禪那 channa — full transliteration</a:t>
-            </a:r>
-          </a:p>
-          <a:p>
-            <a:pPr algn="l">
-              <a:spcBef>
-                <a:spcPts val="800"/>
-              </a:spcBef>
-              <a:spcAft>
-                <a:spcPts val="400"/>
-              </a:spcAft>
-              <a:defRPr sz="1800" b="0" i="0">
-                <a:solidFill>
-                  <a:srgbClr val="2C3E50"/>
-                </a:solidFill>
-                <a:latin typeface="Avenir Next"/>
-              </a:defRPr>
-            </a:pPr>
-            <a:r>
-              <a:t>禪 chan — abbreviation (became school name)</a:t>
-            </a:r>
-          </a:p>
-          <a:p>
-            <a:pPr algn="l">
-              <a:spcBef>
-                <a:spcPts val="800"/>
-              </a:spcBef>
-              <a:spcAft>
-                <a:spcPts val="400"/>
-              </a:spcAft>
-              <a:defRPr sz="1800" b="0" i="0">
-                <a:solidFill>
-                  <a:srgbClr val="2C3E50"/>
-                </a:solidFill>
-                <a:latin typeface="Avenir Next"/>
-              </a:defRPr>
-            </a:pPr>
-            <a:r>
-              <a:t>禪定 chanding — hybrid (sound + meaning)</a:t>
-            </a:r>
-          </a:p>
-          <a:p>
-            <a:pPr algn="l">
-              <a:spcBef>
-                <a:spcPts val="800"/>
-              </a:spcBef>
-              <a:spcAft>
-                <a:spcPts val="400"/>
-              </a:spcAft>
-              <a:defRPr sz="1800" b="0" i="0">
-                <a:solidFill>
-                  <a:srgbClr val="2C3E50"/>
-                </a:solidFill>
-                <a:latin typeface="Avenir Next"/>
-              </a:defRPr>
-            </a:pPr>
-            <a:r>
-              <a:t>靜慮 jinglu — Xuanzang's semantic: "quiet contemplation"</a:t>
+              <a:t>     Available for you to explore after class</a:t>
             </a:r>
           </a:p>
         </p:txBody>
@@ -5243,7 +6406,7 @@
 </p:sld>
 </file>
 
-<file path=ppt/slides/slide11.xml><?xml version="1.0" encoding="utf-8"?>
+<file path=ppt/slides/slide14.xml><?xml version="1.0" encoding="utf-8"?>
 <p:sld xmlns:a="http://schemas.openxmlformats.org/drawingml/2006/main" xmlns:p="http://schemas.openxmlformats.org/presentationml/2006/main" xmlns:r="http://schemas.openxmlformats.org/officeDocument/2006/relationships">
   <p:cSld>
     <p:bg>
@@ -5333,7 +6496,7 @@
               <a:spcAft>
                 <a:spcPts val="0"/>
               </a:spcAft>
-              <a:defRPr sz="3000" b="1" i="0">
+              <a:defRPr sz="3200" b="1" i="0">
                 <a:solidFill>
                   <a:srgbClr val="1E2761"/>
                 </a:solidFill>
@@ -5341,7 +6504,7 @@
               </a:defRPr>
             </a:pPr>
             <a:r>
-              <a:t>अविद्या avidya to 無明 wuming</a:t>
+              <a:t>What the Words Know</a:t>
             </a:r>
           </a:p>
         </p:txBody>
@@ -5393,57 +6556,14 @@
       </p:sp>
       <p:sp>
         <p:nvSpPr>
-          <p:cNvPr id="5" name="Rectangle 4"/>
-          <p:cNvSpPr/>
+          <p:cNvPr id="5" name="TextBox 4"/>
+          <p:cNvSpPr txBox="1"/>
           <p:nvPr/>
         </p:nvSpPr>
         <p:spPr>
           <a:xfrm>
-            <a:off x="4434840" y="1463040"/>
-            <a:ext cx="19050" cy="4754880"/>
-          </a:xfrm>
-          <a:prstGeom prst="rect">
-            <a:avLst/>
-          </a:prstGeom>
-          <a:solidFill>
-            <a:srgbClr val="D0D0D0"/>
-          </a:solidFill>
-          <a:ln>
-            <a:noFill/>
-          </a:ln>
-        </p:spPr>
-        <p:style>
-          <a:lnRef idx="1">
-            <a:schemeClr val="accent1"/>
-          </a:lnRef>
-          <a:fillRef idx="3">
-            <a:schemeClr val="accent1"/>
-          </a:fillRef>
-          <a:effectRef idx="2">
-            <a:schemeClr val="accent1"/>
-          </a:effectRef>
-          <a:fontRef idx="minor">
-            <a:schemeClr val="lt1"/>
-          </a:fontRef>
-        </p:style>
-        <p:txBody>
-          <a:bodyPr rtlCol="0" anchor="ctr"/>
-          <a:lstStyle/>
-          <a:p>
-            <a:pPr algn="ctr"/>
-          </a:p>
-        </p:txBody>
-      </p:sp>
-      <p:sp>
-        <p:nvSpPr>
-          <p:cNvPr id="6" name="TextBox 5"/>
-          <p:cNvSpPr txBox="1"/>
-          <p:nvPr/>
-        </p:nvSpPr>
-        <p:spPr>
-          <a:xfrm>
-            <a:off x="731520" y="1508760"/>
-            <a:ext cx="3566160" cy="4846320"/>
+            <a:off x="731520" y="1554480"/>
+            <a:ext cx="7863840" cy="4754880"/>
           </a:xfrm>
           <a:prstGeom prst="rect">
             <a:avLst/>
@@ -5458,12 +6578,12 @@
           <a:p>
             <a:pPr algn="l">
               <a:spcBef>
-                <a:spcPts val="800"/>
+                <a:spcPts val="1600"/>
               </a:spcBef>
               <a:spcAft>
                 <a:spcPts val="400"/>
               </a:spcAft>
-              <a:defRPr sz="1800" b="0" i="0">
+              <a:defRPr sz="2000" b="1" i="0">
                 <a:solidFill>
                   <a:srgbClr val="2C3E50"/>
                 </a:solidFill>
@@ -5471,18 +6591,37 @@
               </a:defRPr>
             </a:pPr>
             <a:r>
-              <a:t>Sanskrit: a- ("not") + vidya ("knowledge")</a:t>
-            </a:r>
-          </a:p>
-          <a:p>
-            <a:pPr algn="l">
-              <a:spcBef>
-                <a:spcPts val="800"/>
+              <a:t>Sanskrit word-structure carries philosophical weight</a:t>
+            </a:r>
+          </a:p>
+          <a:p>
+            <a:pPr algn="l">
+              <a:spcBef>
+                <a:spcPts val="200"/>
+              </a:spcBef>
+              <a:spcAft>
+                <a:spcPts val="600"/>
+              </a:spcAft>
+              <a:defRPr sz="1800" b="0" i="1">
+                <a:solidFill>
+                  <a:srgbClr val="2C3E50"/>
+                </a:solidFill>
+                <a:latin typeface="Avenir Next"/>
+              </a:defRPr>
+            </a:pPr>
+            <a:r>
+              <a:t>     Roots and prefixes compress arguments about what concepts mean</a:t>
+            </a:r>
+          </a:p>
+          <a:p>
+            <a:pPr algn="l">
+              <a:spcBef>
+                <a:spcPts val="1600"/>
               </a:spcBef>
               <a:spcAft>
                 <a:spcPts val="400"/>
               </a:spcAft>
-              <a:defRPr sz="1800" b="0" i="0">
+              <a:defRPr sz="2000" b="1" i="0">
                 <a:solidFill>
                   <a:srgbClr val="2C3E50"/>
                 </a:solidFill>
@@ -5490,18 +6629,37 @@
               </a:defRPr>
             </a:pPr>
             <a:r>
-              <a:t>= "non-knowledge"</a:t>
-            </a:r>
-          </a:p>
-          <a:p>
-            <a:pPr algn="l">
-              <a:spcBef>
-                <a:spcPts val="800"/>
+              <a:t>Translation is always interpretation</a:t>
+            </a:r>
+          </a:p>
+          <a:p>
+            <a:pPr algn="l">
+              <a:spcBef>
+                <a:spcPts val="200"/>
+              </a:spcBef>
+              <a:spcAft>
+                <a:spcPts val="600"/>
+              </a:spcAft>
+              <a:defRPr sz="1800" b="0" i="1">
+                <a:solidFill>
+                  <a:srgbClr val="2C3E50"/>
+                </a:solidFill>
+                <a:latin typeface="Avenir Next"/>
+              </a:defRPr>
+            </a:pPr>
+            <a:r>
+              <a:t>     Sound vs. meaning, darkness vs. ignorance, extinction vs. restraint</a:t>
+            </a:r>
+          </a:p>
+          <a:p>
+            <a:pPr algn="l">
+              <a:spcBef>
+                <a:spcPts val="1600"/>
               </a:spcBef>
               <a:spcAft>
                 <a:spcPts val="400"/>
               </a:spcAft>
-              <a:defRPr sz="1800" b="0" i="0">
+              <a:defRPr sz="2000" b="1" i="0">
                 <a:solidFill>
                   <a:srgbClr val="2C3E50"/>
                 </a:solidFill>
@@ -5509,18 +6667,37 @@
               </a:defRPr>
             </a:pPr>
             <a:r>
-              <a:t>Chinese: 無 ("without") + 明 ("brightness")</a:t>
-            </a:r>
-          </a:p>
-          <a:p>
-            <a:pPr algn="l">
-              <a:spcBef>
-                <a:spcPts val="800"/>
+              <a:t>Cross-cultural transmission is real but partial</a:t>
+            </a:r>
+          </a:p>
+          <a:p>
+            <a:pPr algn="l">
+              <a:spcBef>
+                <a:spcPts val="200"/>
+              </a:spcBef>
+              <a:spcAft>
+                <a:spcPts val="600"/>
+              </a:spcAft>
+              <a:defRPr sz="1800" b="0" i="1">
+                <a:solidFill>
+                  <a:srgbClr val="2C3E50"/>
+                </a:solidFill>
+                <a:latin typeface="Avenir Next"/>
+              </a:defRPr>
+            </a:pPr>
+            <a:r>
+              <a:t>     dhyāna → zen is rock-solid; the Yoga Sutras' vocabulary has no Chinese equivalent</a:t>
+            </a:r>
+          </a:p>
+          <a:p>
+            <a:pPr algn="l">
+              <a:spcBef>
+                <a:spcPts val="1600"/>
               </a:spcBef>
               <a:spcAft>
                 <a:spcPts val="400"/>
               </a:spcAft>
-              <a:defRPr sz="1800" b="0" i="0">
+              <a:defRPr sz="2000" b="1" i="0">
                 <a:solidFill>
                   <a:srgbClr val="2C3E50"/>
                 </a:solidFill>
@@ -5528,144 +6705,7 @@
               </a:defRPr>
             </a:pPr>
             <a:r>
-              <a:t>= 無明 wuming = "without brightness"</a:t>
-            </a:r>
-          </a:p>
-          <a:p>
-            <a:pPr algn="l">
-              <a:spcBef>
-                <a:spcPts val="800"/>
-              </a:spcBef>
-              <a:spcAft>
-                <a:spcPts val="400"/>
-              </a:spcAft>
-              <a:defRPr sz="1800" b="0" i="0">
-                <a:solidFill>
-                  <a:srgbClr val="2C3E50"/>
-                </a:solidFill>
-                <a:latin typeface="Avenir Next"/>
-              </a:defRPr>
-            </a:pPr>
-            <a:r>
-              <a:t>A morphological mirror — almost piece by piece</a:t>
-            </a:r>
-          </a:p>
-        </p:txBody>
-      </p:sp>
-      <p:sp>
-        <p:nvSpPr>
-          <p:cNvPr id="7" name="TextBox 6"/>
-          <p:cNvSpPr txBox="1"/>
-          <p:nvPr/>
-        </p:nvSpPr>
-        <p:spPr>
-          <a:xfrm>
-            <a:off x="4663440" y="1508760"/>
-            <a:ext cx="4114800" cy="4846320"/>
-          </a:xfrm>
-          <a:prstGeom prst="rect">
-            <a:avLst/>
-          </a:prstGeom>
-          <a:noFill/>
-        </p:spPr>
-        <p:txBody>
-          <a:bodyPr wrap="square">
-            <a:spAutoFit/>
-          </a:bodyPr>
-          <a:lstStyle/>
-          <a:p>
-            <a:pPr algn="l">
-              <a:spcBef>
-                <a:spcPts val="800"/>
-              </a:spcBef>
-              <a:spcAft>
-                <a:spcPts val="400"/>
-              </a:spcAft>
-              <a:defRPr sz="1800" b="0" i="0">
-                <a:solidFill>
-                  <a:srgbClr val="2C3E50"/>
-                </a:solidFill>
-                <a:latin typeface="Avenir Next"/>
-              </a:defRPr>
-            </a:pPr>
-            <a:r>
-              <a:t>The translators chose "brightness" over "knowledge"</a:t>
-            </a:r>
-          </a:p>
-          <a:p>
-            <a:pPr algn="l">
-              <a:spcBef>
-                <a:spcPts val="800"/>
-              </a:spcBef>
-              <a:spcAft>
-                <a:spcPts val="400"/>
-              </a:spcAft>
-              <a:defRPr sz="1800" b="0" i="0">
-                <a:solidFill>
-                  <a:srgbClr val="2C3E50"/>
-                </a:solidFill>
-                <a:latin typeface="Avenir Next"/>
-              </a:defRPr>
-            </a:pPr>
-            <a:r>
-              <a:t>Sanskrit image: epistemological — a failure of knowing</a:t>
-            </a:r>
-          </a:p>
-          <a:p>
-            <a:pPr algn="l">
-              <a:spcBef>
-                <a:spcPts val="800"/>
-              </a:spcBef>
-              <a:spcAft>
-                <a:spcPts val="400"/>
-              </a:spcAft>
-              <a:defRPr sz="1800" b="0" i="0">
-                <a:solidFill>
-                  <a:srgbClr val="2C3E50"/>
-                </a:solidFill>
-                <a:latin typeface="Avenir Next"/>
-              </a:defRPr>
-            </a:pPr>
-            <a:r>
-              <a:t>Chinese image: phenomenological — an absence of light</a:t>
-            </a:r>
-          </a:p>
-          <a:p>
-            <a:pPr algn="l">
-              <a:spcBef>
-                <a:spcPts val="800"/>
-              </a:spcBef>
-              <a:spcAft>
-                <a:spcPts val="400"/>
-              </a:spcAft>
-              <a:defRPr sz="1800" b="0" i="0">
-                <a:solidFill>
-                  <a:srgbClr val="2C3E50"/>
-                </a:solidFill>
-                <a:latin typeface="Avenir Next"/>
-              </a:defRPr>
-            </a:pPr>
-            <a:r>
-              <a:t>Small shift, real consequences for practice</a:t>
-            </a:r>
-          </a:p>
-          <a:p>
-            <a:pPr algn="l">
-              <a:spcBef>
-                <a:spcPts val="800"/>
-              </a:spcBef>
-              <a:spcAft>
-                <a:spcPts val="400"/>
-              </a:spcAft>
-              <a:defRPr sz="1800" b="0" i="0">
-                <a:solidFill>
-                  <a:srgbClr val="2C3E50"/>
-                </a:solidFill>
-                <a:latin typeface="Avenir Next"/>
-              </a:defRPr>
-            </a:pPr>
-            <a:r>
-              <a:t>Even faithful translation is interpretation</a:t>
+              <a:t>The most instructive cases are sometimes the failures</a:t>
             </a:r>
           </a:p>
         </p:txBody>
@@ -5678,7 +6718,7 @@
 </p:sld>
 </file>
 
-<file path=ppt/slides/slide12.xml><?xml version="1.0" encoding="utf-8"?>
+<file path=ppt/slides/slide2.xml><?xml version="1.0" encoding="utf-8"?>
 <p:sld xmlns:a="http://schemas.openxmlformats.org/drawingml/2006/main" xmlns:p="http://schemas.openxmlformats.org/presentationml/2006/main" xmlns:r="http://schemas.openxmlformats.org/officeDocument/2006/relationships">
   <p:cSld>
     <p:bg>
@@ -5768,7 +6808,7 @@
               <a:spcAft>
                 <a:spcPts val="0"/>
               </a:spcAft>
-              <a:defRPr sz="3000" b="1" i="0">
+              <a:defRPr sz="3200" b="1" i="0">
                 <a:solidFill>
                   <a:srgbClr val="1E2761"/>
                 </a:solidFill>
@@ -5776,7 +6816,7 @@
               </a:defRPr>
             </a:pPr>
             <a:r>
-              <a:t>svarupa vs. 自性 zixing — The Gap Is the Finding</a:t>
+              <a:t>The Core Claim</a:t>
             </a:r>
           </a:p>
         </p:txBody>
@@ -5828,57 +6868,14 @@
       </p:sp>
       <p:sp>
         <p:nvSpPr>
-          <p:cNvPr id="5" name="Rectangle 4"/>
-          <p:cNvSpPr/>
+          <p:cNvPr id="5" name="TextBox 4"/>
+          <p:cNvSpPr txBox="1"/>
           <p:nvPr/>
         </p:nvSpPr>
         <p:spPr>
           <a:xfrm>
-            <a:off x="4434840" y="1463040"/>
-            <a:ext cx="19050" cy="4754880"/>
-          </a:xfrm>
-          <a:prstGeom prst="rect">
-            <a:avLst/>
-          </a:prstGeom>
-          <a:solidFill>
-            <a:srgbClr val="D0D0D0"/>
-          </a:solidFill>
-          <a:ln>
-            <a:noFill/>
-          </a:ln>
-        </p:spPr>
-        <p:style>
-          <a:lnRef idx="1">
-            <a:schemeClr val="accent1"/>
-          </a:lnRef>
-          <a:fillRef idx="3">
-            <a:schemeClr val="accent1"/>
-          </a:fillRef>
-          <a:effectRef idx="2">
-            <a:schemeClr val="accent1"/>
-          </a:effectRef>
-          <a:fontRef idx="minor">
-            <a:schemeClr val="lt1"/>
-          </a:fontRef>
-        </p:style>
-        <p:txBody>
-          <a:bodyPr rtlCol="0" anchor="ctr"/>
-          <a:lstStyle/>
-          <a:p>
-            <a:pPr algn="ctr"/>
-          </a:p>
-        </p:txBody>
-      </p:sp>
-      <p:sp>
-        <p:nvSpPr>
-          <p:cNvPr id="6" name="TextBox 5"/>
-          <p:cNvSpPr txBox="1"/>
-          <p:nvPr/>
-        </p:nvSpPr>
-        <p:spPr>
-          <a:xfrm>
-            <a:off x="731520" y="1508760"/>
-            <a:ext cx="3566160" cy="4846320"/>
+            <a:off x="731520" y="1554480"/>
+            <a:ext cx="7863840" cy="4754880"/>
           </a:xfrm>
           <a:prstGeom prst="rect">
             <a:avLst/>
@@ -5898,7 +6895,7 @@
               <a:spcAft>
                 <a:spcPts val="400"/>
               </a:spcAft>
-              <a:defRPr sz="1800" b="0" i="0">
+              <a:defRPr sz="2000" b="0" i="0">
                 <a:solidFill>
                   <a:srgbClr val="2C3E50"/>
                 </a:solidFill>
@@ -5906,7 +6903,7 @@
               </a:defRPr>
             </a:pPr>
             <a:r>
-              <a:t>Yoga Sutras: svarupa = "own form"</a:t>
+              <a:t>Sanskrit philosophical terms are not arbitrary labels</a:t>
             </a:r>
           </a:p>
           <a:p>
@@ -5917,7 +6914,7 @@
               <a:spcAft>
                 <a:spcPts val="400"/>
               </a:spcAft>
-              <a:defRPr sz="1800" b="0" i="0">
+              <a:defRPr sz="2000" b="0" i="0">
                 <a:solidFill>
                   <a:srgbClr val="2C3E50"/>
                 </a:solidFill>
@@ -5925,7 +6922,7 @@
               </a:defRPr>
             </a:pPr>
             <a:r>
-              <a:t>YS 1.3: "The seer abides in its own form"</a:t>
+              <a:t>Their internal structure — roots, prefixes, suffixes — encodes substantive claims about what concepts mean</a:t>
             </a:r>
           </a:p>
           <a:p>
@@ -5936,7 +6933,7 @@
               <a:spcAft>
                 <a:spcPts val="400"/>
               </a:spcAft>
-              <a:defRPr sz="1800" b="0" i="0">
+              <a:defRPr sz="2000" b="0" i="0">
                 <a:solidFill>
                   <a:srgbClr val="2C3E50"/>
                 </a:solidFill>
@@ -5944,7 +6941,7 @@
               </a:defRPr>
             </a:pPr>
             <a:r>
-              <a:t>Purusa has a real essential nature</a:t>
+              <a:t>This matters especially in the Yoga Sutras, where every word carries extraordinary weight</a:t>
             </a:r>
           </a:p>
           <a:p>
@@ -5955,7 +6952,7 @@
               <a:spcAft>
                 <a:spcPts val="400"/>
               </a:spcAft>
-              <a:defRPr sz="1800" b="0" i="0">
+              <a:defRPr sz="2000" b="0" i="0">
                 <a:solidFill>
                   <a:srgbClr val="2C3E50"/>
                 </a:solidFill>
@@ -5963,106 +6960,7 @@
               </a:defRPr>
             </a:pPr>
             <a:r>
-              <a:t>Meditation reveals it</a:t>
-            </a:r>
-          </a:p>
-        </p:txBody>
-      </p:sp>
-      <p:sp>
-        <p:nvSpPr>
-          <p:cNvPr id="7" name="TextBox 6"/>
-          <p:cNvSpPr txBox="1"/>
-          <p:nvPr/>
-        </p:nvSpPr>
-        <p:spPr>
-          <a:xfrm>
-            <a:off x="4663440" y="1508760"/>
-            <a:ext cx="4114800" cy="4846320"/>
-          </a:xfrm>
-          <a:prstGeom prst="rect">
-            <a:avLst/>
-          </a:prstGeom>
-          <a:noFill/>
-        </p:spPr>
-        <p:txBody>
-          <a:bodyPr wrap="square">
-            <a:spAutoFit/>
-          </a:bodyPr>
-          <a:lstStyle/>
-          <a:p>
-            <a:pPr algn="l">
-              <a:spcBef>
-                <a:spcPts val="800"/>
-              </a:spcBef>
-              <a:spcAft>
-                <a:spcPts val="400"/>
-              </a:spcAft>
-              <a:defRPr sz="1800" b="0" i="0">
-                <a:solidFill>
-                  <a:srgbClr val="2C3E50"/>
-                </a:solidFill>
-                <a:latin typeface="Avenir Next"/>
-              </a:defRPr>
-            </a:pPr>
-            <a:r>
-              <a:t>Chinese Madhyamaka: 自性 zixing = "own nature"</a:t>
-            </a:r>
-          </a:p>
-          <a:p>
-            <a:pPr algn="l">
-              <a:spcBef>
-                <a:spcPts val="800"/>
-              </a:spcBef>
-              <a:spcAft>
-                <a:spcPts val="400"/>
-              </a:spcAft>
-              <a:defRPr sz="1800" b="0" i="0">
-                <a:solidFill>
-                  <a:srgbClr val="2C3E50"/>
-                </a:solidFill>
-                <a:latin typeface="Avenir Next"/>
-              </a:defRPr>
-            </a:pPr>
-            <a:r>
-              <a:t>Central insight: 自性空 — "empty of own-nature"</a:t>
-            </a:r>
-          </a:p>
-          <a:p>
-            <a:pPr algn="l">
-              <a:spcBef>
-                <a:spcPts val="800"/>
-              </a:spcBef>
-              <a:spcAft>
-                <a:spcPts val="400"/>
-              </a:spcAft>
-              <a:defRPr sz="1800" b="0" i="0">
-                <a:solidFill>
-                  <a:srgbClr val="2C3E50"/>
-                </a:solidFill>
-                <a:latin typeface="Avenir Next"/>
-              </a:defRPr>
-            </a:pPr>
-            <a:r>
-              <a:t>Nothing has inherent nature</a:t>
-            </a:r>
-          </a:p>
-          <a:p>
-            <a:pPr algn="l">
-              <a:spcBef>
-                <a:spcPts val="800"/>
-              </a:spcBef>
-              <a:spcAft>
-                <a:spcPts val="400"/>
-              </a:spcAft>
-              <a:defRPr sz="1800" b="0" i="0">
-                <a:solidFill>
-                  <a:srgbClr val="2C3E50"/>
-                </a:solidFill>
-                <a:latin typeface="Avenir Next"/>
-              </a:defRPr>
-            </a:pPr>
-            <a:r>
-              <a:t>Meditation sees through the illusion of it</a:t>
+              <a:t>When these concepts crossed into Chinese, translation choices reshaped philosophy</a:t>
             </a:r>
           </a:p>
         </p:txBody>
@@ -6075,7 +6973,7 @@
 </p:sld>
 </file>
 
-<file path=ppt/slides/slide13.xml><?xml version="1.0" encoding="utf-8"?>
+<file path=ppt/slides/slide3.xml><?xml version="1.0" encoding="utf-8"?>
 <p:sld xmlns:a="http://schemas.openxmlformats.org/drawingml/2006/main" xmlns:p="http://schemas.openxmlformats.org/presentationml/2006/main" xmlns:r="http://schemas.openxmlformats.org/officeDocument/2006/relationships">
   <p:cSld>
     <p:bg>
@@ -6173,7 +7071,244 @@
               </a:defRPr>
             </a:pPr>
             <a:r>
-              <a:t>Live Demo — Sanskrit Word Explorer</a:t>
+              <a:t>The Defining Sutra</a:t>
+            </a:r>
+          </a:p>
+        </p:txBody>
+      </p:sp>
+      <p:sp>
+        <p:nvSpPr>
+          <p:cNvPr id="4" name="TextBox 3"/>
+          <p:cNvSpPr txBox="1"/>
+          <p:nvPr/>
+        </p:nvSpPr>
+        <p:spPr>
+          <a:xfrm>
+            <a:off x="914400" y="1463040"/>
+            <a:ext cx="914400" cy="914400"/>
+          </a:xfrm>
+          <a:prstGeom prst="rect">
+            <a:avLst/>
+          </a:prstGeom>
+          <a:noFill/>
+        </p:spPr>
+        <p:txBody>
+          <a:bodyPr wrap="none">
+            <a:spAutoFit/>
+          </a:bodyPr>
+          <a:lstStyle/>
+          <a:p>
+            <a:pPr algn="l">
+              <a:spcBef>
+                <a:spcPts val="0"/>
+              </a:spcBef>
+              <a:spcAft>
+                <a:spcPts val="0"/>
+              </a:spcAft>
+              <a:defRPr sz="7200" b="1" i="0">
+                <a:solidFill>
+                  <a:srgbClr val="7B2D26"/>
+                </a:solidFill>
+                <a:latin typeface="Palatino"/>
+              </a:defRPr>
+            </a:pPr>
+            <a:r>
+              <a:t>“</a:t>
+            </a:r>
+          </a:p>
+        </p:txBody>
+      </p:sp>
+      <p:sp>
+        <p:nvSpPr>
+          <p:cNvPr id="5" name="TextBox 4"/>
+          <p:cNvSpPr txBox="1"/>
+          <p:nvPr/>
+        </p:nvSpPr>
+        <p:spPr>
+          <a:xfrm>
+            <a:off x="1371600" y="2194560"/>
+            <a:ext cx="6858000" cy="2286000"/>
+          </a:xfrm>
+          <a:prstGeom prst="rect">
+            <a:avLst/>
+          </a:prstGeom>
+          <a:noFill/>
+        </p:spPr>
+        <p:txBody>
+          <a:bodyPr wrap="square">
+            <a:spAutoFit/>
+          </a:bodyPr>
+          <a:lstStyle/>
+          <a:p>
+            <a:pPr algn="l">
+              <a:spcBef>
+                <a:spcPts val="0"/>
+              </a:spcBef>
+              <a:spcAft>
+                <a:spcPts val="1200"/>
+              </a:spcAft>
+              <a:defRPr sz="2600" b="0" i="1">
+                <a:solidFill>
+                  <a:srgbClr val="1E2761"/>
+                </a:solidFill>
+                <a:latin typeface="Palatino"/>
+              </a:defRPr>
+            </a:pPr>
+            <a:r>
+              <a:t>योगश्चित्तवृत्तिनिरोधः    yogas citta-vrtti-nirodhah</a:t>
+            </a:r>
+          </a:p>
+        </p:txBody>
+      </p:sp>
+      <p:sp>
+        <p:nvSpPr>
+          <p:cNvPr id="6" name="TextBox 5"/>
+          <p:cNvSpPr txBox="1"/>
+          <p:nvPr/>
+        </p:nvSpPr>
+        <p:spPr>
+          <a:xfrm>
+            <a:off x="1371600" y="4572000"/>
+            <a:ext cx="6858000" cy="731520"/>
+          </a:xfrm>
+          <a:prstGeom prst="rect">
+            <a:avLst/>
+          </a:prstGeom>
+          <a:noFill/>
+        </p:spPr>
+        <p:txBody>
+          <a:bodyPr wrap="square">
+            <a:spAutoFit/>
+          </a:bodyPr>
+          <a:lstStyle/>
+          <a:p>
+            <a:pPr algn="l">
+              <a:spcBef>
+                <a:spcPts val="0"/>
+              </a:spcBef>
+              <a:spcAft>
+                <a:spcPts val="0"/>
+              </a:spcAft>
+              <a:defRPr sz="1600" b="0" i="1">
+                <a:solidFill>
+                  <a:srgbClr val="7B2D26"/>
+                </a:solidFill>
+                <a:latin typeface="Avenir Next"/>
+              </a:defRPr>
+            </a:pPr>
+            <a:r>
+              <a:t>Yoga Sutra 1.2 — "Yoga is the stilling of the turnings of the mind"</a:t>
+            </a:r>
+          </a:p>
+        </p:txBody>
+      </p:sp>
+    </p:spTree>
+  </p:cSld>
+  <p:clrMapOvr>
+    <a:masterClrMapping/>
+  </p:clrMapOvr>
+</p:sld>
+</file>
+
+<file path=ppt/slides/slide4.xml><?xml version="1.0" encoding="utf-8"?>
+<p:sld xmlns:a="http://schemas.openxmlformats.org/drawingml/2006/main" xmlns:p="http://schemas.openxmlformats.org/presentationml/2006/main" xmlns:r="http://schemas.openxmlformats.org/officeDocument/2006/relationships">
+  <p:cSld>
+    <p:bg>
+      <p:bgPr>
+        <a:solidFill>
+          <a:srgbClr val="F7F6F2"/>
+        </a:solidFill>
+        <a:effectLst/>
+      </p:bgPr>
+    </p:bg>
+    <p:spTree>
+      <p:nvGrpSpPr>
+        <p:cNvPr id="1" name=""/>
+        <p:cNvGrpSpPr/>
+        <p:nvPr/>
+      </p:nvGrpSpPr>
+      <p:grpSpPr/>
+      <p:sp>
+        <p:nvSpPr>
+          <p:cNvPr id="2" name="Rectangle 1"/>
+          <p:cNvSpPr/>
+          <p:nvPr/>
+        </p:nvSpPr>
+        <p:spPr>
+          <a:xfrm>
+            <a:off x="0" y="0"/>
+            <a:ext cx="320040" cy="6858000"/>
+          </a:xfrm>
+          <a:prstGeom prst="rect">
+            <a:avLst/>
+          </a:prstGeom>
+          <a:solidFill>
+            <a:srgbClr val="1E2761"/>
+          </a:solidFill>
+          <a:ln>
+            <a:noFill/>
+          </a:ln>
+        </p:spPr>
+        <p:style>
+          <a:lnRef idx="1">
+            <a:schemeClr val="accent1"/>
+          </a:lnRef>
+          <a:fillRef idx="3">
+            <a:schemeClr val="accent1"/>
+          </a:fillRef>
+          <a:effectRef idx="2">
+            <a:schemeClr val="accent1"/>
+          </a:effectRef>
+          <a:fontRef idx="minor">
+            <a:schemeClr val="lt1"/>
+          </a:fontRef>
+        </p:style>
+        <p:txBody>
+          <a:bodyPr rtlCol="0" anchor="ctr"/>
+          <a:lstStyle/>
+          <a:p>
+            <a:pPr algn="ctr"/>
+          </a:p>
+        </p:txBody>
+      </p:sp>
+      <p:sp>
+        <p:nvSpPr>
+          <p:cNvPr id="3" name="TextBox 2"/>
+          <p:cNvSpPr txBox="1"/>
+          <p:nvPr/>
+        </p:nvSpPr>
+        <p:spPr>
+          <a:xfrm>
+            <a:off x="731520" y="320040"/>
+            <a:ext cx="8046720" cy="822960"/>
+          </a:xfrm>
+          <a:prstGeom prst="rect">
+            <a:avLst/>
+          </a:prstGeom>
+          <a:noFill/>
+        </p:spPr>
+        <p:txBody>
+          <a:bodyPr wrap="square">
+            <a:spAutoFit/>
+          </a:bodyPr>
+          <a:lstStyle/>
+          <a:p>
+            <a:pPr algn="l">
+              <a:spcBef>
+                <a:spcPts val="0"/>
+              </a:spcBef>
+              <a:spcAft>
+                <a:spcPts val="0"/>
+              </a:spcAft>
+              <a:defRPr sz="3200" b="1" i="0">
+                <a:solidFill>
+                  <a:srgbClr val="1E2761"/>
+                </a:solidFill>
+                <a:latin typeface="Palatino"/>
+              </a:defRPr>
+            </a:pPr>
+            <a:r>
+              <a:t>How Sanskrit Word-Building Works</a:t>
             </a:r>
           </a:p>
         </p:txBody>
@@ -6247,12 +7382,12 @@
           <a:p>
             <a:pPr algn="l">
               <a:spcBef>
-                <a:spcPts val="1600"/>
+                <a:spcPts val="800"/>
               </a:spcBef>
               <a:spcAft>
                 <a:spcPts val="400"/>
               </a:spcAft>
-              <a:defRPr sz="2000" b="1" i="0">
+              <a:defRPr sz="2000" b="0" i="0">
                 <a:solidFill>
                   <a:srgbClr val="2C3E50"/>
                 </a:solidFill>
@@ -6260,18 +7395,18 @@
               </a:defRPr>
             </a:pPr>
             <a:r>
-              <a:t>84 terms from all 4 chapters of the Yoga Sutras</a:t>
-            </a:r>
-          </a:p>
-          <a:p>
-            <a:pPr algn="l">
-              <a:spcBef>
-                <a:spcPts val="200"/>
-              </a:spcBef>
-              <a:spcAft>
-                <a:spcPts val="600"/>
-              </a:spcAft>
-              <a:defRPr sz="1800" b="0" i="1">
+              <a:t>Root (dhatu): the core verb that carries primary meaning</a:t>
+            </a:r>
+          </a:p>
+          <a:p>
+            <a:pPr algn="l">
+              <a:spcBef>
+                <a:spcPts val="800"/>
+              </a:spcBef>
+              <a:spcAft>
+                <a:spcPts val="400"/>
+              </a:spcAft>
+              <a:defRPr sz="2000" b="0" i="0">
                 <a:solidFill>
                   <a:srgbClr val="2C3E50"/>
                 </a:solidFill>
@@ -6279,18 +7414,18 @@
               </a:defRPr>
             </a:pPr>
             <a:r>
-              <a:t>     Search by English, IAST, or Devanagari</a:t>
-            </a:r>
-          </a:p>
-          <a:p>
-            <a:pPr algn="l">
-              <a:spcBef>
-                <a:spcPts val="200"/>
-              </a:spcBef>
-              <a:spcAft>
-                <a:spcPts val="600"/>
-              </a:spcAft>
-              <a:defRPr sz="1800" b="0" i="1">
+              <a:t>Prefixes (upasarga): particles that modify direction or intensity</a:t>
+            </a:r>
+          </a:p>
+          <a:p>
+            <a:pPr algn="l">
+              <a:spcBef>
+                <a:spcPts val="800"/>
+              </a:spcBef>
+              <a:spcAft>
+                <a:spcPts val="400"/>
+              </a:spcAft>
+              <a:defRPr sz="2000" b="0" i="0">
                 <a:solidFill>
                   <a:srgbClr val="2C3E50"/>
                 </a:solidFill>
@@ -6298,18 +7433,18 @@
               </a:defRPr>
             </a:pPr>
             <a:r>
-              <a:t>     Color-coded morphological segmentation</a:t>
-            </a:r>
-          </a:p>
-          <a:p>
-            <a:pPr algn="l">
-              <a:spcBef>
-                <a:spcPts val="200"/>
-              </a:spcBef>
-              <a:spcAft>
-                <a:spcPts val="600"/>
-              </a:spcAft>
-              <a:defRPr sz="1800" b="0" i="1">
+              <a:t>Suffixes (pratyaya): endings that determine grammatical category</a:t>
+            </a:r>
+          </a:p>
+          <a:p>
+            <a:pPr algn="l">
+              <a:spcBef>
+                <a:spcPts val="800"/>
+              </a:spcBef>
+              <a:spcAft>
+                <a:spcPts val="400"/>
+              </a:spcAft>
+              <a:defRPr sz="2000" b="0" i="0">
                 <a:solidFill>
                   <a:srgbClr val="2C3E50"/>
                 </a:solidFill>
@@ -6317,18 +7452,18 @@
               </a:defRPr>
             </a:pPr>
             <a:r>
-              <a:t>     Root, prefix, and suffix breakdown cards</a:t>
-            </a:r>
-          </a:p>
-          <a:p>
-            <a:pPr algn="l">
-              <a:spcBef>
-                <a:spcPts val="200"/>
-              </a:spcBef>
-              <a:spcAft>
-                <a:spcPts val="600"/>
-              </a:spcAft>
-              <a:defRPr sz="1800" b="0" i="1">
+              <a:t>Compound structure: how multiple words join into one</a:t>
+            </a:r>
+          </a:p>
+          <a:p>
+            <a:pPr algn="l">
+              <a:spcBef>
+                <a:spcPts val="800"/>
+              </a:spcBef>
+              <a:spcAft>
+                <a:spcPts val="400"/>
+              </a:spcAft>
+              <a:defRPr sz="2000" b="0" i="0">
                 <a:solidFill>
                   <a:srgbClr val="2C3E50"/>
                 </a:solidFill>
@@ -6336,64 +7471,7 @@
               </a:defRPr>
             </a:pPr>
             <a:r>
-              <a:t>     Philosophical meaning and Yoga Sutras references</a:t>
-            </a:r>
-          </a:p>
-          <a:p>
-            <a:pPr algn="l">
-              <a:spcBef>
-                <a:spcPts val="200"/>
-              </a:spcBef>
-              <a:spcAft>
-                <a:spcPts val="600"/>
-              </a:spcAft>
-              <a:defRPr sz="1800" b="0" i="1">
-                <a:solidFill>
-                  <a:srgbClr val="2C3E50"/>
-                </a:solidFill>
-                <a:latin typeface="Avenir Next"/>
-              </a:defRPr>
-            </a:pPr>
-            <a:r>
-              <a:t>     Chinese Buddhist equivalents where attested</a:t>
-            </a:r>
-          </a:p>
-          <a:p>
-            <a:pPr algn="l">
-              <a:spcBef>
-                <a:spcPts val="1600"/>
-              </a:spcBef>
-              <a:spcAft>
-                <a:spcPts val="400"/>
-              </a:spcAft>
-              <a:defRPr sz="2000" b="1" i="0">
-                <a:solidFill>
-                  <a:srgbClr val="2C3E50"/>
-                </a:solidFill>
-                <a:latin typeface="Avenir Next"/>
-              </a:defRPr>
-            </a:pPr>
-            <a:r>
-              <a:t>Works offline — no installation needed</a:t>
-            </a:r>
-          </a:p>
-          <a:p>
-            <a:pPr algn="l">
-              <a:spcBef>
-                <a:spcPts val="200"/>
-              </a:spcBef>
-              <a:spcAft>
-                <a:spcPts val="600"/>
-              </a:spcAft>
-              <a:defRPr sz="1800" b="0" i="1">
-                <a:solidFill>
-                  <a:srgbClr val="2C3E50"/>
-                </a:solidFill>
-                <a:latin typeface="Avenir Next"/>
-              </a:defRPr>
-            </a:pPr>
-            <a:r>
-              <a:t>     Available for you to explore after class</a:t>
+              <a:t>The literal meaning built from parts often illuminates the philosophical meaning</a:t>
             </a:r>
           </a:p>
         </p:txBody>
@@ -6406,7 +7484,7 @@
 </p:sld>
 </file>
 
-<file path=ppt/slides/slide14.xml><?xml version="1.0" encoding="utf-8"?>
+<file path=ppt/slides/slide5.xml><?xml version="1.0" encoding="utf-8"?>
 <p:sld xmlns:a="http://schemas.openxmlformats.org/drawingml/2006/main" xmlns:p="http://schemas.openxmlformats.org/presentationml/2006/main" xmlns:r="http://schemas.openxmlformats.org/officeDocument/2006/relationships">
   <p:cSld>
     <p:bg>
@@ -6476,7 +7554,7 @@
         <p:spPr>
           <a:xfrm>
             <a:off x="731520" y="320040"/>
-            <a:ext cx="8046720" cy="822960"/>
+            <a:ext cx="10515600" cy="1005840"/>
           </a:xfrm>
           <a:prstGeom prst="rect">
             <a:avLst/>
@@ -6496,7 +7574,7 @@
               <a:spcAft>
                 <a:spcPts val="0"/>
               </a:spcAft>
-              <a:defRPr sz="3200" b="1" i="0">
+              <a:defRPr sz="2800" b="1" i="0">
                 <a:solidFill>
                   <a:srgbClr val="1E2761"/>
                 </a:solidFill>
@@ -6504,7 +7582,7 @@
               </a:defRPr>
             </a:pPr>
             <a:r>
-              <a:t>What the Words Know</a:t>
+              <a:t>समाधि samadhi — Meditative Absorption</a:t>
             </a:r>
           </a:p>
         </p:txBody>
@@ -6517,7 +7595,7 @@
         </p:nvSpPr>
         <p:spPr>
           <a:xfrm>
-            <a:off x="731520" y="1188720"/>
+            <a:off x="731520" y="1371600"/>
             <a:ext cx="1828800" cy="50800"/>
           </a:xfrm>
           <a:prstGeom prst="roundRect">
@@ -6556,14 +7634,57 @@
       </p:sp>
       <p:sp>
         <p:nvSpPr>
-          <p:cNvPr id="5" name="TextBox 4"/>
+          <p:cNvPr id="5" name="Rectangle 4"/>
+          <p:cNvSpPr/>
+          <p:nvPr/>
+        </p:nvSpPr>
+        <p:spPr>
+          <a:xfrm>
+            <a:off x="4434840" y="1645920"/>
+            <a:ext cx="19050" cy="4572000"/>
+          </a:xfrm>
+          <a:prstGeom prst="rect">
+            <a:avLst/>
+          </a:prstGeom>
+          <a:solidFill>
+            <a:srgbClr val="D0D0D0"/>
+          </a:solidFill>
+          <a:ln>
+            <a:noFill/>
+          </a:ln>
+        </p:spPr>
+        <p:style>
+          <a:lnRef idx="1">
+            <a:schemeClr val="accent1"/>
+          </a:lnRef>
+          <a:fillRef idx="3">
+            <a:schemeClr val="accent1"/>
+          </a:fillRef>
+          <a:effectRef idx="2">
+            <a:schemeClr val="accent1"/>
+          </a:effectRef>
+          <a:fontRef idx="minor">
+            <a:schemeClr val="lt1"/>
+          </a:fontRef>
+        </p:style>
+        <p:txBody>
+          <a:bodyPr rtlCol="0" anchor="ctr"/>
+          <a:lstStyle/>
+          <a:p>
+            <a:pPr algn="ctr"/>
+          </a:p>
+        </p:txBody>
+      </p:sp>
+      <p:sp>
+        <p:nvSpPr>
+          <p:cNvPr id="6" name="TextBox 5"/>
           <p:cNvSpPr txBox="1"/>
           <p:nvPr/>
         </p:nvSpPr>
         <p:spPr>
           <a:xfrm>
-            <a:off x="731520" y="1554480"/>
-            <a:ext cx="7863840" cy="4754880"/>
+            <a:off x="731520" y="1691640"/>
+            <a:ext cx="3566160" cy="4663440"/>
           </a:xfrm>
           <a:prstGeom prst="rect">
             <a:avLst/>
@@ -6578,12 +7699,12 @@
           <a:p>
             <a:pPr algn="l">
               <a:spcBef>
-                <a:spcPts val="1600"/>
+                <a:spcPts val="800"/>
               </a:spcBef>
               <a:spcAft>
                 <a:spcPts val="400"/>
               </a:spcAft>
-              <a:defRPr sz="2000" b="1" i="0">
+              <a:defRPr sz="1800" b="0" i="0">
                 <a:solidFill>
                   <a:srgbClr val="2C3E50"/>
                 </a:solidFill>
@@ -6591,18 +7712,18 @@
               </a:defRPr>
             </a:pPr>
             <a:r>
-              <a:t>Sanskrit word-structure carries philosophical weight</a:t>
-            </a:r>
-          </a:p>
-          <a:p>
-            <a:pPr algn="l">
-              <a:spcBef>
-                <a:spcPts val="200"/>
-              </a:spcBef>
-              <a:spcAft>
-                <a:spcPts val="600"/>
-              </a:spcAft>
-              <a:defRPr sz="1800" b="0" i="1">
+              <a:t>Root: √dha — "to place, put"</a:t>
+            </a:r>
+          </a:p>
+          <a:p>
+            <a:pPr algn="l">
+              <a:spcBef>
+                <a:spcPts val="800"/>
+              </a:spcBef>
+              <a:spcAft>
+                <a:spcPts val="400"/>
+              </a:spcAft>
+              <a:defRPr sz="1800" b="0" i="0">
                 <a:solidFill>
                   <a:srgbClr val="2C3E50"/>
                 </a:solidFill>
@@ -6610,18 +7731,18 @@
               </a:defRPr>
             </a:pPr>
             <a:r>
-              <a:t>     Roots and prefixes compress arguments about what concepts mean</a:t>
-            </a:r>
-          </a:p>
-          <a:p>
-            <a:pPr algn="l">
-              <a:spcBef>
-                <a:spcPts val="1600"/>
+              <a:t>Prefixes: sam- ("together") + a- ("toward")</a:t>
+            </a:r>
+          </a:p>
+          <a:p>
+            <a:pPr algn="l">
+              <a:spcBef>
+                <a:spcPts val="800"/>
               </a:spcBef>
               <a:spcAft>
                 <a:spcPts val="400"/>
               </a:spcAft>
-              <a:defRPr sz="2000" b="1" i="0">
+              <a:defRPr sz="1800" b="0" i="0">
                 <a:solidFill>
                   <a:srgbClr val="2C3E50"/>
                 </a:solidFill>
@@ -6629,18 +7750,18 @@
               </a:defRPr>
             </a:pPr>
             <a:r>
-              <a:t>Translation is always interpretation</a:t>
-            </a:r>
-          </a:p>
-          <a:p>
-            <a:pPr algn="l">
-              <a:spcBef>
-                <a:spcPts val="200"/>
-              </a:spcBef>
-              <a:spcAft>
-                <a:spcPts val="600"/>
-              </a:spcAft>
-              <a:defRPr sz="1800" b="0" i="1">
+              <a:t>Suffix: -i (action noun)</a:t>
+            </a:r>
+          </a:p>
+          <a:p>
+            <a:pPr algn="l">
+              <a:spcBef>
+                <a:spcPts val="800"/>
+              </a:spcBef>
+              <a:spcAft>
+                <a:spcPts val="400"/>
+              </a:spcAft>
+              <a:defRPr sz="1800" b="0" i="0">
                 <a:solidFill>
                   <a:srgbClr val="2C3E50"/>
                 </a:solidFill>
@@ -6648,18 +7769,18 @@
               </a:defRPr>
             </a:pPr>
             <a:r>
-              <a:t>     Sound vs. meaning, darkness vs. ignorance, extinction vs. restraint</a:t>
-            </a:r>
-          </a:p>
-          <a:p>
-            <a:pPr algn="l">
-              <a:spcBef>
-                <a:spcPts val="1600"/>
+              <a:t>Literal: "a complete placing-together"</a:t>
+            </a:r>
+          </a:p>
+          <a:p>
+            <a:pPr algn="l">
+              <a:spcBef>
+                <a:spcPts val="800"/>
               </a:spcBef>
               <a:spcAft>
                 <a:spcPts val="400"/>
               </a:spcAft>
-              <a:defRPr sz="2000" b="1" i="0">
+              <a:defRPr sz="1800" b="0" i="0">
                 <a:solidFill>
                   <a:srgbClr val="2C3E50"/>
                 </a:solidFill>
@@ -6667,18 +7788,41 @@
               </a:defRPr>
             </a:pPr>
             <a:r>
-              <a:t>Cross-cultural transmission is real but partial</a:t>
-            </a:r>
-          </a:p>
-          <a:p>
-            <a:pPr algn="l">
-              <a:spcBef>
-                <a:spcPts val="200"/>
-              </a:spcBef>
-              <a:spcAft>
-                <a:spcPts val="600"/>
-              </a:spcAft>
-              <a:defRPr sz="1800" b="0" i="1">
+              <a:t>Philosophical: total absorption of awareness into its object</a:t>
+            </a:r>
+          </a:p>
+        </p:txBody>
+      </p:sp>
+      <p:sp>
+        <p:nvSpPr>
+          <p:cNvPr id="7" name="TextBox 6"/>
+          <p:cNvSpPr txBox="1"/>
+          <p:nvPr/>
+        </p:nvSpPr>
+        <p:spPr>
+          <a:xfrm>
+            <a:off x="4663440" y="1691640"/>
+            <a:ext cx="4114800" cy="4663440"/>
+          </a:xfrm>
+          <a:prstGeom prst="rect">
+            <a:avLst/>
+          </a:prstGeom>
+          <a:noFill/>
+        </p:spPr>
+        <p:txBody>
+          <a:bodyPr wrap="square">
+            <a:spAutoFit/>
+          </a:bodyPr>
+          <a:lstStyle/>
+          <a:p>
+            <a:pPr algn="l">
+              <a:spcBef>
+                <a:spcPts val="800"/>
+              </a:spcBef>
+              <a:spcAft>
+                <a:spcPts val="400"/>
+              </a:spcAft>
+              <a:defRPr sz="1800" b="0" i="0">
                 <a:solidFill>
                   <a:srgbClr val="2C3E50"/>
                 </a:solidFill>
@@ -6686,18 +7830,18 @@
               </a:defRPr>
             </a:pPr>
             <a:r>
-              <a:t>     dhyāna → zen is rock-solid; the Yoga Sutras' vocabulary has no Chinese equivalent</a:t>
-            </a:r>
-          </a:p>
-          <a:p>
-            <a:pPr algn="l">
-              <a:spcBef>
-                <a:spcPts val="1600"/>
+              <a:t>The word's architecture argues for its meaning</a:t>
+            </a:r>
+          </a:p>
+          <a:p>
+            <a:pPr algn="l">
+              <a:spcBef>
+                <a:spcPts val="800"/>
               </a:spcBef>
               <a:spcAft>
                 <a:spcPts val="400"/>
               </a:spcAft>
-              <a:defRPr sz="2000" b="1" i="0">
+              <a:defRPr sz="1800" b="0" i="0">
                 <a:solidFill>
                   <a:srgbClr val="2C3E50"/>
                 </a:solidFill>
@@ -6705,7 +7849,45 @@
               </a:defRPr>
             </a:pPr>
             <a:r>
-              <a:t>The most instructive cases are sometimes the failures</a:t>
+              <a:t>"Placing-together" is not a metaphor added later — it is built into the word</a:t>
+            </a:r>
+          </a:p>
+          <a:p>
+            <a:pPr algn="l">
+              <a:spcBef>
+                <a:spcPts val="800"/>
+              </a:spcBef>
+              <a:spcAft>
+                <a:spcPts val="400"/>
+              </a:spcAft>
+              <a:defRPr sz="1800" b="0" i="0">
+                <a:solidFill>
+                  <a:srgbClr val="2C3E50"/>
+                </a:solidFill>
+                <a:latin typeface="Avenir Next"/>
+              </a:defRPr>
+            </a:pPr>
+            <a:r>
+              <a:t>Common folk etymology sama + adhi ("equal placing") is not supported by standard grammar</a:t>
+            </a:r>
+          </a:p>
+          <a:p>
+            <a:pPr algn="l">
+              <a:spcBef>
+                <a:spcPts val="800"/>
+              </a:spcBef>
+              <a:spcAft>
+                <a:spcPts val="400"/>
+              </a:spcAft>
+              <a:defRPr sz="1800" b="0" i="0">
+                <a:solidFill>
+                  <a:srgbClr val="2C3E50"/>
+                </a:solidFill>
+                <a:latin typeface="Avenir Next"/>
+              </a:defRPr>
+            </a:pPr>
+            <a:r>
+              <a:t>Standard derivation: sam + a + √dha (Monier-Williams)</a:t>
             </a:r>
           </a:p>
         </p:txBody>
@@ -6718,7 +7900,7 @@
 </p:sld>
 </file>
 
-<file path=ppt/slides/slide2.xml><?xml version="1.0" encoding="utf-8"?>
+<file path=ppt/slides/slide6.xml><?xml version="1.0" encoding="utf-8"?>
 <p:sld xmlns:a="http://schemas.openxmlformats.org/drawingml/2006/main" xmlns:p="http://schemas.openxmlformats.org/presentationml/2006/main" xmlns:r="http://schemas.openxmlformats.org/officeDocument/2006/relationships">
   <p:cSld>
     <p:bg>
@@ -6788,7 +7970,7 @@
         <p:spPr>
           <a:xfrm>
             <a:off x="731520" y="320040"/>
-            <a:ext cx="8046720" cy="822960"/>
+            <a:ext cx="10515600" cy="1005840"/>
           </a:xfrm>
           <a:prstGeom prst="rect">
             <a:avLst/>
@@ -6808,7 +7990,7 @@
               <a:spcAft>
                 <a:spcPts val="0"/>
               </a:spcAft>
-              <a:defRPr sz="3200" b="1" i="0">
+              <a:defRPr sz="2800" b="1" i="0">
                 <a:solidFill>
                   <a:srgbClr val="1E2761"/>
                 </a:solidFill>
@@ -6816,7 +7998,7 @@
               </a:defRPr>
             </a:pPr>
             <a:r>
-              <a:t>The Core Claim</a:t>
+              <a:t>निरोध nirodha — Cessation or Stilling</a:t>
             </a:r>
           </a:p>
         </p:txBody>
@@ -6829,7 +8011,7 @@
         </p:nvSpPr>
         <p:spPr>
           <a:xfrm>
-            <a:off x="731520" y="1188720"/>
+            <a:off x="731520" y="1371600"/>
             <a:ext cx="1828800" cy="50800"/>
           </a:xfrm>
           <a:prstGeom prst="roundRect">
@@ -6868,14 +8050,57 @@
       </p:sp>
       <p:sp>
         <p:nvSpPr>
-          <p:cNvPr id="5" name="TextBox 4"/>
+          <p:cNvPr id="5" name="Rectangle 4"/>
+          <p:cNvSpPr/>
+          <p:nvPr/>
+        </p:nvSpPr>
+        <p:spPr>
+          <a:xfrm>
+            <a:off x="4434840" y="1645920"/>
+            <a:ext cx="19050" cy="4572000"/>
+          </a:xfrm>
+          <a:prstGeom prst="rect">
+            <a:avLst/>
+          </a:prstGeom>
+          <a:solidFill>
+            <a:srgbClr val="D0D0D0"/>
+          </a:solidFill>
+          <a:ln>
+            <a:noFill/>
+          </a:ln>
+        </p:spPr>
+        <p:style>
+          <a:lnRef idx="1">
+            <a:schemeClr val="accent1"/>
+          </a:lnRef>
+          <a:fillRef idx="3">
+            <a:schemeClr val="accent1"/>
+          </a:fillRef>
+          <a:effectRef idx="2">
+            <a:schemeClr val="accent1"/>
+          </a:effectRef>
+          <a:fontRef idx="minor">
+            <a:schemeClr val="lt1"/>
+          </a:fontRef>
+        </p:style>
+        <p:txBody>
+          <a:bodyPr rtlCol="0" anchor="ctr"/>
+          <a:lstStyle/>
+          <a:p>
+            <a:pPr algn="ctr"/>
+          </a:p>
+        </p:txBody>
+      </p:sp>
+      <p:sp>
+        <p:nvSpPr>
+          <p:cNvPr id="6" name="TextBox 5"/>
           <p:cNvSpPr txBox="1"/>
           <p:nvPr/>
         </p:nvSpPr>
         <p:spPr>
           <a:xfrm>
-            <a:off x="731520" y="1554480"/>
-            <a:ext cx="7863840" cy="4754880"/>
+            <a:off x="731520" y="1691640"/>
+            <a:ext cx="3566160" cy="4663440"/>
           </a:xfrm>
           <a:prstGeom prst="rect">
             <a:avLst/>
@@ -6895,7 +8120,7 @@
               <a:spcAft>
                 <a:spcPts val="400"/>
               </a:spcAft>
-              <a:defRPr sz="2000" b="0" i="0">
+              <a:defRPr sz="1800" b="0" i="0">
                 <a:solidFill>
                   <a:srgbClr val="2C3E50"/>
                 </a:solidFill>
@@ -6903,7 +8128,7 @@
               </a:defRPr>
             </a:pPr>
             <a:r>
-              <a:t>Sanskrit philosophical terms are not arbitrary labels</a:t>
+              <a:t>Root: √rudh — "to hold back, restrain"</a:t>
             </a:r>
           </a:p>
           <a:p>
@@ -6914,7 +8139,7 @@
               <a:spcAft>
                 <a:spcPts val="400"/>
               </a:spcAft>
-              <a:defRPr sz="2000" b="0" i="0">
+              <a:defRPr sz="1800" b="0" i="0">
                 <a:solidFill>
                   <a:srgbClr val="2C3E50"/>
                 </a:solidFill>
@@ -6922,7 +8147,7 @@
               </a:defRPr>
             </a:pPr>
             <a:r>
-              <a:t>Their internal structure — roots, prefixes, suffixes — encodes substantive claims about what concepts mean</a:t>
+              <a:t>Prefix: ni- (intensifying)</a:t>
             </a:r>
           </a:p>
           <a:p>
@@ -6933,7 +8158,7 @@
               <a:spcAft>
                 <a:spcPts val="400"/>
               </a:spcAft>
-              <a:defRPr sz="2000" b="0" i="0">
+              <a:defRPr sz="1800" b="0" i="0">
                 <a:solidFill>
                   <a:srgbClr val="2C3E50"/>
                 </a:solidFill>
@@ -6941,7 +8166,7 @@
               </a:defRPr>
             </a:pPr>
             <a:r>
-              <a:t>This matters especially in the Yoga Sutras, where every word carries extraordinary weight</a:t>
+              <a:t>Suffix: -a (action noun)</a:t>
             </a:r>
           </a:p>
           <a:p>
@@ -6952,7 +8177,7 @@
               <a:spcAft>
                 <a:spcPts val="400"/>
               </a:spcAft>
-              <a:defRPr sz="2000" b="0" i="0">
+              <a:defRPr sz="1800" b="0" i="0">
                 <a:solidFill>
                   <a:srgbClr val="2C3E50"/>
                 </a:solidFill>
@@ -6960,7 +8185,144 @@
               </a:defRPr>
             </a:pPr>
             <a:r>
-              <a:t>When these concepts crossed into Chinese, translation choices reshaped philosophy</a:t>
+              <a:t>Literal: "a complete holding-back"</a:t>
+            </a:r>
+          </a:p>
+          <a:p>
+            <a:pPr algn="l">
+              <a:spcBef>
+                <a:spcPts val="800"/>
+              </a:spcBef>
+              <a:spcAft>
+                <a:spcPts val="400"/>
+              </a:spcAft>
+              <a:defRPr sz="1800" b="0" i="0">
+                <a:solidFill>
+                  <a:srgbClr val="2C3E50"/>
+                </a:solidFill>
+                <a:latin typeface="Avenir Next"/>
+              </a:defRPr>
+            </a:pPr>
+            <a:r>
+              <a:t>Philosophical: the stilling of mental activity</a:t>
+            </a:r>
+          </a:p>
+        </p:txBody>
+      </p:sp>
+      <p:sp>
+        <p:nvSpPr>
+          <p:cNvPr id="7" name="TextBox 6"/>
+          <p:cNvSpPr txBox="1"/>
+          <p:nvPr/>
+        </p:nvSpPr>
+        <p:spPr>
+          <a:xfrm>
+            <a:off x="4663440" y="1691640"/>
+            <a:ext cx="4114800" cy="4663440"/>
+          </a:xfrm>
+          <a:prstGeom prst="rect">
+            <a:avLst/>
+          </a:prstGeom>
+          <a:noFill/>
+        </p:spPr>
+        <p:txBody>
+          <a:bodyPr wrap="square">
+            <a:spAutoFit/>
+          </a:bodyPr>
+          <a:lstStyle/>
+          <a:p>
+            <a:pPr algn="l">
+              <a:spcBef>
+                <a:spcPts val="800"/>
+              </a:spcBef>
+              <a:spcAft>
+                <a:spcPts val="400"/>
+              </a:spcAft>
+              <a:defRPr sz="1800" b="0" i="0">
+                <a:solidFill>
+                  <a:srgbClr val="2C3E50"/>
+                </a:solidFill>
+                <a:latin typeface="Avenir Next"/>
+              </a:defRPr>
+            </a:pPr>
+            <a:r>
+              <a:t>English translations carry different weight:</a:t>
+            </a:r>
+          </a:p>
+          <a:p>
+            <a:pPr algn="l">
+              <a:spcBef>
+                <a:spcPts val="800"/>
+              </a:spcBef>
+              <a:spcAft>
+                <a:spcPts val="400"/>
+              </a:spcAft>
+              <a:defRPr sz="1800" b="0" i="0">
+                <a:solidFill>
+                  <a:srgbClr val="2C3E50"/>
+                </a:solidFill>
+                <a:latin typeface="Avenir Next"/>
+              </a:defRPr>
+            </a:pPr>
+            <a:r>
+              <a:t>"Cessation" — implies ending</a:t>
+            </a:r>
+          </a:p>
+          <a:p>
+            <a:pPr algn="l">
+              <a:spcBef>
+                <a:spcPts val="800"/>
+              </a:spcBef>
+              <a:spcAft>
+                <a:spcPts val="400"/>
+              </a:spcAft>
+              <a:defRPr sz="1800" b="0" i="0">
+                <a:solidFill>
+                  <a:srgbClr val="2C3E50"/>
+                </a:solidFill>
+                <a:latin typeface="Avenir Next"/>
+              </a:defRPr>
+            </a:pPr>
+            <a:r>
+              <a:t>"Suppression" — implies force</a:t>
+            </a:r>
+          </a:p>
+          <a:p>
+            <a:pPr algn="l">
+              <a:spcBef>
+                <a:spcPts val="800"/>
+              </a:spcBef>
+              <a:spcAft>
+                <a:spcPts val="400"/>
+              </a:spcAft>
+              <a:defRPr sz="1800" b="0" i="0">
+                <a:solidFill>
+                  <a:srgbClr val="2C3E50"/>
+                </a:solidFill>
+                <a:latin typeface="Avenir Next"/>
+              </a:defRPr>
+            </a:pPr>
+            <a:r>
+              <a:t>"Stilling" — implies quieting</a:t>
+            </a:r>
+          </a:p>
+          <a:p>
+            <a:pPr algn="l">
+              <a:spcBef>
+                <a:spcPts val="800"/>
+              </a:spcBef>
+              <a:spcAft>
+                <a:spcPts val="400"/>
+              </a:spcAft>
+              <a:defRPr sz="1800" b="0" i="0">
+                <a:solidFill>
+                  <a:srgbClr val="2C3E50"/>
+                </a:solidFill>
+                <a:latin typeface="Avenir Next"/>
+              </a:defRPr>
+            </a:pPr>
+            <a:r>
+              <a:t>The root √rudh favors "stilling" over "destroying"</a:t>
             </a:r>
           </a:p>
         </p:txBody>
@@ -6973,7 +8335,7 @@
 </p:sld>
 </file>
 
-<file path=ppt/slides/slide3.xml><?xml version="1.0" encoding="utf-8"?>
+<file path=ppt/slides/slide7.xml><?xml version="1.0" encoding="utf-8"?>
 <p:sld xmlns:a="http://schemas.openxmlformats.org/drawingml/2006/main" xmlns:p="http://schemas.openxmlformats.org/presentationml/2006/main" xmlns:r="http://schemas.openxmlformats.org/officeDocument/2006/relationships">
   <p:cSld>
     <p:bg>
@@ -7043,7 +8405,7 @@
         <p:spPr>
           <a:xfrm>
             <a:off x="731520" y="320040"/>
-            <a:ext cx="8046720" cy="822960"/>
+            <a:ext cx="10515600" cy="1005840"/>
           </a:xfrm>
           <a:prstGeom prst="rect">
             <a:avLst/>
@@ -7063,7 +8425,7 @@
               <a:spcAft>
                 <a:spcPts val="0"/>
               </a:spcAft>
-              <a:defRPr sz="3200" b="1" i="0">
+              <a:defRPr sz="2800" b="1" i="0">
                 <a:solidFill>
                   <a:srgbClr val="1E2761"/>
                 </a:solidFill>
@@ -7071,244 +8433,7 @@
               </a:defRPr>
             </a:pPr>
             <a:r>
-              <a:t>The Defining Sutra</a:t>
-            </a:r>
-          </a:p>
-        </p:txBody>
-      </p:sp>
-      <p:sp>
-        <p:nvSpPr>
-          <p:cNvPr id="4" name="TextBox 3"/>
-          <p:cNvSpPr txBox="1"/>
-          <p:nvPr/>
-        </p:nvSpPr>
-        <p:spPr>
-          <a:xfrm>
-            <a:off x="914400" y="1463040"/>
-            <a:ext cx="914400" cy="914400"/>
-          </a:xfrm>
-          <a:prstGeom prst="rect">
-            <a:avLst/>
-          </a:prstGeom>
-          <a:noFill/>
-        </p:spPr>
-        <p:txBody>
-          <a:bodyPr wrap="none">
-            <a:spAutoFit/>
-          </a:bodyPr>
-          <a:lstStyle/>
-          <a:p>
-            <a:pPr algn="l">
-              <a:spcBef>
-                <a:spcPts val="0"/>
-              </a:spcBef>
-              <a:spcAft>
-                <a:spcPts val="0"/>
-              </a:spcAft>
-              <a:defRPr sz="7200" b="1" i="0">
-                <a:solidFill>
-                  <a:srgbClr val="7B2D26"/>
-                </a:solidFill>
-                <a:latin typeface="Palatino"/>
-              </a:defRPr>
-            </a:pPr>
-            <a:r>
-              <a:t>“</a:t>
-            </a:r>
-          </a:p>
-        </p:txBody>
-      </p:sp>
-      <p:sp>
-        <p:nvSpPr>
-          <p:cNvPr id="5" name="TextBox 4"/>
-          <p:cNvSpPr txBox="1"/>
-          <p:nvPr/>
-        </p:nvSpPr>
-        <p:spPr>
-          <a:xfrm>
-            <a:off x="1371600" y="2194560"/>
-            <a:ext cx="6858000" cy="2286000"/>
-          </a:xfrm>
-          <a:prstGeom prst="rect">
-            <a:avLst/>
-          </a:prstGeom>
-          <a:noFill/>
-        </p:spPr>
-        <p:txBody>
-          <a:bodyPr wrap="square">
-            <a:spAutoFit/>
-          </a:bodyPr>
-          <a:lstStyle/>
-          <a:p>
-            <a:pPr algn="l">
-              <a:spcBef>
-                <a:spcPts val="0"/>
-              </a:spcBef>
-              <a:spcAft>
-                <a:spcPts val="1200"/>
-              </a:spcAft>
-              <a:defRPr sz="2600" b="0" i="1">
-                <a:solidFill>
-                  <a:srgbClr val="1E2761"/>
-                </a:solidFill>
-                <a:latin typeface="Palatino"/>
-              </a:defRPr>
-            </a:pPr>
-            <a:r>
-              <a:t>योगश्चित्तवृत्तिनिरोधः    yogas citta-vrtti-nirodhah</a:t>
-            </a:r>
-          </a:p>
-        </p:txBody>
-      </p:sp>
-      <p:sp>
-        <p:nvSpPr>
-          <p:cNvPr id="6" name="TextBox 5"/>
-          <p:cNvSpPr txBox="1"/>
-          <p:nvPr/>
-        </p:nvSpPr>
-        <p:spPr>
-          <a:xfrm>
-            <a:off x="1371600" y="4572000"/>
-            <a:ext cx="6858000" cy="731520"/>
-          </a:xfrm>
-          <a:prstGeom prst="rect">
-            <a:avLst/>
-          </a:prstGeom>
-          <a:noFill/>
-        </p:spPr>
-        <p:txBody>
-          <a:bodyPr wrap="square">
-            <a:spAutoFit/>
-          </a:bodyPr>
-          <a:lstStyle/>
-          <a:p>
-            <a:pPr algn="l">
-              <a:spcBef>
-                <a:spcPts val="0"/>
-              </a:spcBef>
-              <a:spcAft>
-                <a:spcPts val="0"/>
-              </a:spcAft>
-              <a:defRPr sz="1600" b="0" i="1">
-                <a:solidFill>
-                  <a:srgbClr val="7B2D26"/>
-                </a:solidFill>
-                <a:latin typeface="Avenir Next"/>
-              </a:defRPr>
-            </a:pPr>
-            <a:r>
-              <a:t>Yoga Sutra 1.2 — "Yoga is the stilling of the turnings of the mind"</a:t>
-            </a:r>
-          </a:p>
-        </p:txBody>
-      </p:sp>
-    </p:spTree>
-  </p:cSld>
-  <p:clrMapOvr>
-    <a:masterClrMapping/>
-  </p:clrMapOvr>
-</p:sld>
-</file>
-
-<file path=ppt/slides/slide4.xml><?xml version="1.0" encoding="utf-8"?>
-<p:sld xmlns:a="http://schemas.openxmlformats.org/drawingml/2006/main" xmlns:p="http://schemas.openxmlformats.org/presentationml/2006/main" xmlns:r="http://schemas.openxmlformats.org/officeDocument/2006/relationships">
-  <p:cSld>
-    <p:bg>
-      <p:bgPr>
-        <a:solidFill>
-          <a:srgbClr val="F7F6F2"/>
-        </a:solidFill>
-        <a:effectLst/>
-      </p:bgPr>
-    </p:bg>
-    <p:spTree>
-      <p:nvGrpSpPr>
-        <p:cNvPr id="1" name=""/>
-        <p:cNvGrpSpPr/>
-        <p:nvPr/>
-      </p:nvGrpSpPr>
-      <p:grpSpPr/>
-      <p:sp>
-        <p:nvSpPr>
-          <p:cNvPr id="2" name="Rectangle 1"/>
-          <p:cNvSpPr/>
-          <p:nvPr/>
-        </p:nvSpPr>
-        <p:spPr>
-          <a:xfrm>
-            <a:off x="0" y="0"/>
-            <a:ext cx="320040" cy="6858000"/>
-          </a:xfrm>
-          <a:prstGeom prst="rect">
-            <a:avLst/>
-          </a:prstGeom>
-          <a:solidFill>
-            <a:srgbClr val="1E2761"/>
-          </a:solidFill>
-          <a:ln>
-            <a:noFill/>
-          </a:ln>
-        </p:spPr>
-        <p:style>
-          <a:lnRef idx="1">
-            <a:schemeClr val="accent1"/>
-          </a:lnRef>
-          <a:fillRef idx="3">
-            <a:schemeClr val="accent1"/>
-          </a:fillRef>
-          <a:effectRef idx="2">
-            <a:schemeClr val="accent1"/>
-          </a:effectRef>
-          <a:fontRef idx="minor">
-            <a:schemeClr val="lt1"/>
-          </a:fontRef>
-        </p:style>
-        <p:txBody>
-          <a:bodyPr rtlCol="0" anchor="ctr"/>
-          <a:lstStyle/>
-          <a:p>
-            <a:pPr algn="ctr"/>
-          </a:p>
-        </p:txBody>
-      </p:sp>
-      <p:sp>
-        <p:nvSpPr>
-          <p:cNvPr id="3" name="TextBox 2"/>
-          <p:cNvSpPr txBox="1"/>
-          <p:nvPr/>
-        </p:nvSpPr>
-        <p:spPr>
-          <a:xfrm>
-            <a:off x="731520" y="320040"/>
-            <a:ext cx="8046720" cy="822960"/>
-          </a:xfrm>
-          <a:prstGeom prst="rect">
-            <a:avLst/>
-          </a:prstGeom>
-          <a:noFill/>
-        </p:spPr>
-        <p:txBody>
-          <a:bodyPr wrap="square">
-            <a:spAutoFit/>
-          </a:bodyPr>
-          <a:lstStyle/>
-          <a:p>
-            <a:pPr algn="l">
-              <a:spcBef>
-                <a:spcPts val="0"/>
-              </a:spcBef>
-              <a:spcAft>
-                <a:spcPts val="0"/>
-              </a:spcAft>
-              <a:defRPr sz="3200" b="1" i="0">
-                <a:solidFill>
-                  <a:srgbClr val="1E2761"/>
-                </a:solidFill>
-                <a:latin typeface="Palatino"/>
-              </a:defRPr>
-            </a:pPr>
-            <a:r>
-              <a:t>How Sanskrit Word-Building Works</a:t>
+              <a:t>abhinivesa — Clinging to Existence</a:t>
             </a:r>
           </a:p>
         </p:txBody>
@@ -7321,7 +8446,7 @@
         </p:nvSpPr>
         <p:spPr>
           <a:xfrm>
-            <a:off x="731520" y="1188720"/>
+            <a:off x="731520" y="1371600"/>
             <a:ext cx="1828800" cy="50800"/>
           </a:xfrm>
           <a:prstGeom prst="roundRect">
@@ -7360,288 +8485,14 @@
       </p:sp>
       <p:sp>
         <p:nvSpPr>
-          <p:cNvPr id="5" name="TextBox 4"/>
-          <p:cNvSpPr txBox="1"/>
-          <p:nvPr/>
-        </p:nvSpPr>
-        <p:spPr>
-          <a:xfrm>
-            <a:off x="731520" y="1554480"/>
-            <a:ext cx="7863840" cy="4754880"/>
-          </a:xfrm>
-          <a:prstGeom prst="rect">
-            <a:avLst/>
-          </a:prstGeom>
-          <a:noFill/>
-        </p:spPr>
-        <p:txBody>
-          <a:bodyPr wrap="square">
-            <a:spAutoFit/>
-          </a:bodyPr>
-          <a:lstStyle/>
-          <a:p>
-            <a:pPr algn="l">
-              <a:spcBef>
-                <a:spcPts val="800"/>
-              </a:spcBef>
-              <a:spcAft>
-                <a:spcPts val="400"/>
-              </a:spcAft>
-              <a:defRPr sz="2000" b="0" i="0">
-                <a:solidFill>
-                  <a:srgbClr val="2C3E50"/>
-                </a:solidFill>
-                <a:latin typeface="Avenir Next"/>
-              </a:defRPr>
-            </a:pPr>
-            <a:r>
-              <a:t>Root (dhatu): the core verb that carries primary meaning</a:t>
-            </a:r>
-          </a:p>
-          <a:p>
-            <a:pPr algn="l">
-              <a:spcBef>
-                <a:spcPts val="800"/>
-              </a:spcBef>
-              <a:spcAft>
-                <a:spcPts val="400"/>
-              </a:spcAft>
-              <a:defRPr sz="2000" b="0" i="0">
-                <a:solidFill>
-                  <a:srgbClr val="2C3E50"/>
-                </a:solidFill>
-                <a:latin typeface="Avenir Next"/>
-              </a:defRPr>
-            </a:pPr>
-            <a:r>
-              <a:t>Prefixes (upasarga): particles that modify direction or intensity</a:t>
-            </a:r>
-          </a:p>
-          <a:p>
-            <a:pPr algn="l">
-              <a:spcBef>
-                <a:spcPts val="800"/>
-              </a:spcBef>
-              <a:spcAft>
-                <a:spcPts val="400"/>
-              </a:spcAft>
-              <a:defRPr sz="2000" b="0" i="0">
-                <a:solidFill>
-                  <a:srgbClr val="2C3E50"/>
-                </a:solidFill>
-                <a:latin typeface="Avenir Next"/>
-              </a:defRPr>
-            </a:pPr>
-            <a:r>
-              <a:t>Suffixes (pratyaya): endings that determine grammatical category</a:t>
-            </a:r>
-          </a:p>
-          <a:p>
-            <a:pPr algn="l">
-              <a:spcBef>
-                <a:spcPts val="800"/>
-              </a:spcBef>
-              <a:spcAft>
-                <a:spcPts val="400"/>
-              </a:spcAft>
-              <a:defRPr sz="2000" b="0" i="0">
-                <a:solidFill>
-                  <a:srgbClr val="2C3E50"/>
-                </a:solidFill>
-                <a:latin typeface="Avenir Next"/>
-              </a:defRPr>
-            </a:pPr>
-            <a:r>
-              <a:t>Compound structure: how multiple words join into one</a:t>
-            </a:r>
-          </a:p>
-          <a:p>
-            <a:pPr algn="l">
-              <a:spcBef>
-                <a:spcPts val="800"/>
-              </a:spcBef>
-              <a:spcAft>
-                <a:spcPts val="400"/>
-              </a:spcAft>
-              <a:defRPr sz="2000" b="0" i="0">
-                <a:solidFill>
-                  <a:srgbClr val="2C3E50"/>
-                </a:solidFill>
-                <a:latin typeface="Avenir Next"/>
-              </a:defRPr>
-            </a:pPr>
-            <a:r>
-              <a:t>The literal meaning built from parts often illuminates the philosophical meaning</a:t>
-            </a:r>
-          </a:p>
-        </p:txBody>
-      </p:sp>
-    </p:spTree>
-  </p:cSld>
-  <p:clrMapOvr>
-    <a:masterClrMapping/>
-  </p:clrMapOvr>
-</p:sld>
-</file>
-
-<file path=ppt/slides/slide5.xml><?xml version="1.0" encoding="utf-8"?>
-<p:sld xmlns:a="http://schemas.openxmlformats.org/drawingml/2006/main" xmlns:p="http://schemas.openxmlformats.org/presentationml/2006/main" xmlns:r="http://schemas.openxmlformats.org/officeDocument/2006/relationships">
-  <p:cSld>
-    <p:bg>
-      <p:bgPr>
-        <a:solidFill>
-          <a:srgbClr val="F7F6F2"/>
-        </a:solidFill>
-        <a:effectLst/>
-      </p:bgPr>
-    </p:bg>
-    <p:spTree>
-      <p:nvGrpSpPr>
-        <p:cNvPr id="1" name=""/>
-        <p:cNvGrpSpPr/>
-        <p:nvPr/>
-      </p:nvGrpSpPr>
-      <p:grpSpPr/>
-      <p:sp>
-        <p:nvSpPr>
-          <p:cNvPr id="2" name="Rectangle 1"/>
-          <p:cNvSpPr/>
-          <p:nvPr/>
-        </p:nvSpPr>
-        <p:spPr>
-          <a:xfrm>
-            <a:off x="0" y="0"/>
-            <a:ext cx="320040" cy="6858000"/>
-          </a:xfrm>
-          <a:prstGeom prst="rect">
-            <a:avLst/>
-          </a:prstGeom>
-          <a:solidFill>
-            <a:srgbClr val="1E2761"/>
-          </a:solidFill>
-          <a:ln>
-            <a:noFill/>
-          </a:ln>
-        </p:spPr>
-        <p:style>
-          <a:lnRef idx="1">
-            <a:schemeClr val="accent1"/>
-          </a:lnRef>
-          <a:fillRef idx="3">
-            <a:schemeClr val="accent1"/>
-          </a:fillRef>
-          <a:effectRef idx="2">
-            <a:schemeClr val="accent1"/>
-          </a:effectRef>
-          <a:fontRef idx="minor">
-            <a:schemeClr val="lt1"/>
-          </a:fontRef>
-        </p:style>
-        <p:txBody>
-          <a:bodyPr rtlCol="0" anchor="ctr"/>
-          <a:lstStyle/>
-          <a:p>
-            <a:pPr algn="ctr"/>
-          </a:p>
-        </p:txBody>
-      </p:sp>
-      <p:sp>
-        <p:nvSpPr>
-          <p:cNvPr id="3" name="TextBox 2"/>
-          <p:cNvSpPr txBox="1"/>
-          <p:nvPr/>
-        </p:nvSpPr>
-        <p:spPr>
-          <a:xfrm>
-            <a:off x="731520" y="320040"/>
-            <a:ext cx="8046720" cy="822960"/>
-          </a:xfrm>
-          <a:prstGeom prst="rect">
-            <a:avLst/>
-          </a:prstGeom>
-          <a:noFill/>
-        </p:spPr>
-        <p:txBody>
-          <a:bodyPr wrap="square">
-            <a:spAutoFit/>
-          </a:bodyPr>
-          <a:lstStyle/>
-          <a:p>
-            <a:pPr algn="l">
-              <a:spcBef>
-                <a:spcPts val="0"/>
-              </a:spcBef>
-              <a:spcAft>
-                <a:spcPts val="0"/>
-              </a:spcAft>
-              <a:defRPr sz="3000" b="1" i="0">
-                <a:solidFill>
-                  <a:srgbClr val="1E2761"/>
-                </a:solidFill>
-                <a:latin typeface="Palatino"/>
-              </a:defRPr>
-            </a:pPr>
-            <a:r>
-              <a:t>समाधि samadhi — Meditative Absorption</a:t>
-            </a:r>
-          </a:p>
-        </p:txBody>
-      </p:sp>
-      <p:sp>
-        <p:nvSpPr>
-          <p:cNvPr id="4" name="Rounded Rectangle 3"/>
-          <p:cNvSpPr/>
-          <p:nvPr/>
-        </p:nvSpPr>
-        <p:spPr>
-          <a:xfrm>
-            <a:off x="731520" y="1188720"/>
-            <a:ext cx="1828800" cy="50800"/>
-          </a:xfrm>
-          <a:prstGeom prst="roundRect">
-            <a:avLst>
-              <a:gd name="adj" fmla="val 10000"/>
-            </a:avLst>
-          </a:prstGeom>
-          <a:solidFill>
-            <a:srgbClr val="7B2D26"/>
-          </a:solidFill>
-          <a:ln>
-            <a:noFill/>
-          </a:ln>
-        </p:spPr>
-        <p:style>
-          <a:lnRef idx="1">
-            <a:schemeClr val="accent1"/>
-          </a:lnRef>
-          <a:fillRef idx="3">
-            <a:schemeClr val="accent1"/>
-          </a:fillRef>
-          <a:effectRef idx="2">
-            <a:schemeClr val="accent1"/>
-          </a:effectRef>
-          <a:fontRef idx="minor">
-            <a:schemeClr val="lt1"/>
-          </a:fontRef>
-        </p:style>
-        <p:txBody>
-          <a:bodyPr rtlCol="0" anchor="ctr"/>
-          <a:lstStyle/>
-          <a:p>
-            <a:pPr algn="ctr"/>
-          </a:p>
-        </p:txBody>
-      </p:sp>
-      <p:sp>
-        <p:nvSpPr>
           <p:cNvPr id="5" name="Rectangle 4"/>
           <p:cNvSpPr/>
           <p:nvPr/>
         </p:nvSpPr>
         <p:spPr>
           <a:xfrm>
-            <a:off x="4434840" y="1463040"/>
-            <a:ext cx="19050" cy="4754880"/>
+            <a:off x="4434840" y="1645920"/>
+            <a:ext cx="19050" cy="4572000"/>
           </a:xfrm>
           <a:prstGeom prst="rect">
             <a:avLst/>
@@ -7683,8 +8534,8 @@
         </p:nvSpPr>
         <p:spPr>
           <a:xfrm>
-            <a:off x="731520" y="1508760"/>
-            <a:ext cx="3566160" cy="4846320"/>
+            <a:off x="731520" y="1691640"/>
+            <a:ext cx="3566160" cy="4663440"/>
           </a:xfrm>
           <a:prstGeom prst="rect">
             <a:avLst/>
@@ -7712,7 +8563,7 @@
               </a:defRPr>
             </a:pPr>
             <a:r>
-              <a:t>Root: √dha — "to place, put"</a:t>
+              <a:t>Root: √vis — "to enter, settle into"</a:t>
             </a:r>
           </a:p>
           <a:p>
@@ -7731,7 +8582,7 @@
               </a:defRPr>
             </a:pPr>
             <a:r>
-              <a:t>Prefixes: sam- ("together") + a- ("toward")</a:t>
+              <a:t>Prefix: abhi- ("toward, upon")</a:t>
             </a:r>
           </a:p>
           <a:p>
@@ -7750,7 +8601,7 @@
               </a:defRPr>
             </a:pPr>
             <a:r>
-              <a:t>Suffix: -i (action noun)</a:t>
+              <a:t>Prefix: ni- ("down, into")</a:t>
             </a:r>
           </a:p>
           <a:p>
@@ -7769,7 +8620,7 @@
               </a:defRPr>
             </a:pPr>
             <a:r>
-              <a:t>Literal: "a complete placing-together"</a:t>
+              <a:t>Literal: "a deep settling-into"</a:t>
             </a:r>
           </a:p>
           <a:p>
@@ -7788,7 +8639,7 @@
               </a:defRPr>
             </a:pPr>
             <a:r>
-              <a:t>Philosophical: total absorption of awareness into its object</a:t>
+              <a:t>Three layers of settling deeper</a:t>
             </a:r>
           </a:p>
         </p:txBody>
@@ -7801,859 +8652,8 @@
         </p:nvSpPr>
         <p:spPr>
           <a:xfrm>
-            <a:off x="4663440" y="1508760"/>
-            <a:ext cx="4114800" cy="4846320"/>
-          </a:xfrm>
-          <a:prstGeom prst="rect">
-            <a:avLst/>
-          </a:prstGeom>
-          <a:noFill/>
-        </p:spPr>
-        <p:txBody>
-          <a:bodyPr wrap="square">
-            <a:spAutoFit/>
-          </a:bodyPr>
-          <a:lstStyle/>
-          <a:p>
-            <a:pPr algn="l">
-              <a:spcBef>
-                <a:spcPts val="800"/>
-              </a:spcBef>
-              <a:spcAft>
-                <a:spcPts val="400"/>
-              </a:spcAft>
-              <a:defRPr sz="1800" b="0" i="0">
-                <a:solidFill>
-                  <a:srgbClr val="2C3E50"/>
-                </a:solidFill>
-                <a:latin typeface="Avenir Next"/>
-              </a:defRPr>
-            </a:pPr>
-            <a:r>
-              <a:t>The word's architecture argues for its meaning</a:t>
-            </a:r>
-          </a:p>
-          <a:p>
-            <a:pPr algn="l">
-              <a:spcBef>
-                <a:spcPts val="800"/>
-              </a:spcBef>
-              <a:spcAft>
-                <a:spcPts val="400"/>
-              </a:spcAft>
-              <a:defRPr sz="1800" b="0" i="0">
-                <a:solidFill>
-                  <a:srgbClr val="2C3E50"/>
-                </a:solidFill>
-                <a:latin typeface="Avenir Next"/>
-              </a:defRPr>
-            </a:pPr>
-            <a:r>
-              <a:t>"Placing-together" is not a metaphor added later — it is built into the word</a:t>
-            </a:r>
-          </a:p>
-          <a:p>
-            <a:pPr algn="l">
-              <a:spcBef>
-                <a:spcPts val="800"/>
-              </a:spcBef>
-              <a:spcAft>
-                <a:spcPts val="400"/>
-              </a:spcAft>
-              <a:defRPr sz="1800" b="0" i="0">
-                <a:solidFill>
-                  <a:srgbClr val="2C3E50"/>
-                </a:solidFill>
-                <a:latin typeface="Avenir Next"/>
-              </a:defRPr>
-            </a:pPr>
-            <a:r>
-              <a:t>Common folk etymology sama + adhi ("equal placing") is not supported by standard grammar</a:t>
-            </a:r>
-          </a:p>
-          <a:p>
-            <a:pPr algn="l">
-              <a:spcBef>
-                <a:spcPts val="800"/>
-              </a:spcBef>
-              <a:spcAft>
-                <a:spcPts val="400"/>
-              </a:spcAft>
-              <a:defRPr sz="1800" b="0" i="0">
-                <a:solidFill>
-                  <a:srgbClr val="2C3E50"/>
-                </a:solidFill>
-                <a:latin typeface="Avenir Next"/>
-              </a:defRPr>
-            </a:pPr>
-            <a:r>
-              <a:t>Standard derivation: sam + a + √dha (Monier-Williams)</a:t>
-            </a:r>
-          </a:p>
-        </p:txBody>
-      </p:sp>
-    </p:spTree>
-  </p:cSld>
-  <p:clrMapOvr>
-    <a:masterClrMapping/>
-  </p:clrMapOvr>
-</p:sld>
-</file>
-
-<file path=ppt/slides/slide6.xml><?xml version="1.0" encoding="utf-8"?>
-<p:sld xmlns:a="http://schemas.openxmlformats.org/drawingml/2006/main" xmlns:p="http://schemas.openxmlformats.org/presentationml/2006/main" xmlns:r="http://schemas.openxmlformats.org/officeDocument/2006/relationships">
-  <p:cSld>
-    <p:bg>
-      <p:bgPr>
-        <a:solidFill>
-          <a:srgbClr val="F7F6F2"/>
-        </a:solidFill>
-        <a:effectLst/>
-      </p:bgPr>
-    </p:bg>
-    <p:spTree>
-      <p:nvGrpSpPr>
-        <p:cNvPr id="1" name=""/>
-        <p:cNvGrpSpPr/>
-        <p:nvPr/>
-      </p:nvGrpSpPr>
-      <p:grpSpPr/>
-      <p:sp>
-        <p:nvSpPr>
-          <p:cNvPr id="2" name="Rectangle 1"/>
-          <p:cNvSpPr/>
-          <p:nvPr/>
-        </p:nvSpPr>
-        <p:spPr>
-          <a:xfrm>
-            <a:off x="0" y="0"/>
-            <a:ext cx="320040" cy="6858000"/>
-          </a:xfrm>
-          <a:prstGeom prst="rect">
-            <a:avLst/>
-          </a:prstGeom>
-          <a:solidFill>
-            <a:srgbClr val="1E2761"/>
-          </a:solidFill>
-          <a:ln>
-            <a:noFill/>
-          </a:ln>
-        </p:spPr>
-        <p:style>
-          <a:lnRef idx="1">
-            <a:schemeClr val="accent1"/>
-          </a:lnRef>
-          <a:fillRef idx="3">
-            <a:schemeClr val="accent1"/>
-          </a:fillRef>
-          <a:effectRef idx="2">
-            <a:schemeClr val="accent1"/>
-          </a:effectRef>
-          <a:fontRef idx="minor">
-            <a:schemeClr val="lt1"/>
-          </a:fontRef>
-        </p:style>
-        <p:txBody>
-          <a:bodyPr rtlCol="0" anchor="ctr"/>
-          <a:lstStyle/>
-          <a:p>
-            <a:pPr algn="ctr"/>
-          </a:p>
-        </p:txBody>
-      </p:sp>
-      <p:sp>
-        <p:nvSpPr>
-          <p:cNvPr id="3" name="TextBox 2"/>
-          <p:cNvSpPr txBox="1"/>
-          <p:nvPr/>
-        </p:nvSpPr>
-        <p:spPr>
-          <a:xfrm>
-            <a:off x="731520" y="320040"/>
-            <a:ext cx="8046720" cy="822960"/>
-          </a:xfrm>
-          <a:prstGeom prst="rect">
-            <a:avLst/>
-          </a:prstGeom>
-          <a:noFill/>
-        </p:spPr>
-        <p:txBody>
-          <a:bodyPr wrap="square">
-            <a:spAutoFit/>
-          </a:bodyPr>
-          <a:lstStyle/>
-          <a:p>
-            <a:pPr algn="l">
-              <a:spcBef>
-                <a:spcPts val="0"/>
-              </a:spcBef>
-              <a:spcAft>
-                <a:spcPts val="0"/>
-              </a:spcAft>
-              <a:defRPr sz="3000" b="1" i="0">
-                <a:solidFill>
-                  <a:srgbClr val="1E2761"/>
-                </a:solidFill>
-                <a:latin typeface="Palatino"/>
-              </a:defRPr>
-            </a:pPr>
-            <a:r>
-              <a:t>निरोध nirodha — Cessation or Stilling</a:t>
-            </a:r>
-          </a:p>
-        </p:txBody>
-      </p:sp>
-      <p:sp>
-        <p:nvSpPr>
-          <p:cNvPr id="4" name="Rounded Rectangle 3"/>
-          <p:cNvSpPr/>
-          <p:nvPr/>
-        </p:nvSpPr>
-        <p:spPr>
-          <a:xfrm>
-            <a:off x="731520" y="1188720"/>
-            <a:ext cx="1828800" cy="50800"/>
-          </a:xfrm>
-          <a:prstGeom prst="roundRect">
-            <a:avLst>
-              <a:gd name="adj" fmla="val 10000"/>
-            </a:avLst>
-          </a:prstGeom>
-          <a:solidFill>
-            <a:srgbClr val="7B2D26"/>
-          </a:solidFill>
-          <a:ln>
-            <a:noFill/>
-          </a:ln>
-        </p:spPr>
-        <p:style>
-          <a:lnRef idx="1">
-            <a:schemeClr val="accent1"/>
-          </a:lnRef>
-          <a:fillRef idx="3">
-            <a:schemeClr val="accent1"/>
-          </a:fillRef>
-          <a:effectRef idx="2">
-            <a:schemeClr val="accent1"/>
-          </a:effectRef>
-          <a:fontRef idx="minor">
-            <a:schemeClr val="lt1"/>
-          </a:fontRef>
-        </p:style>
-        <p:txBody>
-          <a:bodyPr rtlCol="0" anchor="ctr"/>
-          <a:lstStyle/>
-          <a:p>
-            <a:pPr algn="ctr"/>
-          </a:p>
-        </p:txBody>
-      </p:sp>
-      <p:sp>
-        <p:nvSpPr>
-          <p:cNvPr id="5" name="Rectangle 4"/>
-          <p:cNvSpPr/>
-          <p:nvPr/>
-        </p:nvSpPr>
-        <p:spPr>
-          <a:xfrm>
-            <a:off x="4434840" y="1463040"/>
-            <a:ext cx="19050" cy="4754880"/>
-          </a:xfrm>
-          <a:prstGeom prst="rect">
-            <a:avLst/>
-          </a:prstGeom>
-          <a:solidFill>
-            <a:srgbClr val="D0D0D0"/>
-          </a:solidFill>
-          <a:ln>
-            <a:noFill/>
-          </a:ln>
-        </p:spPr>
-        <p:style>
-          <a:lnRef idx="1">
-            <a:schemeClr val="accent1"/>
-          </a:lnRef>
-          <a:fillRef idx="3">
-            <a:schemeClr val="accent1"/>
-          </a:fillRef>
-          <a:effectRef idx="2">
-            <a:schemeClr val="accent1"/>
-          </a:effectRef>
-          <a:fontRef idx="minor">
-            <a:schemeClr val="lt1"/>
-          </a:fontRef>
-        </p:style>
-        <p:txBody>
-          <a:bodyPr rtlCol="0" anchor="ctr"/>
-          <a:lstStyle/>
-          <a:p>
-            <a:pPr algn="ctr"/>
-          </a:p>
-        </p:txBody>
-      </p:sp>
-      <p:sp>
-        <p:nvSpPr>
-          <p:cNvPr id="6" name="TextBox 5"/>
-          <p:cNvSpPr txBox="1"/>
-          <p:nvPr/>
-        </p:nvSpPr>
-        <p:spPr>
-          <a:xfrm>
-            <a:off x="731520" y="1508760"/>
-            <a:ext cx="3566160" cy="4846320"/>
-          </a:xfrm>
-          <a:prstGeom prst="rect">
-            <a:avLst/>
-          </a:prstGeom>
-          <a:noFill/>
-        </p:spPr>
-        <p:txBody>
-          <a:bodyPr wrap="square">
-            <a:spAutoFit/>
-          </a:bodyPr>
-          <a:lstStyle/>
-          <a:p>
-            <a:pPr algn="l">
-              <a:spcBef>
-                <a:spcPts val="800"/>
-              </a:spcBef>
-              <a:spcAft>
-                <a:spcPts val="400"/>
-              </a:spcAft>
-              <a:defRPr sz="1800" b="0" i="0">
-                <a:solidFill>
-                  <a:srgbClr val="2C3E50"/>
-                </a:solidFill>
-                <a:latin typeface="Avenir Next"/>
-              </a:defRPr>
-            </a:pPr>
-            <a:r>
-              <a:t>Root: √rudh — "to hold back, restrain"</a:t>
-            </a:r>
-          </a:p>
-          <a:p>
-            <a:pPr algn="l">
-              <a:spcBef>
-                <a:spcPts val="800"/>
-              </a:spcBef>
-              <a:spcAft>
-                <a:spcPts val="400"/>
-              </a:spcAft>
-              <a:defRPr sz="1800" b="0" i="0">
-                <a:solidFill>
-                  <a:srgbClr val="2C3E50"/>
-                </a:solidFill>
-                <a:latin typeface="Avenir Next"/>
-              </a:defRPr>
-            </a:pPr>
-            <a:r>
-              <a:t>Prefix: ni- (intensifying)</a:t>
-            </a:r>
-          </a:p>
-          <a:p>
-            <a:pPr algn="l">
-              <a:spcBef>
-                <a:spcPts val="800"/>
-              </a:spcBef>
-              <a:spcAft>
-                <a:spcPts val="400"/>
-              </a:spcAft>
-              <a:defRPr sz="1800" b="0" i="0">
-                <a:solidFill>
-                  <a:srgbClr val="2C3E50"/>
-                </a:solidFill>
-                <a:latin typeface="Avenir Next"/>
-              </a:defRPr>
-            </a:pPr>
-            <a:r>
-              <a:t>Suffix: -a (action noun)</a:t>
-            </a:r>
-          </a:p>
-          <a:p>
-            <a:pPr algn="l">
-              <a:spcBef>
-                <a:spcPts val="800"/>
-              </a:spcBef>
-              <a:spcAft>
-                <a:spcPts val="400"/>
-              </a:spcAft>
-              <a:defRPr sz="1800" b="0" i="0">
-                <a:solidFill>
-                  <a:srgbClr val="2C3E50"/>
-                </a:solidFill>
-                <a:latin typeface="Avenir Next"/>
-              </a:defRPr>
-            </a:pPr>
-            <a:r>
-              <a:t>Literal: "a complete holding-back"</a:t>
-            </a:r>
-          </a:p>
-          <a:p>
-            <a:pPr algn="l">
-              <a:spcBef>
-                <a:spcPts val="800"/>
-              </a:spcBef>
-              <a:spcAft>
-                <a:spcPts val="400"/>
-              </a:spcAft>
-              <a:defRPr sz="1800" b="0" i="0">
-                <a:solidFill>
-                  <a:srgbClr val="2C3E50"/>
-                </a:solidFill>
-                <a:latin typeface="Avenir Next"/>
-              </a:defRPr>
-            </a:pPr>
-            <a:r>
-              <a:t>Philosophical: the stilling of mental activity</a:t>
-            </a:r>
-          </a:p>
-        </p:txBody>
-      </p:sp>
-      <p:sp>
-        <p:nvSpPr>
-          <p:cNvPr id="7" name="TextBox 6"/>
-          <p:cNvSpPr txBox="1"/>
-          <p:nvPr/>
-        </p:nvSpPr>
-        <p:spPr>
-          <a:xfrm>
-            <a:off x="4663440" y="1508760"/>
-            <a:ext cx="4114800" cy="4846320"/>
-          </a:xfrm>
-          <a:prstGeom prst="rect">
-            <a:avLst/>
-          </a:prstGeom>
-          <a:noFill/>
-        </p:spPr>
-        <p:txBody>
-          <a:bodyPr wrap="square">
-            <a:spAutoFit/>
-          </a:bodyPr>
-          <a:lstStyle/>
-          <a:p>
-            <a:pPr algn="l">
-              <a:spcBef>
-                <a:spcPts val="800"/>
-              </a:spcBef>
-              <a:spcAft>
-                <a:spcPts val="400"/>
-              </a:spcAft>
-              <a:defRPr sz="1800" b="0" i="0">
-                <a:solidFill>
-                  <a:srgbClr val="2C3E50"/>
-                </a:solidFill>
-                <a:latin typeface="Avenir Next"/>
-              </a:defRPr>
-            </a:pPr>
-            <a:r>
-              <a:t>English translations carry different weight:</a:t>
-            </a:r>
-          </a:p>
-          <a:p>
-            <a:pPr algn="l">
-              <a:spcBef>
-                <a:spcPts val="800"/>
-              </a:spcBef>
-              <a:spcAft>
-                <a:spcPts val="400"/>
-              </a:spcAft>
-              <a:defRPr sz="1800" b="0" i="0">
-                <a:solidFill>
-                  <a:srgbClr val="2C3E50"/>
-                </a:solidFill>
-                <a:latin typeface="Avenir Next"/>
-              </a:defRPr>
-            </a:pPr>
-            <a:r>
-              <a:t>"Cessation" — implies ending</a:t>
-            </a:r>
-          </a:p>
-          <a:p>
-            <a:pPr algn="l">
-              <a:spcBef>
-                <a:spcPts val="800"/>
-              </a:spcBef>
-              <a:spcAft>
-                <a:spcPts val="400"/>
-              </a:spcAft>
-              <a:defRPr sz="1800" b="0" i="0">
-                <a:solidFill>
-                  <a:srgbClr val="2C3E50"/>
-                </a:solidFill>
-                <a:latin typeface="Avenir Next"/>
-              </a:defRPr>
-            </a:pPr>
-            <a:r>
-              <a:t>"Suppression" — implies force</a:t>
-            </a:r>
-          </a:p>
-          <a:p>
-            <a:pPr algn="l">
-              <a:spcBef>
-                <a:spcPts val="800"/>
-              </a:spcBef>
-              <a:spcAft>
-                <a:spcPts val="400"/>
-              </a:spcAft>
-              <a:defRPr sz="1800" b="0" i="0">
-                <a:solidFill>
-                  <a:srgbClr val="2C3E50"/>
-                </a:solidFill>
-                <a:latin typeface="Avenir Next"/>
-              </a:defRPr>
-            </a:pPr>
-            <a:r>
-              <a:t>"Stilling" — implies quieting</a:t>
-            </a:r>
-          </a:p>
-          <a:p>
-            <a:pPr algn="l">
-              <a:spcBef>
-                <a:spcPts val="800"/>
-              </a:spcBef>
-              <a:spcAft>
-                <a:spcPts val="400"/>
-              </a:spcAft>
-              <a:defRPr sz="1800" b="0" i="0">
-                <a:solidFill>
-                  <a:srgbClr val="2C3E50"/>
-                </a:solidFill>
-                <a:latin typeface="Avenir Next"/>
-              </a:defRPr>
-            </a:pPr>
-            <a:r>
-              <a:t>The root √rudh favors "stilling" over "destroying"</a:t>
-            </a:r>
-          </a:p>
-        </p:txBody>
-      </p:sp>
-    </p:spTree>
-  </p:cSld>
-  <p:clrMapOvr>
-    <a:masterClrMapping/>
-  </p:clrMapOvr>
-</p:sld>
-</file>
-
-<file path=ppt/slides/slide7.xml><?xml version="1.0" encoding="utf-8"?>
-<p:sld xmlns:a="http://schemas.openxmlformats.org/drawingml/2006/main" xmlns:p="http://schemas.openxmlformats.org/presentationml/2006/main" xmlns:r="http://schemas.openxmlformats.org/officeDocument/2006/relationships">
-  <p:cSld>
-    <p:bg>
-      <p:bgPr>
-        <a:solidFill>
-          <a:srgbClr val="F7F6F2"/>
-        </a:solidFill>
-        <a:effectLst/>
-      </p:bgPr>
-    </p:bg>
-    <p:spTree>
-      <p:nvGrpSpPr>
-        <p:cNvPr id="1" name=""/>
-        <p:cNvGrpSpPr/>
-        <p:nvPr/>
-      </p:nvGrpSpPr>
-      <p:grpSpPr/>
-      <p:sp>
-        <p:nvSpPr>
-          <p:cNvPr id="2" name="Rectangle 1"/>
-          <p:cNvSpPr/>
-          <p:nvPr/>
-        </p:nvSpPr>
-        <p:spPr>
-          <a:xfrm>
-            <a:off x="0" y="0"/>
-            <a:ext cx="320040" cy="6858000"/>
-          </a:xfrm>
-          <a:prstGeom prst="rect">
-            <a:avLst/>
-          </a:prstGeom>
-          <a:solidFill>
-            <a:srgbClr val="1E2761"/>
-          </a:solidFill>
-          <a:ln>
-            <a:noFill/>
-          </a:ln>
-        </p:spPr>
-        <p:style>
-          <a:lnRef idx="1">
-            <a:schemeClr val="accent1"/>
-          </a:lnRef>
-          <a:fillRef idx="3">
-            <a:schemeClr val="accent1"/>
-          </a:fillRef>
-          <a:effectRef idx="2">
-            <a:schemeClr val="accent1"/>
-          </a:effectRef>
-          <a:fontRef idx="minor">
-            <a:schemeClr val="lt1"/>
-          </a:fontRef>
-        </p:style>
-        <p:txBody>
-          <a:bodyPr rtlCol="0" anchor="ctr"/>
-          <a:lstStyle/>
-          <a:p>
-            <a:pPr algn="ctr"/>
-          </a:p>
-        </p:txBody>
-      </p:sp>
-      <p:sp>
-        <p:nvSpPr>
-          <p:cNvPr id="3" name="TextBox 2"/>
-          <p:cNvSpPr txBox="1"/>
-          <p:nvPr/>
-        </p:nvSpPr>
-        <p:spPr>
-          <a:xfrm>
-            <a:off x="731520" y="320040"/>
-            <a:ext cx="8046720" cy="822960"/>
-          </a:xfrm>
-          <a:prstGeom prst="rect">
-            <a:avLst/>
-          </a:prstGeom>
-          <a:noFill/>
-        </p:spPr>
-        <p:txBody>
-          <a:bodyPr wrap="square">
-            <a:spAutoFit/>
-          </a:bodyPr>
-          <a:lstStyle/>
-          <a:p>
-            <a:pPr algn="l">
-              <a:spcBef>
-                <a:spcPts val="0"/>
-              </a:spcBef>
-              <a:spcAft>
-                <a:spcPts val="0"/>
-              </a:spcAft>
-              <a:defRPr sz="3000" b="1" i="0">
-                <a:solidFill>
-                  <a:srgbClr val="1E2761"/>
-                </a:solidFill>
-                <a:latin typeface="Palatino"/>
-              </a:defRPr>
-            </a:pPr>
-            <a:r>
-              <a:t>abhinivesa — Clinging to Existence</a:t>
-            </a:r>
-          </a:p>
-        </p:txBody>
-      </p:sp>
-      <p:sp>
-        <p:nvSpPr>
-          <p:cNvPr id="4" name="Rounded Rectangle 3"/>
-          <p:cNvSpPr/>
-          <p:nvPr/>
-        </p:nvSpPr>
-        <p:spPr>
-          <a:xfrm>
-            <a:off x="731520" y="1188720"/>
-            <a:ext cx="1828800" cy="50800"/>
-          </a:xfrm>
-          <a:prstGeom prst="roundRect">
-            <a:avLst>
-              <a:gd name="adj" fmla="val 10000"/>
-            </a:avLst>
-          </a:prstGeom>
-          <a:solidFill>
-            <a:srgbClr val="7B2D26"/>
-          </a:solidFill>
-          <a:ln>
-            <a:noFill/>
-          </a:ln>
-        </p:spPr>
-        <p:style>
-          <a:lnRef idx="1">
-            <a:schemeClr val="accent1"/>
-          </a:lnRef>
-          <a:fillRef idx="3">
-            <a:schemeClr val="accent1"/>
-          </a:fillRef>
-          <a:effectRef idx="2">
-            <a:schemeClr val="accent1"/>
-          </a:effectRef>
-          <a:fontRef idx="minor">
-            <a:schemeClr val="lt1"/>
-          </a:fontRef>
-        </p:style>
-        <p:txBody>
-          <a:bodyPr rtlCol="0" anchor="ctr"/>
-          <a:lstStyle/>
-          <a:p>
-            <a:pPr algn="ctr"/>
-          </a:p>
-        </p:txBody>
-      </p:sp>
-      <p:sp>
-        <p:nvSpPr>
-          <p:cNvPr id="5" name="Rectangle 4"/>
-          <p:cNvSpPr/>
-          <p:nvPr/>
-        </p:nvSpPr>
-        <p:spPr>
-          <a:xfrm>
-            <a:off x="4434840" y="1463040"/>
-            <a:ext cx="19050" cy="4754880"/>
-          </a:xfrm>
-          <a:prstGeom prst="rect">
-            <a:avLst/>
-          </a:prstGeom>
-          <a:solidFill>
-            <a:srgbClr val="D0D0D0"/>
-          </a:solidFill>
-          <a:ln>
-            <a:noFill/>
-          </a:ln>
-        </p:spPr>
-        <p:style>
-          <a:lnRef idx="1">
-            <a:schemeClr val="accent1"/>
-          </a:lnRef>
-          <a:fillRef idx="3">
-            <a:schemeClr val="accent1"/>
-          </a:fillRef>
-          <a:effectRef idx="2">
-            <a:schemeClr val="accent1"/>
-          </a:effectRef>
-          <a:fontRef idx="minor">
-            <a:schemeClr val="lt1"/>
-          </a:fontRef>
-        </p:style>
-        <p:txBody>
-          <a:bodyPr rtlCol="0" anchor="ctr"/>
-          <a:lstStyle/>
-          <a:p>
-            <a:pPr algn="ctr"/>
-          </a:p>
-        </p:txBody>
-      </p:sp>
-      <p:sp>
-        <p:nvSpPr>
-          <p:cNvPr id="6" name="TextBox 5"/>
-          <p:cNvSpPr txBox="1"/>
-          <p:nvPr/>
-        </p:nvSpPr>
-        <p:spPr>
-          <a:xfrm>
-            <a:off x="731520" y="1508760"/>
-            <a:ext cx="3566160" cy="4846320"/>
-          </a:xfrm>
-          <a:prstGeom prst="rect">
-            <a:avLst/>
-          </a:prstGeom>
-          <a:noFill/>
-        </p:spPr>
-        <p:txBody>
-          <a:bodyPr wrap="square">
-            <a:spAutoFit/>
-          </a:bodyPr>
-          <a:lstStyle/>
-          <a:p>
-            <a:pPr algn="l">
-              <a:spcBef>
-                <a:spcPts val="800"/>
-              </a:spcBef>
-              <a:spcAft>
-                <a:spcPts val="400"/>
-              </a:spcAft>
-              <a:defRPr sz="1800" b="0" i="0">
-                <a:solidFill>
-                  <a:srgbClr val="2C3E50"/>
-                </a:solidFill>
-                <a:latin typeface="Avenir Next"/>
-              </a:defRPr>
-            </a:pPr>
-            <a:r>
-              <a:t>Root: √vis — "to enter, settle into"</a:t>
-            </a:r>
-          </a:p>
-          <a:p>
-            <a:pPr algn="l">
-              <a:spcBef>
-                <a:spcPts val="800"/>
-              </a:spcBef>
-              <a:spcAft>
-                <a:spcPts val="400"/>
-              </a:spcAft>
-              <a:defRPr sz="1800" b="0" i="0">
-                <a:solidFill>
-                  <a:srgbClr val="2C3E50"/>
-                </a:solidFill>
-                <a:latin typeface="Avenir Next"/>
-              </a:defRPr>
-            </a:pPr>
-            <a:r>
-              <a:t>Prefix: abhi- ("toward, upon")</a:t>
-            </a:r>
-          </a:p>
-          <a:p>
-            <a:pPr algn="l">
-              <a:spcBef>
-                <a:spcPts val="800"/>
-              </a:spcBef>
-              <a:spcAft>
-                <a:spcPts val="400"/>
-              </a:spcAft>
-              <a:defRPr sz="1800" b="0" i="0">
-                <a:solidFill>
-                  <a:srgbClr val="2C3E50"/>
-                </a:solidFill>
-                <a:latin typeface="Avenir Next"/>
-              </a:defRPr>
-            </a:pPr>
-            <a:r>
-              <a:t>Prefix: ni- ("down, into")</a:t>
-            </a:r>
-          </a:p>
-          <a:p>
-            <a:pPr algn="l">
-              <a:spcBef>
-                <a:spcPts val="800"/>
-              </a:spcBef>
-              <a:spcAft>
-                <a:spcPts val="400"/>
-              </a:spcAft>
-              <a:defRPr sz="1800" b="0" i="0">
-                <a:solidFill>
-                  <a:srgbClr val="2C3E50"/>
-                </a:solidFill>
-                <a:latin typeface="Avenir Next"/>
-              </a:defRPr>
-            </a:pPr>
-            <a:r>
-              <a:t>Literal: "a deep settling-into"</a:t>
-            </a:r>
-          </a:p>
-          <a:p>
-            <a:pPr algn="l">
-              <a:spcBef>
-                <a:spcPts val="800"/>
-              </a:spcBef>
-              <a:spcAft>
-                <a:spcPts val="400"/>
-              </a:spcAft>
-              <a:defRPr sz="1800" b="0" i="0">
-                <a:solidFill>
-                  <a:srgbClr val="2C3E50"/>
-                </a:solidFill>
-                <a:latin typeface="Avenir Next"/>
-              </a:defRPr>
-            </a:pPr>
-            <a:r>
-              <a:t>Three layers of settling deeper</a:t>
-            </a:r>
-          </a:p>
-        </p:txBody>
-      </p:sp>
-      <p:sp>
-        <p:nvSpPr>
-          <p:cNvPr id="7" name="TextBox 6"/>
-          <p:cNvSpPr txBox="1"/>
-          <p:nvPr/>
-        </p:nvSpPr>
-        <p:spPr>
-          <a:xfrm>
-            <a:off x="4663440" y="1508760"/>
-            <a:ext cx="4114800" cy="4846320"/>
+            <a:off x="4663440" y="1691640"/>
+            <a:ext cx="4114800" cy="4663440"/>
           </a:xfrm>
           <a:prstGeom prst="rect">
             <a:avLst/>

--- a/docs/final_presentation.pptx
+++ b/docs/final_presentation.pptx
@@ -2124,6 +2124,10 @@
             <a:prstDash val="solid"/>
           </a:ln>
         </p:spPr>
+        <p:txBody>
+          <a:bodyPr/>
+          <a:p/>
+        </p:txBody>
       </p:sp>
       <p:sp>
         <p:nvSpPr>
@@ -2228,15 +2232,13 @@
               <a:buNone/>
             </a:pPr>
             <a:r>
-              <a:rPr lang="en-US" sz="1250" dirty="0">
-                <a:solidFill>
-                  <a:srgbClr val="F7F3EE"/>
-                </a:solidFill>
-                <a:latin typeface="Aptos" pitchFamily="34" charset="0"/>
-                <a:ea typeface="Aptos" pitchFamily="34" charset="-122"/>
-                <a:cs typeface="Aptos" pitchFamily="34" charset="-120"/>
-              </a:rPr>
-              <a:t>Mehek Bajaj</a:t>
+              <a:rPr sz="2000" b="0">
+                <a:solidFill>
+                  <a:srgbClr val="CADCFC"/>
+                </a:solidFill>
+                <a:latin typeface="Avenir Next"/>
+              </a:rPr>
+              <a:t>Jai Bajaj</a:t>
             </a:r>
             <a:endParaRPr lang="en-US" sz="1250" dirty="0"/>
           </a:p>
@@ -2303,6 +2305,10 @@
             <a:prstDash val="solid"/>
           </a:ln>
         </p:spPr>
+        <p:txBody>
+          <a:bodyPr/>
+          <a:p/>
+        </p:txBody>
       </p:sp>
     </p:spTree>
   </p:cSld>

--- a/docs/final_presentation.pptx
+++ b/docs/final_presentation.pptx
@@ -4,24 +4,25 @@
   <p:sldMasterIdLst>
     <p:sldMasterId id="2147483648" r:id="rId1"/>
   </p:sldMasterIdLst>
+  <p:notesMasterIdLst>
+    <p:notesMasterId r:id="rId16"/>
+  </p:notesMasterIdLst>
   <p:sldIdLst>
     <p:sldId id="256" r:id="rId2"/>
     <p:sldId id="257" r:id="rId3"/>
     <p:sldId id="258" r:id="rId4"/>
     <p:sldId id="259" r:id="rId5"/>
-    <p:sldId id="260" r:id="rId6"/>
-    <p:sldId id="261" r:id="rId7"/>
-    <p:sldId id="262" r:id="rId8"/>
-    <p:sldId id="263" r:id="rId9"/>
-    <p:sldId id="264" r:id="rId10"/>
-    <p:sldId id="265" r:id="rId11"/>
-    <p:sldId id="266" r:id="rId12"/>
-    <p:sldId id="267" r:id="rId13"/>
+    <p:sldId id="271" r:id="rId6"/>
+    <p:sldId id="260" r:id="rId7"/>
+    <p:sldId id="261" r:id="rId8"/>
+    <p:sldId id="262" r:id="rId9"/>
+    <p:sldId id="263" r:id="rId10"/>
+    <p:sldId id="264" r:id="rId11"/>
+    <p:sldId id="265" r:id="rId12"/>
+    <p:sldId id="266" r:id="rId13"/>
     <p:sldId id="268" r:id="rId14"/>
+    <p:sldId id="272" r:id="rId15"/>
   </p:sldIdLst>
-  <p:notesMasterIdLst>
-    <p:notesMasterId r:id="rId15"/>
-  </p:notesMasterIdLst>
   <p:sldSz cx="12192000" cy="6858000"/>
   <p:notesSz cx="6858000" cy="12192000"/>
   <p:defaultTextStyle>
@@ -116,6 +117,11 @@
       </a:defRPr>
     </a:lvl9pPr>
   </p:defaultTextStyle>
+  <p:extLst>
+    <p:ext uri="{EFAFB233-063F-42B5-8137-9DF3F51BA10A}">
+      <p15:sldGuideLst xmlns:p15="http://schemas.microsoft.com/office/powerpoint/2012/main"/>
+    </p:ext>
+  </p:extLst>
 </p:presentation>
 </file>
 
@@ -141,234 +147,10 @@
           <a:chExt cx="0" cy="0"/>
         </a:xfrm>
       </p:grpSpPr>
-      <p:sp>
-        <p:nvSpPr>
-          <p:cNvPr id="2" name="Header Placeholder 1"/>
-          <p:cNvSpPr>
-            <a:spLocks noGrp="1"/>
-          </p:cNvSpPr>
-          <p:nvPr>
-            <p:ph type="hdr" sz="quarter"/>
-          </p:nvPr>
-        </p:nvSpPr>
-        <p:spPr>
-          <a:xfrm>
-            <a:off x="0" y="0"/>
-            <a:ext cx="2971800" cy="458788"/>
-          </a:xfrm>
-          <a:prstGeom prst="rect">
-            <a:avLst/>
-          </a:prstGeom>
-        </p:spPr>
-        <p:txBody>
-          <a:bodyPr vert="horz" lIns="91440" tIns="45720" rIns="91440" bIns="45720" rtlCol="0"/>
-          <a:lstStyle>
-            <a:lvl1pPr algn="l">
-              <a:defRPr sz="1200"/>
-            </a:lvl1pPr>
-          </a:lstStyle>
-          <a:p>
-            <a:endParaRPr lang="en-US"/>
-          </a:p>
-        </p:txBody>
-      </p:sp>
-      <p:sp>
-        <p:nvSpPr>
-          <p:cNvPr id="3" name="Date Placeholder 2"/>
-          <p:cNvSpPr>
-            <a:spLocks noGrp="1"/>
-          </p:cNvSpPr>
-          <p:nvPr>
-            <p:ph type="dt" idx="1"/>
-          </p:nvPr>
-        </p:nvSpPr>
-        <p:spPr>
-          <a:xfrm>
-            <a:off x="3884613" y="0"/>
-            <a:ext cx="2971800" cy="458788"/>
-          </a:xfrm>
-          <a:prstGeom prst="rect">
-            <a:avLst/>
-          </a:prstGeom>
-        </p:spPr>
-        <p:txBody>
-          <a:bodyPr vert="horz" lIns="91440" tIns="45720" rIns="91440" bIns="45720" rtlCol="0"/>
-          <a:lstStyle>
-            <a:lvl1pPr algn="r">
-              <a:defRPr sz="1200"/>
-            </a:lvl1pPr>
-          </a:lstStyle>
-          <a:p>
-            <a:fld id="{5282F153-3F37-0F45-9E97-73ACFA13230C}" type="datetimeFigureOut">
-              <a:rPr lang="en-US"/>
-              <a:t>7/23/19</a:t>
-            </a:fld>
-            <a:endParaRPr lang="en-US"/>
-          </a:p>
-        </p:txBody>
-      </p:sp>
-      <p:sp>
-        <p:nvSpPr>
-          <p:cNvPr id="4" name="Slide Image Placeholder 3"/>
-          <p:cNvSpPr>
-            <a:spLocks noGrp="1" noRot="1" noChangeAspect="1"/>
-          </p:cNvSpPr>
-          <p:nvPr>
-            <p:ph type="sldImg" idx="2"/>
-          </p:nvPr>
-        </p:nvSpPr>
-        <p:spPr>
-          <a:xfrm>
-            <a:off x="685800" y="1143000"/>
-            <a:ext cx="5486400" cy="3086100"/>
-          </a:xfrm>
-          <a:prstGeom prst="rect">
-            <a:avLst/>
-          </a:prstGeom>
-          <a:noFill/>
-          <a:ln w="12700">
-            <a:solidFill>
-              <a:prstClr val="black"/>
-            </a:solidFill>
-          </a:ln>
-        </p:spPr>
-        <p:txBody>
-          <a:bodyPr vert="horz" lIns="91440" tIns="45720" rIns="91440" bIns="45720" rtlCol="0" anchor="ctr"/>
-          <a:lstStyle/>
-          <a:p>
-            <a:endParaRPr lang="en-US"/>
-          </a:p>
-        </p:txBody>
-      </p:sp>
-      <p:sp>
-        <p:nvSpPr>
-          <p:cNvPr id="5" name="Notes Placeholder 4"/>
-          <p:cNvSpPr>
-            <a:spLocks noGrp="1"/>
-          </p:cNvSpPr>
-          <p:nvPr>
-            <p:ph type="body" sz="quarter" idx="3"/>
-          </p:nvPr>
-        </p:nvSpPr>
-        <p:spPr>
-          <a:xfrm>
-            <a:off x="685800" y="4400550"/>
-            <a:ext cx="5486400" cy="3600450"/>
-          </a:xfrm>
-          <a:prstGeom prst="rect">
-            <a:avLst/>
-          </a:prstGeom>
-        </p:spPr>
-        <p:txBody>
-          <a:bodyPr vert="horz" lIns="91440" tIns="45720" rIns="91440" bIns="45720" rtlCol="0"/>
-          <a:lstStyle/>
-          <a:p>
-            <a:pPr lvl="0"/>
-            <a:r>
-              <a:rPr lang="en-US"/>
-              <a:t>Click to edit Master text styles</a:t>
-            </a:r>
-          </a:p>
-          <a:p>
-            <a:pPr lvl="1"/>
-            <a:r>
-              <a:rPr lang="en-US"/>
-              <a:t>Second level</a:t>
-            </a:r>
-          </a:p>
-          <a:p>
-            <a:pPr lvl="2"/>
-            <a:r>
-              <a:rPr lang="en-US"/>
-              <a:t>Third level</a:t>
-            </a:r>
-          </a:p>
-          <a:p>
-            <a:pPr lvl="3"/>
-            <a:r>
-              <a:rPr lang="en-US"/>
-              <a:t>Fourth level</a:t>
-            </a:r>
-          </a:p>
-          <a:p>
-            <a:pPr lvl="4"/>
-            <a:r>
-              <a:rPr lang="en-US"/>
-              <a:t>Fifth level</a:t>
-            </a:r>
-          </a:p>
-        </p:txBody>
-      </p:sp>
-      <p:sp>
-        <p:nvSpPr>
-          <p:cNvPr id="6" name="Footer Placeholder 5"/>
-          <p:cNvSpPr>
-            <a:spLocks noGrp="1"/>
-          </p:cNvSpPr>
-          <p:nvPr>
-            <p:ph type="ftr" sz="quarter" idx="4"/>
-          </p:nvPr>
-        </p:nvSpPr>
-        <p:spPr>
-          <a:xfrm>
-            <a:off x="0" y="8685213"/>
-            <a:ext cx="2971800" cy="458787"/>
-          </a:xfrm>
-          <a:prstGeom prst="rect">
-            <a:avLst/>
-          </a:prstGeom>
-        </p:spPr>
-        <p:txBody>
-          <a:bodyPr vert="horz" lIns="91440" tIns="45720" rIns="91440" bIns="45720" rtlCol="0" anchor="b"/>
-          <a:lstStyle>
-            <a:lvl1pPr algn="l">
-              <a:defRPr sz="1200"/>
-            </a:lvl1pPr>
-          </a:lstStyle>
-          <a:p>
-            <a:endParaRPr lang="en-US"/>
-          </a:p>
-        </p:txBody>
-      </p:sp>
-      <p:sp>
-        <p:nvSpPr>
-          <p:cNvPr id="7" name="Slide Number Placeholder 6"/>
-          <p:cNvSpPr>
-            <a:spLocks noGrp="1"/>
-          </p:cNvSpPr>
-          <p:nvPr>
-            <p:ph type="sldNum" sz="quarter" idx="5"/>
-          </p:nvPr>
-        </p:nvSpPr>
-        <p:spPr>
-          <a:xfrm>
-            <a:off x="3884613" y="8685213"/>
-            <a:ext cx="2971800" cy="458787"/>
-          </a:xfrm>
-          <a:prstGeom prst="rect">
-            <a:avLst/>
-          </a:prstGeom>
-        </p:spPr>
-        <p:txBody>
-          <a:bodyPr vert="horz" lIns="91440" tIns="45720" rIns="91440" bIns="45720" rtlCol="0" anchor="b"/>
-          <a:lstStyle>
-            <a:lvl1pPr algn="r">
-              <a:defRPr sz="1200"/>
-            </a:lvl1pPr>
-          </a:lstStyle>
-          <a:p>
-            <a:fld id="{CE5E9CC1-C706-0F49-92D6-E571CC5EEA8F}" type="slidenum">
-              <a:rPr lang="en-US"/>
-              <a:t>‹#›</a:t>
-            </a:fld>
-            <a:endParaRPr lang="en-US"/>
-          </a:p>
-        </p:txBody>
-      </p:sp>
     </p:spTree>
     <p:extLst>
       <p:ext uri="{BB962C8B-B14F-4D97-AF65-F5344CB8AC3E}">
-        <p14:creationId xmlns:p14="http://schemas.microsoft.com/office/powerpoint/2010/main" val="1024086991"/>
+        <p14:creationId xmlns:p14="http://schemas.microsoft.com/office/powerpoint/2010/main" val="4134201545"/>
       </p:ext>
     </p:extLst>
   </p:cSld>
@@ -519,7 +301,6 @@
 - Built from the user-provided presentation draft and term analyses in this conversation.
 [/Sources]</a:t>
             </a:r>
-            <a:endParaRPr lang="en-US" dirty="0"/>
           </a:p>
         </p:txBody>
       </p:sp>
@@ -610,7 +391,6 @@
 - Built from the user-provided presentation draft and term analyses in this conversation.
 [/Sources]</a:t>
             </a:r>
-            <a:endParaRPr lang="en-US" dirty="0"/>
           </a:p>
         </p:txBody>
       </p:sp>
@@ -701,7 +481,6 @@
 - Built from the user-provided presentation draft and term analyses in this conversation.
 [/Sources]</a:t>
             </a:r>
-            <a:endParaRPr lang="en-US" dirty="0"/>
           </a:p>
         </p:txBody>
       </p:sp>
@@ -792,7 +571,6 @@
 - Built from the user-provided presentation draft and term analyses in this conversation.
 [/Sources]</a:t>
             </a:r>
-            <a:endParaRPr lang="en-US" dirty="0"/>
           </a:p>
         </p:txBody>
       </p:sp>
@@ -883,7 +661,6 @@
 - Built from the user-provided presentation draft and term analyses in this conversation.
 [/Sources]</a:t>
             </a:r>
-            <a:endParaRPr lang="en-US" dirty="0"/>
           </a:p>
         </p:txBody>
       </p:sp>
@@ -914,6 +691,120 @@
     <p:extLst>
       <p:ext uri="{BB962C8B-B14F-4D97-AF65-F5344CB8AC3E}">
         <p14:creationId xmlns:p14="http://schemas.microsoft.com/office/powerpoint/2010/main" val="1024086991"/>
+      </p:ext>
+    </p:extLst>
+  </p:cSld>
+  <p:clrMapOvr>
+    <a:masterClrMapping/>
+  </p:clrMapOvr>
+</p:notes>
+</file>
+
+<file path=ppt/notesSlides/notesSlide14.xml><?xml version="1.0" encoding="utf-8"?>
+<p:notes xmlns:a="http://schemas.openxmlformats.org/drawingml/2006/main" xmlns:r="http://schemas.openxmlformats.org/officeDocument/2006/relationships" xmlns:p="http://schemas.openxmlformats.org/presentationml/2006/main">
+  <p:cSld>
+    <p:spTree>
+      <p:nvGrpSpPr>
+        <p:cNvPr id="1" name="">
+          <a:extLst>
+            <a:ext uri="{FF2B5EF4-FFF2-40B4-BE49-F238E27FC236}">
+              <a16:creationId xmlns:a16="http://schemas.microsoft.com/office/drawing/2014/main" id="{E514B4F8-B7ED-464E-B1D7-805E55FCF187}"/>
+            </a:ext>
+          </a:extLst>
+        </p:cNvPr>
+        <p:cNvGrpSpPr/>
+        <p:nvPr/>
+      </p:nvGrpSpPr>
+      <p:grpSpPr>
+        <a:xfrm>
+          <a:off x="0" y="0"/>
+          <a:ext cx="0" cy="0"/>
+          <a:chOff x="0" y="0"/>
+          <a:chExt cx="0" cy="0"/>
+        </a:xfrm>
+      </p:grpSpPr>
+      <p:sp>
+        <p:nvSpPr>
+          <p:cNvPr id="2" name="Slide Image Placeholder 1">
+            <a:extLst>
+              <a:ext uri="{FF2B5EF4-FFF2-40B4-BE49-F238E27FC236}">
+                <a16:creationId xmlns:a16="http://schemas.microsoft.com/office/drawing/2014/main" id="{C55DE34A-BFD5-ABF7-85E9-20F522B65B67}"/>
+              </a:ext>
+            </a:extLst>
+          </p:cNvPr>
+          <p:cNvSpPr>
+            <a:spLocks noGrp="1" noRot="1" noChangeAspect="1"/>
+          </p:cNvSpPr>
+          <p:nvPr>
+            <p:ph type="sldImg"/>
+          </p:nvPr>
+        </p:nvSpPr>
+        <p:spPr/>
+      </p:sp>
+      <p:sp>
+        <p:nvSpPr>
+          <p:cNvPr id="3" name="Notes Placeholder 2">
+            <a:extLst>
+              <a:ext uri="{FF2B5EF4-FFF2-40B4-BE49-F238E27FC236}">
+                <a16:creationId xmlns:a16="http://schemas.microsoft.com/office/drawing/2014/main" id="{BC201485-4F9E-59D0-6CDD-2F135E462CD2}"/>
+              </a:ext>
+            </a:extLst>
+          </p:cNvPr>
+          <p:cNvSpPr>
+            <a:spLocks noGrp="1"/>
+          </p:cNvSpPr>
+          <p:nvPr>
+            <p:ph type="body" idx="1"/>
+          </p:nvPr>
+        </p:nvSpPr>
+        <p:spPr/>
+        <p:txBody>
+          <a:bodyPr/>
+          <a:lstStyle/>
+          <a:p>
+            <a:r>
+              <a:rPr lang="en-US" dirty="0"/>
+              <a:t>
+[Sources]
+- Built from the user-provided presentation draft and term analyses in this conversation.
+[/Sources]</a:t>
+            </a:r>
+          </a:p>
+        </p:txBody>
+      </p:sp>
+      <p:sp>
+        <p:nvSpPr>
+          <p:cNvPr id="4" name="Slide Number Placeholder 3">
+            <a:extLst>
+              <a:ext uri="{FF2B5EF4-FFF2-40B4-BE49-F238E27FC236}">
+                <a16:creationId xmlns:a16="http://schemas.microsoft.com/office/drawing/2014/main" id="{E081325B-A810-FA04-AB56-3CA7853539DC}"/>
+              </a:ext>
+            </a:extLst>
+          </p:cNvPr>
+          <p:cNvSpPr>
+            <a:spLocks noGrp="1"/>
+          </p:cNvSpPr>
+          <p:nvPr>
+            <p:ph type="sldNum" sz="quarter" idx="10"/>
+          </p:nvPr>
+        </p:nvSpPr>
+        <p:spPr/>
+        <p:txBody>
+          <a:bodyPr/>
+          <a:lstStyle/>
+          <a:p>
+            <a:fld id="{F7021451-1387-4CA6-816F-3879F97B5CBC}" type="slidenum">
+              <a:rPr lang="en-US"/>
+              <a:t>14</a:t>
+            </a:fld>
+            <a:endParaRPr lang="en-US"/>
+          </a:p>
+        </p:txBody>
+      </p:sp>
+    </p:spTree>
+    <p:extLst>
+      <p:ext uri="{BB962C8B-B14F-4D97-AF65-F5344CB8AC3E}">
+        <p14:creationId xmlns:p14="http://schemas.microsoft.com/office/powerpoint/2010/main" val="3996248205"/>
       </p:ext>
     </p:extLst>
   </p:cSld>
@@ -974,7 +865,6 @@
 - Built from the user-provided presentation draft and term analyses in this conversation.
 [/Sources]</a:t>
             </a:r>
-            <a:endParaRPr lang="en-US" dirty="0"/>
           </a:p>
         </p:txBody>
       </p:sp>
@@ -1065,7 +955,6 @@
 - Built from the user-provided presentation draft and term analyses in this conversation.
 [/Sources]</a:t>
             </a:r>
-            <a:endParaRPr lang="en-US" dirty="0"/>
           </a:p>
         </p:txBody>
       </p:sp>
@@ -1156,7 +1045,6 @@
 - Built from the user-provided presentation draft and term analyses in this conversation.
 [/Sources]</a:t>
             </a:r>
-            <a:endParaRPr lang="en-US" dirty="0"/>
           </a:p>
         </p:txBody>
       </p:sp>
@@ -1201,7 +1089,13 @@
   <p:cSld>
     <p:spTree>
       <p:nvGrpSpPr>
-        <p:cNvPr id="1" name=""/>
+        <p:cNvPr id="1" name="">
+          <a:extLst>
+            <a:ext uri="{FF2B5EF4-FFF2-40B4-BE49-F238E27FC236}">
+              <a16:creationId xmlns:a16="http://schemas.microsoft.com/office/drawing/2014/main" id="{4FC40F2E-6C19-3979-FBB2-BDC3D53DC3E9}"/>
+            </a:ext>
+          </a:extLst>
+        </p:cNvPr>
         <p:cNvGrpSpPr/>
         <p:nvPr/>
       </p:nvGrpSpPr>
@@ -1215,7 +1109,13 @@
       </p:grpSpPr>
       <p:sp>
         <p:nvSpPr>
-          <p:cNvPr id="2" name="Slide Image Placeholder 1"/>
+          <p:cNvPr id="2" name="Slide Image Placeholder 1">
+            <a:extLst>
+              <a:ext uri="{FF2B5EF4-FFF2-40B4-BE49-F238E27FC236}">
+                <a16:creationId xmlns:a16="http://schemas.microsoft.com/office/drawing/2014/main" id="{6DCFC3CE-A8E5-FD19-B95B-EFC596D5A8F7}"/>
+              </a:ext>
+            </a:extLst>
+          </p:cNvPr>
           <p:cNvSpPr>
             <a:spLocks noGrp="1" noRot="1" noChangeAspect="1"/>
           </p:cNvSpPr>
@@ -1227,7 +1127,13 @@
       </p:sp>
       <p:sp>
         <p:nvSpPr>
-          <p:cNvPr id="3" name="Notes Placeholder 2"/>
+          <p:cNvPr id="3" name="Notes Placeholder 2">
+            <a:extLst>
+              <a:ext uri="{FF2B5EF4-FFF2-40B4-BE49-F238E27FC236}">
+                <a16:creationId xmlns:a16="http://schemas.microsoft.com/office/drawing/2014/main" id="{42025185-D901-3C51-2A5F-6857C5B11742}"/>
+              </a:ext>
+            </a:extLst>
+          </p:cNvPr>
           <p:cNvSpPr>
             <a:spLocks noGrp="1"/>
           </p:cNvSpPr>
@@ -1247,13 +1153,18 @@
 - Built from the user-provided presentation draft and term analyses in this conversation.
 [/Sources]</a:t>
             </a:r>
-            <a:endParaRPr lang="en-US" dirty="0"/>
-          </a:p>
-        </p:txBody>
-      </p:sp>
-      <p:sp>
-        <p:nvSpPr>
-          <p:cNvPr id="4" name="Slide Number Placeholder 3"/>
+          </a:p>
+        </p:txBody>
+      </p:sp>
+      <p:sp>
+        <p:nvSpPr>
+          <p:cNvPr id="4" name="Slide Number Placeholder 3">
+            <a:extLst>
+              <a:ext uri="{FF2B5EF4-FFF2-40B4-BE49-F238E27FC236}">
+                <a16:creationId xmlns:a16="http://schemas.microsoft.com/office/drawing/2014/main" id="{D23F8181-6AED-3967-AF58-05E6ACEF8CA7}"/>
+              </a:ext>
+            </a:extLst>
+          </p:cNvPr>
           <p:cNvSpPr>
             <a:spLocks noGrp="1"/>
           </p:cNvSpPr>
@@ -1277,7 +1188,7 @@
     </p:spTree>
     <p:extLst>
       <p:ext uri="{BB962C8B-B14F-4D97-AF65-F5344CB8AC3E}">
-        <p14:creationId xmlns:p14="http://schemas.microsoft.com/office/powerpoint/2010/main" val="1024086991"/>
+        <p14:creationId xmlns:p14="http://schemas.microsoft.com/office/powerpoint/2010/main" val="2169439342"/>
       </p:ext>
     </p:extLst>
   </p:cSld>
@@ -1338,7 +1249,6 @@
 - Built from the user-provided presentation draft and term analyses in this conversation.
 [/Sources]</a:t>
             </a:r>
-            <a:endParaRPr lang="en-US" dirty="0"/>
           </a:p>
         </p:txBody>
       </p:sp>
@@ -1429,7 +1339,6 @@
 - Built from the user-provided presentation draft and term analyses in this conversation.
 [/Sources]</a:t>
             </a:r>
-            <a:endParaRPr lang="en-US" dirty="0"/>
           </a:p>
         </p:txBody>
       </p:sp>
@@ -1520,7 +1429,6 @@
 - Built from the user-provided presentation draft and term analyses in this conversation.
 [/Sources]</a:t>
             </a:r>
-            <a:endParaRPr lang="en-US" dirty="0"/>
           </a:p>
         </p:txBody>
       </p:sp>
@@ -1611,7 +1519,6 @@
 - Built from the user-provided presentation draft and term analyses in this conversation.
 [/Sources]</a:t>
             </a:r>
-            <a:endParaRPr lang="en-US" dirty="0"/>
           </a:p>
         </p:txBody>
       </p:sp>
@@ -1689,6 +1596,7 @@
         <a:solidFill>
           <a:srgbClr val="F7F3EE"/>
         </a:solidFill>
+        <a:effectLst/>
       </p:bgPr>
     </p:bg>
     <p:spTree>
@@ -1774,7 +1682,7 @@
           <a:bodyPr wrap="square" rtlCol="0" anchor="ctr"/>
           <a:lstStyle/>
           <a:p>
-            <a:pPr algn="r" indent="0" marL="0">
+            <a:pPr marL="0" indent="0" algn="r">
               <a:buNone/>
             </a:pPr>
             <a:r>
@@ -1803,6 +1711,11 @@
 <file path=ppt/slideMasters/slideMaster1.xml><?xml version="1.0" encoding="utf-8"?>
 <p:sldMaster xmlns:a="http://schemas.openxmlformats.org/drawingml/2006/main" xmlns:r="http://schemas.openxmlformats.org/officeDocument/2006/relationships" xmlns:p="http://schemas.openxmlformats.org/presentationml/2006/main">
   <p:cSld>
+    <p:bg>
+      <p:bgRef idx="1001">
+        <a:schemeClr val="bg1"/>
+      </p:bgRef>
+    </p:bg>
     <p:spTree>
       <p:nvGrpSpPr>
         <p:cNvPr id="1" name=""/>
@@ -2086,6 +1999,7 @@
         <a:solidFill>
           <a:srgbClr val="1F2A6B"/>
         </a:solidFill>
+        <a:effectLst/>
       </p:bgPr>
     </p:bg>
     <p:spTree>
@@ -2126,7 +2040,10 @@
         </p:spPr>
         <p:txBody>
           <a:bodyPr/>
-          <a:p/>
+          <a:lstStyle/>
+          <a:p>
+            <a:endParaRPr/>
+          </a:p>
         </p:txBody>
       </p:sp>
       <p:sp>
@@ -2150,7 +2067,7 @@
           <a:bodyPr wrap="square" lIns="0" tIns="0" rIns="0" bIns="0" rtlCol="0" anchor="ctr"/>
           <a:lstStyle/>
           <a:p>
-            <a:pPr indent="0" marL="0">
+            <a:pPr marL="0" indent="0">
               <a:buNone/>
             </a:pPr>
             <a:r>
@@ -2162,7 +2079,7 @@
                 <a:ea typeface="Georgia" pitchFamily="34" charset="-122"/>
                 <a:cs typeface="Georgia" pitchFamily="34" charset="-120"/>
               </a:rPr>
-              <a:t>What Sanskrit Words Know</a:t>
+              <a:t>Listening to Sanskrit</a:t>
             </a:r>
             <a:endParaRPr lang="en-US" sz="2600" dirty="0"/>
           </a:p>
@@ -2189,7 +2106,7 @@
           <a:bodyPr wrap="square" lIns="0" tIns="0" rIns="0" bIns="0" rtlCol="0" anchor="ctr"/>
           <a:lstStyle/>
           <a:p>
-            <a:pPr indent="0" marL="0">
+            <a:pPr marL="0" indent="0">
               <a:buNone/>
             </a:pPr>
             <a:r>
@@ -2228,7 +2145,7 @@
           <a:bodyPr wrap="square" rtlCol="0" anchor="ctr"/>
           <a:lstStyle/>
           <a:p>
-            <a:pPr indent="0" marL="0">
+            <a:pPr marL="0" indent="0">
               <a:buNone/>
             </a:pPr>
             <a:r>
@@ -2265,7 +2182,7 @@
           <a:bodyPr wrap="square" rtlCol="0" anchor="ctr"/>
           <a:lstStyle/>
           <a:p>
-            <a:pPr indent="0" marL="0">
+            <a:pPr marL="0" indent="0">
               <a:buNone/>
             </a:pPr>
             <a:r>
@@ -2307,7 +2224,10 @@
         </p:spPr>
         <p:txBody>
           <a:bodyPr/>
-          <a:p/>
+          <a:lstStyle/>
+          <a:p>
+            <a:endParaRPr/>
+          </a:p>
         </p:txBody>
       </p:sp>
     </p:spTree>
@@ -2319,6 +2239,147 @@
 </file>
 
 <file path=ppt/slides/slide10.xml><?xml version="1.0" encoding="utf-8"?>
+<p:sld xmlns:a="http://schemas.openxmlformats.org/drawingml/2006/main" xmlns:r="http://schemas.openxmlformats.org/officeDocument/2006/relationships" xmlns:p="http://schemas.openxmlformats.org/presentationml/2006/main">
+  <p:cSld name="Slide 9">
+    <p:bg>
+      <p:bgPr>
+        <a:solidFill>
+          <a:srgbClr val="1F2A6B"/>
+        </a:solidFill>
+        <a:effectLst/>
+      </p:bgPr>
+    </p:bg>
+    <p:spTree>
+      <p:nvGrpSpPr>
+        <p:cNvPr id="1" name=""/>
+        <p:cNvGrpSpPr/>
+        <p:nvPr/>
+      </p:nvGrpSpPr>
+      <p:grpSpPr>
+        <a:xfrm>
+          <a:off x="0" y="0"/>
+          <a:ext cx="0" cy="0"/>
+          <a:chOff x="0" y="0"/>
+          <a:chExt cx="0" cy="0"/>
+        </a:xfrm>
+      </p:grpSpPr>
+      <p:sp>
+        <p:nvSpPr>
+          <p:cNvPr id="2" name="Text 0"/>
+          <p:cNvSpPr/>
+          <p:nvPr/>
+        </p:nvSpPr>
+        <p:spPr>
+          <a:xfrm>
+            <a:off x="1097280" y="2606040"/>
+            <a:ext cx="7863840" cy="640080"/>
+          </a:xfrm>
+          <a:prstGeom prst="rect">
+            <a:avLst/>
+          </a:prstGeom>
+          <a:noFill/>
+          <a:ln/>
+        </p:spPr>
+        <p:txBody>
+          <a:bodyPr wrap="square" lIns="0" tIns="0" rIns="0" bIns="0" rtlCol="0" anchor="ctr"/>
+          <a:lstStyle/>
+          <a:p>
+            <a:pPr marL="0" indent="0">
+              <a:buNone/>
+            </a:pPr>
+            <a:r>
+              <a:rPr lang="en-US" sz="2500" dirty="0">
+                <a:solidFill>
+                  <a:srgbClr val="FFFFFF"/>
+                </a:solidFill>
+                <a:latin typeface="Georgia" pitchFamily="34" charset="0"/>
+                <a:ea typeface="Georgia" pitchFamily="34" charset="-122"/>
+                <a:cs typeface="Georgia" pitchFamily="34" charset="-120"/>
+              </a:rPr>
+              <a:t>When Concepts Cross Languages</a:t>
+            </a:r>
+            <a:endParaRPr lang="en-US" sz="2500" dirty="0"/>
+          </a:p>
+        </p:txBody>
+      </p:sp>
+      <p:sp>
+        <p:nvSpPr>
+          <p:cNvPr id="3" name="Text 1"/>
+          <p:cNvSpPr/>
+          <p:nvPr/>
+        </p:nvSpPr>
+        <p:spPr>
+          <a:xfrm>
+            <a:off x="1115568" y="3383280"/>
+            <a:ext cx="7315200" cy="256032"/>
+          </a:xfrm>
+          <a:prstGeom prst="rect">
+            <a:avLst/>
+          </a:prstGeom>
+          <a:noFill/>
+          <a:ln/>
+        </p:spPr>
+        <p:txBody>
+          <a:bodyPr wrap="square" lIns="0" tIns="0" rIns="0" bIns="0" rtlCol="0" anchor="ctr"/>
+          <a:lstStyle/>
+          <a:p>
+            <a:pPr marL="0" indent="0">
+              <a:buNone/>
+            </a:pPr>
+            <a:r>
+              <a:rPr lang="en-US" sz="1150" dirty="0">
+                <a:solidFill>
+                  <a:srgbClr val="D6DDF5"/>
+                </a:solidFill>
+                <a:latin typeface="Aptos" pitchFamily="34" charset="0"/>
+                <a:ea typeface="Aptos" pitchFamily="34" charset="-122"/>
+                <a:cs typeface="Aptos" pitchFamily="34" charset="-120"/>
+              </a:rPr>
+              <a:t>The second question is not just “what is the translation?” but “what survives the move?”</a:t>
+            </a:r>
+            <a:endParaRPr lang="en-US" sz="1150" dirty="0"/>
+          </a:p>
+        </p:txBody>
+      </p:sp>
+      <p:sp>
+        <p:nvSpPr>
+          <p:cNvPr id="4" name="Shape 2"/>
+          <p:cNvSpPr/>
+          <p:nvPr/>
+        </p:nvSpPr>
+        <p:spPr>
+          <a:xfrm>
+            <a:off x="1097280" y="2331720"/>
+            <a:ext cx="1051560" cy="0"/>
+          </a:xfrm>
+          <a:prstGeom prst="line">
+            <a:avLst/>
+          </a:prstGeom>
+          <a:noFill/>
+          <a:ln w="12700">
+            <a:solidFill>
+              <a:srgbClr val="C46A2C"/>
+            </a:solidFill>
+            <a:prstDash val="solid"/>
+          </a:ln>
+        </p:spPr>
+        <p:txBody>
+          <a:bodyPr/>
+          <a:lstStyle/>
+          <a:p>
+            <a:endParaRPr lang="en-US"/>
+          </a:p>
+        </p:txBody>
+      </p:sp>
+    </p:spTree>
+  </p:cSld>
+  <p:clrMapOvr>
+    <a:masterClrMapping/>
+  </p:clrMapOvr>
+</p:sld>
+</file>
+
+<file path=ppt/slides/slide11.xml><?xml version="1.0" encoding="utf-8"?>
 <p:sld xmlns:a="http://schemas.openxmlformats.org/drawingml/2006/main" xmlns:r="http://schemas.openxmlformats.org/officeDocument/2006/relationships" xmlns:p="http://schemas.openxmlformats.org/presentationml/2006/main">
   <p:cSld name="Slide 10">
     <p:spTree>
@@ -2360,7 +2421,7 @@
           <a:bodyPr wrap="square" lIns="0" tIns="0" rIns="0" bIns="0" rtlCol="0" anchor="ctr"/>
           <a:lstStyle/>
           <a:p>
-            <a:pPr indent="0" marL="0">
+            <a:pPr marL="0" indent="0">
               <a:buNone/>
             </a:pPr>
             <a:r>
@@ -2399,7 +2460,7 @@
           <a:bodyPr wrap="square" lIns="0" tIns="0" rIns="0" bIns="0" rtlCol="0" anchor="ctr"/>
           <a:lstStyle/>
           <a:p>
-            <a:pPr indent="0" marL="0">
+            <a:pPr marL="0" indent="0">
               <a:buNone/>
             </a:pPr>
             <a:r>
@@ -2439,6 +2500,13 @@
             <a:prstDash val="solid"/>
           </a:ln>
         </p:spPr>
+        <p:txBody>
+          <a:bodyPr/>
+          <a:lstStyle/>
+          <a:p>
+            <a:endParaRPr lang="en-US"/>
+          </a:p>
+        </p:txBody>
       </p:sp>
       <p:sp>
         <p:nvSpPr>
@@ -2464,6 +2532,13 @@
             <a:prstDash val="solid"/>
           </a:ln>
         </p:spPr>
+        <p:txBody>
+          <a:bodyPr/>
+          <a:lstStyle/>
+          <a:p>
+            <a:endParaRPr lang="en-US"/>
+          </a:p>
+        </p:txBody>
       </p:sp>
       <p:sp>
         <p:nvSpPr>
@@ -2491,13 +2566,20 @@
             <a:prstDash val="solid"/>
           </a:ln>
           <a:effectLst>
-            <a:outerShdw sx="100000" sy="100000" kx="0" ky="0" algn="bl" rotWithShape="0" blurRad="12700" dist="6350" dir="2700000">
+            <a:outerShdw blurRad="12700" dist="6350" dir="2700000" algn="bl" rotWithShape="0">
               <a:srgbClr val="000000">
                 <a:alpha val="12000"/>
               </a:srgbClr>
             </a:outerShdw>
           </a:effectLst>
         </p:spPr>
+        <p:txBody>
+          <a:bodyPr/>
+          <a:lstStyle/>
+          <a:p>
+            <a:endParaRPr lang="en-US"/>
+          </a:p>
+        </p:txBody>
       </p:sp>
       <p:sp>
         <p:nvSpPr>
@@ -2520,7 +2602,7 @@
           <a:bodyPr wrap="square" rtlCol="0" anchor="ctr"/>
           <a:lstStyle/>
           <a:p>
-            <a:pPr algn="ctr" indent="0" marL="0">
+            <a:pPr marL="0" indent="0" algn="ctr">
               <a:buNone/>
             </a:pPr>
             <a:r>
@@ -2559,7 +2641,7 @@
           <a:bodyPr wrap="square" rtlCol="0" anchor="ctr"/>
           <a:lstStyle/>
           <a:p>
-            <a:pPr algn="ctr" indent="0" marL="0">
+            <a:pPr marL="0" indent="0" algn="ctr">
               <a:buNone/>
             </a:pPr>
             <a:r>
@@ -2598,7 +2680,7 @@
           <a:bodyPr wrap="square" rtlCol="0" anchor="ctr"/>
           <a:lstStyle/>
           <a:p>
-            <a:pPr algn="ctr" indent="0" marL="0">
+            <a:pPr marL="0" indent="0" algn="ctr">
               <a:buNone/>
             </a:pPr>
             <a:r>
@@ -2640,6 +2722,13 @@
             <a:prstDash val="solid"/>
           </a:ln>
         </p:spPr>
+        <p:txBody>
+          <a:bodyPr/>
+          <a:lstStyle/>
+          <a:p>
+            <a:endParaRPr lang="en-US"/>
+          </a:p>
+        </p:txBody>
       </p:sp>
       <p:sp>
         <p:nvSpPr>
@@ -2665,6 +2754,13 @@
             <a:prstDash val="solid"/>
           </a:ln>
         </p:spPr>
+        <p:txBody>
+          <a:bodyPr/>
+          <a:lstStyle/>
+          <a:p>
+            <a:endParaRPr lang="en-US"/>
+          </a:p>
+        </p:txBody>
       </p:sp>
       <p:sp>
         <p:nvSpPr>
@@ -2692,13 +2788,20 @@
             <a:prstDash val="solid"/>
           </a:ln>
           <a:effectLst>
-            <a:outerShdw sx="100000" sy="100000" kx="0" ky="0" algn="bl" rotWithShape="0" blurRad="12700" dist="6350" dir="2700000">
+            <a:outerShdw blurRad="12700" dist="6350" dir="2700000" algn="bl" rotWithShape="0">
               <a:srgbClr val="000000">
                 <a:alpha val="12000"/>
               </a:srgbClr>
             </a:outerShdw>
           </a:effectLst>
         </p:spPr>
+        <p:txBody>
+          <a:bodyPr/>
+          <a:lstStyle/>
+          <a:p>
+            <a:endParaRPr lang="en-US"/>
+          </a:p>
+        </p:txBody>
       </p:sp>
       <p:sp>
         <p:nvSpPr>
@@ -2721,7 +2824,7 @@
           <a:bodyPr wrap="square" rtlCol="0" anchor="ctr"/>
           <a:lstStyle/>
           <a:p>
-            <a:pPr algn="ctr" indent="0" marL="0">
+            <a:pPr marL="0" indent="0" algn="ctr">
               <a:buNone/>
             </a:pPr>
             <a:r>
@@ -2760,7 +2863,7 @@
           <a:bodyPr wrap="square" rtlCol="0" anchor="ctr"/>
           <a:lstStyle/>
           <a:p>
-            <a:pPr algn="ctr" indent="0" marL="0">
+            <a:pPr marL="0" indent="0" algn="ctr">
               <a:buNone/>
             </a:pPr>
             <a:r>
@@ -2799,7 +2902,7 @@
           <a:bodyPr wrap="square" rtlCol="0" anchor="ctr"/>
           <a:lstStyle/>
           <a:p>
-            <a:pPr algn="ctr" indent="0" marL="0">
+            <a:pPr marL="0" indent="0" algn="ctr">
               <a:buNone/>
             </a:pPr>
             <a:r>
@@ -2841,6 +2944,13 @@
             <a:prstDash val="solid"/>
           </a:ln>
         </p:spPr>
+        <p:txBody>
+          <a:bodyPr/>
+          <a:lstStyle/>
+          <a:p>
+            <a:endParaRPr lang="en-US"/>
+          </a:p>
+        </p:txBody>
       </p:sp>
       <p:sp>
         <p:nvSpPr>
@@ -2866,6 +2976,13 @@
             <a:prstDash val="solid"/>
           </a:ln>
         </p:spPr>
+        <p:txBody>
+          <a:bodyPr/>
+          <a:lstStyle/>
+          <a:p>
+            <a:endParaRPr lang="en-US"/>
+          </a:p>
+        </p:txBody>
       </p:sp>
       <p:sp>
         <p:nvSpPr>
@@ -2893,13 +3010,20 @@
             <a:prstDash val="solid"/>
           </a:ln>
           <a:effectLst>
-            <a:outerShdw sx="100000" sy="100000" kx="0" ky="0" algn="bl" rotWithShape="0" blurRad="12700" dist="6350" dir="2700000">
+            <a:outerShdw blurRad="12700" dist="6350" dir="2700000" algn="bl" rotWithShape="0">
               <a:srgbClr val="000000">
                 <a:alpha val="12000"/>
               </a:srgbClr>
             </a:outerShdw>
           </a:effectLst>
         </p:spPr>
+        <p:txBody>
+          <a:bodyPr/>
+          <a:lstStyle/>
+          <a:p>
+            <a:endParaRPr lang="en-US"/>
+          </a:p>
+        </p:txBody>
       </p:sp>
       <p:sp>
         <p:nvSpPr>
@@ -2922,7 +3046,7 @@
           <a:bodyPr wrap="square" rtlCol="0" anchor="ctr"/>
           <a:lstStyle/>
           <a:p>
-            <a:pPr algn="ctr" indent="0" marL="0">
+            <a:pPr marL="0" indent="0" algn="ctr">
               <a:buNone/>
             </a:pPr>
             <a:r>
@@ -2961,7 +3085,7 @@
           <a:bodyPr wrap="square" rtlCol="0" anchor="ctr"/>
           <a:lstStyle/>
           <a:p>
-            <a:pPr algn="ctr" indent="0" marL="0">
+            <a:pPr marL="0" indent="0" algn="ctr">
               <a:buNone/>
             </a:pPr>
             <a:r>
@@ -3000,7 +3124,7 @@
           <a:bodyPr wrap="square" rtlCol="0" anchor="ctr"/>
           <a:lstStyle/>
           <a:p>
-            <a:pPr algn="ctr" indent="0" marL="0">
+            <a:pPr marL="0" indent="0" algn="ctr">
               <a:buNone/>
             </a:pPr>
             <a:r>
@@ -3042,6 +3166,13 @@
             <a:prstDash val="solid"/>
           </a:ln>
         </p:spPr>
+        <p:txBody>
+          <a:bodyPr/>
+          <a:lstStyle/>
+          <a:p>
+            <a:endParaRPr lang="en-US"/>
+          </a:p>
+        </p:txBody>
       </p:sp>
       <p:sp>
         <p:nvSpPr>
@@ -3067,6 +3198,13 @@
             <a:prstDash val="solid"/>
           </a:ln>
         </p:spPr>
+        <p:txBody>
+          <a:bodyPr/>
+          <a:lstStyle/>
+          <a:p>
+            <a:endParaRPr lang="en-US"/>
+          </a:p>
+        </p:txBody>
       </p:sp>
       <p:sp>
         <p:nvSpPr>
@@ -3094,13 +3232,20 @@
             <a:prstDash val="solid"/>
           </a:ln>
           <a:effectLst>
-            <a:outerShdw sx="100000" sy="100000" kx="0" ky="0" algn="bl" rotWithShape="0" blurRad="12700" dist="6350" dir="2700000">
+            <a:outerShdw blurRad="12700" dist="6350" dir="2700000" algn="bl" rotWithShape="0">
               <a:srgbClr val="000000">
                 <a:alpha val="12000"/>
               </a:srgbClr>
             </a:outerShdw>
           </a:effectLst>
         </p:spPr>
+        <p:txBody>
+          <a:bodyPr/>
+          <a:lstStyle/>
+          <a:p>
+            <a:endParaRPr lang="en-US"/>
+          </a:p>
+        </p:txBody>
       </p:sp>
       <p:sp>
         <p:nvSpPr>
@@ -3123,7 +3268,7 @@
           <a:bodyPr wrap="square" rtlCol="0" anchor="ctr"/>
           <a:lstStyle/>
           <a:p>
-            <a:pPr algn="ctr" indent="0" marL="0">
+            <a:pPr marL="0" indent="0" algn="ctr">
               <a:buNone/>
             </a:pPr>
             <a:r>
@@ -3162,7 +3307,7 @@
           <a:bodyPr wrap="square" rtlCol="0" anchor="ctr"/>
           <a:lstStyle/>
           <a:p>
-            <a:pPr algn="ctr" indent="0" marL="0">
+            <a:pPr marL="0" indent="0" algn="ctr">
               <a:buNone/>
             </a:pPr>
             <a:r>
@@ -3201,7 +3346,7 @@
           <a:bodyPr wrap="square" rtlCol="0" anchor="ctr"/>
           <a:lstStyle/>
           <a:p>
-            <a:pPr algn="ctr" indent="0" marL="0">
+            <a:pPr marL="0" indent="0" algn="ctr">
               <a:buNone/>
             </a:pPr>
             <a:r>
@@ -3243,6 +3388,13 @@
             <a:prstDash val="solid"/>
           </a:ln>
         </p:spPr>
+        <p:txBody>
+          <a:bodyPr/>
+          <a:lstStyle/>
+          <a:p>
+            <a:endParaRPr lang="en-US"/>
+          </a:p>
+        </p:txBody>
       </p:sp>
       <p:sp>
         <p:nvSpPr>
@@ -3268,6 +3420,13 @@
             <a:prstDash val="solid"/>
           </a:ln>
         </p:spPr>
+        <p:txBody>
+          <a:bodyPr/>
+          <a:lstStyle/>
+          <a:p>
+            <a:endParaRPr lang="en-US"/>
+          </a:p>
+        </p:txBody>
       </p:sp>
       <p:sp>
         <p:nvSpPr>
@@ -3295,13 +3454,20 @@
             <a:prstDash val="solid"/>
           </a:ln>
           <a:effectLst>
-            <a:outerShdw sx="100000" sy="100000" kx="0" ky="0" algn="bl" rotWithShape="0" blurRad="12700" dist="6350" dir="2700000">
+            <a:outerShdw blurRad="12700" dist="6350" dir="2700000" algn="bl" rotWithShape="0">
               <a:srgbClr val="000000">
                 <a:alpha val="12000"/>
               </a:srgbClr>
             </a:outerShdw>
           </a:effectLst>
         </p:spPr>
+        <p:txBody>
+          <a:bodyPr/>
+          <a:lstStyle/>
+          <a:p>
+            <a:endParaRPr lang="en-US"/>
+          </a:p>
+        </p:txBody>
       </p:sp>
       <p:sp>
         <p:nvSpPr>
@@ -3324,7 +3490,7 @@
           <a:bodyPr wrap="square" rtlCol="0" anchor="ctr"/>
           <a:lstStyle/>
           <a:p>
-            <a:pPr algn="ctr" indent="0" marL="0">
+            <a:pPr marL="0" indent="0" algn="ctr">
               <a:buNone/>
             </a:pPr>
             <a:r>
@@ -3363,7 +3529,7 @@
           <a:bodyPr wrap="square" rtlCol="0" anchor="ctr"/>
           <a:lstStyle/>
           <a:p>
-            <a:pPr algn="ctr" indent="0" marL="0">
+            <a:pPr marL="0" indent="0" algn="ctr">
               <a:buNone/>
             </a:pPr>
             <a:r>
@@ -3402,7 +3568,7 @@
           <a:bodyPr wrap="square" rtlCol="0" anchor="ctr"/>
           <a:lstStyle/>
           <a:p>
-            <a:pPr algn="ctr" indent="0" marL="0">
+            <a:pPr marL="0" indent="0" algn="ctr">
               <a:buNone/>
             </a:pPr>
             <a:r>
@@ -3441,7 +3607,7 @@
           <a:bodyPr wrap="square" rtlCol="0" anchor="ctr"/>
           <a:lstStyle/>
           <a:p>
-            <a:pPr algn="ctr" indent="0" marL="0">
+            <a:pPr marL="0" indent="0" algn="ctr">
               <a:buNone/>
             </a:pPr>
             <a:r>
@@ -3467,7 +3633,7 @@
 </p:sld>
 </file>
 
-<file path=ppt/slides/slide11.xml><?xml version="1.0" encoding="utf-8"?>
+<file path=ppt/slides/slide12.xml><?xml version="1.0" encoding="utf-8"?>
 <p:sld xmlns:a="http://schemas.openxmlformats.org/drawingml/2006/main" xmlns:r="http://schemas.openxmlformats.org/officeDocument/2006/relationships" xmlns:p="http://schemas.openxmlformats.org/presentationml/2006/main">
   <p:cSld name="Slide 11">
     <p:spTree>
@@ -3509,7 +3675,7 @@
           <a:bodyPr wrap="square" lIns="0" tIns="0" rIns="0" bIns="0" rtlCol="0" anchor="ctr"/>
           <a:lstStyle/>
           <a:p>
-            <a:pPr indent="0" marL="0">
+            <a:pPr marL="0" indent="0">
               <a:buNone/>
             </a:pPr>
             <a:r>
@@ -3548,7 +3714,7 @@
           <a:bodyPr wrap="square" lIns="0" tIns="0" rIns="0" bIns="0" rtlCol="0" anchor="ctr"/>
           <a:lstStyle/>
           <a:p>
-            <a:pPr indent="0" marL="0">
+            <a:pPr marL="0" indent="0">
               <a:buNone/>
             </a:pPr>
             <a:r>
@@ -3592,13 +3758,20 @@
             <a:prstDash val="solid"/>
           </a:ln>
           <a:effectLst>
-            <a:outerShdw sx="100000" sy="100000" kx="0" ky="0" algn="bl" rotWithShape="0" blurRad="12700" dist="6350" dir="2700000">
+            <a:outerShdw blurRad="12700" dist="6350" dir="2700000" algn="bl" rotWithShape="0">
               <a:srgbClr val="000000">
                 <a:alpha val="12000"/>
               </a:srgbClr>
             </a:outerShdw>
           </a:effectLst>
         </p:spPr>
+        <p:txBody>
+          <a:bodyPr/>
+          <a:lstStyle/>
+          <a:p>
+            <a:endParaRPr lang="en-US"/>
+          </a:p>
+        </p:txBody>
       </p:sp>
       <p:sp>
         <p:nvSpPr>
@@ -3626,13 +3799,20 @@
             <a:prstDash val="solid"/>
           </a:ln>
           <a:effectLst>
-            <a:outerShdw sx="100000" sy="100000" kx="0" ky="0" algn="bl" rotWithShape="0" blurRad="12700" dist="6350" dir="2700000">
+            <a:outerShdw blurRad="12700" dist="6350" dir="2700000" algn="bl" rotWithShape="0">
               <a:srgbClr val="000000">
                 <a:alpha val="12000"/>
               </a:srgbClr>
             </a:outerShdw>
           </a:effectLst>
         </p:spPr>
+        <p:txBody>
+          <a:bodyPr/>
+          <a:lstStyle/>
+          <a:p>
+            <a:endParaRPr lang="en-US"/>
+          </a:p>
+        </p:txBody>
       </p:sp>
       <p:sp>
         <p:nvSpPr>
@@ -3655,7 +3835,7 @@
           <a:bodyPr wrap="square" rtlCol="0" anchor="ctr"/>
           <a:lstStyle/>
           <a:p>
-            <a:pPr indent="0" marL="0">
+            <a:pPr marL="0" indent="0">
               <a:buNone/>
             </a:pPr>
             <a:r>
@@ -3694,7 +3874,7 @@
           <a:bodyPr wrap="square" rtlCol="0" anchor="ctr"/>
           <a:lstStyle/>
           <a:p>
-            <a:pPr indent="0" marL="0">
+            <a:pPr marL="0" indent="0">
               <a:buNone/>
             </a:pPr>
             <a:r>
@@ -3733,7 +3913,7 @@
           <a:bodyPr wrap="square" rtlCol="0" anchor="ctr"/>
           <a:lstStyle/>
           <a:p>
-            <a:pPr indent="0" marL="0">
+            <a:pPr marL="0" indent="0">
               <a:buNone/>
             </a:pPr>
             <a:r>
@@ -3750,7 +3930,7 @@
             <a:endParaRPr lang="en-US" sz="1500" dirty="0"/>
           </a:p>
           <a:p>
-            <a:pPr indent="0" marL="0">
+            <a:pPr marL="0" indent="0">
               <a:buNone/>
             </a:pPr>
             <a:r>
@@ -3789,7 +3969,7 @@
           <a:bodyPr wrap="square" rtlCol="0" anchor="ctr"/>
           <a:lstStyle/>
           <a:p>
-            <a:pPr indent="0" marL="0">
+            <a:pPr marL="0" indent="0">
               <a:buNone/>
             </a:pPr>
             <a:r>
@@ -3828,7 +4008,7 @@
           <a:bodyPr wrap="square" rtlCol="0" anchor="ctr"/>
           <a:lstStyle/>
           <a:p>
-            <a:pPr indent="0" marL="0">
+            <a:pPr marL="0" indent="0">
               <a:buNone/>
             </a:pPr>
             <a:r>
@@ -3867,7 +4047,7 @@
           <a:bodyPr wrap="square" rtlCol="0" anchor="ctr"/>
           <a:lstStyle/>
           <a:p>
-            <a:pPr indent="0" marL="0">
+            <a:pPr marL="0" indent="0">
               <a:buNone/>
             </a:pPr>
             <a:r>
@@ -3884,7 +4064,7 @@
             <a:endParaRPr lang="en-US" sz="1500" dirty="0"/>
           </a:p>
           <a:p>
-            <a:pPr indent="0" marL="0">
+            <a:pPr marL="0" indent="0">
               <a:buNone/>
             </a:pPr>
             <a:r>
@@ -3924,6 +4104,13 @@
             <a:prstDash val="solid"/>
           </a:ln>
         </p:spPr>
+        <p:txBody>
+          <a:bodyPr/>
+          <a:lstStyle/>
+          <a:p>
+            <a:endParaRPr lang="en-US"/>
+          </a:p>
+        </p:txBody>
       </p:sp>
       <p:sp>
         <p:nvSpPr>
@@ -3946,7 +4133,7 @@
           <a:bodyPr wrap="square" rtlCol="0" anchor="ctr"/>
           <a:lstStyle/>
           <a:p>
-            <a:pPr algn="ctr" indent="0" marL="0">
+            <a:pPr marL="0" indent="0" algn="ctr">
               <a:buNone/>
             </a:pPr>
             <a:r>
@@ -3959,547 +4146,6 @@
                 <a:cs typeface="Georgia" pitchFamily="34" charset="-120"/>
               </a:rPr>
               <a:t>Translation here is continuity plus reinterpretation.</a:t>
-            </a:r>
-            <a:endParaRPr lang="en-US" sz="1450" dirty="0"/>
-          </a:p>
-        </p:txBody>
-      </p:sp>
-    </p:spTree>
-  </p:cSld>
-  <p:clrMapOvr>
-    <a:masterClrMapping/>
-  </p:clrMapOvr>
-</p:sld>
-</file>
-
-<file path=ppt/slides/slide12.xml><?xml version="1.0" encoding="utf-8"?>
-<p:sld xmlns:a="http://schemas.openxmlformats.org/drawingml/2006/main" xmlns:r="http://schemas.openxmlformats.org/officeDocument/2006/relationships" xmlns:p="http://schemas.openxmlformats.org/presentationml/2006/main">
-  <p:cSld name="Slide 12">
-    <p:spTree>
-      <p:nvGrpSpPr>
-        <p:cNvPr id="1" name=""/>
-        <p:cNvGrpSpPr/>
-        <p:nvPr/>
-      </p:nvGrpSpPr>
-      <p:grpSpPr>
-        <a:xfrm>
-          <a:off x="0" y="0"/>
-          <a:ext cx="0" cy="0"/>
-          <a:chOff x="0" y="0"/>
-          <a:chExt cx="0" cy="0"/>
-        </a:xfrm>
-      </p:grpSpPr>
-      <p:sp>
-        <p:nvSpPr>
-          <p:cNvPr id="2" name="Text 0"/>
-          <p:cNvSpPr/>
-          <p:nvPr/>
-        </p:nvSpPr>
-        <p:spPr>
-          <a:xfrm>
-            <a:off x="658368" y="320040"/>
-            <a:ext cx="10332720" cy="365760"/>
-          </a:xfrm>
-          <a:prstGeom prst="rect">
-            <a:avLst/>
-          </a:prstGeom>
-          <a:solidFill>
-            <a:srgbClr val="F2F0EC"/>
-          </a:solidFill>
-          <a:ln>
-            <a:noFill/>
-          </a:ln>
-        </p:spPr>
-        <p:txBody>
-          <a:bodyPr wrap="square" lIns="0" tIns="0" rIns="0" bIns="0" rtlCol="0" anchor="ctr"/>
-          <a:lstStyle/>
-          <a:p>
-            <a:pPr indent="0" marL="0">
-              <a:buNone/>
-            </a:pPr>
-            <a:r>
-              <a:rPr lang="en-US" sz="2400" dirty="0">
-                <a:solidFill>
-                  <a:srgbClr val="1F2A6B"/>
-                </a:solidFill>
-                <a:latin typeface="Georgia" pitchFamily="34" charset="0"/>
-                <a:ea typeface="Georgia" pitchFamily="34" charset="-122"/>
-                <a:cs typeface="Georgia" pitchFamily="34" charset="-120"/>
-              </a:rPr>
-              <a:t>svarūpa vs. 自性  zìxìng</a:t>
-            </a:r>
-            <a:endParaRPr lang="en-US" sz="2400" dirty="0"/>
-          </a:p>
-        </p:txBody>
-      </p:sp>
-      <p:sp>
-        <p:nvSpPr>
-          <p:cNvPr id="3" name="Text 1"/>
-          <p:cNvSpPr/>
-          <p:nvPr/>
-        </p:nvSpPr>
-        <p:spPr>
-          <a:xfrm>
-            <a:off x="676656" y="731520"/>
-            <a:ext cx="9875520" cy="228600"/>
-          </a:xfrm>
-          <a:prstGeom prst="rect">
-            <a:avLst/>
-          </a:prstGeom>
-          <a:noFill/>
-          <a:ln/>
-        </p:spPr>
-        <p:txBody>
-          <a:bodyPr wrap="square" lIns="0" tIns="0" rIns="0" bIns="0" rtlCol="0" anchor="ctr"/>
-          <a:lstStyle/>
-          <a:p>
-            <a:pPr indent="0" marL="0">
-              <a:buNone/>
-            </a:pPr>
-            <a:r>
-              <a:rPr lang="en-US" sz="1100" i="1" dirty="0">
-                <a:solidFill>
-                  <a:srgbClr val="6B7280"/>
-                </a:solidFill>
-                <a:latin typeface="Aptos" pitchFamily="34" charset="0"/>
-                <a:ea typeface="Aptos" pitchFamily="34" charset="-122"/>
-                <a:cs typeface="Aptos" pitchFamily="34" charset="-120"/>
-              </a:rPr>
-              <a:t>The most instructive case may be the one that does not map cleanly.</a:t>
-            </a:r>
-            <a:endParaRPr lang="en-US" sz="1100" dirty="0"/>
-          </a:p>
-        </p:txBody>
-      </p:sp>
-      <p:sp>
-        <p:nvSpPr>
-          <p:cNvPr id="4" name="Shape 2"/>
-          <p:cNvSpPr/>
-          <p:nvPr/>
-        </p:nvSpPr>
-        <p:spPr>
-          <a:xfrm>
-            <a:off x="914400" y="1508760"/>
-            <a:ext cx="4434840" cy="4343400"/>
-          </a:xfrm>
-          <a:prstGeom prst="roundRect">
-            <a:avLst>
-              <a:gd name="adj" fmla="val 1684"/>
-            </a:avLst>
-          </a:prstGeom>
-          <a:solidFill>
-            <a:srgbClr val="FFFDF9"/>
-          </a:solidFill>
-          <a:ln w="12700">
-            <a:solidFill>
-              <a:srgbClr val="D7D0C4"/>
-            </a:solidFill>
-            <a:prstDash val="solid"/>
-          </a:ln>
-          <a:effectLst>
-            <a:outerShdw sx="100000" sy="100000" kx="0" ky="0" algn="bl" rotWithShape="0" blurRad="12700" dist="6350" dir="2700000">
-              <a:srgbClr val="000000">
-                <a:alpha val="12000"/>
-              </a:srgbClr>
-            </a:outerShdw>
-          </a:effectLst>
-        </p:spPr>
-      </p:sp>
-      <p:sp>
-        <p:nvSpPr>
-          <p:cNvPr id="5" name="Shape 3"/>
-          <p:cNvSpPr/>
-          <p:nvPr/>
-        </p:nvSpPr>
-        <p:spPr>
-          <a:xfrm>
-            <a:off x="5669280" y="1508760"/>
-            <a:ext cx="4434840" cy="4343400"/>
-          </a:xfrm>
-          <a:prstGeom prst="roundRect">
-            <a:avLst>
-              <a:gd name="adj" fmla="val 1684"/>
-            </a:avLst>
-          </a:prstGeom>
-          <a:solidFill>
-            <a:srgbClr val="FFFDF9"/>
-          </a:solidFill>
-          <a:ln w="12700">
-            <a:solidFill>
-              <a:srgbClr val="D7D0C4"/>
-            </a:solidFill>
-            <a:prstDash val="solid"/>
-          </a:ln>
-          <a:effectLst>
-            <a:outerShdw sx="100000" sy="100000" kx="0" ky="0" algn="bl" rotWithShape="0" blurRad="12700" dist="6350" dir="2700000">
-              <a:srgbClr val="000000">
-                <a:alpha val="12000"/>
-              </a:srgbClr>
-            </a:outerShdw>
-          </a:effectLst>
-        </p:spPr>
-      </p:sp>
-      <p:sp>
-        <p:nvSpPr>
-          <p:cNvPr id="6" name="Text 4"/>
-          <p:cNvSpPr/>
-          <p:nvPr/>
-        </p:nvSpPr>
-        <p:spPr>
-          <a:xfrm>
-            <a:off x="1170432" y="1810512"/>
-            <a:ext cx="1463040" cy="219456"/>
-          </a:xfrm>
-          <a:prstGeom prst="rect">
-            <a:avLst/>
-          </a:prstGeom>
-          <a:noFill/>
-          <a:ln/>
-        </p:spPr>
-        <p:txBody>
-          <a:bodyPr wrap="square" rtlCol="0" anchor="ctr"/>
-          <a:lstStyle/>
-          <a:p>
-            <a:pPr indent="0" marL="0">
-              <a:buNone/>
-            </a:pPr>
-            <a:r>
-              <a:rPr lang="en-US" sz="1800" dirty="0">
-                <a:solidFill>
-                  <a:srgbClr val="1F2A6B"/>
-                </a:solidFill>
-                <a:latin typeface="Georgia" pitchFamily="34" charset="0"/>
-                <a:ea typeface="Georgia" pitchFamily="34" charset="-122"/>
-                <a:cs typeface="Georgia" pitchFamily="34" charset="-120"/>
-              </a:rPr>
-              <a:t>Yoga Sutras</a:t>
-            </a:r>
-            <a:endParaRPr lang="en-US" sz="1800" dirty="0"/>
-          </a:p>
-        </p:txBody>
-      </p:sp>
-      <p:sp>
-        <p:nvSpPr>
-          <p:cNvPr id="7" name="Text 5"/>
-          <p:cNvSpPr/>
-          <p:nvPr/>
-        </p:nvSpPr>
-        <p:spPr>
-          <a:xfrm>
-            <a:off x="1170432" y="2176272"/>
-            <a:ext cx="1828800" cy="502920"/>
-          </a:xfrm>
-          <a:prstGeom prst="rect">
-            <a:avLst/>
-          </a:prstGeom>
-          <a:noFill/>
-          <a:ln/>
-        </p:spPr>
-        <p:txBody>
-          <a:bodyPr wrap="square" rtlCol="0" anchor="ctr"/>
-          <a:lstStyle/>
-          <a:p>
-            <a:pPr indent="0" marL="0">
-              <a:buNone/>
-            </a:pPr>
-            <a:r>
-              <a:rPr lang="en-US" sz="2200" dirty="0">
-                <a:solidFill>
-                  <a:srgbClr val="182033"/>
-                </a:solidFill>
-                <a:latin typeface="Georgia" pitchFamily="34" charset="0"/>
-                <a:ea typeface="Georgia" pitchFamily="34" charset="-122"/>
-                <a:cs typeface="Georgia" pitchFamily="34" charset="-120"/>
-              </a:rPr>
-              <a:t>sva-rūpa</a:t>
-            </a:r>
-            <a:endParaRPr lang="en-US" sz="2200" dirty="0"/>
-          </a:p>
-          <a:p>
-            <a:pPr indent="0" marL="0">
-              <a:buNone/>
-            </a:pPr>
-            <a:r>
-              <a:rPr lang="en-US" sz="2200" dirty="0">
-                <a:solidFill>
-                  <a:srgbClr val="182033"/>
-                </a:solidFill>
-                <a:latin typeface="Georgia" pitchFamily="34" charset="0"/>
-                <a:ea typeface="Georgia" pitchFamily="34" charset="-122"/>
-                <a:cs typeface="Georgia" pitchFamily="34" charset="-120"/>
-              </a:rPr>
-              <a:t>“own form”</a:t>
-            </a:r>
-            <a:endParaRPr lang="en-US" sz="2200" dirty="0"/>
-          </a:p>
-        </p:txBody>
-      </p:sp>
-      <p:sp>
-        <p:nvSpPr>
-          <p:cNvPr id="8" name="Text 6"/>
-          <p:cNvSpPr/>
-          <p:nvPr/>
-        </p:nvSpPr>
-        <p:spPr>
-          <a:xfrm>
-            <a:off x="1170432" y="2907792"/>
-            <a:ext cx="3611880" cy="1005840"/>
-          </a:xfrm>
-          <a:prstGeom prst="rect">
-            <a:avLst/>
-          </a:prstGeom>
-          <a:noFill/>
-          <a:ln/>
-        </p:spPr>
-        <p:txBody>
-          <a:bodyPr wrap="square" rtlCol="0" anchor="ctr"/>
-          <a:lstStyle/>
-          <a:p>
-            <a:pPr indent="0" marL="0">
-              <a:buNone/>
-            </a:pPr>
-            <a:r>
-              <a:rPr lang="en-US" sz="1500" dirty="0">
-                <a:solidFill>
-                  <a:srgbClr val="263248"/>
-                </a:solidFill>
-                <a:latin typeface="Aptos" pitchFamily="34" charset="0"/>
-                <a:ea typeface="Aptos" pitchFamily="34" charset="-122"/>
-                <a:cs typeface="Aptos" pitchFamily="34" charset="-120"/>
-              </a:rPr>
-              <a:t>YS 1.3: “The seer abides in its own form.”</a:t>
-            </a:r>
-            <a:endParaRPr lang="en-US" sz="1500" dirty="0"/>
-          </a:p>
-          <a:p>
-            <a:pPr indent="0" marL="0">
-              <a:buNone/>
-            </a:pPr>
-            <a:r>
-              <a:rPr lang="en-US" sz="1500" dirty="0">
-                <a:solidFill>
-                  <a:srgbClr val="263248"/>
-                </a:solidFill>
-                <a:latin typeface="Aptos" pitchFamily="34" charset="0"/>
-                <a:ea typeface="Aptos" pitchFamily="34" charset="-122"/>
-                <a:cs typeface="Aptos" pitchFamily="34" charset="-120"/>
-              </a:rPr>
-              <a:t>Meditation reveals a real, stable nature.</a:t>
-            </a:r>
-            <a:endParaRPr lang="en-US" sz="1500" dirty="0"/>
-          </a:p>
-        </p:txBody>
-      </p:sp>
-      <p:sp>
-        <p:nvSpPr>
-          <p:cNvPr id="9" name="Text 7"/>
-          <p:cNvSpPr/>
-          <p:nvPr/>
-        </p:nvSpPr>
-        <p:spPr>
-          <a:xfrm>
-            <a:off x="5925312" y="1810512"/>
-            <a:ext cx="2194560" cy="219456"/>
-          </a:xfrm>
-          <a:prstGeom prst="rect">
-            <a:avLst/>
-          </a:prstGeom>
-          <a:noFill/>
-          <a:ln/>
-        </p:spPr>
-        <p:txBody>
-          <a:bodyPr wrap="square" rtlCol="0" anchor="ctr"/>
-          <a:lstStyle/>
-          <a:p>
-            <a:pPr indent="0" marL="0">
-              <a:buNone/>
-            </a:pPr>
-            <a:r>
-              <a:rPr lang="en-US" sz="1800" dirty="0">
-                <a:solidFill>
-                  <a:srgbClr val="1F2A6B"/>
-                </a:solidFill>
-                <a:latin typeface="Georgia" pitchFamily="34" charset="0"/>
-                <a:ea typeface="Georgia" pitchFamily="34" charset="-122"/>
-                <a:cs typeface="Georgia" pitchFamily="34" charset="-120"/>
-              </a:rPr>
-              <a:t>Chinese Madhyamaka</a:t>
-            </a:r>
-            <a:endParaRPr lang="en-US" sz="1800" dirty="0"/>
-          </a:p>
-        </p:txBody>
-      </p:sp>
-      <p:sp>
-        <p:nvSpPr>
-          <p:cNvPr id="10" name="Text 8"/>
-          <p:cNvSpPr/>
-          <p:nvPr/>
-        </p:nvSpPr>
-        <p:spPr>
-          <a:xfrm>
-            <a:off x="5925312" y="2176272"/>
-            <a:ext cx="1828800" cy="502920"/>
-          </a:xfrm>
-          <a:prstGeom prst="rect">
-            <a:avLst/>
-          </a:prstGeom>
-          <a:noFill/>
-          <a:ln/>
-        </p:spPr>
-        <p:txBody>
-          <a:bodyPr wrap="square" rtlCol="0" anchor="ctr"/>
-          <a:lstStyle/>
-          <a:p>
-            <a:pPr indent="0" marL="0">
-              <a:buNone/>
-            </a:pPr>
-            <a:r>
-              <a:rPr lang="en-US" sz="2200" dirty="0">
-                <a:solidFill>
-                  <a:srgbClr val="182033"/>
-                </a:solidFill>
-                <a:latin typeface="Georgia" pitchFamily="34" charset="0"/>
-                <a:ea typeface="Georgia" pitchFamily="34" charset="-122"/>
-                <a:cs typeface="Georgia" pitchFamily="34" charset="-120"/>
-              </a:rPr>
-              <a:t>自性</a:t>
-            </a:r>
-            <a:endParaRPr lang="en-US" sz="2200" dirty="0"/>
-          </a:p>
-          <a:p>
-            <a:pPr indent="0" marL="0">
-              <a:buNone/>
-            </a:pPr>
-            <a:r>
-              <a:rPr lang="en-US" sz="2200" dirty="0">
-                <a:solidFill>
-                  <a:srgbClr val="182033"/>
-                </a:solidFill>
-                <a:latin typeface="Georgia" pitchFamily="34" charset="0"/>
-                <a:ea typeface="Georgia" pitchFamily="34" charset="-122"/>
-                <a:cs typeface="Georgia" pitchFamily="34" charset="-120"/>
-              </a:rPr>
-              <a:t>“own nature”</a:t>
-            </a:r>
-            <a:endParaRPr lang="en-US" sz="2200" dirty="0"/>
-          </a:p>
-        </p:txBody>
-      </p:sp>
-      <p:sp>
-        <p:nvSpPr>
-          <p:cNvPr id="11" name="Text 9"/>
-          <p:cNvSpPr/>
-          <p:nvPr/>
-        </p:nvSpPr>
-        <p:spPr>
-          <a:xfrm>
-            <a:off x="5925312" y="2907792"/>
-            <a:ext cx="3611880" cy="1143000"/>
-          </a:xfrm>
-          <a:prstGeom prst="rect">
-            <a:avLst/>
-          </a:prstGeom>
-          <a:noFill/>
-          <a:ln/>
-        </p:spPr>
-        <p:txBody>
-          <a:bodyPr wrap="square" rtlCol="0" anchor="ctr"/>
-          <a:lstStyle/>
-          <a:p>
-            <a:pPr indent="0" marL="0">
-              <a:buNone/>
-            </a:pPr>
-            <a:r>
-              <a:rPr lang="en-US" sz="1500" dirty="0">
-                <a:solidFill>
-                  <a:srgbClr val="263248"/>
-                </a:solidFill>
-                <a:latin typeface="Aptos" pitchFamily="34" charset="0"/>
-                <a:ea typeface="Aptos" pitchFamily="34" charset="-122"/>
-                <a:cs typeface="Aptos" pitchFamily="34" charset="-120"/>
-              </a:rPr>
-              <a:t>In many Buddhist contexts, the critical phrase is 自性空 - “empty of own-nature.”</a:t>
-            </a:r>
-            <a:endParaRPr lang="en-US" sz="1500" dirty="0"/>
-          </a:p>
-          <a:p>
-            <a:pPr indent="0" marL="0">
-              <a:buNone/>
-            </a:pPr>
-            <a:r>
-              <a:rPr lang="en-US" sz="1500" dirty="0">
-                <a:solidFill>
-                  <a:srgbClr val="263248"/>
-                </a:solidFill>
-                <a:latin typeface="Aptos" pitchFamily="34" charset="0"/>
-                <a:ea typeface="Aptos" pitchFamily="34" charset="-122"/>
-                <a:cs typeface="Aptos" pitchFamily="34" charset="-120"/>
-              </a:rPr>
-              <a:t>The same semantic field can lead to the opposite doctrinal conclusion.</a:t>
-            </a:r>
-            <a:endParaRPr lang="en-US" sz="1500" dirty="0"/>
-          </a:p>
-        </p:txBody>
-      </p:sp>
-      <p:sp>
-        <p:nvSpPr>
-          <p:cNvPr id="12" name="Shape 10"/>
-          <p:cNvSpPr/>
-          <p:nvPr/>
-        </p:nvSpPr>
-        <p:spPr>
-          <a:xfrm>
-            <a:off x="4855464" y="3328416"/>
-            <a:ext cx="164592" cy="109728"/>
-          </a:xfrm>
-          <a:prstGeom prst="chevron">
-            <a:avLst/>
-          </a:prstGeom>
-          <a:solidFill>
-            <a:srgbClr val="A7473F"/>
-          </a:solidFill>
-          <a:ln w="12700">
-            <a:solidFill>
-              <a:srgbClr val="A7473F"/>
-            </a:solidFill>
-            <a:prstDash val="solid"/>
-          </a:ln>
-        </p:spPr>
-      </p:sp>
-      <p:sp>
-        <p:nvSpPr>
-          <p:cNvPr id="13" name="Text 11"/>
-          <p:cNvSpPr/>
-          <p:nvPr/>
-        </p:nvSpPr>
-        <p:spPr>
-          <a:xfrm>
-            <a:off x="1828800" y="6108192"/>
-            <a:ext cx="7863840" cy="182880"/>
-          </a:xfrm>
-          <a:prstGeom prst="rect">
-            <a:avLst/>
-          </a:prstGeom>
-          <a:noFill/>
-          <a:ln/>
-        </p:spPr>
-        <p:txBody>
-          <a:bodyPr wrap="square" rtlCol="0" anchor="ctr"/>
-          <a:lstStyle/>
-          <a:p>
-            <a:pPr algn="ctr" indent="0" marL="0">
-              <a:buNone/>
-            </a:pPr>
-            <a:r>
-              <a:rPr lang="en-US" sz="1450" dirty="0">
-                <a:solidFill>
-                  <a:srgbClr val="A7473F"/>
-                </a:solidFill>
-                <a:latin typeface="Georgia" pitchFamily="34" charset="0"/>
-                <a:ea typeface="Georgia" pitchFamily="34" charset="-122"/>
-                <a:cs typeface="Georgia" pitchFamily="34" charset="-120"/>
-              </a:rPr>
-              <a:t>The gap itself becomes evidence.</a:t>
             </a:r>
             <a:endParaRPr lang="en-US" sz="1450" dirty="0"/>
           </a:p>
@@ -4555,7 +4201,7 @@
           <a:bodyPr wrap="square" lIns="0" tIns="0" rIns="0" bIns="0" rtlCol="0" anchor="ctr"/>
           <a:lstStyle/>
           <a:p>
-            <a:pPr indent="0" marL="0">
+            <a:pPr marL="0" indent="0">
               <a:buNone/>
             </a:pPr>
             <a:r>
@@ -4599,13 +4245,20 @@
             <a:prstDash val="solid"/>
           </a:ln>
           <a:effectLst>
-            <a:outerShdw sx="100000" sy="100000" kx="0" ky="0" algn="bl" rotWithShape="0" blurRad="12700" dist="6350" dir="2700000">
+            <a:outerShdw blurRad="12700" dist="6350" dir="2700000" algn="bl" rotWithShape="0">
               <a:srgbClr val="000000">
                 <a:alpha val="12000"/>
               </a:srgbClr>
             </a:outerShdw>
           </a:effectLst>
         </p:spPr>
+        <p:txBody>
+          <a:bodyPr/>
+          <a:lstStyle/>
+          <a:p>
+            <a:endParaRPr lang="en-US"/>
+          </a:p>
+        </p:txBody>
       </p:sp>
       <p:sp>
         <p:nvSpPr>
@@ -4631,6 +4284,13 @@
             <a:prstDash val="solid"/>
           </a:ln>
         </p:spPr>
+        <p:txBody>
+          <a:bodyPr/>
+          <a:lstStyle/>
+          <a:p>
+            <a:endParaRPr lang="en-US"/>
+          </a:p>
+        </p:txBody>
       </p:sp>
       <p:sp>
         <p:nvSpPr>
@@ -4653,7 +4313,7 @@
           <a:bodyPr wrap="square" rtlCol="0" anchor="ctr"/>
           <a:lstStyle/>
           <a:p>
-            <a:pPr indent="0" marL="0">
+            <a:pPr marL="0" indent="0">
               <a:buNone/>
             </a:pPr>
             <a:r>
@@ -4692,7 +4352,7 @@
           <a:bodyPr wrap="square" rtlCol="0" anchor="ctr"/>
           <a:lstStyle/>
           <a:p>
-            <a:pPr indent="0" marL="0">
+            <a:pPr marL="0" indent="0">
               <a:buNone/>
             </a:pPr>
             <a:r>
@@ -4734,6 +4394,13 @@
             <a:prstDash val="solid"/>
           </a:ln>
         </p:spPr>
+        <p:txBody>
+          <a:bodyPr/>
+          <a:lstStyle/>
+          <a:p>
+            <a:endParaRPr lang="en-US"/>
+          </a:p>
+        </p:txBody>
       </p:sp>
       <p:sp>
         <p:nvSpPr>
@@ -4756,7 +4423,7 @@
           <a:bodyPr wrap="square" rtlCol="0" anchor="ctr"/>
           <a:lstStyle/>
           <a:p>
-            <a:pPr indent="0" marL="0">
+            <a:pPr marL="0" indent="0">
               <a:buNone/>
             </a:pPr>
             <a:r>
@@ -4795,7 +4462,7 @@
           <a:bodyPr wrap="square" rtlCol="0" anchor="ctr"/>
           <a:lstStyle/>
           <a:p>
-            <a:pPr indent="0" marL="0">
+            <a:pPr marL="0" indent="0">
               <a:buNone/>
             </a:pPr>
             <a:r>
@@ -4837,6 +4504,13 @@
             <a:prstDash val="solid"/>
           </a:ln>
         </p:spPr>
+        <p:txBody>
+          <a:bodyPr/>
+          <a:lstStyle/>
+          <a:p>
+            <a:endParaRPr lang="en-US"/>
+          </a:p>
+        </p:txBody>
       </p:sp>
       <p:sp>
         <p:nvSpPr>
@@ -4859,7 +4533,7 @@
           <a:bodyPr wrap="square" rtlCol="0" anchor="ctr"/>
           <a:lstStyle/>
           <a:p>
-            <a:pPr indent="0" marL="0">
+            <a:pPr marL="0" indent="0">
               <a:buNone/>
             </a:pPr>
             <a:r>
@@ -4898,7 +4572,7 @@
           <a:bodyPr wrap="square" rtlCol="0" anchor="ctr"/>
           <a:lstStyle/>
           <a:p>
-            <a:pPr indent="0" marL="0">
+            <a:pPr marL="0" indent="0">
               <a:buNone/>
             </a:pPr>
             <a:r>
@@ -4942,13 +4616,20 @@
             <a:prstDash val="solid"/>
           </a:ln>
           <a:effectLst>
-            <a:outerShdw sx="100000" sy="100000" kx="0" ky="0" algn="bl" rotWithShape="0" blurRad="12700" dist="6350" dir="2700000">
+            <a:outerShdw blurRad="12700" dist="6350" dir="2700000" algn="bl" rotWithShape="0">
               <a:srgbClr val="000000">
                 <a:alpha val="12000"/>
               </a:srgbClr>
             </a:outerShdw>
           </a:effectLst>
         </p:spPr>
+        <p:txBody>
+          <a:bodyPr/>
+          <a:lstStyle/>
+          <a:p>
+            <a:endParaRPr lang="en-US"/>
+          </a:p>
+        </p:txBody>
       </p:sp>
       <p:sp>
         <p:nvSpPr>
@@ -4971,7 +4652,7 @@
           <a:bodyPr wrap="square" rtlCol="0" anchor="ctr"/>
           <a:lstStyle/>
           <a:p>
-            <a:pPr algn="ctr" indent="0" marL="0">
+            <a:pPr marL="0" indent="0" algn="ctr">
               <a:buNone/>
             </a:pPr>
             <a:r>
@@ -4990,6 +4671,176 @@
         </p:txBody>
       </p:sp>
     </p:spTree>
+  </p:cSld>
+  <p:clrMapOvr>
+    <a:masterClrMapping/>
+  </p:clrMapOvr>
+</p:sld>
+</file>
+
+<file path=ppt/slides/slide14.xml><?xml version="1.0" encoding="utf-8"?>
+<p:sld xmlns:a="http://schemas.openxmlformats.org/drawingml/2006/main" xmlns:r="http://schemas.openxmlformats.org/officeDocument/2006/relationships" xmlns:p="http://schemas.openxmlformats.org/presentationml/2006/main">
+  <p:cSld>
+    <p:bg>
+      <p:bgPr>
+        <a:solidFill>
+          <a:srgbClr val="1F2A6B"/>
+        </a:solidFill>
+        <a:effectLst/>
+      </p:bgPr>
+    </p:bg>
+    <p:spTree>
+      <p:nvGrpSpPr>
+        <p:cNvPr id="1" name="">
+          <a:extLst>
+            <a:ext uri="{FF2B5EF4-FFF2-40B4-BE49-F238E27FC236}">
+              <a16:creationId xmlns:a16="http://schemas.microsoft.com/office/drawing/2014/main" id="{56CBB07A-4302-51CB-D020-EFD0F9D8E366}"/>
+            </a:ext>
+          </a:extLst>
+        </p:cNvPr>
+        <p:cNvGrpSpPr/>
+        <p:nvPr/>
+      </p:nvGrpSpPr>
+      <p:grpSpPr>
+        <a:xfrm>
+          <a:off x="0" y="0"/>
+          <a:ext cx="0" cy="0"/>
+          <a:chOff x="0" y="0"/>
+          <a:chExt cx="0" cy="0"/>
+        </a:xfrm>
+      </p:grpSpPr>
+      <p:sp>
+        <p:nvSpPr>
+          <p:cNvPr id="2" name="Text 0">
+            <a:extLst>
+              <a:ext uri="{FF2B5EF4-FFF2-40B4-BE49-F238E27FC236}">
+                <a16:creationId xmlns:a16="http://schemas.microsoft.com/office/drawing/2014/main" id="{B6669A15-7887-D810-6B0E-57871BB8A144}"/>
+              </a:ext>
+            </a:extLst>
+          </p:cNvPr>
+          <p:cNvSpPr/>
+          <p:nvPr/>
+        </p:nvSpPr>
+        <p:spPr>
+          <a:xfrm>
+            <a:off x="1097280" y="2606040"/>
+            <a:ext cx="7863840" cy="640080"/>
+          </a:xfrm>
+          <a:prstGeom prst="rect">
+            <a:avLst/>
+          </a:prstGeom>
+          <a:noFill/>
+          <a:ln/>
+        </p:spPr>
+        <p:txBody>
+          <a:bodyPr wrap="square" lIns="0" tIns="0" rIns="0" bIns="0" rtlCol="0" anchor="ctr"/>
+          <a:lstStyle/>
+          <a:p>
+            <a:pPr marL="0" indent="0">
+              <a:buNone/>
+            </a:pPr>
+            <a:r>
+              <a:rPr lang="en-US" sz="2500" dirty="0">
+                <a:solidFill>
+                  <a:srgbClr val="FFFFFF"/>
+                </a:solidFill>
+                <a:latin typeface="Georgia" pitchFamily="34" charset="0"/>
+                <a:ea typeface="Georgia" pitchFamily="34" charset="-122"/>
+                <a:cs typeface="Georgia" pitchFamily="34" charset="-120"/>
+              </a:rPr>
+              <a:t>Thank You!</a:t>
+            </a:r>
+            <a:endParaRPr lang="en-US" sz="2500" dirty="0"/>
+          </a:p>
+        </p:txBody>
+      </p:sp>
+      <p:sp>
+        <p:nvSpPr>
+          <p:cNvPr id="3" name="Text 1">
+            <a:extLst>
+              <a:ext uri="{FF2B5EF4-FFF2-40B4-BE49-F238E27FC236}">
+                <a16:creationId xmlns:a16="http://schemas.microsoft.com/office/drawing/2014/main" id="{87782CD0-0B4C-0B8E-6543-D76BF7C580FE}"/>
+              </a:ext>
+            </a:extLst>
+          </p:cNvPr>
+          <p:cNvSpPr/>
+          <p:nvPr/>
+        </p:nvSpPr>
+        <p:spPr>
+          <a:xfrm>
+            <a:off x="1115568" y="3383280"/>
+            <a:ext cx="7315200" cy="256032"/>
+          </a:xfrm>
+          <a:prstGeom prst="rect">
+            <a:avLst/>
+          </a:prstGeom>
+          <a:noFill/>
+          <a:ln/>
+        </p:spPr>
+        <p:txBody>
+          <a:bodyPr wrap="square" lIns="0" tIns="0" rIns="0" bIns="0" rtlCol="0" anchor="ctr"/>
+          <a:lstStyle/>
+          <a:p>
+            <a:pPr marL="0" indent="0">
+              <a:buNone/>
+            </a:pPr>
+            <a:r>
+              <a:rPr lang="en-US" sz="1150" dirty="0">
+                <a:solidFill>
+                  <a:srgbClr val="D6DDF5"/>
+                </a:solidFill>
+                <a:latin typeface="Aptos" pitchFamily="34" charset="0"/>
+                <a:ea typeface="Aptos" pitchFamily="34" charset="-122"/>
+                <a:cs typeface="Aptos" pitchFamily="34" charset="-120"/>
+              </a:rPr>
+              <a:t>Any questions?</a:t>
+            </a:r>
+            <a:endParaRPr lang="en-US" sz="1150" dirty="0"/>
+          </a:p>
+        </p:txBody>
+      </p:sp>
+      <p:sp>
+        <p:nvSpPr>
+          <p:cNvPr id="4" name="Shape 2">
+            <a:extLst>
+              <a:ext uri="{FF2B5EF4-FFF2-40B4-BE49-F238E27FC236}">
+                <a16:creationId xmlns:a16="http://schemas.microsoft.com/office/drawing/2014/main" id="{B8BF213F-219F-774E-A537-C2613AC28CCA}"/>
+              </a:ext>
+            </a:extLst>
+          </p:cNvPr>
+          <p:cNvSpPr/>
+          <p:nvPr/>
+        </p:nvSpPr>
+        <p:spPr>
+          <a:xfrm>
+            <a:off x="1097280" y="2331720"/>
+            <a:ext cx="1051560" cy="0"/>
+          </a:xfrm>
+          <a:prstGeom prst="line">
+            <a:avLst/>
+          </a:prstGeom>
+          <a:noFill/>
+          <a:ln w="12700">
+            <a:solidFill>
+              <a:srgbClr val="C46A2C"/>
+            </a:solidFill>
+            <a:prstDash val="solid"/>
+          </a:ln>
+        </p:spPr>
+        <p:txBody>
+          <a:bodyPr/>
+          <a:lstStyle/>
+          <a:p>
+            <a:endParaRPr lang="en-US"/>
+          </a:p>
+        </p:txBody>
+      </p:sp>
+    </p:spTree>
+    <p:extLst>
+      <p:ext uri="{BB962C8B-B14F-4D97-AF65-F5344CB8AC3E}">
+        <p14:creationId xmlns:p14="http://schemas.microsoft.com/office/powerpoint/2010/main" val="3942369607"/>
+      </p:ext>
+    </p:extLst>
   </p:cSld>
   <p:clrMapOvr>
     <a:masterClrMapping/>
@@ -5039,7 +4890,7 @@
           <a:bodyPr wrap="square" lIns="0" tIns="0" rIns="0" bIns="0" rtlCol="0" anchor="ctr"/>
           <a:lstStyle/>
           <a:p>
-            <a:pPr indent="0" marL="0">
+            <a:pPr marL="0" indent="0">
               <a:buNone/>
             </a:pPr>
             <a:r>
@@ -5083,13 +4934,20 @@
             <a:prstDash val="solid"/>
           </a:ln>
           <a:effectLst>
-            <a:outerShdw sx="100000" sy="100000" kx="0" ky="0" algn="bl" rotWithShape="0" blurRad="12700" dist="6350" dir="2700000">
+            <a:outerShdw blurRad="12700" dist="6350" dir="2700000" algn="bl" rotWithShape="0">
               <a:srgbClr val="000000">
                 <a:alpha val="12000"/>
               </a:srgbClr>
             </a:outerShdw>
           </a:effectLst>
         </p:spPr>
+        <p:txBody>
+          <a:bodyPr/>
+          <a:lstStyle/>
+          <a:p>
+            <a:endParaRPr lang="en-US"/>
+          </a:p>
+        </p:txBody>
       </p:sp>
       <p:sp>
         <p:nvSpPr>
@@ -5112,7 +4970,7 @@
           <a:bodyPr wrap="square" lIns="635" tIns="635" rIns="635" bIns="635" rtlCol="0" anchor="ctr"/>
           <a:lstStyle/>
           <a:p>
-            <a:pPr algn="ctr" indent="0" marL="0">
+            <a:pPr marL="0" indent="0" algn="ctr">
               <a:buNone/>
             </a:pPr>
             <a:r>
@@ -5156,13 +5014,20 @@
             <a:prstDash val="solid"/>
           </a:ln>
           <a:effectLst>
-            <a:outerShdw sx="100000" sy="100000" kx="0" ky="0" algn="bl" rotWithShape="0" blurRad="12700" dist="6350" dir="2700000">
+            <a:outerShdw blurRad="12700" dist="6350" dir="2700000" algn="bl" rotWithShape="0">
               <a:srgbClr val="000000">
                 <a:alpha val="12000"/>
               </a:srgbClr>
             </a:outerShdw>
           </a:effectLst>
         </p:spPr>
+        <p:txBody>
+          <a:bodyPr/>
+          <a:lstStyle/>
+          <a:p>
+            <a:endParaRPr lang="en-US"/>
+          </a:p>
+        </p:txBody>
       </p:sp>
       <p:sp>
         <p:nvSpPr>
@@ -5190,13 +5055,20 @@
             <a:prstDash val="solid"/>
           </a:ln>
           <a:effectLst>
-            <a:outerShdw sx="100000" sy="100000" kx="0" ky="0" algn="bl" rotWithShape="0" blurRad="12700" dist="6350" dir="2700000">
+            <a:outerShdw blurRad="12700" dist="6350" dir="2700000" algn="bl" rotWithShape="0">
               <a:srgbClr val="000000">
                 <a:alpha val="12000"/>
               </a:srgbClr>
             </a:outerShdw>
           </a:effectLst>
         </p:spPr>
+        <p:txBody>
+          <a:bodyPr/>
+          <a:lstStyle/>
+          <a:p>
+            <a:endParaRPr lang="en-US"/>
+          </a:p>
+        </p:txBody>
       </p:sp>
       <p:sp>
         <p:nvSpPr>
@@ -5224,13 +5096,20 @@
             <a:prstDash val="solid"/>
           </a:ln>
           <a:effectLst>
-            <a:outerShdw sx="100000" sy="100000" kx="0" ky="0" algn="bl" rotWithShape="0" blurRad="12700" dist="6350" dir="2700000">
+            <a:outerShdw blurRad="12700" dist="6350" dir="2700000" algn="bl" rotWithShape="0">
               <a:srgbClr val="000000">
                 <a:alpha val="12000"/>
               </a:srgbClr>
             </a:outerShdw>
           </a:effectLst>
         </p:spPr>
+        <p:txBody>
+          <a:bodyPr/>
+          <a:lstStyle/>
+          <a:p>
+            <a:endParaRPr lang="en-US"/>
+          </a:p>
+        </p:txBody>
       </p:sp>
       <p:sp>
         <p:nvSpPr>
@@ -5253,7 +5132,7 @@
           <a:bodyPr wrap="square" rtlCol="0" anchor="ctr"/>
           <a:lstStyle/>
           <a:p>
-            <a:pPr indent="0" marL="0">
+            <a:pPr marL="0" indent="0">
               <a:buNone/>
             </a:pPr>
             <a:r>
@@ -5292,7 +5171,7 @@
           <a:bodyPr wrap="square" rtlCol="0" anchor="ctr"/>
           <a:lstStyle/>
           <a:p>
-            <a:pPr indent="0" marL="0">
+            <a:pPr marL="0" indent="0">
               <a:buNone/>
             </a:pPr>
             <a:r>
@@ -5331,7 +5210,7 @@
           <a:bodyPr wrap="square" rtlCol="0" anchor="ctr"/>
           <a:lstStyle/>
           <a:p>
-            <a:pPr indent="0" marL="0">
+            <a:pPr marL="0" indent="0">
               <a:buNone/>
             </a:pPr>
             <a:r>
@@ -5370,7 +5249,7 @@
           <a:bodyPr wrap="square" rtlCol="0" anchor="ctr"/>
           <a:lstStyle/>
           <a:p>
-            <a:pPr indent="0" marL="0">
+            <a:pPr marL="0" indent="0">
               <a:buNone/>
             </a:pPr>
             <a:r>
@@ -5409,7 +5288,7 @@
           <a:bodyPr wrap="square" rtlCol="0" anchor="ctr"/>
           <a:lstStyle/>
           <a:p>
-            <a:pPr indent="0" marL="0">
+            <a:pPr marL="0" indent="0">
               <a:buNone/>
             </a:pPr>
             <a:r>
@@ -5448,7 +5327,7 @@
           <a:bodyPr wrap="square" rtlCol="0" anchor="ctr"/>
           <a:lstStyle/>
           <a:p>
-            <a:pPr indent="0" marL="0">
+            <a:pPr marL="0" indent="0">
               <a:buNone/>
             </a:pPr>
             <a:r>
@@ -5516,7 +5395,7 @@
           <a:bodyPr wrap="square" lIns="0" tIns="0" rIns="0" bIns="0" rtlCol="0" anchor="ctr"/>
           <a:lstStyle/>
           <a:p>
-            <a:pPr indent="0" marL="0">
+            <a:pPr marL="0" indent="0">
               <a:buNone/>
             </a:pPr>
             <a:r>
@@ -5555,7 +5434,7 @@
           <a:bodyPr wrap="square" lIns="0" tIns="0" rIns="0" bIns="0" rtlCol="0" anchor="ctr"/>
           <a:lstStyle/>
           <a:p>
-            <a:pPr indent="0" marL="0">
+            <a:pPr marL="0" indent="0">
               <a:buNone/>
             </a:pPr>
             <a:r>
@@ -5599,13 +5478,20 @@
             <a:prstDash val="solid"/>
           </a:ln>
           <a:effectLst>
-            <a:outerShdw sx="100000" sy="100000" kx="0" ky="0" algn="bl" rotWithShape="0" blurRad="12700" dist="6350" dir="2700000">
+            <a:outerShdw blurRad="12700" dist="6350" dir="2700000" algn="bl" rotWithShape="0">
               <a:srgbClr val="000000">
                 <a:alpha val="12000"/>
               </a:srgbClr>
             </a:outerShdw>
           </a:effectLst>
         </p:spPr>
+        <p:txBody>
+          <a:bodyPr/>
+          <a:lstStyle/>
+          <a:p>
+            <a:endParaRPr lang="en-US"/>
+          </a:p>
+        </p:txBody>
       </p:sp>
       <p:sp>
         <p:nvSpPr>
@@ -5628,7 +5514,7 @@
           <a:bodyPr wrap="square" rtlCol="0" anchor="ctr"/>
           <a:lstStyle/>
           <a:p>
-            <a:pPr algn="ctr" indent="0" marL="0">
+            <a:pPr marL="0" indent="0" algn="ctr">
               <a:buNone/>
             </a:pPr>
             <a:r>
@@ -5667,7 +5553,7 @@
           <a:bodyPr wrap="square" rtlCol="0" anchor="ctr"/>
           <a:lstStyle/>
           <a:p>
-            <a:pPr algn="ctr" indent="0" marL="0">
+            <a:pPr marL="0" indent="0" algn="ctr">
               <a:buNone/>
             </a:pPr>
             <a:r>
@@ -5706,7 +5592,7 @@
           <a:bodyPr wrap="square" rtlCol="0" anchor="ctr"/>
           <a:lstStyle/>
           <a:p>
-            <a:pPr algn="ctr" indent="0" marL="0">
+            <a:pPr marL="0" indent="0" algn="ctr">
               <a:buNone/>
             </a:pPr>
             <a:r>
@@ -5745,7 +5631,7 @@
           <a:bodyPr wrap="square" rtlCol="0" anchor="ctr"/>
           <a:lstStyle/>
           <a:p>
-            <a:pPr algn="ctr" indent="0" marL="0">
+            <a:pPr marL="0" indent="0" algn="ctr">
               <a:buNone/>
             </a:pPr>
             <a:r>
@@ -5789,13 +5675,20 @@
             <a:prstDash val="solid"/>
           </a:ln>
           <a:effectLst>
-            <a:outerShdw sx="100000" sy="100000" kx="0" ky="0" algn="bl" rotWithShape="0" blurRad="12700" dist="6350" dir="2700000">
+            <a:outerShdw blurRad="12700" dist="6350" dir="2700000" algn="bl" rotWithShape="0">
               <a:srgbClr val="000000">
                 <a:alpha val="12000"/>
               </a:srgbClr>
             </a:outerShdw>
           </a:effectLst>
         </p:spPr>
+        <p:txBody>
+          <a:bodyPr/>
+          <a:lstStyle/>
+          <a:p>
+            <a:endParaRPr lang="en-US"/>
+          </a:p>
+        </p:txBody>
       </p:sp>
       <p:sp>
         <p:nvSpPr>
@@ -5818,7 +5711,7 @@
           <a:bodyPr wrap="square" rtlCol="0" anchor="ctr"/>
           <a:lstStyle/>
           <a:p>
-            <a:pPr algn="ctr" indent="0" marL="0">
+            <a:pPr marL="0" indent="0" algn="ctr">
               <a:buNone/>
             </a:pPr>
             <a:r>
@@ -5857,7 +5750,7 @@
           <a:bodyPr wrap="square" rtlCol="0" anchor="ctr"/>
           <a:lstStyle/>
           <a:p>
-            <a:pPr algn="ctr" indent="0" marL="0">
+            <a:pPr marL="0" indent="0" algn="ctr">
               <a:buNone/>
             </a:pPr>
             <a:r>
@@ -5901,13 +5794,20 @@
             <a:prstDash val="solid"/>
           </a:ln>
           <a:effectLst>
-            <a:outerShdw sx="100000" sy="100000" kx="0" ky="0" algn="bl" rotWithShape="0" blurRad="12700" dist="6350" dir="2700000">
+            <a:outerShdw blurRad="12700" dist="6350" dir="2700000" algn="bl" rotWithShape="0">
               <a:srgbClr val="000000">
                 <a:alpha val="12000"/>
               </a:srgbClr>
             </a:outerShdw>
           </a:effectLst>
         </p:spPr>
+        <p:txBody>
+          <a:bodyPr/>
+          <a:lstStyle/>
+          <a:p>
+            <a:endParaRPr lang="en-US"/>
+          </a:p>
+        </p:txBody>
       </p:sp>
       <p:sp>
         <p:nvSpPr>
@@ -5930,7 +5830,7 @@
           <a:bodyPr wrap="square" rtlCol="0" anchor="ctr"/>
           <a:lstStyle/>
           <a:p>
-            <a:pPr algn="ctr" indent="0" marL="0">
+            <a:pPr marL="0" indent="0" algn="ctr">
               <a:buNone/>
             </a:pPr>
             <a:r>
@@ -5969,7 +5869,7 @@
           <a:bodyPr wrap="square" rtlCol="0" anchor="ctr"/>
           <a:lstStyle/>
           <a:p>
-            <a:pPr algn="ctr" indent="0" marL="0">
+            <a:pPr marL="0" indent="0" algn="ctr">
               <a:buNone/>
             </a:pPr>
             <a:r>
@@ -6013,13 +5913,20 @@
             <a:prstDash val="solid"/>
           </a:ln>
           <a:effectLst>
-            <a:outerShdw sx="100000" sy="100000" kx="0" ky="0" algn="bl" rotWithShape="0" blurRad="12700" dist="6350" dir="2700000">
+            <a:outerShdw blurRad="12700" dist="6350" dir="2700000" algn="bl" rotWithShape="0">
               <a:srgbClr val="000000">
                 <a:alpha val="12000"/>
               </a:srgbClr>
             </a:outerShdw>
           </a:effectLst>
         </p:spPr>
+        <p:txBody>
+          <a:bodyPr/>
+          <a:lstStyle/>
+          <a:p>
+            <a:endParaRPr lang="en-US"/>
+          </a:p>
+        </p:txBody>
       </p:sp>
       <p:sp>
         <p:nvSpPr>
@@ -6042,7 +5949,7 @@
           <a:bodyPr wrap="square" rtlCol="0" anchor="ctr"/>
           <a:lstStyle/>
           <a:p>
-            <a:pPr algn="ctr" indent="0" marL="0">
+            <a:pPr marL="0" indent="0" algn="ctr">
               <a:buNone/>
             </a:pPr>
             <a:r>
@@ -6081,7 +5988,7 @@
           <a:bodyPr wrap="square" rtlCol="0" anchor="ctr"/>
           <a:lstStyle/>
           <a:p>
-            <a:pPr algn="ctr" indent="0" marL="0">
+            <a:pPr marL="0" indent="0" algn="ctr">
               <a:buNone/>
             </a:pPr>
             <a:r>
@@ -6120,7 +6027,7 @@
           <a:bodyPr wrap="square" rtlCol="0" anchor="ctr"/>
           <a:lstStyle/>
           <a:p>
-            <a:pPr algn="ctr" indent="0" marL="0">
+            <a:pPr marL="0" indent="0" algn="ctr">
               <a:buNone/>
             </a:pPr>
             <a:r>
@@ -6188,7 +6095,7 @@
           <a:bodyPr wrap="square" lIns="0" tIns="0" rIns="0" bIns="0" rtlCol="0" anchor="ctr"/>
           <a:lstStyle/>
           <a:p>
-            <a:pPr indent="0" marL="0">
+            <a:pPr marL="0" indent="0">
               <a:buNone/>
             </a:pPr>
             <a:r>
@@ -6232,13 +6139,20 @@
             <a:prstDash val="solid"/>
           </a:ln>
           <a:effectLst>
-            <a:outerShdw sx="100000" sy="100000" kx="0" ky="0" algn="bl" rotWithShape="0" blurRad="12700" dist="6350" dir="2700000">
+            <a:outerShdw blurRad="12700" dist="6350" dir="2700000" algn="bl" rotWithShape="0">
               <a:srgbClr val="000000">
                 <a:alpha val="12000"/>
               </a:srgbClr>
             </a:outerShdw>
           </a:effectLst>
         </p:spPr>
+        <p:txBody>
+          <a:bodyPr/>
+          <a:lstStyle/>
+          <a:p>
+            <a:endParaRPr lang="en-US"/>
+          </a:p>
+        </p:txBody>
       </p:sp>
       <p:sp>
         <p:nvSpPr>
@@ -6264,6 +6178,13 @@
             <a:prstDash val="solid"/>
           </a:ln>
         </p:spPr>
+        <p:txBody>
+          <a:bodyPr/>
+          <a:lstStyle/>
+          <a:p>
+            <a:endParaRPr lang="en-US"/>
+          </a:p>
+        </p:txBody>
       </p:sp>
       <p:sp>
         <p:nvSpPr>
@@ -6286,7 +6207,7 @@
           <a:bodyPr wrap="square" rtlCol="0" anchor="ctr"/>
           <a:lstStyle/>
           <a:p>
-            <a:pPr algn="ctr" indent="0" marL="0">
+            <a:pPr marL="0" indent="0" algn="ctr">
               <a:buNone/>
             </a:pPr>
             <a:r>
@@ -6325,7 +6246,7 @@
           <a:bodyPr wrap="square" rtlCol="0" anchor="ctr"/>
           <a:lstStyle/>
           <a:p>
-            <a:pPr indent="0" marL="0">
+            <a:pPr marL="0" indent="0">
               <a:buNone/>
             </a:pPr>
             <a:r>
@@ -6364,7 +6285,7 @@
           <a:bodyPr wrap="square" rtlCol="0" anchor="ctr"/>
           <a:lstStyle/>
           <a:p>
-            <a:pPr indent="0" marL="0">
+            <a:pPr marL="0" indent="0">
               <a:buNone/>
             </a:pPr>
             <a:r>
@@ -6408,13 +6329,20 @@
             <a:prstDash val="solid"/>
           </a:ln>
           <a:effectLst>
-            <a:outerShdw sx="100000" sy="100000" kx="0" ky="0" algn="bl" rotWithShape="0" blurRad="12700" dist="6350" dir="2700000">
+            <a:outerShdw blurRad="12700" dist="6350" dir="2700000" algn="bl" rotWithShape="0">
               <a:srgbClr val="000000">
                 <a:alpha val="12000"/>
               </a:srgbClr>
             </a:outerShdw>
           </a:effectLst>
         </p:spPr>
+        <p:txBody>
+          <a:bodyPr/>
+          <a:lstStyle/>
+          <a:p>
+            <a:endParaRPr lang="en-US"/>
+          </a:p>
+        </p:txBody>
       </p:sp>
       <p:sp>
         <p:nvSpPr>
@@ -6440,6 +6368,13 @@
             <a:prstDash val="solid"/>
           </a:ln>
         </p:spPr>
+        <p:txBody>
+          <a:bodyPr/>
+          <a:lstStyle/>
+          <a:p>
+            <a:endParaRPr lang="en-US"/>
+          </a:p>
+        </p:txBody>
       </p:sp>
       <p:sp>
         <p:nvSpPr>
@@ -6462,7 +6397,7 @@
           <a:bodyPr wrap="square" rtlCol="0" anchor="ctr"/>
           <a:lstStyle/>
           <a:p>
-            <a:pPr algn="ctr" indent="0" marL="0">
+            <a:pPr marL="0" indent="0" algn="ctr">
               <a:buNone/>
             </a:pPr>
             <a:r>
@@ -6501,7 +6436,7 @@
           <a:bodyPr wrap="square" rtlCol="0" anchor="ctr"/>
           <a:lstStyle/>
           <a:p>
-            <a:pPr indent="0" marL="0">
+            <a:pPr marL="0" indent="0">
               <a:buNone/>
             </a:pPr>
             <a:r>
@@ -6540,7 +6475,7 @@
           <a:bodyPr wrap="square" rtlCol="0" anchor="ctr"/>
           <a:lstStyle/>
           <a:p>
-            <a:pPr indent="0" marL="0">
+            <a:pPr marL="0" indent="0">
               <a:buNone/>
             </a:pPr>
             <a:r>
@@ -6584,13 +6519,20 @@
             <a:prstDash val="solid"/>
           </a:ln>
           <a:effectLst>
-            <a:outerShdw sx="100000" sy="100000" kx="0" ky="0" algn="bl" rotWithShape="0" blurRad="12700" dist="6350" dir="2700000">
+            <a:outerShdw blurRad="12700" dist="6350" dir="2700000" algn="bl" rotWithShape="0">
               <a:srgbClr val="000000">
                 <a:alpha val="12000"/>
               </a:srgbClr>
             </a:outerShdw>
           </a:effectLst>
         </p:spPr>
+        <p:txBody>
+          <a:bodyPr/>
+          <a:lstStyle/>
+          <a:p>
+            <a:endParaRPr lang="en-US"/>
+          </a:p>
+        </p:txBody>
       </p:sp>
       <p:sp>
         <p:nvSpPr>
@@ -6616,6 +6558,13 @@
             <a:prstDash val="solid"/>
           </a:ln>
         </p:spPr>
+        <p:txBody>
+          <a:bodyPr/>
+          <a:lstStyle/>
+          <a:p>
+            <a:endParaRPr lang="en-US"/>
+          </a:p>
+        </p:txBody>
       </p:sp>
       <p:sp>
         <p:nvSpPr>
@@ -6638,7 +6587,7 @@
           <a:bodyPr wrap="square" rtlCol="0" anchor="ctr"/>
           <a:lstStyle/>
           <a:p>
-            <a:pPr algn="ctr" indent="0" marL="0">
+            <a:pPr marL="0" indent="0" algn="ctr">
               <a:buNone/>
             </a:pPr>
             <a:r>
@@ -6677,7 +6626,7 @@
           <a:bodyPr wrap="square" rtlCol="0" anchor="ctr"/>
           <a:lstStyle/>
           <a:p>
-            <a:pPr indent="0" marL="0">
+            <a:pPr marL="0" indent="0">
               <a:buNone/>
             </a:pPr>
             <a:r>
@@ -6716,7 +6665,7 @@
           <a:bodyPr wrap="square" rtlCol="0" anchor="ctr"/>
           <a:lstStyle/>
           <a:p>
-            <a:pPr indent="0" marL="0">
+            <a:pPr marL="0" indent="0">
               <a:buNone/>
             </a:pPr>
             <a:r>
@@ -6760,13 +6709,20 @@
             <a:prstDash val="solid"/>
           </a:ln>
           <a:effectLst>
-            <a:outerShdw sx="100000" sy="100000" kx="0" ky="0" algn="bl" rotWithShape="0" blurRad="12700" dist="6350" dir="2700000">
+            <a:outerShdw blurRad="12700" dist="6350" dir="2700000" algn="bl" rotWithShape="0">
               <a:srgbClr val="000000">
                 <a:alpha val="12000"/>
               </a:srgbClr>
             </a:outerShdw>
           </a:effectLst>
         </p:spPr>
+        <p:txBody>
+          <a:bodyPr/>
+          <a:lstStyle/>
+          <a:p>
+            <a:endParaRPr lang="en-US"/>
+          </a:p>
+        </p:txBody>
       </p:sp>
       <p:sp>
         <p:nvSpPr>
@@ -6792,6 +6748,13 @@
             <a:prstDash val="solid"/>
           </a:ln>
         </p:spPr>
+        <p:txBody>
+          <a:bodyPr/>
+          <a:lstStyle/>
+          <a:p>
+            <a:endParaRPr lang="en-US"/>
+          </a:p>
+        </p:txBody>
       </p:sp>
       <p:sp>
         <p:nvSpPr>
@@ -6814,7 +6777,7 @@
           <a:bodyPr wrap="square" rtlCol="0" anchor="ctr"/>
           <a:lstStyle/>
           <a:p>
-            <a:pPr algn="ctr" indent="0" marL="0">
+            <a:pPr marL="0" indent="0" algn="ctr">
               <a:buNone/>
             </a:pPr>
             <a:r>
@@ -6853,7 +6816,7 @@
           <a:bodyPr wrap="square" rtlCol="0" anchor="ctr"/>
           <a:lstStyle/>
           <a:p>
-            <a:pPr indent="0" marL="0">
+            <a:pPr marL="0" indent="0">
               <a:buNone/>
             </a:pPr>
             <a:r>
@@ -6892,7 +6855,7 @@
           <a:bodyPr wrap="square" rtlCol="0" anchor="ctr"/>
           <a:lstStyle/>
           <a:p>
-            <a:pPr indent="0" marL="0">
+            <a:pPr marL="0" indent="0">
               <a:buNone/>
             </a:pPr>
             <a:r>
@@ -6931,7 +6894,7 @@
           <a:bodyPr wrap="square" rtlCol="0" anchor="ctr"/>
           <a:lstStyle/>
           <a:p>
-            <a:pPr algn="ctr" indent="0" marL="0">
+            <a:pPr marL="0" indent="0" algn="ctr">
               <a:buNone/>
             </a:pPr>
             <a:r>
@@ -6958,6 +6921,197 @@
 </file>
 
 <file path=ppt/slides/slide5.xml><?xml version="1.0" encoding="utf-8"?>
+<p:sld xmlns:a="http://schemas.openxmlformats.org/drawingml/2006/main" xmlns:r="http://schemas.openxmlformats.org/officeDocument/2006/relationships" xmlns:p="http://schemas.openxmlformats.org/presentationml/2006/main">
+  <p:cSld>
+    <p:bg>
+      <p:bgPr>
+        <a:solidFill>
+          <a:srgbClr val="1F2A6B"/>
+        </a:solidFill>
+        <a:effectLst/>
+      </p:bgPr>
+    </p:bg>
+    <p:spTree>
+      <p:nvGrpSpPr>
+        <p:cNvPr id="1" name="">
+          <a:extLst>
+            <a:ext uri="{FF2B5EF4-FFF2-40B4-BE49-F238E27FC236}">
+              <a16:creationId xmlns:a16="http://schemas.microsoft.com/office/drawing/2014/main" id="{771276DE-501A-5B02-FDD9-A93EBCF20E86}"/>
+            </a:ext>
+          </a:extLst>
+        </p:cNvPr>
+        <p:cNvGrpSpPr/>
+        <p:nvPr/>
+      </p:nvGrpSpPr>
+      <p:grpSpPr>
+        <a:xfrm>
+          <a:off x="0" y="0"/>
+          <a:ext cx="0" cy="0"/>
+          <a:chOff x="0" y="0"/>
+          <a:chExt cx="0" cy="0"/>
+        </a:xfrm>
+      </p:grpSpPr>
+      <p:sp>
+        <p:nvSpPr>
+          <p:cNvPr id="2" name="Text 0">
+            <a:extLst>
+              <a:ext uri="{FF2B5EF4-FFF2-40B4-BE49-F238E27FC236}">
+                <a16:creationId xmlns:a16="http://schemas.microsoft.com/office/drawing/2014/main" id="{76B8C1BF-73D7-EC9F-EBA5-7325371BC038}"/>
+              </a:ext>
+            </a:extLst>
+          </p:cNvPr>
+          <p:cNvSpPr/>
+          <p:nvPr/>
+        </p:nvSpPr>
+        <p:spPr>
+          <a:xfrm>
+            <a:off x="1097280" y="2606040"/>
+            <a:ext cx="7863840" cy="640080"/>
+          </a:xfrm>
+          <a:prstGeom prst="rect">
+            <a:avLst/>
+          </a:prstGeom>
+          <a:noFill/>
+          <a:ln/>
+        </p:spPr>
+        <p:txBody>
+          <a:bodyPr wrap="square" lIns="0" tIns="0" rIns="0" bIns="0" rtlCol="0" anchor="ctr"/>
+          <a:lstStyle/>
+          <a:p>
+            <a:pPr marL="0" indent="0">
+              <a:buNone/>
+            </a:pPr>
+            <a:r>
+              <a:rPr lang="en-US" sz="2500" dirty="0">
+                <a:solidFill>
+                  <a:srgbClr val="FFFFFF"/>
+                </a:solidFill>
+                <a:latin typeface="Georgia" pitchFamily="34" charset="0"/>
+                <a:ea typeface="Georgia" pitchFamily="34" charset="-122"/>
+                <a:cs typeface="Georgia" pitchFamily="34" charset="-120"/>
+              </a:rPr>
+              <a:t>https://jbajaj6.github.io/</a:t>
+            </a:r>
+            <a:r>
+              <a:rPr lang="en-US" sz="2500" dirty="0" err="1">
+                <a:solidFill>
+                  <a:srgbClr val="FFFFFF"/>
+                </a:solidFill>
+                <a:latin typeface="Georgia" pitchFamily="34" charset="0"/>
+                <a:ea typeface="Georgia" pitchFamily="34" charset="-122"/>
+                <a:cs typeface="Georgia" pitchFamily="34" charset="-120"/>
+              </a:rPr>
+              <a:t>sanskrit_etymology</a:t>
+            </a:r>
+            <a:r>
+              <a:rPr lang="en-US" sz="2500" dirty="0">
+                <a:solidFill>
+                  <a:srgbClr val="FFFFFF"/>
+                </a:solidFill>
+                <a:latin typeface="Georgia" pitchFamily="34" charset="0"/>
+                <a:ea typeface="Georgia" pitchFamily="34" charset="-122"/>
+                <a:cs typeface="Georgia" pitchFamily="34" charset="-120"/>
+              </a:rPr>
+              <a:t>/</a:t>
+            </a:r>
+          </a:p>
+        </p:txBody>
+      </p:sp>
+      <p:sp>
+        <p:nvSpPr>
+          <p:cNvPr id="3" name="Text 1">
+            <a:extLst>
+              <a:ext uri="{FF2B5EF4-FFF2-40B4-BE49-F238E27FC236}">
+                <a16:creationId xmlns:a16="http://schemas.microsoft.com/office/drawing/2014/main" id="{AF53B571-87D1-659B-D5AF-21575C494C9C}"/>
+              </a:ext>
+            </a:extLst>
+          </p:cNvPr>
+          <p:cNvSpPr/>
+          <p:nvPr/>
+        </p:nvSpPr>
+        <p:spPr>
+          <a:xfrm>
+            <a:off x="1115568" y="3383280"/>
+            <a:ext cx="7315200" cy="256032"/>
+          </a:xfrm>
+          <a:prstGeom prst="rect">
+            <a:avLst/>
+          </a:prstGeom>
+          <a:noFill/>
+          <a:ln/>
+        </p:spPr>
+        <p:txBody>
+          <a:bodyPr wrap="square" lIns="0" tIns="0" rIns="0" bIns="0" rtlCol="0" anchor="ctr"/>
+          <a:lstStyle/>
+          <a:p>
+            <a:pPr marL="0" indent="0">
+              <a:buNone/>
+            </a:pPr>
+            <a:r>
+              <a:rPr lang="en-US" sz="1150" dirty="0">
+                <a:solidFill>
+                  <a:srgbClr val="D6DDF5"/>
+                </a:solidFill>
+                <a:latin typeface="Aptos" pitchFamily="34" charset="0"/>
+                <a:ea typeface="Aptos" pitchFamily="34" charset="-122"/>
+                <a:cs typeface="Aptos" pitchFamily="34" charset="-120"/>
+              </a:rPr>
+              <a:t>A little demo I have prepared</a:t>
+            </a:r>
+            <a:endParaRPr lang="en-US" sz="1150" dirty="0"/>
+          </a:p>
+        </p:txBody>
+      </p:sp>
+      <p:sp>
+        <p:nvSpPr>
+          <p:cNvPr id="4" name="Shape 2">
+            <a:extLst>
+              <a:ext uri="{FF2B5EF4-FFF2-40B4-BE49-F238E27FC236}">
+                <a16:creationId xmlns:a16="http://schemas.microsoft.com/office/drawing/2014/main" id="{F4AD4C27-7455-65F8-9237-E79F7C191BF6}"/>
+              </a:ext>
+            </a:extLst>
+          </p:cNvPr>
+          <p:cNvSpPr/>
+          <p:nvPr/>
+        </p:nvSpPr>
+        <p:spPr>
+          <a:xfrm>
+            <a:off x="1097280" y="2331720"/>
+            <a:ext cx="1051560" cy="0"/>
+          </a:xfrm>
+          <a:prstGeom prst="line">
+            <a:avLst/>
+          </a:prstGeom>
+          <a:noFill/>
+          <a:ln w="12700">
+            <a:solidFill>
+              <a:srgbClr val="C46A2C"/>
+            </a:solidFill>
+            <a:prstDash val="solid"/>
+          </a:ln>
+        </p:spPr>
+        <p:txBody>
+          <a:bodyPr/>
+          <a:lstStyle/>
+          <a:p>
+            <a:endParaRPr lang="en-US"/>
+          </a:p>
+        </p:txBody>
+      </p:sp>
+    </p:spTree>
+    <p:extLst>
+      <p:ext uri="{BB962C8B-B14F-4D97-AF65-F5344CB8AC3E}">
+        <p14:creationId xmlns:p14="http://schemas.microsoft.com/office/powerpoint/2010/main" val="1747401659"/>
+      </p:ext>
+    </p:extLst>
+  </p:cSld>
+  <p:clrMapOvr>
+    <a:masterClrMapping/>
+  </p:clrMapOvr>
+</p:sld>
+</file>
+
+<file path=ppt/slides/slide6.xml><?xml version="1.0" encoding="utf-8"?>
 <p:sld xmlns:a="http://schemas.openxmlformats.org/drawingml/2006/main" xmlns:r="http://schemas.openxmlformats.org/officeDocument/2006/relationships" xmlns:p="http://schemas.openxmlformats.org/presentationml/2006/main">
   <p:cSld name="Slide 5">
     <p:spTree>
@@ -6999,7 +7153,7 @@
           <a:bodyPr wrap="square" lIns="0" tIns="0" rIns="0" bIns="0" rtlCol="0" anchor="ctr"/>
           <a:lstStyle/>
           <a:p>
-            <a:pPr indent="0" marL="0">
+            <a:pPr marL="0" indent="0">
               <a:buNone/>
             </a:pPr>
             <a:r>
@@ -7038,7 +7192,7 @@
           <a:bodyPr wrap="square" lIns="0" tIns="0" rIns="0" bIns="0" rtlCol="0" anchor="ctr"/>
           <a:lstStyle/>
           <a:p>
-            <a:pPr indent="0" marL="0">
+            <a:pPr marL="0" indent="0">
               <a:buNone/>
             </a:pPr>
             <a:r>
@@ -7082,13 +7236,20 @@
             <a:prstDash val="solid"/>
           </a:ln>
           <a:effectLst>
-            <a:outerShdw sx="100000" sy="100000" kx="0" ky="0" algn="bl" rotWithShape="0" blurRad="12700" dist="6350" dir="2700000">
+            <a:outerShdw blurRad="12700" dist="6350" dir="2700000" algn="bl" rotWithShape="0">
               <a:srgbClr val="000000">
                 <a:alpha val="12000"/>
               </a:srgbClr>
             </a:outerShdw>
           </a:effectLst>
         </p:spPr>
+        <p:txBody>
+          <a:bodyPr/>
+          <a:lstStyle/>
+          <a:p>
+            <a:endParaRPr lang="en-US"/>
+          </a:p>
+        </p:txBody>
       </p:sp>
       <p:sp>
         <p:nvSpPr>
@@ -7116,13 +7277,20 @@
             <a:prstDash val="solid"/>
           </a:ln>
           <a:effectLst>
-            <a:outerShdw sx="100000" sy="100000" kx="0" ky="0" algn="bl" rotWithShape="0" blurRad="12700" dist="6350" dir="2700000">
+            <a:outerShdw blurRad="12700" dist="6350" dir="2700000" algn="bl" rotWithShape="0">
               <a:srgbClr val="000000">
                 <a:alpha val="12000"/>
               </a:srgbClr>
             </a:outerShdw>
           </a:effectLst>
         </p:spPr>
+        <p:txBody>
+          <a:bodyPr/>
+          <a:lstStyle/>
+          <a:p>
+            <a:endParaRPr lang="en-US"/>
+          </a:p>
+        </p:txBody>
       </p:sp>
       <p:sp>
         <p:nvSpPr>
@@ -7145,7 +7313,7 @@
           <a:bodyPr wrap="square" rtlCol="0" anchor="ctr"/>
           <a:lstStyle/>
           <a:p>
-            <a:pPr indent="0" marL="0">
+            <a:pPr marL="0" indent="0">
               <a:buNone/>
             </a:pPr>
             <a:r>
@@ -7184,7 +7352,7 @@
           <a:bodyPr wrap="square" lIns="254" tIns="254" rIns="254" bIns="254" rtlCol="0" anchor="ctr"/>
           <a:lstStyle/>
           <a:p>
-            <a:pPr indent="0" marL="0">
+            <a:pPr marL="0" indent="0">
               <a:buNone/>
             </a:pPr>
             <a:r>
@@ -7198,9 +7366,6 @@
               </a:rPr>
               <a:t>sam- </a:t>
             </a:r>
-            <a:pPr indent="0" marL="0">
-              <a:buNone/>
-            </a:pPr>
             <a:r>
               <a:rPr lang="en-US" sz="1600" dirty="0">
                 <a:solidFill>
@@ -7212,13 +7377,10 @@
               </a:rPr>
               <a:t>"together"</a:t>
             </a:r>
-            <a:pPr indent="0" marL="0">
-              <a:buNone/>
-            </a:pPr>
             <a:endParaRPr lang="en-US" sz="1600" dirty="0"/>
           </a:p>
           <a:p>
-            <a:pPr indent="0" marL="0">
+            <a:pPr marL="0" indent="0">
               <a:buNone/>
             </a:pPr>
             <a:r>
@@ -7235,7 +7397,7 @@
             <a:endParaRPr lang="en-US" sz="1600" dirty="0"/>
           </a:p>
           <a:p>
-            <a:pPr indent="0" marL="0">
+            <a:pPr marL="0" indent="0">
               <a:buNone/>
             </a:pPr>
             <a:r>
@@ -7249,13 +7411,10 @@
               </a:rPr>
               <a:t>"toward"</a:t>
             </a:r>
-            <a:pPr indent="0" marL="0">
-              <a:buNone/>
-            </a:pPr>
             <a:endParaRPr lang="en-US" sz="1600" dirty="0"/>
           </a:p>
           <a:p>
-            <a:pPr indent="0" marL="0">
+            <a:pPr marL="0" indent="0">
               <a:buNone/>
             </a:pPr>
             <a:r>
@@ -7272,7 +7431,7 @@
             <a:endParaRPr lang="en-US" sz="1600" dirty="0"/>
           </a:p>
           <a:p>
-            <a:pPr indent="0" marL="0">
+            <a:pPr marL="0" indent="0">
               <a:buNone/>
             </a:pPr>
             <a:r>
@@ -7286,13 +7445,10 @@
               </a:rPr>
               <a:t>"to place, put"</a:t>
             </a:r>
-            <a:pPr indent="0" marL="0">
-              <a:buNone/>
-            </a:pPr>
             <a:endParaRPr lang="en-US" sz="1600" dirty="0"/>
           </a:p>
           <a:p>
-            <a:pPr indent="0" marL="0">
+            <a:pPr marL="0" indent="0">
               <a:buNone/>
             </a:pPr>
             <a:r>
@@ -7309,7 +7465,7 @@
             <a:endParaRPr lang="en-US" sz="1600" dirty="0"/>
           </a:p>
           <a:p>
-            <a:pPr indent="0" marL="0">
+            <a:pPr marL="0" indent="0">
               <a:buNone/>
             </a:pPr>
             <a:r>
@@ -7348,7 +7504,7 @@
           <a:bodyPr wrap="square" rtlCol="0" anchor="ctr"/>
           <a:lstStyle/>
           <a:p>
-            <a:pPr indent="0" marL="0">
+            <a:pPr marL="0" indent="0">
               <a:buNone/>
             </a:pPr>
             <a:r>
@@ -7387,7 +7543,7 @@
           <a:bodyPr wrap="square" rtlCol="0" anchor="ctr"/>
           <a:lstStyle/>
           <a:p>
-            <a:pPr indent="0" marL="0">
+            <a:pPr marL="0" indent="0">
               <a:buNone/>
             </a:pPr>
             <a:r>
@@ -7426,7 +7582,7 @@
           <a:bodyPr wrap="square" rtlCol="0" anchor="ctr"/>
           <a:lstStyle/>
           <a:p>
-            <a:pPr indent="0" marL="0">
+            <a:pPr marL="0" indent="0">
               <a:buNone/>
             </a:pPr>
             <a:r>
@@ -7546,13 +7702,20 @@
             <a:prstDash val="solid"/>
           </a:ln>
           <a:effectLst>
-            <a:outerShdw sx="100000" sy="100000" kx="0" ky="0" algn="bl" rotWithShape="0" blurRad="12700" dist="6350" dir="2700000">
+            <a:outerShdw blurRad="12700" dist="6350" dir="2700000" algn="bl" rotWithShape="0">
               <a:srgbClr val="000000">
                 <a:alpha val="12000"/>
               </a:srgbClr>
             </a:outerShdw>
           </a:effectLst>
         </p:spPr>
+        <p:txBody>
+          <a:bodyPr/>
+          <a:lstStyle/>
+          <a:p>
+            <a:endParaRPr lang="en-US"/>
+          </a:p>
+        </p:txBody>
       </p:sp>
       <p:sp>
         <p:nvSpPr>
@@ -7575,7 +7738,7 @@
           <a:bodyPr wrap="square" rtlCol="0" anchor="ctr"/>
           <a:lstStyle/>
           <a:p>
-            <a:pPr algn="ctr" indent="0" marL="0">
+            <a:pPr marL="0" indent="0" algn="ctr">
               <a:buNone/>
             </a:pPr>
             <a:r>
@@ -7601,7 +7764,7 @@
 </p:sld>
 </file>
 
-<file path=ppt/slides/slide6.xml><?xml version="1.0" encoding="utf-8"?>
+<file path=ppt/slides/slide7.xml><?xml version="1.0" encoding="utf-8"?>
 <p:sld xmlns:a="http://schemas.openxmlformats.org/drawingml/2006/main" xmlns:r="http://schemas.openxmlformats.org/officeDocument/2006/relationships" xmlns:p="http://schemas.openxmlformats.org/presentationml/2006/main">
   <p:cSld name="Slide 6">
     <p:spTree>
@@ -7643,7 +7806,7 @@
           <a:bodyPr wrap="square" lIns="0" tIns="0" rIns="0" bIns="0" rtlCol="0" anchor="ctr"/>
           <a:lstStyle/>
           <a:p>
-            <a:pPr indent="0" marL="0">
+            <a:pPr marL="0" indent="0">
               <a:buNone/>
             </a:pPr>
             <a:r>
@@ -7682,7 +7845,7 @@
           <a:bodyPr wrap="square" lIns="0" tIns="0" rIns="0" bIns="0" rtlCol="0" anchor="ctr"/>
           <a:lstStyle/>
           <a:p>
-            <a:pPr indent="0" marL="0">
+            <a:pPr marL="0" indent="0">
               <a:buNone/>
             </a:pPr>
             <a:r>
@@ -7726,13 +7889,20 @@
             <a:prstDash val="solid"/>
           </a:ln>
           <a:effectLst>
-            <a:outerShdw sx="100000" sy="100000" kx="0" ky="0" algn="bl" rotWithShape="0" blurRad="12700" dist="6350" dir="2700000">
+            <a:outerShdw blurRad="12700" dist="6350" dir="2700000" algn="bl" rotWithShape="0">
               <a:srgbClr val="000000">
                 <a:alpha val="12000"/>
               </a:srgbClr>
             </a:outerShdw>
           </a:effectLst>
         </p:spPr>
+        <p:txBody>
+          <a:bodyPr/>
+          <a:lstStyle/>
+          <a:p>
+            <a:endParaRPr lang="en-US"/>
+          </a:p>
+        </p:txBody>
       </p:sp>
       <p:sp>
         <p:nvSpPr>
@@ -7755,7 +7925,7 @@
           <a:bodyPr wrap="square" rtlCol="0" anchor="ctr"/>
           <a:lstStyle/>
           <a:p>
-            <a:pPr indent="0" marL="0">
+            <a:pPr marL="0" indent="0">
               <a:buNone/>
             </a:pPr>
             <a:r>
@@ -7794,7 +7964,7 @@
           <a:bodyPr wrap="square" rtlCol="0" anchor="ctr"/>
           <a:lstStyle/>
           <a:p>
-            <a:pPr indent="0" marL="0">
+            <a:pPr marL="0" indent="0">
               <a:buNone/>
             </a:pPr>
             <a:r>
@@ -7833,7 +8003,7 @@
           <a:bodyPr wrap="square" rtlCol="0" anchor="ctr"/>
           <a:lstStyle/>
           <a:p>
-            <a:pPr indent="0" marL="0">
+            <a:pPr marL="0" indent="0">
               <a:buNone/>
             </a:pPr>
             <a:r>
@@ -7850,7 +8020,7 @@
             <a:endParaRPr lang="en-US" sz="1500" dirty="0"/>
           </a:p>
           <a:p>
-            <a:pPr indent="0" marL="0">
+            <a:pPr marL="0" indent="0">
               <a:buNone/>
             </a:pPr>
             <a:r>
@@ -7889,7 +8059,7 @@
           <a:bodyPr wrap="square" rtlCol="0" anchor="ctr"/>
           <a:lstStyle/>
           <a:p>
-            <a:pPr indent="0" marL="0">
+            <a:pPr marL="0" indent="0">
               <a:buNone/>
             </a:pPr>
             <a:r>
@@ -7933,13 +8103,20 @@
             <a:prstDash val="solid"/>
           </a:ln>
           <a:effectLst>
-            <a:outerShdw sx="100000" sy="100000" kx="0" ky="0" algn="bl" rotWithShape="0" blurRad="12700" dist="6350" dir="2700000">
+            <a:outerShdw blurRad="12700" dist="6350" dir="2700000" algn="bl" rotWithShape="0">
               <a:srgbClr val="000000">
                 <a:alpha val="12000"/>
               </a:srgbClr>
             </a:outerShdw>
           </a:effectLst>
         </p:spPr>
+        <p:txBody>
+          <a:bodyPr/>
+          <a:lstStyle/>
+          <a:p>
+            <a:endParaRPr lang="en-US"/>
+          </a:p>
+        </p:txBody>
       </p:sp>
       <p:sp>
         <p:nvSpPr>
@@ -7962,7 +8139,7 @@
           <a:bodyPr wrap="square" rtlCol="0" anchor="ctr"/>
           <a:lstStyle/>
           <a:p>
-            <a:pPr algn="ctr" indent="0" marL="0">
+            <a:pPr marL="0" indent="0" algn="ctr">
               <a:buNone/>
             </a:pPr>
             <a:r>
@@ -8001,7 +8178,7 @@
           <a:bodyPr wrap="square" rtlCol="0" anchor="ctr"/>
           <a:lstStyle/>
           <a:p>
-            <a:pPr algn="ctr" indent="0" marL="0">
+            <a:pPr marL="0" indent="0" algn="ctr">
               <a:buNone/>
             </a:pPr>
             <a:r>
@@ -8045,13 +8222,20 @@
             <a:prstDash val="solid"/>
           </a:ln>
           <a:effectLst>
-            <a:outerShdw sx="100000" sy="100000" kx="0" ky="0" algn="bl" rotWithShape="0" blurRad="12700" dist="6350" dir="2700000">
+            <a:outerShdw blurRad="12700" dist="6350" dir="2700000" algn="bl" rotWithShape="0">
               <a:srgbClr val="000000">
                 <a:alpha val="12000"/>
               </a:srgbClr>
             </a:outerShdw>
           </a:effectLst>
         </p:spPr>
+        <p:txBody>
+          <a:bodyPr/>
+          <a:lstStyle/>
+          <a:p>
+            <a:endParaRPr lang="en-US"/>
+          </a:p>
+        </p:txBody>
       </p:sp>
       <p:sp>
         <p:nvSpPr>
@@ -8074,7 +8258,7 @@
           <a:bodyPr wrap="square" rtlCol="0" anchor="ctr"/>
           <a:lstStyle/>
           <a:p>
-            <a:pPr algn="ctr" indent="0" marL="0">
+            <a:pPr marL="0" indent="0" algn="ctr">
               <a:buNone/>
             </a:pPr>
             <a:r>
@@ -8113,7 +8297,7 @@
           <a:bodyPr wrap="square" rtlCol="0" anchor="ctr"/>
           <a:lstStyle/>
           <a:p>
-            <a:pPr algn="ctr" indent="0" marL="0">
+            <a:pPr marL="0" indent="0" algn="ctr">
               <a:buNone/>
             </a:pPr>
             <a:r>
@@ -8157,13 +8341,20 @@
             <a:prstDash val="solid"/>
           </a:ln>
           <a:effectLst>
-            <a:outerShdw sx="100000" sy="100000" kx="0" ky="0" algn="bl" rotWithShape="0" blurRad="12700" dist="6350" dir="2700000">
+            <a:outerShdw blurRad="12700" dist="6350" dir="2700000" algn="bl" rotWithShape="0">
               <a:srgbClr val="000000">
                 <a:alpha val="12000"/>
               </a:srgbClr>
             </a:outerShdw>
           </a:effectLst>
         </p:spPr>
+        <p:txBody>
+          <a:bodyPr/>
+          <a:lstStyle/>
+          <a:p>
+            <a:endParaRPr lang="en-US"/>
+          </a:p>
+        </p:txBody>
       </p:sp>
       <p:sp>
         <p:nvSpPr>
@@ -8186,7 +8377,7 @@
           <a:bodyPr wrap="square" rtlCol="0" anchor="ctr"/>
           <a:lstStyle/>
           <a:p>
-            <a:pPr algn="ctr" indent="0" marL="0">
+            <a:pPr marL="0" indent="0" algn="ctr">
               <a:buNone/>
             </a:pPr>
             <a:r>
@@ -8225,7 +8416,7 @@
           <a:bodyPr wrap="square" rtlCol="0" anchor="ctr"/>
           <a:lstStyle/>
           <a:p>
-            <a:pPr algn="ctr" indent="0" marL="0">
+            <a:pPr marL="0" indent="0" algn="ctr">
               <a:buNone/>
             </a:pPr>
             <a:r>
@@ -8264,7 +8455,7 @@
           <a:bodyPr wrap="square" rtlCol="0" anchor="ctr"/>
           <a:lstStyle/>
           <a:p>
-            <a:pPr algn="ctr" indent="0" marL="0">
+            <a:pPr marL="0" indent="0" algn="ctr">
               <a:buNone/>
             </a:pPr>
             <a:r>
@@ -8290,7 +8481,7 @@
 </p:sld>
 </file>
 
-<file path=ppt/slides/slide7.xml><?xml version="1.0" encoding="utf-8"?>
+<file path=ppt/slides/slide8.xml><?xml version="1.0" encoding="utf-8"?>
 <p:sld xmlns:a="http://schemas.openxmlformats.org/drawingml/2006/main" xmlns:r="http://schemas.openxmlformats.org/officeDocument/2006/relationships" xmlns:p="http://schemas.openxmlformats.org/presentationml/2006/main">
   <p:cSld name="Slide 7">
     <p:spTree>
@@ -8332,7 +8523,7 @@
           <a:bodyPr wrap="square" lIns="0" tIns="0" rIns="0" bIns="0" rtlCol="0" anchor="ctr"/>
           <a:lstStyle/>
           <a:p>
-            <a:pPr indent="0" marL="0">
+            <a:pPr marL="0" indent="0">
               <a:buNone/>
             </a:pPr>
             <a:r>
@@ -8371,7 +8562,7 @@
           <a:bodyPr wrap="square" lIns="0" tIns="0" rIns="0" bIns="0" rtlCol="0" anchor="ctr"/>
           <a:lstStyle/>
           <a:p>
-            <a:pPr indent="0" marL="0">
+            <a:pPr marL="0" indent="0">
               <a:buNone/>
             </a:pPr>
             <a:r>
@@ -8415,13 +8606,20 @@
             <a:prstDash val="solid"/>
           </a:ln>
           <a:effectLst>
-            <a:outerShdw sx="100000" sy="100000" kx="0" ky="0" algn="bl" rotWithShape="0" blurRad="12700" dist="6350" dir="2700000">
+            <a:outerShdw blurRad="12700" dist="6350" dir="2700000" algn="bl" rotWithShape="0">
               <a:srgbClr val="000000">
                 <a:alpha val="12000"/>
               </a:srgbClr>
             </a:outerShdw>
           </a:effectLst>
         </p:spPr>
+        <p:txBody>
+          <a:bodyPr/>
+          <a:lstStyle/>
+          <a:p>
+            <a:endParaRPr lang="en-US"/>
+          </a:p>
+        </p:txBody>
       </p:sp>
       <p:sp>
         <p:nvSpPr>
@@ -8449,13 +8647,20 @@
             <a:prstDash val="solid"/>
           </a:ln>
           <a:effectLst>
-            <a:outerShdw sx="100000" sy="100000" kx="0" ky="0" algn="bl" rotWithShape="0" blurRad="12700" dist="6350" dir="2700000">
+            <a:outerShdw blurRad="12700" dist="6350" dir="2700000" algn="bl" rotWithShape="0">
               <a:srgbClr val="000000">
                 <a:alpha val="12000"/>
               </a:srgbClr>
             </a:outerShdw>
           </a:effectLst>
         </p:spPr>
+        <p:txBody>
+          <a:bodyPr/>
+          <a:lstStyle/>
+          <a:p>
+            <a:endParaRPr lang="en-US"/>
+          </a:p>
+        </p:txBody>
       </p:sp>
       <p:sp>
         <p:nvSpPr>
@@ -8478,7 +8683,7 @@
           <a:bodyPr wrap="square" rtlCol="0" anchor="ctr"/>
           <a:lstStyle/>
           <a:p>
-            <a:pPr indent="0" marL="0">
+            <a:pPr marL="0" indent="0">
               <a:buNone/>
             </a:pPr>
             <a:r>
@@ -8522,6 +8727,13 @@
             <a:prstDash val="solid"/>
           </a:ln>
         </p:spPr>
+        <p:txBody>
+          <a:bodyPr/>
+          <a:lstStyle/>
+          <a:p>
+            <a:endParaRPr lang="en-US"/>
+          </a:p>
+        </p:txBody>
       </p:sp>
       <p:sp>
         <p:nvSpPr>
@@ -8544,7 +8756,7 @@
           <a:bodyPr wrap="square" rtlCol="0" anchor="ctr"/>
           <a:lstStyle/>
           <a:p>
-            <a:pPr indent="0" marL="0">
+            <a:pPr marL="0" indent="0">
               <a:buNone/>
             </a:pPr>
             <a:r>
@@ -8583,7 +8795,7 @@
           <a:bodyPr wrap="square" rtlCol="0" anchor="ctr"/>
           <a:lstStyle/>
           <a:p>
-            <a:pPr indent="0" marL="0">
+            <a:pPr marL="0" indent="0">
               <a:buNone/>
             </a:pPr>
             <a:r>
@@ -8627,6 +8839,13 @@
             <a:prstDash val="solid"/>
           </a:ln>
         </p:spPr>
+        <p:txBody>
+          <a:bodyPr/>
+          <a:lstStyle/>
+          <a:p>
+            <a:endParaRPr lang="en-US"/>
+          </a:p>
+        </p:txBody>
       </p:sp>
       <p:sp>
         <p:nvSpPr>
@@ -8649,7 +8868,7 @@
           <a:bodyPr wrap="square" rtlCol="0" anchor="ctr"/>
           <a:lstStyle/>
           <a:p>
-            <a:pPr indent="0" marL="0">
+            <a:pPr marL="0" indent="0">
               <a:buNone/>
             </a:pPr>
             <a:r>
@@ -8688,7 +8907,7 @@
           <a:bodyPr wrap="square" rtlCol="0" anchor="ctr"/>
           <a:lstStyle/>
           <a:p>
-            <a:pPr indent="0" marL="0">
+            <a:pPr marL="0" indent="0">
               <a:buNone/>
             </a:pPr>
             <a:r>
@@ -8732,6 +8951,13 @@
             <a:prstDash val="solid"/>
           </a:ln>
         </p:spPr>
+        <p:txBody>
+          <a:bodyPr/>
+          <a:lstStyle/>
+          <a:p>
+            <a:endParaRPr lang="en-US"/>
+          </a:p>
+        </p:txBody>
       </p:sp>
       <p:sp>
         <p:nvSpPr>
@@ -8754,7 +8980,7 @@
           <a:bodyPr wrap="square" rtlCol="0" anchor="ctr"/>
           <a:lstStyle/>
           <a:p>
-            <a:pPr indent="0" marL="0">
+            <a:pPr marL="0" indent="0">
               <a:buNone/>
             </a:pPr>
             <a:r>
@@ -8793,7 +9019,7 @@
           <a:bodyPr wrap="square" rtlCol="0" anchor="ctr"/>
           <a:lstStyle/>
           <a:p>
-            <a:pPr indent="0" marL="0">
+            <a:pPr marL="0" indent="0">
               <a:buNone/>
             </a:pPr>
             <a:r>
@@ -8832,7 +9058,7 @@
           <a:bodyPr wrap="square" rtlCol="0" anchor="ctr"/>
           <a:lstStyle/>
           <a:p>
-            <a:pPr algn="ctr" indent="0" marL="0">
+            <a:pPr marL="0" indent="0" algn="ctr">
               <a:buNone/>
             </a:pPr>
             <a:r>
@@ -8871,7 +9097,7 @@
           <a:bodyPr wrap="square" rtlCol="0" anchor="ctr"/>
           <a:lstStyle/>
           <a:p>
-            <a:pPr indent="0" marL="0">
+            <a:pPr marL="0" indent="0">
               <a:buNone/>
             </a:pPr>
             <a:r>
@@ -8991,13 +9217,20 @@
             <a:prstDash val="solid"/>
           </a:ln>
           <a:effectLst>
-            <a:outerShdw sx="100000" sy="100000" kx="0" ky="0" algn="bl" rotWithShape="0" blurRad="12700" dist="6350" dir="2700000">
+            <a:outerShdw blurRad="12700" dist="6350" dir="2700000" algn="bl" rotWithShape="0">
               <a:srgbClr val="000000">
                 <a:alpha val="12000"/>
               </a:srgbClr>
             </a:outerShdw>
           </a:effectLst>
         </p:spPr>
+        <p:txBody>
+          <a:bodyPr/>
+          <a:lstStyle/>
+          <a:p>
+            <a:endParaRPr lang="en-US"/>
+          </a:p>
+        </p:txBody>
       </p:sp>
       <p:sp>
         <p:nvSpPr>
@@ -9020,7 +9253,7 @@
           <a:bodyPr wrap="square" rtlCol="0" anchor="ctr"/>
           <a:lstStyle/>
           <a:p>
-            <a:pPr algn="ctr" indent="0" marL="0">
+            <a:pPr marL="0" indent="0" algn="ctr">
               <a:buNone/>
             </a:pPr>
             <a:r>
@@ -9046,7 +9279,7 @@
 </p:sld>
 </file>
 
-<file path=ppt/slides/slide8.xml><?xml version="1.0" encoding="utf-8"?>
+<file path=ppt/slides/slide9.xml><?xml version="1.0" encoding="utf-8"?>
 <p:sld xmlns:a="http://schemas.openxmlformats.org/drawingml/2006/main" xmlns:r="http://schemas.openxmlformats.org/officeDocument/2006/relationships" xmlns:p="http://schemas.openxmlformats.org/presentationml/2006/main">
   <p:cSld name="Slide 8">
     <p:spTree>
@@ -9088,7 +9321,7 @@
           <a:bodyPr wrap="square" lIns="0" tIns="0" rIns="0" bIns="0" rtlCol="0" anchor="ctr"/>
           <a:lstStyle/>
           <a:p>
-            <a:pPr indent="0" marL="0">
+            <a:pPr marL="0" indent="0">
               <a:buNone/>
             </a:pPr>
             <a:r>
@@ -9127,7 +9360,7 @@
           <a:bodyPr wrap="square" lIns="0" tIns="0" rIns="0" bIns="0" rtlCol="0" anchor="ctr"/>
           <a:lstStyle/>
           <a:p>
-            <a:pPr indent="0" marL="0">
+            <a:pPr marL="0" indent="0">
               <a:buNone/>
             </a:pPr>
             <a:r>
@@ -9171,13 +9404,20 @@
             <a:prstDash val="solid"/>
           </a:ln>
           <a:effectLst>
-            <a:outerShdw sx="100000" sy="100000" kx="0" ky="0" algn="bl" rotWithShape="0" blurRad="12700" dist="6350" dir="2700000">
+            <a:outerShdw blurRad="12700" dist="6350" dir="2700000" algn="bl" rotWithShape="0">
               <a:srgbClr val="000000">
                 <a:alpha val="12000"/>
               </a:srgbClr>
             </a:outerShdw>
           </a:effectLst>
         </p:spPr>
+        <p:txBody>
+          <a:bodyPr/>
+          <a:lstStyle/>
+          <a:p>
+            <a:endParaRPr lang="en-US"/>
+          </a:p>
+        </p:txBody>
       </p:sp>
       <p:sp>
         <p:nvSpPr>
@@ -9200,7 +9440,7 @@
           <a:bodyPr wrap="square" rtlCol="0" anchor="ctr"/>
           <a:lstStyle/>
           <a:p>
-            <a:pPr algn="ctr" indent="0" marL="0">
+            <a:pPr marL="0" indent="0" algn="ctr">
               <a:buNone/>
             </a:pPr>
             <a:r>
@@ -9244,13 +9484,20 @@
             <a:prstDash val="solid"/>
           </a:ln>
           <a:effectLst>
-            <a:outerShdw sx="100000" sy="100000" kx="0" ky="0" algn="bl" rotWithShape="0" blurRad="12700" dist="6350" dir="2700000">
+            <a:outerShdw blurRad="12700" dist="6350" dir="2700000" algn="bl" rotWithShape="0">
               <a:srgbClr val="000000">
                 <a:alpha val="12000"/>
               </a:srgbClr>
             </a:outerShdw>
           </a:effectLst>
         </p:spPr>
+        <p:txBody>
+          <a:bodyPr/>
+          <a:lstStyle/>
+          <a:p>
+            <a:endParaRPr lang="en-US"/>
+          </a:p>
+        </p:txBody>
       </p:sp>
       <p:sp>
         <p:nvSpPr>
@@ -9273,7 +9520,7 @@
           <a:bodyPr wrap="square" rtlCol="0" anchor="ctr"/>
           <a:lstStyle/>
           <a:p>
-            <a:pPr algn="ctr" indent="0" marL="0">
+            <a:pPr marL="0" indent="0" algn="ctr">
               <a:buNone/>
             </a:pPr>
             <a:r>
@@ -9312,7 +9559,7 @@
           <a:bodyPr wrap="square" rtlCol="0" anchor="ctr"/>
           <a:lstStyle/>
           <a:p>
-            <a:pPr algn="ctr" indent="0" marL="0">
+            <a:pPr marL="0" indent="0" algn="ctr">
               <a:buNone/>
             </a:pPr>
             <a:r>
@@ -9356,13 +9603,20 @@
             <a:prstDash val="solid"/>
           </a:ln>
           <a:effectLst>
-            <a:outerShdw sx="100000" sy="100000" kx="0" ky="0" algn="bl" rotWithShape="0" blurRad="12700" dist="6350" dir="2700000">
+            <a:outerShdw blurRad="12700" dist="6350" dir="2700000" algn="bl" rotWithShape="0">
               <a:srgbClr val="000000">
                 <a:alpha val="12000"/>
               </a:srgbClr>
             </a:outerShdw>
           </a:effectLst>
         </p:spPr>
+        <p:txBody>
+          <a:bodyPr/>
+          <a:lstStyle/>
+          <a:p>
+            <a:endParaRPr lang="en-US"/>
+          </a:p>
+        </p:txBody>
       </p:sp>
       <p:sp>
         <p:nvSpPr>
@@ -9385,7 +9639,7 @@
           <a:bodyPr wrap="square" rtlCol="0" anchor="ctr"/>
           <a:lstStyle/>
           <a:p>
-            <a:pPr algn="ctr" indent="0" marL="0">
+            <a:pPr marL="0" indent="0" algn="ctr">
               <a:buNone/>
             </a:pPr>
             <a:r>
@@ -9424,7 +9678,7 @@
           <a:bodyPr wrap="square" rtlCol="0" anchor="ctr"/>
           <a:lstStyle/>
           <a:p>
-            <a:pPr algn="ctr" indent="0" marL="0">
+            <a:pPr marL="0" indent="0" algn="ctr">
               <a:buNone/>
             </a:pPr>
             <a:r>
@@ -9468,13 +9722,20 @@
             <a:prstDash val="solid"/>
           </a:ln>
           <a:effectLst>
-            <a:outerShdw sx="100000" sy="100000" kx="0" ky="0" algn="bl" rotWithShape="0" blurRad="12700" dist="6350" dir="2700000">
+            <a:outerShdw blurRad="12700" dist="6350" dir="2700000" algn="bl" rotWithShape="0">
               <a:srgbClr val="000000">
                 <a:alpha val="12000"/>
               </a:srgbClr>
             </a:outerShdw>
           </a:effectLst>
         </p:spPr>
+        <p:txBody>
+          <a:bodyPr/>
+          <a:lstStyle/>
+          <a:p>
+            <a:endParaRPr lang="en-US"/>
+          </a:p>
+        </p:txBody>
       </p:sp>
       <p:sp>
         <p:nvSpPr>
@@ -9497,7 +9758,7 @@
           <a:bodyPr wrap="square" rtlCol="0" anchor="ctr"/>
           <a:lstStyle/>
           <a:p>
-            <a:pPr algn="ctr" indent="0" marL="0">
+            <a:pPr marL="0" indent="0" algn="ctr">
               <a:buNone/>
             </a:pPr>
             <a:r>
@@ -9536,7 +9797,7 @@
           <a:bodyPr wrap="square" rtlCol="0" anchor="ctr"/>
           <a:lstStyle/>
           <a:p>
-            <a:pPr algn="ctr" indent="0" marL="0">
+            <a:pPr marL="0" indent="0" algn="ctr">
               <a:buNone/>
             </a:pPr>
             <a:r>
@@ -9575,7 +9836,7 @@
           <a:bodyPr wrap="square" rtlCol="0" anchor="ctr"/>
           <a:lstStyle/>
           <a:p>
-            <a:pPr algn="ctr" indent="0" marL="0">
+            <a:pPr marL="0" indent="0" algn="ctr">
               <a:buNone/>
             </a:pPr>
             <a:r>
@@ -9592,139 +9853,6 @@
             <a:endParaRPr lang="en-US" sz="1450" dirty="0"/>
           </a:p>
         </p:txBody>
-      </p:sp>
-    </p:spTree>
-  </p:cSld>
-  <p:clrMapOvr>
-    <a:masterClrMapping/>
-  </p:clrMapOvr>
-</p:sld>
-</file>
-
-<file path=ppt/slides/slide9.xml><?xml version="1.0" encoding="utf-8"?>
-<p:sld xmlns:a="http://schemas.openxmlformats.org/drawingml/2006/main" xmlns:r="http://schemas.openxmlformats.org/officeDocument/2006/relationships" xmlns:p="http://schemas.openxmlformats.org/presentationml/2006/main">
-  <p:cSld name="Slide 9">
-    <p:bg>
-      <p:bgPr>
-        <a:solidFill>
-          <a:srgbClr val="1F2A6B"/>
-        </a:solidFill>
-      </p:bgPr>
-    </p:bg>
-    <p:spTree>
-      <p:nvGrpSpPr>
-        <p:cNvPr id="1" name=""/>
-        <p:cNvGrpSpPr/>
-        <p:nvPr/>
-      </p:nvGrpSpPr>
-      <p:grpSpPr>
-        <a:xfrm>
-          <a:off x="0" y="0"/>
-          <a:ext cx="0" cy="0"/>
-          <a:chOff x="0" y="0"/>
-          <a:chExt cx="0" cy="0"/>
-        </a:xfrm>
-      </p:grpSpPr>
-      <p:sp>
-        <p:nvSpPr>
-          <p:cNvPr id="2" name="Text 0"/>
-          <p:cNvSpPr/>
-          <p:nvPr/>
-        </p:nvSpPr>
-        <p:spPr>
-          <a:xfrm>
-            <a:off x="1097280" y="2606040"/>
-            <a:ext cx="7863840" cy="640080"/>
-          </a:xfrm>
-          <a:prstGeom prst="rect">
-            <a:avLst/>
-          </a:prstGeom>
-          <a:noFill/>
-          <a:ln/>
-        </p:spPr>
-        <p:txBody>
-          <a:bodyPr wrap="square" lIns="0" tIns="0" rIns="0" bIns="0" rtlCol="0" anchor="ctr"/>
-          <a:lstStyle/>
-          <a:p>
-            <a:pPr indent="0" marL="0">
-              <a:buNone/>
-            </a:pPr>
-            <a:r>
-              <a:rPr lang="en-US" sz="2500" dirty="0">
-                <a:solidFill>
-                  <a:srgbClr val="FFFFFF"/>
-                </a:solidFill>
-                <a:latin typeface="Georgia" pitchFamily="34" charset="0"/>
-                <a:ea typeface="Georgia" pitchFamily="34" charset="-122"/>
-                <a:cs typeface="Georgia" pitchFamily="34" charset="-120"/>
-              </a:rPr>
-              <a:t>When Concepts Cross Languages</a:t>
-            </a:r>
-            <a:endParaRPr lang="en-US" sz="2500" dirty="0"/>
-          </a:p>
-        </p:txBody>
-      </p:sp>
-      <p:sp>
-        <p:nvSpPr>
-          <p:cNvPr id="3" name="Text 1"/>
-          <p:cNvSpPr/>
-          <p:nvPr/>
-        </p:nvSpPr>
-        <p:spPr>
-          <a:xfrm>
-            <a:off x="1115568" y="3383280"/>
-            <a:ext cx="7315200" cy="256032"/>
-          </a:xfrm>
-          <a:prstGeom prst="rect">
-            <a:avLst/>
-          </a:prstGeom>
-          <a:noFill/>
-          <a:ln/>
-        </p:spPr>
-        <p:txBody>
-          <a:bodyPr wrap="square" lIns="0" tIns="0" rIns="0" bIns="0" rtlCol="0" anchor="ctr"/>
-          <a:lstStyle/>
-          <a:p>
-            <a:pPr indent="0" marL="0">
-              <a:buNone/>
-            </a:pPr>
-            <a:r>
-              <a:rPr lang="en-US" sz="1150" dirty="0">
-                <a:solidFill>
-                  <a:srgbClr val="D6DDF5"/>
-                </a:solidFill>
-                <a:latin typeface="Aptos" pitchFamily="34" charset="0"/>
-                <a:ea typeface="Aptos" pitchFamily="34" charset="-122"/>
-                <a:cs typeface="Aptos" pitchFamily="34" charset="-120"/>
-              </a:rPr>
-              <a:t>The second question is not just “what is the translation?” but “what survives the move?”</a:t>
-            </a:r>
-            <a:endParaRPr lang="en-US" sz="1150" dirty="0"/>
-          </a:p>
-        </p:txBody>
-      </p:sp>
-      <p:sp>
-        <p:nvSpPr>
-          <p:cNvPr id="4" name="Shape 2"/>
-          <p:cNvSpPr/>
-          <p:nvPr/>
-        </p:nvSpPr>
-        <p:spPr>
-          <a:xfrm>
-            <a:off x="1097280" y="2331720"/>
-            <a:ext cx="1051560" cy="0"/>
-          </a:xfrm>
-          <a:prstGeom prst="line">
-            <a:avLst/>
-          </a:prstGeom>
-          <a:noFill/>
-          <a:ln w="12700">
-            <a:solidFill>
-              <a:srgbClr val="C46A2C"/>
-            </a:solidFill>
-            <a:prstDash val="solid"/>
-          </a:ln>
-        </p:spPr>
       </p:sp>
     </p:spTree>
   </p:cSld>
@@ -10027,4 +10155,319 @@
     </a:ext>
   </a:extLst>
 </a:theme>
+</file>
+
+<file path=ppt/theme/theme2.xml><?xml version="1.0" encoding="utf-8"?>
+<a:theme xmlns:a="http://schemas.openxmlformats.org/drawingml/2006/main" name="Office Theme">
+  <a:themeElements>
+    <a:clrScheme name="Office">
+      <a:dk1>
+        <a:sysClr val="windowText" lastClr="000000"/>
+      </a:dk1>
+      <a:lt1>
+        <a:sysClr val="window" lastClr="FFFFFF"/>
+      </a:lt1>
+      <a:dk2>
+        <a:srgbClr val="0E2841"/>
+      </a:dk2>
+      <a:lt2>
+        <a:srgbClr val="E8E8E8"/>
+      </a:lt2>
+      <a:accent1>
+        <a:srgbClr val="156082"/>
+      </a:accent1>
+      <a:accent2>
+        <a:srgbClr val="E97132"/>
+      </a:accent2>
+      <a:accent3>
+        <a:srgbClr val="196B24"/>
+      </a:accent3>
+      <a:accent4>
+        <a:srgbClr val="0F9ED5"/>
+      </a:accent4>
+      <a:accent5>
+        <a:srgbClr val="A02B93"/>
+      </a:accent5>
+      <a:accent6>
+        <a:srgbClr val="4EA72E"/>
+      </a:accent6>
+      <a:hlink>
+        <a:srgbClr val="467886"/>
+      </a:hlink>
+      <a:folHlink>
+        <a:srgbClr val="96607D"/>
+      </a:folHlink>
+    </a:clrScheme>
+    <a:fontScheme name="Office">
+      <a:majorFont>
+        <a:latin typeface="Aptos Display" panose="02110004020202020204"/>
+        <a:ea typeface=""/>
+        <a:cs typeface=""/>
+        <a:font script="Jpan" typeface="游ゴシック Light"/>
+        <a:font script="Hang" typeface="맑은 고딕"/>
+        <a:font script="Hans" typeface="等线 Light"/>
+        <a:font script="Hant" typeface="新細明體"/>
+        <a:font script="Arab" typeface="Times New Roman"/>
+        <a:font script="Hebr" typeface="Times New Roman"/>
+        <a:font script="Thai" typeface="Angsana New"/>
+        <a:font script="Ethi" typeface="Nyala"/>
+        <a:font script="Beng" typeface="Vrinda"/>
+        <a:font script="Gujr" typeface="Shruti"/>
+        <a:font script="Khmr" typeface="MoolBoran"/>
+        <a:font script="Knda" typeface="Tunga"/>
+        <a:font script="Guru" typeface="Raavi"/>
+        <a:font script="Cans" typeface="Euphemia"/>
+        <a:font script="Cher" typeface="Plantagenet Cherokee"/>
+        <a:font script="Yiii" typeface="Microsoft Yi Baiti"/>
+        <a:font script="Tibt" typeface="Microsoft Himalaya"/>
+        <a:font script="Thaa" typeface="MV Boli"/>
+        <a:font script="Deva" typeface="Mangal"/>
+        <a:font script="Telu" typeface="Gautami"/>
+        <a:font script="Taml" typeface="Latha"/>
+        <a:font script="Syrc" typeface="Estrangelo Edessa"/>
+        <a:font script="Orya" typeface="Kalinga"/>
+        <a:font script="Mlym" typeface="Kartika"/>
+        <a:font script="Laoo" typeface="DokChampa"/>
+        <a:font script="Sinh" typeface="Iskoola Pota"/>
+        <a:font script="Mong" typeface="Mongolian Baiti"/>
+        <a:font script="Viet" typeface="Times New Roman"/>
+        <a:font script="Uigh" typeface="Microsoft Uighur"/>
+        <a:font script="Geor" typeface="Sylfaen"/>
+        <a:font script="Armn" typeface="Arial"/>
+        <a:font script="Bugi" typeface="Leelawadee UI"/>
+        <a:font script="Bopo" typeface="Microsoft JhengHei"/>
+        <a:font script="Java" typeface="Javanese Text"/>
+        <a:font script="Lisu" typeface="Segoe UI"/>
+        <a:font script="Mymr" typeface="Myanmar Text"/>
+        <a:font script="Nkoo" typeface="Ebrima"/>
+        <a:font script="Olck" typeface="Nirmala UI"/>
+        <a:font script="Osma" typeface="Ebrima"/>
+        <a:font script="Phag" typeface="Phagspa"/>
+        <a:font script="Syrn" typeface="Estrangelo Edessa"/>
+        <a:font script="Syrj" typeface="Estrangelo Edessa"/>
+        <a:font script="Syre" typeface="Estrangelo Edessa"/>
+        <a:font script="Sora" typeface="Nirmala UI"/>
+        <a:font script="Tale" typeface="Microsoft Tai Le"/>
+        <a:font script="Talu" typeface="Microsoft New Tai Lue"/>
+        <a:font script="Tfng" typeface="Ebrima"/>
+      </a:majorFont>
+      <a:minorFont>
+        <a:latin typeface="Aptos" panose="02110004020202020204"/>
+        <a:ea typeface=""/>
+        <a:cs typeface=""/>
+        <a:font script="Jpan" typeface="游ゴシック"/>
+        <a:font script="Hang" typeface="맑은 고딕"/>
+        <a:font script="Hans" typeface="等线"/>
+        <a:font script="Hant" typeface="新細明體"/>
+        <a:font script="Arab" typeface="Arial"/>
+        <a:font script="Hebr" typeface="Arial"/>
+        <a:font script="Thai" typeface="Cordia New"/>
+        <a:font script="Ethi" typeface="Nyala"/>
+        <a:font script="Beng" typeface="Vrinda"/>
+        <a:font script="Gujr" typeface="Shruti"/>
+        <a:font script="Khmr" typeface="DaunPenh"/>
+        <a:font script="Knda" typeface="Tunga"/>
+        <a:font script="Guru" typeface="Raavi"/>
+        <a:font script="Cans" typeface="Euphemia"/>
+        <a:font script="Cher" typeface="Plantagenet Cherokee"/>
+        <a:font script="Yiii" typeface="Microsoft Yi Baiti"/>
+        <a:font script="Tibt" typeface="Microsoft Himalaya"/>
+        <a:font script="Thaa" typeface="MV Boli"/>
+        <a:font script="Deva" typeface="Mangal"/>
+        <a:font script="Telu" typeface="Gautami"/>
+        <a:font script="Taml" typeface="Latha"/>
+        <a:font script="Syrc" typeface="Estrangelo Edessa"/>
+        <a:font script="Orya" typeface="Kalinga"/>
+        <a:font script="Mlym" typeface="Kartika"/>
+        <a:font script="Laoo" typeface="DokChampa"/>
+        <a:font script="Sinh" typeface="Iskoola Pota"/>
+        <a:font script="Mong" typeface="Mongolian Baiti"/>
+        <a:font script="Viet" typeface="Arial"/>
+        <a:font script="Uigh" typeface="Microsoft Uighur"/>
+        <a:font script="Geor" typeface="Sylfaen"/>
+        <a:font script="Armn" typeface="Arial"/>
+        <a:font script="Bugi" typeface="Leelawadee UI"/>
+        <a:font script="Bopo" typeface="Microsoft JhengHei"/>
+        <a:font script="Java" typeface="Javanese Text"/>
+        <a:font script="Lisu" typeface="Segoe UI"/>
+        <a:font script="Mymr" typeface="Myanmar Text"/>
+        <a:font script="Nkoo" typeface="Ebrima"/>
+        <a:font script="Olck" typeface="Nirmala UI"/>
+        <a:font script="Osma" typeface="Ebrima"/>
+        <a:font script="Phag" typeface="Phagspa"/>
+        <a:font script="Syrn" typeface="Estrangelo Edessa"/>
+        <a:font script="Syrj" typeface="Estrangelo Edessa"/>
+        <a:font script="Syre" typeface="Estrangelo Edessa"/>
+        <a:font script="Sora" typeface="Nirmala UI"/>
+        <a:font script="Tale" typeface="Microsoft Tai Le"/>
+        <a:font script="Talu" typeface="Microsoft New Tai Lue"/>
+        <a:font script="Tfng" typeface="Ebrima"/>
+      </a:minorFont>
+    </a:fontScheme>
+    <a:fmtScheme name="Office">
+      <a:fillStyleLst>
+        <a:solidFill>
+          <a:schemeClr val="phClr"/>
+        </a:solidFill>
+        <a:gradFill rotWithShape="1">
+          <a:gsLst>
+            <a:gs pos="0">
+              <a:schemeClr val="phClr">
+                <a:lumMod val="110000"/>
+                <a:satMod val="105000"/>
+                <a:tint val="67000"/>
+              </a:schemeClr>
+            </a:gs>
+            <a:gs pos="50000">
+              <a:schemeClr val="phClr">
+                <a:lumMod val="105000"/>
+                <a:satMod val="103000"/>
+                <a:tint val="73000"/>
+              </a:schemeClr>
+            </a:gs>
+            <a:gs pos="100000">
+              <a:schemeClr val="phClr">
+                <a:lumMod val="105000"/>
+                <a:satMod val="109000"/>
+                <a:tint val="81000"/>
+              </a:schemeClr>
+            </a:gs>
+          </a:gsLst>
+          <a:lin ang="5400000" scaled="0"/>
+        </a:gradFill>
+        <a:gradFill rotWithShape="1">
+          <a:gsLst>
+            <a:gs pos="0">
+              <a:schemeClr val="phClr">
+                <a:satMod val="103000"/>
+                <a:lumMod val="102000"/>
+                <a:tint val="94000"/>
+              </a:schemeClr>
+            </a:gs>
+            <a:gs pos="50000">
+              <a:schemeClr val="phClr">
+                <a:satMod val="110000"/>
+                <a:lumMod val="100000"/>
+                <a:shade val="100000"/>
+              </a:schemeClr>
+            </a:gs>
+            <a:gs pos="100000">
+              <a:schemeClr val="phClr">
+                <a:lumMod val="99000"/>
+                <a:satMod val="120000"/>
+                <a:shade val="78000"/>
+              </a:schemeClr>
+            </a:gs>
+          </a:gsLst>
+          <a:lin ang="5400000" scaled="0"/>
+        </a:gradFill>
+      </a:fillStyleLst>
+      <a:lnStyleLst>
+        <a:ln w="12700" cap="flat" cmpd="sng" algn="ctr">
+          <a:solidFill>
+            <a:schemeClr val="phClr"/>
+          </a:solidFill>
+          <a:prstDash val="solid"/>
+          <a:miter lim="800000"/>
+        </a:ln>
+        <a:ln w="19050" cap="flat" cmpd="sng" algn="ctr">
+          <a:solidFill>
+            <a:schemeClr val="phClr"/>
+          </a:solidFill>
+          <a:prstDash val="solid"/>
+          <a:miter lim="800000"/>
+        </a:ln>
+        <a:ln w="25400" cap="flat" cmpd="sng" algn="ctr">
+          <a:solidFill>
+            <a:schemeClr val="phClr"/>
+          </a:solidFill>
+          <a:prstDash val="solid"/>
+          <a:miter lim="800000"/>
+        </a:ln>
+      </a:lnStyleLst>
+      <a:effectStyleLst>
+        <a:effectStyle>
+          <a:effectLst/>
+        </a:effectStyle>
+        <a:effectStyle>
+          <a:effectLst/>
+        </a:effectStyle>
+        <a:effectStyle>
+          <a:effectLst>
+            <a:outerShdw blurRad="57150" dist="19050" dir="5400000" algn="ctr" rotWithShape="0">
+              <a:srgbClr val="000000">
+                <a:alpha val="63000"/>
+              </a:srgbClr>
+            </a:outerShdw>
+          </a:effectLst>
+        </a:effectStyle>
+      </a:effectStyleLst>
+      <a:bgFillStyleLst>
+        <a:solidFill>
+          <a:schemeClr val="phClr"/>
+        </a:solidFill>
+        <a:solidFill>
+          <a:schemeClr val="phClr">
+            <a:tint val="95000"/>
+            <a:satMod val="170000"/>
+          </a:schemeClr>
+        </a:solidFill>
+        <a:gradFill rotWithShape="1">
+          <a:gsLst>
+            <a:gs pos="0">
+              <a:schemeClr val="phClr">
+                <a:tint val="93000"/>
+                <a:satMod val="150000"/>
+                <a:shade val="98000"/>
+                <a:lumMod val="102000"/>
+              </a:schemeClr>
+            </a:gs>
+            <a:gs pos="50000">
+              <a:schemeClr val="phClr">
+                <a:tint val="98000"/>
+                <a:satMod val="130000"/>
+                <a:shade val="90000"/>
+                <a:lumMod val="103000"/>
+              </a:schemeClr>
+            </a:gs>
+            <a:gs pos="100000">
+              <a:schemeClr val="phClr">
+                <a:shade val="63000"/>
+                <a:satMod val="120000"/>
+              </a:schemeClr>
+            </a:gs>
+          </a:gsLst>
+          <a:lin ang="5400000" scaled="0"/>
+        </a:gradFill>
+      </a:bgFillStyleLst>
+    </a:fmtScheme>
+  </a:themeElements>
+  <a:objectDefaults>
+    <a:lnDef>
+      <a:spPr/>
+      <a:bodyPr/>
+      <a:lstStyle/>
+      <a:style>
+        <a:lnRef idx="2">
+          <a:schemeClr val="accent1"/>
+        </a:lnRef>
+        <a:fillRef idx="0">
+          <a:schemeClr val="accent1"/>
+        </a:fillRef>
+        <a:effectRef idx="1">
+          <a:schemeClr val="accent1"/>
+        </a:effectRef>
+        <a:fontRef idx="minor">
+          <a:schemeClr val="tx1"/>
+        </a:fontRef>
+      </a:style>
+    </a:lnDef>
+  </a:objectDefaults>
+  <a:extraClrSchemeLst/>
+  <a:extLst>
+    <a:ext uri="{05A4C25C-085E-4340-85A3-A5531E510DB2}">
+      <thm15:themeFamily xmlns:thm15="http://schemas.microsoft.com/office/thememl/2012/main" name="Office Theme" id="{2E142A2C-CD16-42D6-873A-C26D2A0506FA}" vid="{1BDDFF52-6CD6-40A5-AB3C-68EB2F1E4D0A}"/>
+    </a:ext>
+  </a:extLst>
+</a:theme>
 </file>